--- a/docs/architecture bigdata _Exam.pptx
+++ b/docs/architecture bigdata _Exam.pptx
@@ -6,6 +6,18 @@
   </p:sldMasterIdLst>
   <p:sldIdLst>
     <p:sldId id="256" r:id="rId2"/>
+    <p:sldId id="262" r:id="rId3"/>
+    <p:sldId id="257" r:id="rId4"/>
+    <p:sldId id="263" r:id="rId5"/>
+    <p:sldId id="264" r:id="rId6"/>
+    <p:sldId id="265" r:id="rId7"/>
+    <p:sldId id="266" r:id="rId8"/>
+    <p:sldId id="267" r:id="rId9"/>
+    <p:sldId id="268" r:id="rId10"/>
+    <p:sldId id="269" r:id="rId11"/>
+    <p:sldId id="270" r:id="rId12"/>
+    <p:sldId id="271" r:id="rId13"/>
+    <p:sldId id="272" r:id="rId14"/>
   </p:sldIdLst>
   <p:sldSz cx="12192000" cy="6858000"/>
   <p:notesSz cx="6858000" cy="9144000"/>
@@ -104,6 +116,11 @@
       </a:defRPr>
     </a:lvl9pPr>
   </p:defaultTextStyle>
+  <p:extLst>
+    <p:ext uri="{EFAFB233-063F-42B5-8137-9DF3F51BA10A}">
+      <p15:sldGuideLst xmlns:p15="http://schemas.microsoft.com/office/powerpoint/2012/main"/>
+    </p:ext>
+  </p:extLst>
 </p:presentation>
 </file>
 
@@ -12449,8 +12466,8 @@
         </p:nvSpPr>
         <p:spPr>
           <a:xfrm>
-            <a:off x="1876424" y="627688"/>
-            <a:ext cx="8791575" cy="972512"/>
+            <a:off x="2507226" y="107122"/>
+            <a:ext cx="8653925" cy="866667"/>
           </a:xfrm>
         </p:spPr>
         <p:txBody>
@@ -12461,7 +12478,7 @@
           <a:p>
             <a:pPr algn="ctr"/>
             <a:r>
-              <a:rPr lang="fr-FR" sz="5400" dirty="0"/>
+              <a:rPr lang="fr-FR" b="1" dirty="0"/>
               <a:t>SYSTEME DE VENTE DES LIVRES</a:t>
             </a:r>
           </a:p>
@@ -12485,7 +12502,7 @@
         </p:nvSpPr>
         <p:spPr>
           <a:xfrm>
-            <a:off x="1876424" y="3602038"/>
+            <a:off x="1876423" y="2974191"/>
             <a:ext cx="8791575" cy="1644519"/>
           </a:xfrm>
         </p:spPr>
@@ -12507,7 +12524,7 @@
               <a:buChar char="•"/>
             </a:pPr>
             <a:r>
-              <a:rPr lang="fr-FR" sz="2400" dirty="0"/>
+              <a:rPr lang="fr-FR" sz="2400" b="1" dirty="0"/>
               <a:t>MOUTSITA Rovincy-Prince-Lémy </a:t>
             </a:r>
           </a:p>
@@ -12517,7 +12534,7 @@
               <a:buChar char="•"/>
             </a:pPr>
             <a:r>
-              <a:rPr lang="fr-FR" sz="2400" dirty="0"/>
+              <a:rPr lang="fr-FR" sz="2400" b="1" dirty="0"/>
               <a:t>BANIEK Eudes Exaucé</a:t>
             </a:r>
           </a:p>
@@ -12527,7 +12544,7 @@
               <a:buChar char="•"/>
             </a:pPr>
             <a:r>
-              <a:rPr lang="fr-FR" sz="2400" dirty="0"/>
+              <a:rPr lang="fr-FR" sz="2400" b="1" dirty="0"/>
               <a:t>YABI Nadine Rémi</a:t>
             </a:r>
           </a:p>
@@ -12547,7 +12564,7 @@
         </p:nvSpPr>
         <p:spPr>
           <a:xfrm>
-            <a:off x="1876424" y="2008682"/>
+            <a:off x="1876423" y="1611443"/>
             <a:ext cx="8791575" cy="954107"/>
           </a:xfrm>
           <a:prstGeom prst="rect">
@@ -12601,6 +12618,42 @@
           </a:p>
         </p:txBody>
       </p:sp>
+      <p:pic>
+        <p:nvPicPr>
+          <p:cNvPr id="6" name="Image 5">
+            <a:extLst>
+              <a:ext uri="{FF2B5EF4-FFF2-40B4-BE49-F238E27FC236}">
+                <a16:creationId xmlns:a16="http://schemas.microsoft.com/office/drawing/2014/main" id="{041FB364-0C06-59A5-7740-097EF15244DA}"/>
+              </a:ext>
+            </a:extLst>
+          </p:cNvPr>
+          <p:cNvPicPr>
+            <a:picLocks noChangeAspect="1"/>
+          </p:cNvPicPr>
+          <p:nvPr/>
+        </p:nvPicPr>
+        <p:blipFill>
+          <a:blip r:embed="rId2">
+            <a:extLst>
+              <a:ext uri="{28A0092B-C50C-407E-A947-70E740481C1C}">
+                <a14:useLocalDpi xmlns:a14="http://schemas.microsoft.com/office/drawing/2010/main" val="0"/>
+              </a:ext>
+            </a:extLst>
+          </a:blip>
+          <a:stretch>
+            <a:fillRect/>
+          </a:stretch>
+        </p:blipFill>
+        <p:spPr>
+          <a:xfrm>
+            <a:off x="0" y="0"/>
+            <a:ext cx="2359742" cy="866667"/>
+          </a:xfrm>
+          <a:prstGeom prst="rect">
+            <a:avLst/>
+          </a:prstGeom>
+        </p:spPr>
+      </p:pic>
     </p:spTree>
     <p:extLst>
       <p:ext uri="{BB962C8B-B14F-4D97-AF65-F5344CB8AC3E}">
@@ -12611,6 +12664,7493 @@
   <p:clrMapOvr>
     <a:masterClrMapping/>
   </p:clrMapOvr>
+  <p:transition spd="slow">
+    <p:push dir="u"/>
+  </p:transition>
+</p:sld>
+</file>
+
+<file path=ppt/slides/slide10.xml><?xml version="1.0" encoding="utf-8"?>
+<p:sld xmlns:a="http://schemas.openxmlformats.org/drawingml/2006/main" xmlns:r="http://schemas.openxmlformats.org/officeDocument/2006/relationships" xmlns:p="http://schemas.openxmlformats.org/presentationml/2006/main">
+  <p:cSld>
+    <p:spTree>
+      <p:nvGrpSpPr>
+        <p:cNvPr id="1" name="">
+          <a:extLst>
+            <a:ext uri="{FF2B5EF4-FFF2-40B4-BE49-F238E27FC236}">
+              <a16:creationId xmlns:a16="http://schemas.microsoft.com/office/drawing/2014/main" id="{F23EA309-8A25-BE6C-A5B9-34E325F59689}"/>
+            </a:ext>
+          </a:extLst>
+        </p:cNvPr>
+        <p:cNvGrpSpPr/>
+        <p:nvPr/>
+      </p:nvGrpSpPr>
+      <p:grpSpPr>
+        <a:xfrm>
+          <a:off x="0" y="0"/>
+          <a:ext cx="0" cy="0"/>
+          <a:chOff x="0" y="0"/>
+          <a:chExt cx="0" cy="0"/>
+        </a:xfrm>
+      </p:grpSpPr>
+      <p:sp>
+        <p:nvSpPr>
+          <p:cNvPr id="8" name="Titre 1">
+            <a:extLst>
+              <a:ext uri="{FF2B5EF4-FFF2-40B4-BE49-F238E27FC236}">
+                <a16:creationId xmlns:a16="http://schemas.microsoft.com/office/drawing/2014/main" id="{53D2F7BC-00E3-6E73-A518-F84ABBABF68D}"/>
+              </a:ext>
+            </a:extLst>
+          </p:cNvPr>
+          <p:cNvSpPr txBox="1">
+            <a:spLocks/>
+          </p:cNvSpPr>
+          <p:nvPr/>
+        </p:nvSpPr>
+        <p:spPr>
+          <a:xfrm>
+            <a:off x="2492477" y="144878"/>
+            <a:ext cx="8454052" cy="721789"/>
+          </a:xfrm>
+          <a:prstGeom prst="rect">
+            <a:avLst/>
+          </a:prstGeom>
+        </p:spPr>
+        <p:txBody>
+          <a:bodyPr vert="horz" lIns="91440" tIns="45720" rIns="91440" bIns="45720" rtlCol="0" anchor="b">
+            <a:noAutofit/>
+          </a:bodyPr>
+          <a:lstStyle>
+            <a:lvl1pPr algn="l" defTabSz="914400" rtl="0" eaLnBrk="1" latinLnBrk="0" hangingPunct="1">
+              <a:lnSpc>
+                <a:spcPct val="90000"/>
+              </a:lnSpc>
+              <a:spcBef>
+                <a:spcPct val="0"/>
+              </a:spcBef>
+              <a:buNone/>
+              <a:defRPr sz="4800" kern="1200" cap="all" baseline="0">
+                <a:solidFill>
+                  <a:schemeClr val="tx1"/>
+                </a:solidFill>
+                <a:latin typeface="+mj-lt"/>
+                <a:ea typeface="+mj-ea"/>
+                <a:cs typeface="+mj-cs"/>
+              </a:defRPr>
+            </a:lvl1pPr>
+          </a:lstStyle>
+          <a:p>
+            <a:pPr algn="ctr"/>
+            <a:r>
+              <a:rPr lang="fr-FR" b="1" dirty="0"/>
+              <a:t>SYSTEME DE VENTE DES LIVRES</a:t>
+            </a:r>
+          </a:p>
+        </p:txBody>
+      </p:sp>
+      <p:pic>
+        <p:nvPicPr>
+          <p:cNvPr id="12" name="Image 11">
+            <a:extLst>
+              <a:ext uri="{FF2B5EF4-FFF2-40B4-BE49-F238E27FC236}">
+                <a16:creationId xmlns:a16="http://schemas.microsoft.com/office/drawing/2014/main" id="{7DC94525-19A1-61CC-60B7-2B96B2F97FA6}"/>
+              </a:ext>
+            </a:extLst>
+          </p:cNvPr>
+          <p:cNvPicPr>
+            <a:picLocks noChangeAspect="1"/>
+          </p:cNvPicPr>
+          <p:nvPr/>
+        </p:nvPicPr>
+        <p:blipFill>
+          <a:blip r:embed="rId2">
+            <a:extLst>
+              <a:ext uri="{28A0092B-C50C-407E-A947-70E740481C1C}">
+                <a14:useLocalDpi xmlns:a14="http://schemas.microsoft.com/office/drawing/2010/main" val="0"/>
+              </a:ext>
+            </a:extLst>
+          </a:blip>
+          <a:stretch>
+            <a:fillRect/>
+          </a:stretch>
+        </p:blipFill>
+        <p:spPr>
+          <a:xfrm>
+            <a:off x="0" y="0"/>
+            <a:ext cx="2359742" cy="866667"/>
+          </a:xfrm>
+          <a:prstGeom prst="rect">
+            <a:avLst/>
+          </a:prstGeom>
+        </p:spPr>
+      </p:pic>
+      <p:sp>
+        <p:nvSpPr>
+          <p:cNvPr id="6" name="Titre 1">
+            <a:extLst>
+              <a:ext uri="{FF2B5EF4-FFF2-40B4-BE49-F238E27FC236}">
+                <a16:creationId xmlns:a16="http://schemas.microsoft.com/office/drawing/2014/main" id="{0A3A3CA8-957E-75E3-B59F-5650EB04DE3D}"/>
+              </a:ext>
+            </a:extLst>
+          </p:cNvPr>
+          <p:cNvSpPr>
+            <a:spLocks noGrp="1"/>
+          </p:cNvSpPr>
+          <p:nvPr>
+            <p:ph type="ctrTitle"/>
+          </p:nvPr>
+        </p:nvSpPr>
+        <p:spPr>
+          <a:xfrm>
+            <a:off x="770066" y="991722"/>
+            <a:ext cx="4332876" cy="439170"/>
+          </a:xfrm>
+        </p:spPr>
+        <p:txBody>
+          <a:bodyPr>
+            <a:noAutofit/>
+          </a:bodyPr>
+          <a:lstStyle/>
+          <a:p>
+            <a:pPr algn="ctr"/>
+            <a:r>
+              <a:rPr lang="fr-FR" sz="2800" b="1" dirty="0" err="1"/>
+              <a:t>Snowflake</a:t>
+            </a:r>
+            <a:r>
+              <a:rPr lang="fr-FR" sz="2800" b="1" dirty="0"/>
+              <a:t> et streamlit</a:t>
+            </a:r>
+          </a:p>
+        </p:txBody>
+      </p:sp>
+      <p:sp>
+        <p:nvSpPr>
+          <p:cNvPr id="7" name="Flèche : chevron 6">
+            <a:extLst>
+              <a:ext uri="{FF2B5EF4-FFF2-40B4-BE49-F238E27FC236}">
+                <a16:creationId xmlns:a16="http://schemas.microsoft.com/office/drawing/2014/main" id="{69463F87-1915-D9CA-E3A6-1B3AAB6B84A1}"/>
+              </a:ext>
+            </a:extLst>
+          </p:cNvPr>
+          <p:cNvSpPr/>
+          <p:nvPr/>
+        </p:nvSpPr>
+        <p:spPr>
+          <a:xfrm>
+            <a:off x="193189" y="991722"/>
+            <a:ext cx="576876" cy="439170"/>
+          </a:xfrm>
+          <a:prstGeom prst="chevron">
+            <a:avLst/>
+          </a:prstGeom>
+          <a:solidFill>
+            <a:schemeClr val="tx2"/>
+          </a:solidFill>
+        </p:spPr>
+        <p:style>
+          <a:lnRef idx="2">
+            <a:schemeClr val="accent1">
+              <a:shade val="15000"/>
+            </a:schemeClr>
+          </a:lnRef>
+          <a:fillRef idx="1">
+            <a:schemeClr val="accent1"/>
+          </a:fillRef>
+          <a:effectRef idx="0">
+            <a:schemeClr val="accent1"/>
+          </a:effectRef>
+          <a:fontRef idx="minor">
+            <a:schemeClr val="lt1"/>
+          </a:fontRef>
+        </p:style>
+        <p:txBody>
+          <a:bodyPr rtlCol="0" anchor="ctr"/>
+          <a:lstStyle/>
+          <a:p>
+            <a:pPr algn="ctr"/>
+            <a:endParaRPr lang="fr-FR" sz="1600">
+              <a:solidFill>
+                <a:schemeClr val="accent5">
+                  <a:lumMod val="50000"/>
+                </a:schemeClr>
+              </a:solidFill>
+            </a:endParaRPr>
+          </a:p>
+        </p:txBody>
+      </p:sp>
+      <p:pic>
+        <p:nvPicPr>
+          <p:cNvPr id="9" name="Image 8">
+            <a:extLst>
+              <a:ext uri="{FF2B5EF4-FFF2-40B4-BE49-F238E27FC236}">
+                <a16:creationId xmlns:a16="http://schemas.microsoft.com/office/drawing/2014/main" id="{34CCE4B8-320A-0DE4-95DC-B02B890F17BD}"/>
+              </a:ext>
+            </a:extLst>
+          </p:cNvPr>
+          <p:cNvPicPr>
+            <a:picLocks noChangeAspect="1"/>
+          </p:cNvPicPr>
+          <p:nvPr/>
+        </p:nvPicPr>
+        <p:blipFill>
+          <a:blip r:embed="rId3"/>
+          <a:stretch>
+            <a:fillRect/>
+          </a:stretch>
+        </p:blipFill>
+        <p:spPr>
+          <a:xfrm>
+            <a:off x="193189" y="1555947"/>
+            <a:ext cx="5529185" cy="2668270"/>
+          </a:xfrm>
+          <a:prstGeom prst="rect">
+            <a:avLst/>
+          </a:prstGeom>
+        </p:spPr>
+      </p:pic>
+      <p:sp>
+        <p:nvSpPr>
+          <p:cNvPr id="13" name="ZoneTexte 12">
+            <a:extLst>
+              <a:ext uri="{FF2B5EF4-FFF2-40B4-BE49-F238E27FC236}">
+                <a16:creationId xmlns:a16="http://schemas.microsoft.com/office/drawing/2014/main" id="{26811220-9612-9A68-0EA0-44E13BF61EDB}"/>
+              </a:ext>
+            </a:extLst>
+          </p:cNvPr>
+          <p:cNvSpPr txBox="1"/>
+          <p:nvPr/>
+        </p:nvSpPr>
+        <p:spPr>
+          <a:xfrm>
+            <a:off x="171911" y="4349272"/>
+            <a:ext cx="5529185" cy="366575"/>
+          </a:xfrm>
+          <a:prstGeom prst="rect">
+            <a:avLst/>
+          </a:prstGeom>
+          <a:solidFill>
+            <a:schemeClr val="tx1">
+              <a:lumMod val="85000"/>
+            </a:schemeClr>
+          </a:solidFill>
+        </p:spPr>
+        <p:txBody>
+          <a:bodyPr wrap="square">
+            <a:spAutoFit/>
+          </a:bodyPr>
+          <a:lstStyle/>
+          <a:p>
+            <a:pPr>
+              <a:lnSpc>
+                <a:spcPct val="107000"/>
+              </a:lnSpc>
+              <a:spcAft>
+                <a:spcPts val="800"/>
+              </a:spcAft>
+              <a:buNone/>
+            </a:pPr>
+            <a:r>
+              <a:rPr lang="fr-FR" sz="1800" u="sng" kern="100" dirty="0">
+                <a:solidFill>
+                  <a:schemeClr val="bg1"/>
+                </a:solidFill>
+                <a:effectLst/>
+                <a:latin typeface="Arial Nova" panose="020B0504020202020204" pitchFamily="34" charset="0"/>
+                <a:ea typeface="Calibri" panose="020F0502020204030204" pitchFamily="34" charset="0"/>
+                <a:cs typeface="Arial" panose="020B0604020202020204" pitchFamily="34" charset="0"/>
+                <a:hlinkClick r:id="rId4">
+                  <a:extLst>
+                    <a:ext uri="{A12FA001-AC4F-418D-AE19-62706E023703}">
+                      <ahyp:hlinkClr xmlns:ahyp="http://schemas.microsoft.com/office/drawing/2018/hyperlinkcolor" val="tx"/>
+                    </a:ext>
+                  </a:extLst>
+                </a:hlinkClick>
+              </a:rPr>
+              <a:t>http://localhost:8501</a:t>
+            </a:r>
+            <a:endParaRPr lang="fr-FR" sz="1600" kern="100" dirty="0">
+              <a:solidFill>
+                <a:schemeClr val="bg1"/>
+              </a:solidFill>
+              <a:effectLst/>
+              <a:latin typeface="Century Gothic" panose="020B0502020202020204" pitchFamily="34" charset="0"/>
+              <a:ea typeface="Calibri" panose="020F0502020204030204" pitchFamily="34" charset="0"/>
+              <a:cs typeface="Arial" panose="020B0604020202020204" pitchFamily="34" charset="0"/>
+            </a:endParaRPr>
+          </a:p>
+        </p:txBody>
+      </p:sp>
+      <p:pic>
+        <p:nvPicPr>
+          <p:cNvPr id="15" name="Image 14">
+            <a:extLst>
+              <a:ext uri="{FF2B5EF4-FFF2-40B4-BE49-F238E27FC236}">
+                <a16:creationId xmlns:a16="http://schemas.microsoft.com/office/drawing/2014/main" id="{D6656DA1-A8BE-DD4A-DC07-AFDC8A8E0871}"/>
+              </a:ext>
+            </a:extLst>
+          </p:cNvPr>
+          <p:cNvPicPr>
+            <a:picLocks noChangeAspect="1"/>
+          </p:cNvPicPr>
+          <p:nvPr/>
+        </p:nvPicPr>
+        <p:blipFill>
+          <a:blip r:embed="rId5"/>
+          <a:stretch>
+            <a:fillRect/>
+          </a:stretch>
+        </p:blipFill>
+        <p:spPr>
+          <a:xfrm>
+            <a:off x="6490906" y="1211307"/>
+            <a:ext cx="5419725" cy="2447925"/>
+          </a:xfrm>
+          <a:prstGeom prst="rect">
+            <a:avLst/>
+          </a:prstGeom>
+          <a:ln>
+            <a:solidFill>
+              <a:schemeClr val="bg1">
+                <a:lumMod val="85000"/>
+              </a:schemeClr>
+            </a:solidFill>
+          </a:ln>
+        </p:spPr>
+      </p:pic>
+      <p:pic>
+        <p:nvPicPr>
+          <p:cNvPr id="17" name="Image 16">
+            <a:extLst>
+              <a:ext uri="{FF2B5EF4-FFF2-40B4-BE49-F238E27FC236}">
+                <a16:creationId xmlns:a16="http://schemas.microsoft.com/office/drawing/2014/main" id="{F4056438-EEE7-B980-65F6-D634F84FB00A}"/>
+              </a:ext>
+            </a:extLst>
+          </p:cNvPr>
+          <p:cNvPicPr>
+            <a:picLocks noChangeAspect="1"/>
+          </p:cNvPicPr>
+          <p:nvPr/>
+        </p:nvPicPr>
+        <p:blipFill>
+          <a:blip r:embed="rId6"/>
+          <a:stretch>
+            <a:fillRect/>
+          </a:stretch>
+        </p:blipFill>
+        <p:spPr>
+          <a:xfrm>
+            <a:off x="6490907" y="4012467"/>
+            <a:ext cx="5419725" cy="2700655"/>
+          </a:xfrm>
+          <a:prstGeom prst="rect">
+            <a:avLst/>
+          </a:prstGeom>
+          <a:ln>
+            <a:solidFill>
+              <a:schemeClr val="bg1">
+                <a:lumMod val="85000"/>
+              </a:schemeClr>
+            </a:solidFill>
+          </a:ln>
+        </p:spPr>
+      </p:pic>
+    </p:spTree>
+    <p:extLst>
+      <p:ext uri="{BB962C8B-B14F-4D97-AF65-F5344CB8AC3E}">
+        <p14:creationId xmlns:p14="http://schemas.microsoft.com/office/powerpoint/2010/main" val="3232276666"/>
+      </p:ext>
+    </p:extLst>
+  </p:cSld>
+  <p:clrMapOvr>
+    <a:masterClrMapping/>
+  </p:clrMapOvr>
+  <p:transition spd="slow">
+    <p:push dir="u"/>
+  </p:transition>
+</p:sld>
+</file>
+
+<file path=ppt/slides/slide11.xml><?xml version="1.0" encoding="utf-8"?>
+<p:sld xmlns:a="http://schemas.openxmlformats.org/drawingml/2006/main" xmlns:r="http://schemas.openxmlformats.org/officeDocument/2006/relationships" xmlns:p="http://schemas.openxmlformats.org/presentationml/2006/main">
+  <p:cSld>
+    <p:spTree>
+      <p:nvGrpSpPr>
+        <p:cNvPr id="1" name="">
+          <a:extLst>
+            <a:ext uri="{FF2B5EF4-FFF2-40B4-BE49-F238E27FC236}">
+              <a16:creationId xmlns:a16="http://schemas.microsoft.com/office/drawing/2014/main" id="{E5E5A9CB-FBE5-7D28-5121-636680783278}"/>
+            </a:ext>
+          </a:extLst>
+        </p:cNvPr>
+        <p:cNvGrpSpPr/>
+        <p:nvPr/>
+      </p:nvGrpSpPr>
+      <p:grpSpPr>
+        <a:xfrm>
+          <a:off x="0" y="0"/>
+          <a:ext cx="0" cy="0"/>
+          <a:chOff x="0" y="0"/>
+          <a:chExt cx="0" cy="0"/>
+        </a:xfrm>
+      </p:grpSpPr>
+      <p:sp>
+        <p:nvSpPr>
+          <p:cNvPr id="8" name="Titre 1">
+            <a:extLst>
+              <a:ext uri="{FF2B5EF4-FFF2-40B4-BE49-F238E27FC236}">
+                <a16:creationId xmlns:a16="http://schemas.microsoft.com/office/drawing/2014/main" id="{3CE7A75D-D300-B76B-D957-C800EA3B3DCD}"/>
+              </a:ext>
+            </a:extLst>
+          </p:cNvPr>
+          <p:cNvSpPr txBox="1">
+            <a:spLocks/>
+          </p:cNvSpPr>
+          <p:nvPr/>
+        </p:nvSpPr>
+        <p:spPr>
+          <a:xfrm>
+            <a:off x="2492477" y="144878"/>
+            <a:ext cx="8454052" cy="721789"/>
+          </a:xfrm>
+          <a:prstGeom prst="rect">
+            <a:avLst/>
+          </a:prstGeom>
+        </p:spPr>
+        <p:txBody>
+          <a:bodyPr vert="horz" lIns="91440" tIns="45720" rIns="91440" bIns="45720" rtlCol="0" anchor="b">
+            <a:noAutofit/>
+          </a:bodyPr>
+          <a:lstStyle>
+            <a:lvl1pPr algn="l" defTabSz="914400" rtl="0" eaLnBrk="1" latinLnBrk="0" hangingPunct="1">
+              <a:lnSpc>
+                <a:spcPct val="90000"/>
+              </a:lnSpc>
+              <a:spcBef>
+                <a:spcPct val="0"/>
+              </a:spcBef>
+              <a:buNone/>
+              <a:defRPr sz="4800" kern="1200" cap="all" baseline="0">
+                <a:solidFill>
+                  <a:schemeClr val="tx1"/>
+                </a:solidFill>
+                <a:latin typeface="+mj-lt"/>
+                <a:ea typeface="+mj-ea"/>
+                <a:cs typeface="+mj-cs"/>
+              </a:defRPr>
+            </a:lvl1pPr>
+          </a:lstStyle>
+          <a:p>
+            <a:pPr algn="ctr"/>
+            <a:r>
+              <a:rPr lang="fr-FR" b="1" dirty="0"/>
+              <a:t>SYSTEME DE VENTE DES LIVRES</a:t>
+            </a:r>
+          </a:p>
+        </p:txBody>
+      </p:sp>
+      <p:pic>
+        <p:nvPicPr>
+          <p:cNvPr id="12" name="Image 11">
+            <a:extLst>
+              <a:ext uri="{FF2B5EF4-FFF2-40B4-BE49-F238E27FC236}">
+                <a16:creationId xmlns:a16="http://schemas.microsoft.com/office/drawing/2014/main" id="{EC7387AA-BB9A-C22C-2E00-4A1522033D64}"/>
+              </a:ext>
+            </a:extLst>
+          </p:cNvPr>
+          <p:cNvPicPr>
+            <a:picLocks noChangeAspect="1"/>
+          </p:cNvPicPr>
+          <p:nvPr/>
+        </p:nvPicPr>
+        <p:blipFill>
+          <a:blip r:embed="rId2">
+            <a:extLst>
+              <a:ext uri="{28A0092B-C50C-407E-A947-70E740481C1C}">
+                <a14:useLocalDpi xmlns:a14="http://schemas.microsoft.com/office/drawing/2010/main" val="0"/>
+              </a:ext>
+            </a:extLst>
+          </a:blip>
+          <a:stretch>
+            <a:fillRect/>
+          </a:stretch>
+        </p:blipFill>
+        <p:spPr>
+          <a:xfrm>
+            <a:off x="0" y="0"/>
+            <a:ext cx="2359742" cy="866667"/>
+          </a:xfrm>
+          <a:prstGeom prst="rect">
+            <a:avLst/>
+          </a:prstGeom>
+        </p:spPr>
+      </p:pic>
+      <p:sp>
+        <p:nvSpPr>
+          <p:cNvPr id="6" name="Titre 1">
+            <a:extLst>
+              <a:ext uri="{FF2B5EF4-FFF2-40B4-BE49-F238E27FC236}">
+                <a16:creationId xmlns:a16="http://schemas.microsoft.com/office/drawing/2014/main" id="{5328527C-B8CF-D20C-70A5-F5A7E76341FA}"/>
+              </a:ext>
+            </a:extLst>
+          </p:cNvPr>
+          <p:cNvSpPr>
+            <a:spLocks noGrp="1"/>
+          </p:cNvSpPr>
+          <p:nvPr>
+            <p:ph type="ctrTitle"/>
+          </p:nvPr>
+        </p:nvSpPr>
+        <p:spPr>
+          <a:xfrm>
+            <a:off x="770066" y="991722"/>
+            <a:ext cx="2489328" cy="439170"/>
+          </a:xfrm>
+        </p:spPr>
+        <p:txBody>
+          <a:bodyPr>
+            <a:noAutofit/>
+          </a:bodyPr>
+          <a:lstStyle/>
+          <a:p>
+            <a:pPr algn="ctr"/>
+            <a:r>
+              <a:rPr lang="fr-FR" sz="2800" b="1" dirty="0" err="1"/>
+              <a:t>PowerBI</a:t>
+            </a:r>
+            <a:endParaRPr lang="fr-FR" sz="2800" b="1" dirty="0"/>
+          </a:p>
+        </p:txBody>
+      </p:sp>
+      <p:sp>
+        <p:nvSpPr>
+          <p:cNvPr id="7" name="Flèche : chevron 6">
+            <a:extLst>
+              <a:ext uri="{FF2B5EF4-FFF2-40B4-BE49-F238E27FC236}">
+                <a16:creationId xmlns:a16="http://schemas.microsoft.com/office/drawing/2014/main" id="{F8790F0D-36D7-6876-B5B4-705CA4A0CA9B}"/>
+              </a:ext>
+            </a:extLst>
+          </p:cNvPr>
+          <p:cNvSpPr/>
+          <p:nvPr/>
+        </p:nvSpPr>
+        <p:spPr>
+          <a:xfrm>
+            <a:off x="193189" y="991722"/>
+            <a:ext cx="576876" cy="439170"/>
+          </a:xfrm>
+          <a:prstGeom prst="chevron">
+            <a:avLst/>
+          </a:prstGeom>
+          <a:solidFill>
+            <a:schemeClr val="tx2"/>
+          </a:solidFill>
+        </p:spPr>
+        <p:style>
+          <a:lnRef idx="2">
+            <a:schemeClr val="accent1">
+              <a:shade val="15000"/>
+            </a:schemeClr>
+          </a:lnRef>
+          <a:fillRef idx="1">
+            <a:schemeClr val="accent1"/>
+          </a:fillRef>
+          <a:effectRef idx="0">
+            <a:schemeClr val="accent1"/>
+          </a:effectRef>
+          <a:fontRef idx="minor">
+            <a:schemeClr val="lt1"/>
+          </a:fontRef>
+        </p:style>
+        <p:txBody>
+          <a:bodyPr rtlCol="0" anchor="ctr"/>
+          <a:lstStyle/>
+          <a:p>
+            <a:pPr algn="ctr"/>
+            <a:endParaRPr lang="fr-FR" sz="1600">
+              <a:solidFill>
+                <a:schemeClr val="accent5">
+                  <a:lumMod val="50000"/>
+                </a:schemeClr>
+              </a:solidFill>
+            </a:endParaRPr>
+          </a:p>
+        </p:txBody>
+      </p:sp>
+      <p:pic>
+        <p:nvPicPr>
+          <p:cNvPr id="2" name="Image 1">
+            <a:extLst>
+              <a:ext uri="{FF2B5EF4-FFF2-40B4-BE49-F238E27FC236}">
+                <a16:creationId xmlns:a16="http://schemas.microsoft.com/office/drawing/2014/main" id="{43D54146-46AE-64D2-A8B9-6B6796BEFCCC}"/>
+              </a:ext>
+            </a:extLst>
+          </p:cNvPr>
+          <p:cNvPicPr>
+            <a:picLocks noChangeAspect="1"/>
+          </p:cNvPicPr>
+          <p:nvPr/>
+        </p:nvPicPr>
+        <p:blipFill>
+          <a:blip r:embed="rId3"/>
+          <a:stretch>
+            <a:fillRect/>
+          </a:stretch>
+        </p:blipFill>
+        <p:spPr>
+          <a:xfrm>
+            <a:off x="193189" y="1555947"/>
+            <a:ext cx="8213392" cy="4564634"/>
+          </a:xfrm>
+          <a:prstGeom prst="rect">
+            <a:avLst/>
+          </a:prstGeom>
+          <a:ln>
+            <a:solidFill>
+              <a:schemeClr val="bg1">
+                <a:lumMod val="85000"/>
+              </a:schemeClr>
+            </a:solidFill>
+          </a:ln>
+        </p:spPr>
+      </p:pic>
+    </p:spTree>
+    <p:extLst>
+      <p:ext uri="{BB962C8B-B14F-4D97-AF65-F5344CB8AC3E}">
+        <p14:creationId xmlns:p14="http://schemas.microsoft.com/office/powerpoint/2010/main" val="761065270"/>
+      </p:ext>
+    </p:extLst>
+  </p:cSld>
+  <p:clrMapOvr>
+    <a:masterClrMapping/>
+  </p:clrMapOvr>
+  <p:transition spd="slow">
+    <p:push dir="u"/>
+  </p:transition>
+</p:sld>
+</file>
+
+<file path=ppt/slides/slide12.xml><?xml version="1.0" encoding="utf-8"?>
+<p:sld xmlns:a="http://schemas.openxmlformats.org/drawingml/2006/main" xmlns:r="http://schemas.openxmlformats.org/officeDocument/2006/relationships" xmlns:p="http://schemas.openxmlformats.org/presentationml/2006/main">
+  <p:cSld>
+    <p:spTree>
+      <p:nvGrpSpPr>
+        <p:cNvPr id="1" name="">
+          <a:extLst>
+            <a:ext uri="{FF2B5EF4-FFF2-40B4-BE49-F238E27FC236}">
+              <a16:creationId xmlns:a16="http://schemas.microsoft.com/office/drawing/2014/main" id="{4EBD473F-273E-1070-9FBC-3B37960157D0}"/>
+            </a:ext>
+          </a:extLst>
+        </p:cNvPr>
+        <p:cNvGrpSpPr/>
+        <p:nvPr/>
+      </p:nvGrpSpPr>
+      <p:grpSpPr>
+        <a:xfrm>
+          <a:off x="0" y="0"/>
+          <a:ext cx="0" cy="0"/>
+          <a:chOff x="0" y="0"/>
+          <a:chExt cx="0" cy="0"/>
+        </a:xfrm>
+      </p:grpSpPr>
+      <p:sp>
+        <p:nvSpPr>
+          <p:cNvPr id="8" name="Titre 1">
+            <a:extLst>
+              <a:ext uri="{FF2B5EF4-FFF2-40B4-BE49-F238E27FC236}">
+                <a16:creationId xmlns:a16="http://schemas.microsoft.com/office/drawing/2014/main" id="{1D631E90-A33D-E49B-508F-E52D619AA087}"/>
+              </a:ext>
+            </a:extLst>
+          </p:cNvPr>
+          <p:cNvSpPr txBox="1">
+            <a:spLocks/>
+          </p:cNvSpPr>
+          <p:nvPr/>
+        </p:nvSpPr>
+        <p:spPr>
+          <a:xfrm>
+            <a:off x="2492477" y="144878"/>
+            <a:ext cx="8454052" cy="721789"/>
+          </a:xfrm>
+          <a:prstGeom prst="rect">
+            <a:avLst/>
+          </a:prstGeom>
+        </p:spPr>
+        <p:txBody>
+          <a:bodyPr vert="horz" lIns="91440" tIns="45720" rIns="91440" bIns="45720" rtlCol="0" anchor="b">
+            <a:noAutofit/>
+          </a:bodyPr>
+          <a:lstStyle>
+            <a:lvl1pPr algn="l" defTabSz="914400" rtl="0" eaLnBrk="1" latinLnBrk="0" hangingPunct="1">
+              <a:lnSpc>
+                <a:spcPct val="90000"/>
+              </a:lnSpc>
+              <a:spcBef>
+                <a:spcPct val="0"/>
+              </a:spcBef>
+              <a:buNone/>
+              <a:defRPr sz="4800" kern="1200" cap="all" baseline="0">
+                <a:solidFill>
+                  <a:schemeClr val="tx1"/>
+                </a:solidFill>
+                <a:latin typeface="+mj-lt"/>
+                <a:ea typeface="+mj-ea"/>
+                <a:cs typeface="+mj-cs"/>
+              </a:defRPr>
+            </a:lvl1pPr>
+          </a:lstStyle>
+          <a:p>
+            <a:pPr algn="ctr"/>
+            <a:r>
+              <a:rPr lang="fr-FR" b="1" dirty="0"/>
+              <a:t>SYSTEME DE VENTE DES LIVRES</a:t>
+            </a:r>
+          </a:p>
+        </p:txBody>
+      </p:sp>
+      <p:pic>
+        <p:nvPicPr>
+          <p:cNvPr id="12" name="Image 11">
+            <a:extLst>
+              <a:ext uri="{FF2B5EF4-FFF2-40B4-BE49-F238E27FC236}">
+                <a16:creationId xmlns:a16="http://schemas.microsoft.com/office/drawing/2014/main" id="{34E2E5CC-41C1-25D4-7841-7D5813307E68}"/>
+              </a:ext>
+            </a:extLst>
+          </p:cNvPr>
+          <p:cNvPicPr>
+            <a:picLocks noChangeAspect="1"/>
+          </p:cNvPicPr>
+          <p:nvPr/>
+        </p:nvPicPr>
+        <p:blipFill>
+          <a:blip r:embed="rId2">
+            <a:extLst>
+              <a:ext uri="{28A0092B-C50C-407E-A947-70E740481C1C}">
+                <a14:useLocalDpi xmlns:a14="http://schemas.microsoft.com/office/drawing/2010/main" val="0"/>
+              </a:ext>
+            </a:extLst>
+          </a:blip>
+          <a:stretch>
+            <a:fillRect/>
+          </a:stretch>
+        </p:blipFill>
+        <p:spPr>
+          <a:xfrm>
+            <a:off x="0" y="0"/>
+            <a:ext cx="2359742" cy="866667"/>
+          </a:xfrm>
+          <a:prstGeom prst="rect">
+            <a:avLst/>
+          </a:prstGeom>
+        </p:spPr>
+      </p:pic>
+      <p:sp>
+        <p:nvSpPr>
+          <p:cNvPr id="6" name="Titre 1">
+            <a:extLst>
+              <a:ext uri="{FF2B5EF4-FFF2-40B4-BE49-F238E27FC236}">
+                <a16:creationId xmlns:a16="http://schemas.microsoft.com/office/drawing/2014/main" id="{0F7374D4-FC0D-70BF-9311-365CE0A447BB}"/>
+              </a:ext>
+            </a:extLst>
+          </p:cNvPr>
+          <p:cNvSpPr>
+            <a:spLocks noGrp="1"/>
+          </p:cNvSpPr>
+          <p:nvPr>
+            <p:ph type="ctrTitle"/>
+          </p:nvPr>
+        </p:nvSpPr>
+        <p:spPr>
+          <a:xfrm>
+            <a:off x="770065" y="995302"/>
+            <a:ext cx="3846179" cy="439170"/>
+          </a:xfrm>
+        </p:spPr>
+        <p:txBody>
+          <a:bodyPr>
+            <a:noAutofit/>
+          </a:bodyPr>
+          <a:lstStyle/>
+          <a:p>
+            <a:pPr algn="ctr"/>
+            <a:r>
+              <a:rPr lang="fr-FR" sz="2800" b="1" dirty="0"/>
+              <a:t>RESUME DU PROCESSUS</a:t>
+            </a:r>
+          </a:p>
+        </p:txBody>
+      </p:sp>
+      <p:sp>
+        <p:nvSpPr>
+          <p:cNvPr id="7" name="Flèche : chevron 6">
+            <a:extLst>
+              <a:ext uri="{FF2B5EF4-FFF2-40B4-BE49-F238E27FC236}">
+                <a16:creationId xmlns:a16="http://schemas.microsoft.com/office/drawing/2014/main" id="{6664020C-5C74-BDE1-AAB2-D82CE8C37E30}"/>
+              </a:ext>
+            </a:extLst>
+          </p:cNvPr>
+          <p:cNvSpPr/>
+          <p:nvPr/>
+        </p:nvSpPr>
+        <p:spPr>
+          <a:xfrm>
+            <a:off x="193189" y="991722"/>
+            <a:ext cx="576876" cy="439170"/>
+          </a:xfrm>
+          <a:prstGeom prst="chevron">
+            <a:avLst/>
+          </a:prstGeom>
+          <a:solidFill>
+            <a:schemeClr val="tx2"/>
+          </a:solidFill>
+        </p:spPr>
+        <p:style>
+          <a:lnRef idx="2">
+            <a:schemeClr val="accent1">
+              <a:shade val="15000"/>
+            </a:schemeClr>
+          </a:lnRef>
+          <a:fillRef idx="1">
+            <a:schemeClr val="accent1"/>
+          </a:fillRef>
+          <a:effectRef idx="0">
+            <a:schemeClr val="accent1"/>
+          </a:effectRef>
+          <a:fontRef idx="minor">
+            <a:schemeClr val="lt1"/>
+          </a:fontRef>
+        </p:style>
+        <p:txBody>
+          <a:bodyPr rtlCol="0" anchor="ctr"/>
+          <a:lstStyle/>
+          <a:p>
+            <a:pPr algn="ctr"/>
+            <a:endParaRPr lang="fr-FR" sz="1600">
+              <a:solidFill>
+                <a:schemeClr val="accent5">
+                  <a:lumMod val="50000"/>
+                </a:schemeClr>
+              </a:solidFill>
+            </a:endParaRPr>
+          </a:p>
+        </p:txBody>
+      </p:sp>
+      <p:sp>
+        <p:nvSpPr>
+          <p:cNvPr id="4" name="ZoneTexte 3">
+            <a:extLst>
+              <a:ext uri="{FF2B5EF4-FFF2-40B4-BE49-F238E27FC236}">
+                <a16:creationId xmlns:a16="http://schemas.microsoft.com/office/drawing/2014/main" id="{C8598BFF-A6D1-A8A9-9B46-4FCAA865372E}"/>
+              </a:ext>
+            </a:extLst>
+          </p:cNvPr>
+          <p:cNvSpPr txBox="1"/>
+          <p:nvPr/>
+        </p:nvSpPr>
+        <p:spPr>
+          <a:xfrm>
+            <a:off x="1409200" y="1484541"/>
+            <a:ext cx="2166553" cy="966418"/>
+          </a:xfrm>
+          <a:prstGeom prst="rect">
+            <a:avLst/>
+          </a:prstGeom>
+          <a:solidFill>
+            <a:schemeClr val="tx1">
+              <a:lumMod val="85000"/>
+            </a:schemeClr>
+          </a:solidFill>
+        </p:spPr>
+        <p:txBody>
+          <a:bodyPr wrap="square">
+            <a:spAutoFit/>
+          </a:bodyPr>
+          <a:lstStyle/>
+          <a:p>
+            <a:pPr lvl="0">
+              <a:lnSpc>
+                <a:spcPct val="107000"/>
+              </a:lnSpc>
+              <a:spcAft>
+                <a:spcPts val="800"/>
+              </a:spcAft>
+              <a:tabLst>
+                <a:tab pos="1028700" algn="l"/>
+              </a:tabLst>
+            </a:pPr>
+            <a:r>
+              <a:rPr lang="fr-FR" sz="1800" kern="100" dirty="0">
+                <a:solidFill>
+                  <a:schemeClr val="bg1"/>
+                </a:solidFill>
+                <a:effectLst/>
+                <a:latin typeface="Arial Nova" panose="020B0504020202020204" pitchFamily="34" charset="0"/>
+                <a:ea typeface="Calibri" panose="020F0502020204030204" pitchFamily="34" charset="0"/>
+                <a:cs typeface="Times New Roman" panose="02020603050405020304" pitchFamily="18" charset="0"/>
+              </a:rPr>
+              <a:t>Renseigner les informations sur streamlit</a:t>
+            </a:r>
+            <a:endParaRPr lang="fr-FR" sz="1600" kern="100" dirty="0">
+              <a:solidFill>
+                <a:schemeClr val="bg1"/>
+              </a:solidFill>
+              <a:effectLst/>
+              <a:latin typeface="Calibri" panose="020F0502020204030204" pitchFamily="34" charset="0"/>
+              <a:ea typeface="Calibri" panose="020F0502020204030204" pitchFamily="34" charset="0"/>
+              <a:cs typeface="Times New Roman" panose="02020603050405020304" pitchFamily="18" charset="0"/>
+            </a:endParaRPr>
+          </a:p>
+        </p:txBody>
+      </p:sp>
+      <p:sp>
+        <p:nvSpPr>
+          <p:cNvPr id="10" name="ZoneTexte 9">
+            <a:extLst>
+              <a:ext uri="{FF2B5EF4-FFF2-40B4-BE49-F238E27FC236}">
+                <a16:creationId xmlns:a16="http://schemas.microsoft.com/office/drawing/2014/main" id="{0CB7A9F7-5308-6F4B-1206-6363E70C4A9B}"/>
+              </a:ext>
+            </a:extLst>
+          </p:cNvPr>
+          <p:cNvSpPr txBox="1"/>
+          <p:nvPr/>
+        </p:nvSpPr>
+        <p:spPr>
+          <a:xfrm>
+            <a:off x="895309" y="3991187"/>
+            <a:ext cx="1797845" cy="966418"/>
+          </a:xfrm>
+          <a:prstGeom prst="rect">
+            <a:avLst/>
+          </a:prstGeom>
+          <a:solidFill>
+            <a:schemeClr val="tx1">
+              <a:lumMod val="85000"/>
+            </a:schemeClr>
+          </a:solidFill>
+        </p:spPr>
+        <p:txBody>
+          <a:bodyPr wrap="square">
+            <a:spAutoFit/>
+          </a:bodyPr>
+          <a:lstStyle/>
+          <a:p>
+            <a:pPr lvl="0" algn="just">
+              <a:lnSpc>
+                <a:spcPct val="107000"/>
+              </a:lnSpc>
+              <a:spcAft>
+                <a:spcPts val="800"/>
+              </a:spcAft>
+              <a:tabLst>
+                <a:tab pos="1028700" algn="l"/>
+              </a:tabLst>
+            </a:pPr>
+            <a:r>
+              <a:rPr lang="fr-FR" sz="1800" kern="100" dirty="0">
+                <a:solidFill>
+                  <a:schemeClr val="bg1"/>
+                </a:solidFill>
+                <a:effectLst/>
+                <a:latin typeface="Arial Nova" panose="020B0504020202020204" pitchFamily="34" charset="0"/>
+                <a:ea typeface="Calibri" panose="020F0502020204030204" pitchFamily="34" charset="0"/>
+                <a:cs typeface="Times New Roman" panose="02020603050405020304" pitchFamily="18" charset="0"/>
+              </a:rPr>
+              <a:t>Les données se logent dans la base </a:t>
+            </a:r>
+            <a:r>
+              <a:rPr lang="fr-FR" sz="1800" kern="100" dirty="0" err="1">
+                <a:solidFill>
+                  <a:schemeClr val="bg1"/>
+                </a:solidFill>
+                <a:effectLst/>
+                <a:latin typeface="Arial Nova" panose="020B0504020202020204" pitchFamily="34" charset="0"/>
+                <a:ea typeface="Calibri" panose="020F0502020204030204" pitchFamily="34" charset="0"/>
+                <a:cs typeface="Times New Roman" panose="02020603050405020304" pitchFamily="18" charset="0"/>
+              </a:rPr>
+              <a:t>postgres</a:t>
+            </a:r>
+            <a:endParaRPr lang="fr-FR" sz="1600" kern="100" dirty="0">
+              <a:solidFill>
+                <a:schemeClr val="bg1"/>
+              </a:solidFill>
+              <a:effectLst/>
+              <a:latin typeface="Calibri" panose="020F0502020204030204" pitchFamily="34" charset="0"/>
+              <a:ea typeface="Calibri" panose="020F0502020204030204" pitchFamily="34" charset="0"/>
+              <a:cs typeface="Times New Roman" panose="02020603050405020304" pitchFamily="18" charset="0"/>
+            </a:endParaRPr>
+          </a:p>
+        </p:txBody>
+      </p:sp>
+      <p:sp>
+        <p:nvSpPr>
+          <p:cNvPr id="15" name="ZoneTexte 14">
+            <a:extLst>
+              <a:ext uri="{FF2B5EF4-FFF2-40B4-BE49-F238E27FC236}">
+                <a16:creationId xmlns:a16="http://schemas.microsoft.com/office/drawing/2014/main" id="{A4D0B631-6589-A953-A02F-FC1A3DB26657}"/>
+              </a:ext>
+            </a:extLst>
+          </p:cNvPr>
+          <p:cNvSpPr txBox="1"/>
+          <p:nvPr/>
+        </p:nvSpPr>
+        <p:spPr>
+          <a:xfrm>
+            <a:off x="3790336" y="5487892"/>
+            <a:ext cx="2492631" cy="966418"/>
+          </a:xfrm>
+          <a:prstGeom prst="rect">
+            <a:avLst/>
+          </a:prstGeom>
+          <a:solidFill>
+            <a:schemeClr val="tx1">
+              <a:lumMod val="85000"/>
+            </a:schemeClr>
+          </a:solidFill>
+        </p:spPr>
+        <p:txBody>
+          <a:bodyPr wrap="square">
+            <a:spAutoFit/>
+          </a:bodyPr>
+          <a:lstStyle/>
+          <a:p>
+            <a:pPr lvl="0" algn="just">
+              <a:lnSpc>
+                <a:spcPct val="107000"/>
+              </a:lnSpc>
+              <a:spcAft>
+                <a:spcPts val="800"/>
+              </a:spcAft>
+              <a:tabLst>
+                <a:tab pos="1028700" algn="l"/>
+              </a:tabLst>
+            </a:pPr>
+            <a:r>
+              <a:rPr lang="fr-FR" sz="1800" kern="100" dirty="0">
+                <a:solidFill>
+                  <a:schemeClr val="bg1"/>
+                </a:solidFill>
+                <a:effectLst/>
+                <a:latin typeface="Arial Nova" panose="020B0504020202020204" pitchFamily="34" charset="0"/>
+                <a:ea typeface="Calibri" panose="020F0502020204030204" pitchFamily="34" charset="0"/>
+                <a:cs typeface="Times New Roman" panose="02020603050405020304" pitchFamily="18" charset="0"/>
+              </a:rPr>
+              <a:t>Airflow récupère et chemine les données sur </a:t>
+            </a:r>
+            <a:r>
+              <a:rPr lang="fr-FR" sz="1800" kern="100" dirty="0" err="1">
+                <a:solidFill>
+                  <a:schemeClr val="bg1"/>
+                </a:solidFill>
+                <a:effectLst/>
+                <a:latin typeface="Arial Nova" panose="020B0504020202020204" pitchFamily="34" charset="0"/>
+                <a:ea typeface="Calibri" panose="020F0502020204030204" pitchFamily="34" charset="0"/>
+                <a:cs typeface="Times New Roman" panose="02020603050405020304" pitchFamily="18" charset="0"/>
+              </a:rPr>
+              <a:t>snowflake</a:t>
+            </a:r>
+            <a:endParaRPr lang="fr-FR" sz="1600" kern="100" dirty="0">
+              <a:solidFill>
+                <a:schemeClr val="bg1"/>
+              </a:solidFill>
+              <a:effectLst/>
+              <a:latin typeface="Calibri" panose="020F0502020204030204" pitchFamily="34" charset="0"/>
+              <a:ea typeface="Calibri" panose="020F0502020204030204" pitchFamily="34" charset="0"/>
+              <a:cs typeface="Times New Roman" panose="02020603050405020304" pitchFamily="18" charset="0"/>
+            </a:endParaRPr>
+          </a:p>
+        </p:txBody>
+      </p:sp>
+      <p:sp>
+        <p:nvSpPr>
+          <p:cNvPr id="19" name="ZoneTexte 18">
+            <a:extLst>
+              <a:ext uri="{FF2B5EF4-FFF2-40B4-BE49-F238E27FC236}">
+                <a16:creationId xmlns:a16="http://schemas.microsoft.com/office/drawing/2014/main" id="{A98F7C95-6E10-2A9F-F782-149AB5552510}"/>
+              </a:ext>
+            </a:extLst>
+          </p:cNvPr>
+          <p:cNvSpPr txBox="1"/>
+          <p:nvPr/>
+        </p:nvSpPr>
+        <p:spPr>
+          <a:xfrm>
+            <a:off x="7265805" y="3722612"/>
+            <a:ext cx="2913445" cy="1559145"/>
+          </a:xfrm>
+          <a:prstGeom prst="rect">
+            <a:avLst/>
+          </a:prstGeom>
+          <a:solidFill>
+            <a:schemeClr val="tx1">
+              <a:lumMod val="85000"/>
+            </a:schemeClr>
+          </a:solidFill>
+        </p:spPr>
+        <p:txBody>
+          <a:bodyPr wrap="square">
+            <a:spAutoFit/>
+          </a:bodyPr>
+          <a:lstStyle/>
+          <a:p>
+            <a:pPr lvl="0" algn="just">
+              <a:lnSpc>
+                <a:spcPct val="107000"/>
+              </a:lnSpc>
+              <a:spcAft>
+                <a:spcPts val="800"/>
+              </a:spcAft>
+              <a:tabLst>
+                <a:tab pos="1028700" algn="l"/>
+              </a:tabLst>
+            </a:pPr>
+            <a:r>
+              <a:rPr lang="fr-FR" sz="1800" kern="100" dirty="0" err="1">
+                <a:solidFill>
+                  <a:schemeClr val="bg1"/>
+                </a:solidFill>
+                <a:effectLst/>
+                <a:latin typeface="Arial Nova" panose="020B0504020202020204" pitchFamily="34" charset="0"/>
+                <a:ea typeface="Calibri" panose="020F0502020204030204" pitchFamily="34" charset="0"/>
+                <a:cs typeface="Times New Roman" panose="02020603050405020304" pitchFamily="18" charset="0"/>
+              </a:rPr>
+              <a:t>Dbt</a:t>
+            </a:r>
+            <a:r>
+              <a:rPr lang="fr-FR" sz="1800" kern="100" dirty="0">
+                <a:solidFill>
+                  <a:schemeClr val="bg1"/>
+                </a:solidFill>
+                <a:effectLst/>
+                <a:latin typeface="Arial Nova" panose="020B0504020202020204" pitchFamily="34" charset="0"/>
+                <a:ea typeface="Calibri" panose="020F0502020204030204" pitchFamily="34" charset="0"/>
+                <a:cs typeface="Times New Roman" panose="02020603050405020304" pitchFamily="18" charset="0"/>
+              </a:rPr>
+              <a:t> récupère le données sources sur </a:t>
+            </a:r>
+            <a:r>
+              <a:rPr lang="fr-FR" sz="1800" kern="100" dirty="0" err="1">
+                <a:solidFill>
+                  <a:schemeClr val="bg1"/>
+                </a:solidFill>
+                <a:effectLst/>
+                <a:latin typeface="Arial Nova" panose="020B0504020202020204" pitchFamily="34" charset="0"/>
+                <a:ea typeface="Calibri" panose="020F0502020204030204" pitchFamily="34" charset="0"/>
+                <a:cs typeface="Times New Roman" panose="02020603050405020304" pitchFamily="18" charset="0"/>
+              </a:rPr>
+              <a:t>snowflake</a:t>
+            </a:r>
+            <a:r>
+              <a:rPr lang="fr-FR" kern="100" dirty="0">
+                <a:solidFill>
+                  <a:schemeClr val="bg1"/>
+                </a:solidFill>
+                <a:latin typeface="Arial Nova" panose="020B0504020202020204" pitchFamily="34" charset="0"/>
+                <a:ea typeface="Calibri" panose="020F0502020204030204" pitchFamily="34" charset="0"/>
+                <a:cs typeface="Times New Roman" panose="02020603050405020304" pitchFamily="18" charset="0"/>
+              </a:rPr>
+              <a:t>, </a:t>
+            </a:r>
+            <a:r>
+              <a:rPr lang="fr-FR" sz="1800" kern="100" dirty="0">
+                <a:solidFill>
+                  <a:schemeClr val="bg1"/>
+                </a:solidFill>
+                <a:effectLst/>
+                <a:latin typeface="Arial Nova" panose="020B0504020202020204" pitchFamily="34" charset="0"/>
+                <a:ea typeface="Calibri" panose="020F0502020204030204" pitchFamily="34" charset="0"/>
+                <a:cs typeface="Times New Roman" panose="02020603050405020304" pitchFamily="18" charset="0"/>
+              </a:rPr>
+              <a:t>les transforment et les renvoie dans d’autres schémas </a:t>
+            </a:r>
+            <a:r>
+              <a:rPr lang="fr-FR" sz="1800" kern="100" dirty="0" err="1">
+                <a:solidFill>
+                  <a:schemeClr val="bg1"/>
+                </a:solidFill>
+                <a:effectLst/>
+                <a:latin typeface="Arial Nova" panose="020B0504020202020204" pitchFamily="34" charset="0"/>
+                <a:ea typeface="Calibri" panose="020F0502020204030204" pitchFamily="34" charset="0"/>
+                <a:cs typeface="Times New Roman" panose="02020603050405020304" pitchFamily="18" charset="0"/>
+              </a:rPr>
+              <a:t>snowflake</a:t>
+            </a:r>
+            <a:r>
+              <a:rPr lang="fr-FR" kern="100" dirty="0">
+                <a:solidFill>
+                  <a:schemeClr val="bg1"/>
+                </a:solidFill>
+                <a:latin typeface="Arial Nova" panose="020B0504020202020204" pitchFamily="34" charset="0"/>
+                <a:ea typeface="Calibri" panose="020F0502020204030204" pitchFamily="34" charset="0"/>
+                <a:cs typeface="Times New Roman" panose="02020603050405020304" pitchFamily="18" charset="0"/>
+              </a:rPr>
+              <a:t> </a:t>
+            </a:r>
+            <a:endParaRPr lang="fr-FR" sz="1600" kern="100" dirty="0">
+              <a:solidFill>
+                <a:schemeClr val="bg1"/>
+              </a:solidFill>
+              <a:effectLst/>
+              <a:latin typeface="Calibri" panose="020F0502020204030204" pitchFamily="34" charset="0"/>
+              <a:ea typeface="Calibri" panose="020F0502020204030204" pitchFamily="34" charset="0"/>
+              <a:cs typeface="Times New Roman" panose="02020603050405020304" pitchFamily="18" charset="0"/>
+            </a:endParaRPr>
+          </a:p>
+        </p:txBody>
+      </p:sp>
+      <p:sp>
+        <p:nvSpPr>
+          <p:cNvPr id="21" name="ZoneTexte 20">
+            <a:extLst>
+              <a:ext uri="{FF2B5EF4-FFF2-40B4-BE49-F238E27FC236}">
+                <a16:creationId xmlns:a16="http://schemas.microsoft.com/office/drawing/2014/main" id="{343BBF83-757E-22DE-B71E-69B5C9B62A2D}"/>
+              </a:ext>
+            </a:extLst>
+          </p:cNvPr>
+          <p:cNvSpPr txBox="1"/>
+          <p:nvPr/>
+        </p:nvSpPr>
+        <p:spPr>
+          <a:xfrm>
+            <a:off x="6096000" y="1460687"/>
+            <a:ext cx="2552330" cy="966418"/>
+          </a:xfrm>
+          <a:prstGeom prst="rect">
+            <a:avLst/>
+          </a:prstGeom>
+          <a:solidFill>
+            <a:schemeClr val="tx1">
+              <a:lumMod val="85000"/>
+            </a:schemeClr>
+          </a:solidFill>
+        </p:spPr>
+        <p:txBody>
+          <a:bodyPr wrap="square">
+            <a:spAutoFit/>
+          </a:bodyPr>
+          <a:lstStyle/>
+          <a:p>
+            <a:pPr lvl="0" algn="just">
+              <a:lnSpc>
+                <a:spcPct val="107000"/>
+              </a:lnSpc>
+              <a:spcAft>
+                <a:spcPts val="800"/>
+              </a:spcAft>
+              <a:tabLst>
+                <a:tab pos="1028700" algn="l"/>
+              </a:tabLst>
+            </a:pPr>
+            <a:r>
+              <a:rPr lang="fr-FR" sz="1800" kern="100" dirty="0" err="1">
+                <a:solidFill>
+                  <a:schemeClr val="bg1"/>
+                </a:solidFill>
+                <a:effectLst/>
+                <a:latin typeface="Arial Nova" panose="020B0504020202020204" pitchFamily="34" charset="0"/>
+                <a:ea typeface="Calibri" panose="020F0502020204030204" pitchFamily="34" charset="0"/>
+                <a:cs typeface="Times New Roman" panose="02020603050405020304" pitchFamily="18" charset="0"/>
+              </a:rPr>
+              <a:t>PowerBI</a:t>
+            </a:r>
+            <a:r>
+              <a:rPr lang="fr-FR" sz="1800" kern="100" dirty="0">
+                <a:solidFill>
+                  <a:schemeClr val="bg1"/>
+                </a:solidFill>
+                <a:effectLst/>
+                <a:latin typeface="Arial Nova" panose="020B0504020202020204" pitchFamily="34" charset="0"/>
+                <a:ea typeface="Calibri" panose="020F0502020204030204" pitchFamily="34" charset="0"/>
+                <a:cs typeface="Times New Roman" panose="02020603050405020304" pitchFamily="18" charset="0"/>
+              </a:rPr>
+              <a:t> utilise les données transformées pour la visualisation</a:t>
+            </a:r>
+            <a:endParaRPr lang="fr-FR" sz="1600" kern="100" dirty="0">
+              <a:solidFill>
+                <a:schemeClr val="bg1"/>
+              </a:solidFill>
+              <a:effectLst/>
+              <a:latin typeface="Calibri" panose="020F0502020204030204" pitchFamily="34" charset="0"/>
+              <a:ea typeface="Calibri" panose="020F0502020204030204" pitchFamily="34" charset="0"/>
+              <a:cs typeface="Times New Roman" panose="02020603050405020304" pitchFamily="18" charset="0"/>
+            </a:endParaRPr>
+          </a:p>
+        </p:txBody>
+      </p:sp>
+      <p:sp>
+        <p:nvSpPr>
+          <p:cNvPr id="24" name="Flèche : courbe vers la droite 23">
+            <a:extLst>
+              <a:ext uri="{FF2B5EF4-FFF2-40B4-BE49-F238E27FC236}">
+                <a16:creationId xmlns:a16="http://schemas.microsoft.com/office/drawing/2014/main" id="{B0F6CEB7-B4A9-82DF-C271-EBD92BB2012C}"/>
+              </a:ext>
+            </a:extLst>
+          </p:cNvPr>
+          <p:cNvSpPr/>
+          <p:nvPr/>
+        </p:nvSpPr>
+        <p:spPr>
+          <a:xfrm>
+            <a:off x="895309" y="1967750"/>
+            <a:ext cx="513891" cy="2023437"/>
+          </a:xfrm>
+          <a:prstGeom prst="curvedRightArrow">
+            <a:avLst/>
+          </a:prstGeom>
+          <a:solidFill>
+            <a:schemeClr val="tx1">
+              <a:lumMod val="85000"/>
+            </a:schemeClr>
+          </a:solidFill>
+        </p:spPr>
+        <p:style>
+          <a:lnRef idx="2">
+            <a:schemeClr val="accent1">
+              <a:shade val="15000"/>
+            </a:schemeClr>
+          </a:lnRef>
+          <a:fillRef idx="1">
+            <a:schemeClr val="accent1"/>
+          </a:fillRef>
+          <a:effectRef idx="0">
+            <a:schemeClr val="accent1"/>
+          </a:effectRef>
+          <a:fontRef idx="minor">
+            <a:schemeClr val="lt1"/>
+          </a:fontRef>
+        </p:style>
+        <p:txBody>
+          <a:bodyPr rtlCol="0" anchor="ctr"/>
+          <a:lstStyle/>
+          <a:p>
+            <a:pPr algn="ctr"/>
+            <a:endParaRPr lang="fr-FR">
+              <a:solidFill>
+                <a:schemeClr val="tx1"/>
+              </a:solidFill>
+            </a:endParaRPr>
+          </a:p>
+        </p:txBody>
+      </p:sp>
+      <p:sp>
+        <p:nvSpPr>
+          <p:cNvPr id="26" name="Flèche : courbe vers la droite 25">
+            <a:extLst>
+              <a:ext uri="{FF2B5EF4-FFF2-40B4-BE49-F238E27FC236}">
+                <a16:creationId xmlns:a16="http://schemas.microsoft.com/office/drawing/2014/main" id="{3EDF2189-6485-5ACE-5267-9DC400B759C1}"/>
+              </a:ext>
+            </a:extLst>
+          </p:cNvPr>
+          <p:cNvSpPr/>
+          <p:nvPr/>
+        </p:nvSpPr>
+        <p:spPr>
+          <a:xfrm rot="18730147">
+            <a:off x="2355034" y="4787593"/>
+            <a:ext cx="688303" cy="2299725"/>
+          </a:xfrm>
+          <a:prstGeom prst="curvedRightArrow">
+            <a:avLst/>
+          </a:prstGeom>
+          <a:solidFill>
+            <a:schemeClr val="tx1">
+              <a:lumMod val="85000"/>
+            </a:schemeClr>
+          </a:solidFill>
+        </p:spPr>
+        <p:style>
+          <a:lnRef idx="2">
+            <a:schemeClr val="accent1">
+              <a:shade val="15000"/>
+            </a:schemeClr>
+          </a:lnRef>
+          <a:fillRef idx="1">
+            <a:schemeClr val="accent1"/>
+          </a:fillRef>
+          <a:effectRef idx="0">
+            <a:schemeClr val="accent1"/>
+          </a:effectRef>
+          <a:fontRef idx="minor">
+            <a:schemeClr val="lt1"/>
+          </a:fontRef>
+        </p:style>
+        <p:txBody>
+          <a:bodyPr rtlCol="0" anchor="ctr"/>
+          <a:lstStyle/>
+          <a:p>
+            <a:pPr algn="ctr"/>
+            <a:endParaRPr lang="fr-FR">
+              <a:solidFill>
+                <a:schemeClr val="tx1"/>
+              </a:solidFill>
+            </a:endParaRPr>
+          </a:p>
+        </p:txBody>
+      </p:sp>
+      <p:sp>
+        <p:nvSpPr>
+          <p:cNvPr id="31" name="Flèche : courbe vers la droite 30">
+            <a:extLst>
+              <a:ext uri="{FF2B5EF4-FFF2-40B4-BE49-F238E27FC236}">
+                <a16:creationId xmlns:a16="http://schemas.microsoft.com/office/drawing/2014/main" id="{C407E576-7317-9CEF-B2E3-70B970591326}"/>
+              </a:ext>
+            </a:extLst>
+          </p:cNvPr>
+          <p:cNvSpPr/>
+          <p:nvPr/>
+        </p:nvSpPr>
+        <p:spPr>
+          <a:xfrm rot="14205165">
+            <a:off x="6971609" y="4923105"/>
+            <a:ext cx="588393" cy="1908735"/>
+          </a:xfrm>
+          <a:prstGeom prst="curvedRightArrow">
+            <a:avLst/>
+          </a:prstGeom>
+          <a:solidFill>
+            <a:schemeClr val="tx1">
+              <a:lumMod val="85000"/>
+            </a:schemeClr>
+          </a:solidFill>
+        </p:spPr>
+        <p:style>
+          <a:lnRef idx="2">
+            <a:schemeClr val="accent1">
+              <a:shade val="15000"/>
+            </a:schemeClr>
+          </a:lnRef>
+          <a:fillRef idx="1">
+            <a:schemeClr val="accent1"/>
+          </a:fillRef>
+          <a:effectRef idx="0">
+            <a:schemeClr val="accent1"/>
+          </a:effectRef>
+          <a:fontRef idx="minor">
+            <a:schemeClr val="lt1"/>
+          </a:fontRef>
+        </p:style>
+        <p:txBody>
+          <a:bodyPr rtlCol="0" anchor="ctr"/>
+          <a:lstStyle/>
+          <a:p>
+            <a:pPr algn="ctr"/>
+            <a:endParaRPr lang="fr-FR">
+              <a:solidFill>
+                <a:schemeClr val="tx1"/>
+              </a:solidFill>
+            </a:endParaRPr>
+          </a:p>
+        </p:txBody>
+      </p:sp>
+      <p:sp>
+        <p:nvSpPr>
+          <p:cNvPr id="33" name="Flèche : courbe vers la droite 32">
+            <a:extLst>
+              <a:ext uri="{FF2B5EF4-FFF2-40B4-BE49-F238E27FC236}">
+                <a16:creationId xmlns:a16="http://schemas.microsoft.com/office/drawing/2014/main" id="{E4BF6E47-829A-3958-F54D-55D53A2B9696}"/>
+              </a:ext>
+            </a:extLst>
+          </p:cNvPr>
+          <p:cNvSpPr/>
+          <p:nvPr/>
+        </p:nvSpPr>
+        <p:spPr>
+          <a:xfrm rot="9834306">
+            <a:off x="8871477" y="1635453"/>
+            <a:ext cx="714497" cy="2032329"/>
+          </a:xfrm>
+          <a:prstGeom prst="curvedRightArrow">
+            <a:avLst/>
+          </a:prstGeom>
+          <a:solidFill>
+            <a:schemeClr val="tx1">
+              <a:lumMod val="85000"/>
+            </a:schemeClr>
+          </a:solidFill>
+        </p:spPr>
+        <p:style>
+          <a:lnRef idx="2">
+            <a:schemeClr val="accent1">
+              <a:shade val="15000"/>
+            </a:schemeClr>
+          </a:lnRef>
+          <a:fillRef idx="1">
+            <a:schemeClr val="accent1"/>
+          </a:fillRef>
+          <a:effectRef idx="0">
+            <a:schemeClr val="accent1"/>
+          </a:effectRef>
+          <a:fontRef idx="minor">
+            <a:schemeClr val="lt1"/>
+          </a:fontRef>
+        </p:style>
+        <p:txBody>
+          <a:bodyPr rtlCol="0" anchor="ctr"/>
+          <a:lstStyle/>
+          <a:p>
+            <a:pPr algn="ctr"/>
+            <a:endParaRPr lang="fr-FR">
+              <a:solidFill>
+                <a:schemeClr val="tx1"/>
+              </a:solidFill>
+            </a:endParaRPr>
+          </a:p>
+        </p:txBody>
+      </p:sp>
+    </p:spTree>
+    <p:extLst>
+      <p:ext uri="{BB962C8B-B14F-4D97-AF65-F5344CB8AC3E}">
+        <p14:creationId xmlns:p14="http://schemas.microsoft.com/office/powerpoint/2010/main" val="767819900"/>
+      </p:ext>
+    </p:extLst>
+  </p:cSld>
+  <p:clrMapOvr>
+    <a:masterClrMapping/>
+  </p:clrMapOvr>
+  <p:transition spd="slow">
+    <p:push dir="u"/>
+  </p:transition>
+</p:sld>
+</file>
+
+<file path=ppt/slides/slide13.xml><?xml version="1.0" encoding="utf-8"?>
+<p:sld xmlns:a="http://schemas.openxmlformats.org/drawingml/2006/main" xmlns:r="http://schemas.openxmlformats.org/officeDocument/2006/relationships" xmlns:p="http://schemas.openxmlformats.org/presentationml/2006/main">
+  <p:cSld>
+    <p:spTree>
+      <p:nvGrpSpPr>
+        <p:cNvPr id="1" name="">
+          <a:extLst>
+            <a:ext uri="{FF2B5EF4-FFF2-40B4-BE49-F238E27FC236}">
+              <a16:creationId xmlns:a16="http://schemas.microsoft.com/office/drawing/2014/main" id="{A57D9DAE-00A1-95C3-2BDF-FEB51EACF9B2}"/>
+            </a:ext>
+          </a:extLst>
+        </p:cNvPr>
+        <p:cNvGrpSpPr/>
+        <p:nvPr/>
+      </p:nvGrpSpPr>
+      <p:grpSpPr>
+        <a:xfrm>
+          <a:off x="0" y="0"/>
+          <a:ext cx="0" cy="0"/>
+          <a:chOff x="0" y="0"/>
+          <a:chExt cx="0" cy="0"/>
+        </a:xfrm>
+      </p:grpSpPr>
+      <p:sp>
+        <p:nvSpPr>
+          <p:cNvPr id="8" name="Titre 1">
+            <a:extLst>
+              <a:ext uri="{FF2B5EF4-FFF2-40B4-BE49-F238E27FC236}">
+                <a16:creationId xmlns:a16="http://schemas.microsoft.com/office/drawing/2014/main" id="{FE496A78-A83D-1EAC-6007-D54FD88FC804}"/>
+              </a:ext>
+            </a:extLst>
+          </p:cNvPr>
+          <p:cNvSpPr txBox="1">
+            <a:spLocks/>
+          </p:cNvSpPr>
+          <p:nvPr/>
+        </p:nvSpPr>
+        <p:spPr>
+          <a:xfrm>
+            <a:off x="2492477" y="144878"/>
+            <a:ext cx="8454052" cy="721789"/>
+          </a:xfrm>
+          <a:prstGeom prst="rect">
+            <a:avLst/>
+          </a:prstGeom>
+        </p:spPr>
+        <p:txBody>
+          <a:bodyPr vert="horz" lIns="91440" tIns="45720" rIns="91440" bIns="45720" rtlCol="0" anchor="b">
+            <a:noAutofit/>
+          </a:bodyPr>
+          <a:lstStyle>
+            <a:lvl1pPr algn="l" defTabSz="914400" rtl="0" eaLnBrk="1" latinLnBrk="0" hangingPunct="1">
+              <a:lnSpc>
+                <a:spcPct val="90000"/>
+              </a:lnSpc>
+              <a:spcBef>
+                <a:spcPct val="0"/>
+              </a:spcBef>
+              <a:buNone/>
+              <a:defRPr sz="4800" kern="1200" cap="all" baseline="0">
+                <a:solidFill>
+                  <a:schemeClr val="tx1"/>
+                </a:solidFill>
+                <a:latin typeface="+mj-lt"/>
+                <a:ea typeface="+mj-ea"/>
+                <a:cs typeface="+mj-cs"/>
+              </a:defRPr>
+            </a:lvl1pPr>
+          </a:lstStyle>
+          <a:p>
+            <a:pPr algn="ctr"/>
+            <a:r>
+              <a:rPr lang="fr-FR" b="1" dirty="0"/>
+              <a:t>SYSTEME DE VENTE DES LIVRES</a:t>
+            </a:r>
+          </a:p>
+        </p:txBody>
+      </p:sp>
+      <p:pic>
+        <p:nvPicPr>
+          <p:cNvPr id="12" name="Image 11">
+            <a:extLst>
+              <a:ext uri="{FF2B5EF4-FFF2-40B4-BE49-F238E27FC236}">
+                <a16:creationId xmlns:a16="http://schemas.microsoft.com/office/drawing/2014/main" id="{0C910B03-972D-86E4-2195-13011D0B1D3B}"/>
+              </a:ext>
+            </a:extLst>
+          </p:cNvPr>
+          <p:cNvPicPr>
+            <a:picLocks noChangeAspect="1"/>
+          </p:cNvPicPr>
+          <p:nvPr/>
+        </p:nvPicPr>
+        <p:blipFill>
+          <a:blip r:embed="rId2">
+            <a:extLst>
+              <a:ext uri="{28A0092B-C50C-407E-A947-70E740481C1C}">
+                <a14:useLocalDpi xmlns:a14="http://schemas.microsoft.com/office/drawing/2010/main" val="0"/>
+              </a:ext>
+            </a:extLst>
+          </a:blip>
+          <a:stretch>
+            <a:fillRect/>
+          </a:stretch>
+        </p:blipFill>
+        <p:spPr>
+          <a:xfrm>
+            <a:off x="0" y="0"/>
+            <a:ext cx="2359742" cy="866667"/>
+          </a:xfrm>
+          <a:prstGeom prst="rect">
+            <a:avLst/>
+          </a:prstGeom>
+        </p:spPr>
+      </p:pic>
+      <p:sp>
+        <p:nvSpPr>
+          <p:cNvPr id="6" name="Titre 1">
+            <a:extLst>
+              <a:ext uri="{FF2B5EF4-FFF2-40B4-BE49-F238E27FC236}">
+                <a16:creationId xmlns:a16="http://schemas.microsoft.com/office/drawing/2014/main" id="{2DB691A2-9B87-FB51-57B6-DD4C96163BD5}"/>
+              </a:ext>
+            </a:extLst>
+          </p:cNvPr>
+          <p:cNvSpPr>
+            <a:spLocks noGrp="1"/>
+          </p:cNvSpPr>
+          <p:nvPr>
+            <p:ph type="ctrTitle"/>
+          </p:nvPr>
+        </p:nvSpPr>
+        <p:spPr>
+          <a:xfrm>
+            <a:off x="3822980" y="1582838"/>
+            <a:ext cx="3669201" cy="721789"/>
+          </a:xfrm>
+        </p:spPr>
+        <p:txBody>
+          <a:bodyPr>
+            <a:noAutofit/>
+          </a:bodyPr>
+          <a:lstStyle/>
+          <a:p>
+            <a:pPr algn="ctr"/>
+            <a:r>
+              <a:rPr lang="fr-FR" b="1" dirty="0"/>
+              <a:t>Merci</a:t>
+            </a:r>
+            <a:endParaRPr lang="fr-FR" sz="2800" b="1" dirty="0"/>
+          </a:p>
+        </p:txBody>
+      </p:sp>
+    </p:spTree>
+    <p:extLst>
+      <p:ext uri="{BB962C8B-B14F-4D97-AF65-F5344CB8AC3E}">
+        <p14:creationId xmlns:p14="http://schemas.microsoft.com/office/powerpoint/2010/main" val="3264505153"/>
+      </p:ext>
+    </p:extLst>
+  </p:cSld>
+  <p:clrMapOvr>
+    <a:masterClrMapping/>
+  </p:clrMapOvr>
+  <p:transition spd="slow">
+    <p:push dir="u"/>
+  </p:transition>
+</p:sld>
+</file>
+
+<file path=ppt/slides/slide2.xml><?xml version="1.0" encoding="utf-8"?>
+<p:sld xmlns:a="http://schemas.openxmlformats.org/drawingml/2006/main" xmlns:r="http://schemas.openxmlformats.org/officeDocument/2006/relationships" xmlns:p="http://schemas.openxmlformats.org/presentationml/2006/main">
+  <p:cSld>
+    <p:spTree>
+      <p:nvGrpSpPr>
+        <p:cNvPr id="1" name="">
+          <a:extLst>
+            <a:ext uri="{FF2B5EF4-FFF2-40B4-BE49-F238E27FC236}">
+              <a16:creationId xmlns:a16="http://schemas.microsoft.com/office/drawing/2014/main" id="{E9C855A1-19F0-CFBE-AB48-DA0384804316}"/>
+            </a:ext>
+          </a:extLst>
+        </p:cNvPr>
+        <p:cNvGrpSpPr/>
+        <p:nvPr/>
+      </p:nvGrpSpPr>
+      <p:grpSpPr>
+        <a:xfrm>
+          <a:off x="0" y="0"/>
+          <a:ext cx="0" cy="0"/>
+          <a:chOff x="0" y="0"/>
+          <a:chExt cx="0" cy="0"/>
+        </a:xfrm>
+      </p:grpSpPr>
+      <p:sp>
+        <p:nvSpPr>
+          <p:cNvPr id="2" name="Titre 1">
+            <a:extLst>
+              <a:ext uri="{FF2B5EF4-FFF2-40B4-BE49-F238E27FC236}">
+                <a16:creationId xmlns:a16="http://schemas.microsoft.com/office/drawing/2014/main" id="{1D43D356-F3DB-B47C-FFCB-319F54BC0FBB}"/>
+              </a:ext>
+            </a:extLst>
+          </p:cNvPr>
+          <p:cNvSpPr>
+            <a:spLocks noGrp="1"/>
+          </p:cNvSpPr>
+          <p:nvPr>
+            <p:ph type="ctrTitle"/>
+          </p:nvPr>
+        </p:nvSpPr>
+        <p:spPr>
+          <a:xfrm>
+            <a:off x="2507226" y="194462"/>
+            <a:ext cx="8391832" cy="769127"/>
+          </a:xfrm>
+        </p:spPr>
+        <p:txBody>
+          <a:bodyPr>
+            <a:noAutofit/>
+          </a:bodyPr>
+          <a:lstStyle/>
+          <a:p>
+            <a:pPr algn="ctr"/>
+            <a:r>
+              <a:rPr lang="fr-FR" b="1" dirty="0"/>
+              <a:t>SYSTEME DE VENTE DES LIVRES</a:t>
+            </a:r>
+          </a:p>
+        </p:txBody>
+      </p:sp>
+      <p:sp>
+        <p:nvSpPr>
+          <p:cNvPr id="8" name="ZoneTexte 7">
+            <a:extLst>
+              <a:ext uri="{FF2B5EF4-FFF2-40B4-BE49-F238E27FC236}">
+                <a16:creationId xmlns:a16="http://schemas.microsoft.com/office/drawing/2014/main" id="{C19F89E3-C2FD-631D-528D-6393FC287289}"/>
+              </a:ext>
+            </a:extLst>
+          </p:cNvPr>
+          <p:cNvSpPr txBox="1"/>
+          <p:nvPr/>
+        </p:nvSpPr>
+        <p:spPr>
+          <a:xfrm>
+            <a:off x="452286" y="1761288"/>
+            <a:ext cx="4468760" cy="2862322"/>
+          </a:xfrm>
+          <a:prstGeom prst="rect">
+            <a:avLst/>
+          </a:prstGeom>
+          <a:noFill/>
+        </p:spPr>
+        <p:txBody>
+          <a:bodyPr wrap="square">
+            <a:spAutoFit/>
+          </a:bodyPr>
+          <a:lstStyle/>
+          <a:p>
+            <a:pPr algn="just"/>
+            <a:r>
+              <a:rPr lang="fr-FR" sz="2000" b="1" dirty="0">
+                <a:solidFill>
+                  <a:schemeClr val="bg1"/>
+                </a:solidFill>
+              </a:rPr>
+              <a:t>Dans le cadre de la réalisation de notre projet, nous avons pris l’option de la conteneurisation dont le but de tous garder le même modèle, les mêmes versions et configurations qu’importe l’OS utilisé. Cette démarche vise à garantir la stabilité du programme et à éviter les problèmes de cassures de version.</a:t>
+            </a:r>
+          </a:p>
+        </p:txBody>
+      </p:sp>
+      <p:sp>
+        <p:nvSpPr>
+          <p:cNvPr id="10" name="ZoneTexte 9">
+            <a:extLst>
+              <a:ext uri="{FF2B5EF4-FFF2-40B4-BE49-F238E27FC236}">
+                <a16:creationId xmlns:a16="http://schemas.microsoft.com/office/drawing/2014/main" id="{8B283712-0D3E-1B97-0F61-859B486FAAA3}"/>
+              </a:ext>
+            </a:extLst>
+          </p:cNvPr>
+          <p:cNvSpPr txBox="1"/>
+          <p:nvPr/>
+        </p:nvSpPr>
+        <p:spPr>
+          <a:xfrm>
+            <a:off x="452286" y="1155319"/>
+            <a:ext cx="4748978" cy="523220"/>
+          </a:xfrm>
+          <a:prstGeom prst="rect">
+            <a:avLst/>
+          </a:prstGeom>
+          <a:noFill/>
+        </p:spPr>
+        <p:txBody>
+          <a:bodyPr wrap="square">
+            <a:spAutoFit/>
+          </a:bodyPr>
+          <a:lstStyle/>
+          <a:p>
+            <a:pPr algn="just"/>
+            <a:r>
+              <a:rPr lang="fr-FR" sz="2800" b="1" dirty="0"/>
+              <a:t>Choix de la conteneurisation</a:t>
+            </a:r>
+          </a:p>
+        </p:txBody>
+      </p:sp>
+      <p:sp>
+        <p:nvSpPr>
+          <p:cNvPr id="12" name="ZoneTexte 11">
+            <a:extLst>
+              <a:ext uri="{FF2B5EF4-FFF2-40B4-BE49-F238E27FC236}">
+                <a16:creationId xmlns:a16="http://schemas.microsoft.com/office/drawing/2014/main" id="{1AB06BA6-2398-AE06-29EB-AA1299BE3B47}"/>
+              </a:ext>
+            </a:extLst>
+          </p:cNvPr>
+          <p:cNvSpPr txBox="1"/>
+          <p:nvPr/>
+        </p:nvSpPr>
+        <p:spPr>
+          <a:xfrm>
+            <a:off x="6071420" y="1155319"/>
+            <a:ext cx="4626076" cy="523220"/>
+          </a:xfrm>
+          <a:prstGeom prst="rect">
+            <a:avLst/>
+          </a:prstGeom>
+          <a:noFill/>
+        </p:spPr>
+        <p:txBody>
+          <a:bodyPr wrap="square">
+            <a:spAutoFit/>
+          </a:bodyPr>
+          <a:lstStyle/>
+          <a:p>
+            <a:pPr algn="just"/>
+            <a:r>
+              <a:rPr lang="fr-FR" sz="2800" b="1" dirty="0"/>
+              <a:t>Plan de travail</a:t>
+            </a:r>
+          </a:p>
+        </p:txBody>
+      </p:sp>
+      <p:sp>
+        <p:nvSpPr>
+          <p:cNvPr id="14" name="ZoneTexte 13">
+            <a:extLst>
+              <a:ext uri="{FF2B5EF4-FFF2-40B4-BE49-F238E27FC236}">
+                <a16:creationId xmlns:a16="http://schemas.microsoft.com/office/drawing/2014/main" id="{F28F6754-5D84-33B3-F3B4-877EF1B1712C}"/>
+              </a:ext>
+            </a:extLst>
+          </p:cNvPr>
+          <p:cNvSpPr txBox="1"/>
+          <p:nvPr/>
+        </p:nvSpPr>
+        <p:spPr>
+          <a:xfrm>
+            <a:off x="5201264" y="1761288"/>
+            <a:ext cx="6990736" cy="4979825"/>
+          </a:xfrm>
+          <a:prstGeom prst="rect">
+            <a:avLst/>
+          </a:prstGeom>
+          <a:noFill/>
+        </p:spPr>
+        <p:txBody>
+          <a:bodyPr wrap="square">
+            <a:spAutoFit/>
+          </a:bodyPr>
+          <a:lstStyle/>
+          <a:p>
+            <a:pPr algn="just"/>
+            <a:r>
+              <a:rPr lang="fr-FR" sz="2000" b="1" dirty="0">
+                <a:solidFill>
+                  <a:schemeClr val="bg1"/>
+                </a:solidFill>
+              </a:rPr>
+              <a:t>Pour mener à bien notre projet nous l’avons scindé en plusieurs phases à savoir :</a:t>
+            </a:r>
+          </a:p>
+          <a:p>
+            <a:pPr algn="just"/>
+            <a:endParaRPr lang="fr-FR" sz="1050" b="1" dirty="0">
+              <a:solidFill>
+                <a:schemeClr val="bg1"/>
+              </a:solidFill>
+            </a:endParaRPr>
+          </a:p>
+          <a:p>
+            <a:pPr marL="342900" indent="-342900" algn="just">
+              <a:lnSpc>
+                <a:spcPct val="150000"/>
+              </a:lnSpc>
+              <a:buFont typeface="+mj-lt"/>
+              <a:buAutoNum type="arabicPeriod"/>
+            </a:pPr>
+            <a:r>
+              <a:rPr lang="fr-FR" b="1" dirty="0">
+                <a:solidFill>
+                  <a:schemeClr val="bg1"/>
+                </a:solidFill>
+              </a:rPr>
+              <a:t>Lancement du programme;</a:t>
+            </a:r>
+          </a:p>
+          <a:p>
+            <a:pPr marL="342900" indent="-342900" algn="just">
+              <a:lnSpc>
+                <a:spcPct val="150000"/>
+              </a:lnSpc>
+              <a:buFont typeface="+mj-lt"/>
+              <a:buAutoNum type="arabicPeriod"/>
+            </a:pPr>
+            <a:r>
+              <a:rPr lang="fr-FR" b="1" dirty="0">
+                <a:solidFill>
+                  <a:schemeClr val="bg1"/>
+                </a:solidFill>
+              </a:rPr>
+              <a:t>Configuration de </a:t>
+            </a:r>
+            <a:r>
+              <a:rPr lang="fr-FR" b="1" dirty="0" err="1">
+                <a:solidFill>
+                  <a:schemeClr val="bg1"/>
+                </a:solidFill>
+              </a:rPr>
+              <a:t>airflow</a:t>
+            </a:r>
+            <a:r>
+              <a:rPr lang="fr-FR" b="1" dirty="0">
+                <a:solidFill>
+                  <a:schemeClr val="bg1"/>
+                </a:solidFill>
+              </a:rPr>
+              <a:t>;</a:t>
+            </a:r>
+          </a:p>
+          <a:p>
+            <a:pPr marL="342900" indent="-342900" algn="just">
+              <a:lnSpc>
+                <a:spcPct val="150000"/>
+              </a:lnSpc>
+              <a:buFont typeface="+mj-lt"/>
+              <a:buAutoNum type="arabicPeriod"/>
+            </a:pPr>
+            <a:r>
+              <a:rPr lang="fr-FR" b="1" dirty="0">
+                <a:solidFill>
+                  <a:schemeClr val="bg1"/>
+                </a:solidFill>
+              </a:rPr>
+              <a:t>Création de la base de données et des tables dans </a:t>
+            </a:r>
+            <a:r>
+              <a:rPr lang="fr-FR" b="1" dirty="0" err="1">
+                <a:solidFill>
+                  <a:schemeClr val="bg1"/>
+                </a:solidFill>
+              </a:rPr>
+              <a:t>snowflake</a:t>
+            </a:r>
+            <a:r>
+              <a:rPr lang="fr-FR" b="1" dirty="0">
+                <a:solidFill>
+                  <a:schemeClr val="bg1"/>
+                </a:solidFill>
+              </a:rPr>
+              <a:t>;</a:t>
+            </a:r>
+          </a:p>
+          <a:p>
+            <a:pPr marL="342900" indent="-342900" algn="just">
+              <a:lnSpc>
+                <a:spcPct val="150000"/>
+              </a:lnSpc>
+              <a:buFont typeface="+mj-lt"/>
+              <a:buAutoNum type="arabicPeriod"/>
+            </a:pPr>
+            <a:r>
+              <a:rPr lang="fr-FR" b="1" dirty="0">
+                <a:solidFill>
+                  <a:schemeClr val="bg1"/>
+                </a:solidFill>
+              </a:rPr>
+              <a:t>Vérification de la création des données dans la BD </a:t>
+            </a:r>
+            <a:r>
+              <a:rPr lang="fr-FR" b="1" dirty="0" err="1">
+                <a:solidFill>
+                  <a:schemeClr val="bg1"/>
+                </a:solidFill>
+              </a:rPr>
+              <a:t>Postgres</a:t>
+            </a:r>
+            <a:r>
+              <a:rPr lang="fr-FR" b="1" dirty="0">
+                <a:solidFill>
+                  <a:schemeClr val="bg1"/>
+                </a:solidFill>
+              </a:rPr>
+              <a:t> ;</a:t>
+            </a:r>
+          </a:p>
+          <a:p>
+            <a:pPr marL="342900" indent="-342900" algn="just">
+              <a:lnSpc>
+                <a:spcPct val="150000"/>
+              </a:lnSpc>
+              <a:buFont typeface="+mj-lt"/>
+              <a:buAutoNum type="arabicPeriod"/>
+            </a:pPr>
+            <a:r>
+              <a:rPr lang="fr-FR" b="1" dirty="0">
+                <a:solidFill>
+                  <a:schemeClr val="bg1"/>
+                </a:solidFill>
+              </a:rPr>
+              <a:t>Création du fichier </a:t>
+            </a:r>
+            <a:r>
+              <a:rPr lang="fr-FR" b="1" dirty="0" err="1">
+                <a:solidFill>
+                  <a:schemeClr val="bg1"/>
+                </a:solidFill>
+              </a:rPr>
+              <a:t>profiles.yml</a:t>
+            </a:r>
+            <a:r>
+              <a:rPr lang="fr-FR" b="1" dirty="0">
+                <a:solidFill>
+                  <a:schemeClr val="bg1"/>
+                </a:solidFill>
+              </a:rPr>
+              <a:t> dans le container;</a:t>
+            </a:r>
+          </a:p>
+          <a:p>
+            <a:pPr marL="342900" indent="-342900" algn="just">
+              <a:lnSpc>
+                <a:spcPct val="150000"/>
+              </a:lnSpc>
+              <a:buFont typeface="+mj-lt"/>
+              <a:buAutoNum type="arabicPeriod"/>
+            </a:pPr>
+            <a:r>
+              <a:rPr lang="fr-FR" b="1" dirty="0">
+                <a:solidFill>
+                  <a:schemeClr val="bg1"/>
+                </a:solidFill>
+              </a:rPr>
+              <a:t>Configuration et test de DBT;</a:t>
+            </a:r>
+          </a:p>
+          <a:p>
+            <a:pPr marL="342900" indent="-342900" algn="just">
+              <a:lnSpc>
+                <a:spcPct val="150000"/>
+              </a:lnSpc>
+              <a:buFont typeface="+mj-lt"/>
+              <a:buAutoNum type="arabicPeriod"/>
+            </a:pPr>
+            <a:r>
+              <a:rPr lang="fr-FR" b="1" dirty="0">
+                <a:solidFill>
+                  <a:schemeClr val="bg1"/>
+                </a:solidFill>
+              </a:rPr>
+              <a:t> </a:t>
+            </a:r>
+            <a:r>
+              <a:rPr lang="fr-FR" b="1" dirty="0" err="1">
+                <a:solidFill>
+                  <a:schemeClr val="bg1"/>
+                </a:solidFill>
+              </a:rPr>
+              <a:t>Airflow</a:t>
+            </a:r>
+            <a:r>
+              <a:rPr lang="fr-FR" b="1" dirty="0">
+                <a:solidFill>
+                  <a:schemeClr val="bg1"/>
+                </a:solidFill>
+              </a:rPr>
+              <a:t>, l’orchestration;</a:t>
+            </a:r>
+          </a:p>
+          <a:p>
+            <a:pPr marL="342900" indent="-342900" algn="just">
+              <a:lnSpc>
+                <a:spcPct val="150000"/>
+              </a:lnSpc>
+              <a:buFont typeface="+mj-lt"/>
+              <a:buAutoNum type="arabicPeriod"/>
+            </a:pPr>
+            <a:r>
+              <a:rPr lang="fr-FR" b="1" dirty="0" err="1">
+                <a:solidFill>
+                  <a:schemeClr val="bg1"/>
+                </a:solidFill>
+              </a:rPr>
+              <a:t>Snowflake</a:t>
+            </a:r>
+            <a:r>
+              <a:rPr lang="fr-FR" b="1" dirty="0">
+                <a:solidFill>
+                  <a:schemeClr val="bg1"/>
+                </a:solidFill>
+              </a:rPr>
+              <a:t> et streamlit;</a:t>
+            </a:r>
+          </a:p>
+          <a:p>
+            <a:pPr marL="342900" indent="-342900" algn="just">
+              <a:lnSpc>
+                <a:spcPct val="150000"/>
+              </a:lnSpc>
+              <a:buFont typeface="+mj-lt"/>
+              <a:buAutoNum type="arabicPeriod"/>
+            </a:pPr>
+            <a:r>
+              <a:rPr lang="fr-FR" b="1" dirty="0">
+                <a:solidFill>
+                  <a:schemeClr val="bg1"/>
+                </a:solidFill>
+              </a:rPr>
+              <a:t> </a:t>
+            </a:r>
+            <a:r>
+              <a:rPr lang="fr-FR" b="1" dirty="0" err="1">
+                <a:solidFill>
+                  <a:schemeClr val="bg1"/>
+                </a:solidFill>
+              </a:rPr>
+              <a:t>PowerBI</a:t>
+            </a:r>
+            <a:r>
+              <a:rPr lang="fr-FR" b="1" dirty="0">
+                <a:solidFill>
+                  <a:schemeClr val="bg1"/>
+                </a:solidFill>
+              </a:rPr>
+              <a:t> </a:t>
+            </a:r>
+          </a:p>
+          <a:p>
+            <a:pPr marL="342900" indent="-342900" algn="just">
+              <a:lnSpc>
+                <a:spcPct val="150000"/>
+              </a:lnSpc>
+              <a:buFont typeface="+mj-lt"/>
+              <a:buAutoNum type="arabicPeriod"/>
+            </a:pPr>
+            <a:r>
+              <a:rPr lang="fr-FR" b="1" dirty="0">
+                <a:solidFill>
+                  <a:schemeClr val="bg1"/>
+                </a:solidFill>
+              </a:rPr>
+              <a:t>Résumé du processus</a:t>
+            </a:r>
+          </a:p>
+        </p:txBody>
+      </p:sp>
+      <p:pic>
+        <p:nvPicPr>
+          <p:cNvPr id="20" name="Image 19">
+            <a:extLst>
+              <a:ext uri="{FF2B5EF4-FFF2-40B4-BE49-F238E27FC236}">
+                <a16:creationId xmlns:a16="http://schemas.microsoft.com/office/drawing/2014/main" id="{BD79ACB5-2E3F-708B-871E-5EE31AAF8D40}"/>
+              </a:ext>
+            </a:extLst>
+          </p:cNvPr>
+          <p:cNvPicPr>
+            <a:picLocks noChangeAspect="1"/>
+          </p:cNvPicPr>
+          <p:nvPr/>
+        </p:nvPicPr>
+        <p:blipFill>
+          <a:blip r:embed="rId2">
+            <a:extLst>
+              <a:ext uri="{28A0092B-C50C-407E-A947-70E740481C1C}">
+                <a14:useLocalDpi xmlns:a14="http://schemas.microsoft.com/office/drawing/2010/main" val="0"/>
+              </a:ext>
+            </a:extLst>
+          </a:blip>
+          <a:stretch>
+            <a:fillRect/>
+          </a:stretch>
+        </p:blipFill>
+        <p:spPr>
+          <a:xfrm>
+            <a:off x="0" y="0"/>
+            <a:ext cx="2359742" cy="866667"/>
+          </a:xfrm>
+          <a:prstGeom prst="rect">
+            <a:avLst/>
+          </a:prstGeom>
+        </p:spPr>
+      </p:pic>
+    </p:spTree>
+    <p:extLst>
+      <p:ext uri="{BB962C8B-B14F-4D97-AF65-F5344CB8AC3E}">
+        <p14:creationId xmlns:p14="http://schemas.microsoft.com/office/powerpoint/2010/main" val="3788878569"/>
+      </p:ext>
+    </p:extLst>
+  </p:cSld>
+  <p:clrMapOvr>
+    <a:masterClrMapping/>
+  </p:clrMapOvr>
+  <p:transition spd="slow">
+    <p:push dir="u"/>
+  </p:transition>
+</p:sld>
+</file>
+
+<file path=ppt/slides/slide3.xml><?xml version="1.0" encoding="utf-8"?>
+<p:sld xmlns:a="http://schemas.openxmlformats.org/drawingml/2006/main" xmlns:r="http://schemas.openxmlformats.org/officeDocument/2006/relationships" xmlns:p="http://schemas.openxmlformats.org/presentationml/2006/main">
+  <p:cSld>
+    <p:spTree>
+      <p:nvGrpSpPr>
+        <p:cNvPr id="1" name="">
+          <a:extLst>
+            <a:ext uri="{FF2B5EF4-FFF2-40B4-BE49-F238E27FC236}">
+              <a16:creationId xmlns:a16="http://schemas.microsoft.com/office/drawing/2014/main" id="{0EB2CEBF-0CFD-2318-B2A9-513D95958E1A}"/>
+            </a:ext>
+          </a:extLst>
+        </p:cNvPr>
+        <p:cNvGrpSpPr/>
+        <p:nvPr/>
+      </p:nvGrpSpPr>
+      <p:grpSpPr>
+        <a:xfrm>
+          <a:off x="0" y="0"/>
+          <a:ext cx="0" cy="0"/>
+          <a:chOff x="0" y="0"/>
+          <a:chExt cx="0" cy="0"/>
+        </a:xfrm>
+      </p:grpSpPr>
+      <p:sp>
+        <p:nvSpPr>
+          <p:cNvPr id="2" name="Titre 1">
+            <a:extLst>
+              <a:ext uri="{FF2B5EF4-FFF2-40B4-BE49-F238E27FC236}">
+                <a16:creationId xmlns:a16="http://schemas.microsoft.com/office/drawing/2014/main" id="{6951C48B-E1F2-FE12-A006-7D8E22A2C2BB}"/>
+              </a:ext>
+            </a:extLst>
+          </p:cNvPr>
+          <p:cNvSpPr>
+            <a:spLocks noGrp="1"/>
+          </p:cNvSpPr>
+          <p:nvPr>
+            <p:ph type="ctrTitle"/>
+          </p:nvPr>
+        </p:nvSpPr>
+        <p:spPr>
+          <a:xfrm>
+            <a:off x="722672" y="1019093"/>
+            <a:ext cx="4952078" cy="439170"/>
+          </a:xfrm>
+        </p:spPr>
+        <p:txBody>
+          <a:bodyPr>
+            <a:noAutofit/>
+          </a:bodyPr>
+          <a:lstStyle/>
+          <a:p>
+            <a:pPr algn="ctr"/>
+            <a:r>
+              <a:rPr lang="fr-FR" sz="2800" b="1" dirty="0"/>
+              <a:t>Lancement du programme</a:t>
+            </a:r>
+            <a:endParaRPr lang="fr-FR" sz="2800" dirty="0"/>
+          </a:p>
+        </p:txBody>
+      </p:sp>
+      <p:sp>
+        <p:nvSpPr>
+          <p:cNvPr id="8" name="Titre 1">
+            <a:extLst>
+              <a:ext uri="{FF2B5EF4-FFF2-40B4-BE49-F238E27FC236}">
+                <a16:creationId xmlns:a16="http://schemas.microsoft.com/office/drawing/2014/main" id="{8554B6B6-318D-2E41-6D2C-34AEC8DD1CE7}"/>
+              </a:ext>
+            </a:extLst>
+          </p:cNvPr>
+          <p:cNvSpPr txBox="1">
+            <a:spLocks/>
+          </p:cNvSpPr>
+          <p:nvPr/>
+        </p:nvSpPr>
+        <p:spPr>
+          <a:xfrm>
+            <a:off x="2492477" y="144878"/>
+            <a:ext cx="8454052" cy="721789"/>
+          </a:xfrm>
+          <a:prstGeom prst="rect">
+            <a:avLst/>
+          </a:prstGeom>
+        </p:spPr>
+        <p:txBody>
+          <a:bodyPr vert="horz" lIns="91440" tIns="45720" rIns="91440" bIns="45720" rtlCol="0" anchor="b">
+            <a:noAutofit/>
+          </a:bodyPr>
+          <a:lstStyle>
+            <a:lvl1pPr algn="l" defTabSz="914400" rtl="0" eaLnBrk="1" latinLnBrk="0" hangingPunct="1">
+              <a:lnSpc>
+                <a:spcPct val="90000"/>
+              </a:lnSpc>
+              <a:spcBef>
+                <a:spcPct val="0"/>
+              </a:spcBef>
+              <a:buNone/>
+              <a:defRPr sz="4800" kern="1200" cap="all" baseline="0">
+                <a:solidFill>
+                  <a:schemeClr val="tx1"/>
+                </a:solidFill>
+                <a:latin typeface="+mj-lt"/>
+                <a:ea typeface="+mj-ea"/>
+                <a:cs typeface="+mj-cs"/>
+              </a:defRPr>
+            </a:lvl1pPr>
+          </a:lstStyle>
+          <a:p>
+            <a:pPr algn="ctr"/>
+            <a:r>
+              <a:rPr lang="fr-FR" b="1" dirty="0"/>
+              <a:t>SYSTEME DE VENTE DES LIVRES</a:t>
+            </a:r>
+          </a:p>
+        </p:txBody>
+      </p:sp>
+      <p:pic>
+        <p:nvPicPr>
+          <p:cNvPr id="12" name="Image 11">
+            <a:extLst>
+              <a:ext uri="{FF2B5EF4-FFF2-40B4-BE49-F238E27FC236}">
+                <a16:creationId xmlns:a16="http://schemas.microsoft.com/office/drawing/2014/main" id="{A0107A36-469B-1F3C-FC22-35CA4E6ABE6D}"/>
+              </a:ext>
+            </a:extLst>
+          </p:cNvPr>
+          <p:cNvPicPr>
+            <a:picLocks noChangeAspect="1"/>
+          </p:cNvPicPr>
+          <p:nvPr/>
+        </p:nvPicPr>
+        <p:blipFill>
+          <a:blip r:embed="rId2">
+            <a:extLst>
+              <a:ext uri="{28A0092B-C50C-407E-A947-70E740481C1C}">
+                <a14:useLocalDpi xmlns:a14="http://schemas.microsoft.com/office/drawing/2010/main" val="0"/>
+              </a:ext>
+            </a:extLst>
+          </a:blip>
+          <a:stretch>
+            <a:fillRect/>
+          </a:stretch>
+        </p:blipFill>
+        <p:spPr>
+          <a:xfrm>
+            <a:off x="0" y="0"/>
+            <a:ext cx="2359742" cy="866667"/>
+          </a:xfrm>
+          <a:prstGeom prst="rect">
+            <a:avLst/>
+          </a:prstGeom>
+        </p:spPr>
+      </p:pic>
+      <p:sp>
+        <p:nvSpPr>
+          <p:cNvPr id="14" name="ZoneTexte 13">
+            <a:extLst>
+              <a:ext uri="{FF2B5EF4-FFF2-40B4-BE49-F238E27FC236}">
+                <a16:creationId xmlns:a16="http://schemas.microsoft.com/office/drawing/2014/main" id="{FA0E01CE-9728-8F80-A0EC-7AD803CE9DF7}"/>
+              </a:ext>
+            </a:extLst>
+          </p:cNvPr>
+          <p:cNvSpPr txBox="1"/>
+          <p:nvPr/>
+        </p:nvSpPr>
+        <p:spPr>
+          <a:xfrm>
+            <a:off x="0" y="1598740"/>
+            <a:ext cx="3716593" cy="365869"/>
+          </a:xfrm>
+          <a:prstGeom prst="rect">
+            <a:avLst/>
+          </a:prstGeom>
+          <a:solidFill>
+            <a:schemeClr val="tx1">
+              <a:lumMod val="85000"/>
+            </a:schemeClr>
+          </a:solidFill>
+        </p:spPr>
+        <p:txBody>
+          <a:bodyPr wrap="square">
+            <a:spAutoFit/>
+          </a:bodyPr>
+          <a:lstStyle/>
+          <a:p>
+            <a:pPr>
+              <a:lnSpc>
+                <a:spcPct val="107000"/>
+              </a:lnSpc>
+              <a:spcAft>
+                <a:spcPts val="800"/>
+              </a:spcAft>
+              <a:buNone/>
+            </a:pPr>
+            <a:r>
+              <a:rPr lang="fr-FR" sz="1800" kern="100" dirty="0">
+                <a:solidFill>
+                  <a:srgbClr val="000000"/>
+                </a:solidFill>
+                <a:effectLst/>
+                <a:latin typeface="Century Gothic" panose="020B0502020202020204" pitchFamily="34" charset="0"/>
+                <a:ea typeface="Calibri" panose="020F0502020204030204" pitchFamily="34" charset="0"/>
+                <a:cs typeface="Arial" panose="020B0604020202020204" pitchFamily="34" charset="0"/>
+              </a:rPr>
+              <a:t>docker compose up -d</a:t>
+            </a:r>
+            <a:endParaRPr lang="fr-FR" sz="1800" kern="100" dirty="0">
+              <a:effectLst/>
+              <a:latin typeface="Century Gothic" panose="020B0502020202020204" pitchFamily="34" charset="0"/>
+              <a:ea typeface="Calibri" panose="020F0502020204030204" pitchFamily="34" charset="0"/>
+              <a:cs typeface="Arial" panose="020B0604020202020204" pitchFamily="34" charset="0"/>
+            </a:endParaRPr>
+          </a:p>
+        </p:txBody>
+      </p:sp>
+      <p:pic>
+        <p:nvPicPr>
+          <p:cNvPr id="15" name="Image 14">
+            <a:extLst>
+              <a:ext uri="{FF2B5EF4-FFF2-40B4-BE49-F238E27FC236}">
+                <a16:creationId xmlns:a16="http://schemas.microsoft.com/office/drawing/2014/main" id="{EB7AF31C-F468-5C37-399C-3BD913ED761D}"/>
+              </a:ext>
+            </a:extLst>
+          </p:cNvPr>
+          <p:cNvPicPr>
+            <a:picLocks noChangeAspect="1"/>
+          </p:cNvPicPr>
+          <p:nvPr/>
+        </p:nvPicPr>
+        <p:blipFill>
+          <a:blip r:embed="rId3">
+            <a:extLst>
+              <a:ext uri="{28A0092B-C50C-407E-A947-70E740481C1C}">
+                <a14:useLocalDpi xmlns:a14="http://schemas.microsoft.com/office/drawing/2010/main" val="0"/>
+              </a:ext>
+            </a:extLst>
+          </a:blip>
+          <a:stretch>
+            <a:fillRect/>
+          </a:stretch>
+        </p:blipFill>
+        <p:spPr>
+          <a:xfrm>
+            <a:off x="0" y="2147543"/>
+            <a:ext cx="5412658" cy="1638100"/>
+          </a:xfrm>
+          <a:prstGeom prst="rect">
+            <a:avLst/>
+          </a:prstGeom>
+          <a:ln>
+            <a:solidFill>
+              <a:schemeClr val="bg1">
+                <a:lumMod val="85000"/>
+              </a:schemeClr>
+            </a:solidFill>
+          </a:ln>
+        </p:spPr>
+      </p:pic>
+      <p:sp>
+        <p:nvSpPr>
+          <p:cNvPr id="16" name="Titre 1">
+            <a:extLst>
+              <a:ext uri="{FF2B5EF4-FFF2-40B4-BE49-F238E27FC236}">
+                <a16:creationId xmlns:a16="http://schemas.microsoft.com/office/drawing/2014/main" id="{E212F238-DFC0-5E43-DBA9-017A7D27A2C3}"/>
+              </a:ext>
+            </a:extLst>
+          </p:cNvPr>
+          <p:cNvSpPr txBox="1">
+            <a:spLocks/>
+          </p:cNvSpPr>
+          <p:nvPr/>
+        </p:nvSpPr>
+        <p:spPr>
+          <a:xfrm>
+            <a:off x="6407332" y="1019093"/>
+            <a:ext cx="4952078" cy="449649"/>
+          </a:xfrm>
+          <a:prstGeom prst="rect">
+            <a:avLst/>
+          </a:prstGeom>
+        </p:spPr>
+        <p:txBody>
+          <a:bodyPr vert="horz" lIns="91440" tIns="45720" rIns="91440" bIns="45720" rtlCol="0" anchor="b">
+            <a:noAutofit/>
+          </a:bodyPr>
+          <a:lstStyle>
+            <a:lvl1pPr algn="l" defTabSz="914400" rtl="0" eaLnBrk="1" latinLnBrk="0" hangingPunct="1">
+              <a:lnSpc>
+                <a:spcPct val="90000"/>
+              </a:lnSpc>
+              <a:spcBef>
+                <a:spcPct val="0"/>
+              </a:spcBef>
+              <a:buNone/>
+              <a:defRPr sz="4800" kern="1200" cap="all" baseline="0">
+                <a:solidFill>
+                  <a:schemeClr val="tx1"/>
+                </a:solidFill>
+                <a:latin typeface="+mj-lt"/>
+                <a:ea typeface="+mj-ea"/>
+                <a:cs typeface="+mj-cs"/>
+              </a:defRPr>
+            </a:lvl1pPr>
+          </a:lstStyle>
+          <a:p>
+            <a:pPr algn="ctr"/>
+            <a:r>
+              <a:rPr lang="fr-FR" sz="2800" b="1" dirty="0"/>
+              <a:t>Configuration de </a:t>
+            </a:r>
+            <a:r>
+              <a:rPr lang="fr-FR" sz="2800" b="1" dirty="0" err="1"/>
+              <a:t>airflow</a:t>
+            </a:r>
+            <a:endParaRPr lang="fr-FR" sz="2800" b="1" dirty="0"/>
+          </a:p>
+        </p:txBody>
+      </p:sp>
+      <p:sp>
+        <p:nvSpPr>
+          <p:cNvPr id="17" name="Flèche : chevron 16">
+            <a:extLst>
+              <a:ext uri="{FF2B5EF4-FFF2-40B4-BE49-F238E27FC236}">
+                <a16:creationId xmlns:a16="http://schemas.microsoft.com/office/drawing/2014/main" id="{C02C5FD4-0D66-FE91-B51F-57D6FF7E16B2}"/>
+              </a:ext>
+            </a:extLst>
+          </p:cNvPr>
+          <p:cNvSpPr/>
+          <p:nvPr/>
+        </p:nvSpPr>
+        <p:spPr>
+          <a:xfrm>
+            <a:off x="5942142" y="1050937"/>
+            <a:ext cx="576876" cy="439170"/>
+          </a:xfrm>
+          <a:prstGeom prst="chevron">
+            <a:avLst/>
+          </a:prstGeom>
+          <a:solidFill>
+            <a:schemeClr val="tx2"/>
+          </a:solidFill>
+        </p:spPr>
+        <p:style>
+          <a:lnRef idx="2">
+            <a:schemeClr val="accent1">
+              <a:shade val="15000"/>
+            </a:schemeClr>
+          </a:lnRef>
+          <a:fillRef idx="1">
+            <a:schemeClr val="accent1"/>
+          </a:fillRef>
+          <a:effectRef idx="0">
+            <a:schemeClr val="accent1"/>
+          </a:effectRef>
+          <a:fontRef idx="minor">
+            <a:schemeClr val="lt1"/>
+          </a:fontRef>
+        </p:style>
+        <p:txBody>
+          <a:bodyPr rtlCol="0" anchor="ctr"/>
+          <a:lstStyle/>
+          <a:p>
+            <a:pPr algn="ctr"/>
+            <a:endParaRPr lang="fr-FR" sz="1600">
+              <a:solidFill>
+                <a:schemeClr val="accent5">
+                  <a:lumMod val="50000"/>
+                </a:schemeClr>
+              </a:solidFill>
+            </a:endParaRPr>
+          </a:p>
+        </p:txBody>
+      </p:sp>
+      <p:sp>
+        <p:nvSpPr>
+          <p:cNvPr id="19" name="ZoneTexte 18">
+            <a:extLst>
+              <a:ext uri="{FF2B5EF4-FFF2-40B4-BE49-F238E27FC236}">
+                <a16:creationId xmlns:a16="http://schemas.microsoft.com/office/drawing/2014/main" id="{761C4302-215A-167E-C10E-939F4CE93FDF}"/>
+              </a:ext>
+            </a:extLst>
+          </p:cNvPr>
+          <p:cNvSpPr txBox="1"/>
+          <p:nvPr/>
+        </p:nvSpPr>
+        <p:spPr>
+          <a:xfrm>
+            <a:off x="5997602" y="1558940"/>
+            <a:ext cx="1801145" cy="305661"/>
+          </a:xfrm>
+          <a:prstGeom prst="rect">
+            <a:avLst/>
+          </a:prstGeom>
+          <a:solidFill>
+            <a:schemeClr val="tx1">
+              <a:lumMod val="85000"/>
+            </a:schemeClr>
+          </a:solidFill>
+        </p:spPr>
+        <p:txBody>
+          <a:bodyPr wrap="square">
+            <a:spAutoFit/>
+          </a:bodyPr>
+          <a:lstStyle/>
+          <a:p>
+            <a:pPr>
+              <a:lnSpc>
+                <a:spcPct val="107000"/>
+              </a:lnSpc>
+              <a:spcAft>
+                <a:spcPts val="800"/>
+              </a:spcAft>
+              <a:buNone/>
+            </a:pPr>
+            <a:r>
+              <a:rPr lang="fr-FR" sz="1400" u="sng" kern="100" dirty="0">
+                <a:solidFill>
+                  <a:schemeClr val="bg1"/>
+                </a:solidFill>
+                <a:effectLst/>
+                <a:latin typeface="Arial Nova" panose="020B0504020202020204" pitchFamily="34" charset="0"/>
+                <a:ea typeface="Calibri" panose="020F0502020204030204" pitchFamily="34" charset="0"/>
+                <a:cs typeface="Arial" panose="020B0604020202020204" pitchFamily="34" charset="0"/>
+                <a:hlinkClick r:id="rId4">
+                  <a:extLst>
+                    <a:ext uri="{A12FA001-AC4F-418D-AE19-62706E023703}">
+                      <ahyp:hlinkClr xmlns:ahyp="http://schemas.microsoft.com/office/drawing/2018/hyperlinkcolor" val="tx"/>
+                    </a:ext>
+                  </a:extLst>
+                </a:hlinkClick>
+              </a:rPr>
+              <a:t>http://localhost:8080</a:t>
+            </a:r>
+            <a:endParaRPr lang="fr-FR" sz="1200" kern="100" dirty="0">
+              <a:solidFill>
+                <a:schemeClr val="bg1"/>
+              </a:solidFill>
+              <a:effectLst/>
+              <a:latin typeface="Century Gothic" panose="020B0502020202020204" pitchFamily="34" charset="0"/>
+              <a:ea typeface="Calibri" panose="020F0502020204030204" pitchFamily="34" charset="0"/>
+              <a:cs typeface="Arial" panose="020B0604020202020204" pitchFamily="34" charset="0"/>
+            </a:endParaRPr>
+          </a:p>
+        </p:txBody>
+      </p:sp>
+      <p:sp>
+        <p:nvSpPr>
+          <p:cNvPr id="21" name="ZoneTexte 20">
+            <a:extLst>
+              <a:ext uri="{FF2B5EF4-FFF2-40B4-BE49-F238E27FC236}">
+                <a16:creationId xmlns:a16="http://schemas.microsoft.com/office/drawing/2014/main" id="{4C15BAEB-E95D-25F7-CC7B-1FD87564146D}"/>
+              </a:ext>
+            </a:extLst>
+          </p:cNvPr>
+          <p:cNvSpPr txBox="1"/>
+          <p:nvPr/>
+        </p:nvSpPr>
+        <p:spPr>
+          <a:xfrm>
+            <a:off x="8095253" y="1558363"/>
+            <a:ext cx="3648074" cy="305661"/>
+          </a:xfrm>
+          <a:prstGeom prst="rect">
+            <a:avLst/>
+          </a:prstGeom>
+          <a:solidFill>
+            <a:schemeClr val="tx1">
+              <a:lumMod val="85000"/>
+            </a:schemeClr>
+          </a:solidFill>
+        </p:spPr>
+        <p:txBody>
+          <a:bodyPr wrap="square">
+            <a:spAutoFit/>
+          </a:bodyPr>
+          <a:lstStyle/>
+          <a:p>
+            <a:pPr>
+              <a:lnSpc>
+                <a:spcPct val="107000"/>
+              </a:lnSpc>
+              <a:spcAft>
+                <a:spcPts val="800"/>
+              </a:spcAft>
+              <a:buNone/>
+            </a:pPr>
+            <a:r>
+              <a:rPr lang="fr-FR" sz="1400" kern="100" dirty="0">
+                <a:solidFill>
+                  <a:srgbClr val="000000"/>
+                </a:solidFill>
+                <a:effectLst/>
+                <a:latin typeface="Century Gothic" panose="020B0502020202020204" pitchFamily="34" charset="0"/>
+                <a:ea typeface="Calibri" panose="020F0502020204030204" pitchFamily="34" charset="0"/>
+                <a:cs typeface="Arial" panose="020B0604020202020204" pitchFamily="34" charset="0"/>
+              </a:rPr>
+              <a:t>Login : admin</a:t>
+            </a:r>
+            <a:r>
+              <a:rPr lang="fr-FR" sz="1400" kern="100" dirty="0">
+                <a:solidFill>
+                  <a:srgbClr val="000000"/>
+                </a:solidFill>
+                <a:latin typeface="Century Gothic" panose="020B0502020202020204" pitchFamily="34" charset="0"/>
+                <a:ea typeface="Calibri" panose="020F0502020204030204" pitchFamily="34" charset="0"/>
+                <a:cs typeface="Arial" panose="020B0604020202020204" pitchFamily="34" charset="0"/>
+              </a:rPr>
+              <a:t>  </a:t>
+            </a:r>
+            <a:r>
+              <a:rPr lang="fr-FR" sz="1400" kern="100" dirty="0" err="1">
+                <a:solidFill>
+                  <a:srgbClr val="000000"/>
+                </a:solidFill>
+                <a:effectLst/>
+                <a:latin typeface="Century Gothic" panose="020B0502020202020204" pitchFamily="34" charset="0"/>
+                <a:ea typeface="Calibri" panose="020F0502020204030204" pitchFamily="34" charset="0"/>
+                <a:cs typeface="Arial" panose="020B0604020202020204" pitchFamily="34" charset="0"/>
+              </a:rPr>
+              <a:t>password</a:t>
+            </a:r>
+            <a:r>
+              <a:rPr lang="fr-FR" sz="1400" kern="100" dirty="0">
+                <a:solidFill>
+                  <a:srgbClr val="000000"/>
+                </a:solidFill>
+                <a:effectLst/>
+                <a:latin typeface="Century Gothic" panose="020B0502020202020204" pitchFamily="34" charset="0"/>
+                <a:ea typeface="Calibri" panose="020F0502020204030204" pitchFamily="34" charset="0"/>
+                <a:cs typeface="Arial" panose="020B0604020202020204" pitchFamily="34" charset="0"/>
+              </a:rPr>
+              <a:t> : admin123</a:t>
+            </a:r>
+            <a:endParaRPr lang="fr-FR" sz="1400" kern="100" dirty="0">
+              <a:effectLst/>
+              <a:latin typeface="Century Gothic" panose="020B0502020202020204" pitchFamily="34" charset="0"/>
+              <a:ea typeface="Calibri" panose="020F0502020204030204" pitchFamily="34" charset="0"/>
+              <a:cs typeface="Arial" panose="020B0604020202020204" pitchFamily="34" charset="0"/>
+            </a:endParaRPr>
+          </a:p>
+        </p:txBody>
+      </p:sp>
+      <p:pic>
+        <p:nvPicPr>
+          <p:cNvPr id="22" name="Image 21">
+            <a:extLst>
+              <a:ext uri="{FF2B5EF4-FFF2-40B4-BE49-F238E27FC236}">
+                <a16:creationId xmlns:a16="http://schemas.microsoft.com/office/drawing/2014/main" id="{D0A03995-D50B-7377-488E-8DE0CCD53DD3}"/>
+              </a:ext>
+            </a:extLst>
+          </p:cNvPr>
+          <p:cNvPicPr>
+            <a:picLocks noChangeAspect="1"/>
+          </p:cNvPicPr>
+          <p:nvPr/>
+        </p:nvPicPr>
+        <p:blipFill>
+          <a:blip r:embed="rId5" cstate="print">
+            <a:extLst>
+              <a:ext uri="{28A0092B-C50C-407E-A947-70E740481C1C}">
+                <a14:useLocalDpi xmlns:a14="http://schemas.microsoft.com/office/drawing/2010/main" val="0"/>
+              </a:ext>
+            </a:extLst>
+          </a:blip>
+          <a:stretch>
+            <a:fillRect/>
+          </a:stretch>
+        </p:blipFill>
+        <p:spPr>
+          <a:xfrm>
+            <a:off x="5942142" y="2044889"/>
+            <a:ext cx="6081401" cy="1975981"/>
+          </a:xfrm>
+          <a:prstGeom prst="rect">
+            <a:avLst/>
+          </a:prstGeom>
+          <a:ln>
+            <a:solidFill>
+              <a:schemeClr val="bg1">
+                <a:lumMod val="85000"/>
+              </a:schemeClr>
+            </a:solidFill>
+          </a:ln>
+        </p:spPr>
+      </p:pic>
+      <p:pic>
+        <p:nvPicPr>
+          <p:cNvPr id="23" name="Image 22">
+            <a:extLst>
+              <a:ext uri="{FF2B5EF4-FFF2-40B4-BE49-F238E27FC236}">
+                <a16:creationId xmlns:a16="http://schemas.microsoft.com/office/drawing/2014/main" id="{039D36DA-5577-7445-3484-BB504C7AB0C0}"/>
+              </a:ext>
+            </a:extLst>
+          </p:cNvPr>
+          <p:cNvPicPr>
+            <a:picLocks noChangeAspect="1"/>
+          </p:cNvPicPr>
+          <p:nvPr/>
+        </p:nvPicPr>
+        <p:blipFill>
+          <a:blip r:embed="rId6" cstate="print">
+            <a:extLst>
+              <a:ext uri="{28A0092B-C50C-407E-A947-70E740481C1C}">
+                <a14:useLocalDpi xmlns:a14="http://schemas.microsoft.com/office/drawing/2010/main" val="0"/>
+              </a:ext>
+            </a:extLst>
+          </a:blip>
+          <a:stretch>
+            <a:fillRect/>
+          </a:stretch>
+        </p:blipFill>
+        <p:spPr>
+          <a:xfrm>
+            <a:off x="5942141" y="4201158"/>
+            <a:ext cx="6081402" cy="2314575"/>
+          </a:xfrm>
+          <a:prstGeom prst="rect">
+            <a:avLst/>
+          </a:prstGeom>
+          <a:ln>
+            <a:solidFill>
+              <a:schemeClr val="bg1">
+                <a:lumMod val="85000"/>
+              </a:schemeClr>
+            </a:solidFill>
+          </a:ln>
+        </p:spPr>
+      </p:pic>
+      <p:sp>
+        <p:nvSpPr>
+          <p:cNvPr id="25" name="Flèche : chevron 24">
+            <a:extLst>
+              <a:ext uri="{FF2B5EF4-FFF2-40B4-BE49-F238E27FC236}">
+                <a16:creationId xmlns:a16="http://schemas.microsoft.com/office/drawing/2014/main" id="{C9DB80B6-D341-86D6-5359-D6D0FB75361B}"/>
+              </a:ext>
+            </a:extLst>
+          </p:cNvPr>
+          <p:cNvSpPr/>
+          <p:nvPr/>
+        </p:nvSpPr>
+        <p:spPr>
+          <a:xfrm>
+            <a:off x="193189" y="991722"/>
+            <a:ext cx="576876" cy="439170"/>
+          </a:xfrm>
+          <a:prstGeom prst="chevron">
+            <a:avLst/>
+          </a:prstGeom>
+          <a:solidFill>
+            <a:schemeClr val="tx2"/>
+          </a:solidFill>
+        </p:spPr>
+        <p:style>
+          <a:lnRef idx="2">
+            <a:schemeClr val="accent1">
+              <a:shade val="15000"/>
+            </a:schemeClr>
+          </a:lnRef>
+          <a:fillRef idx="1">
+            <a:schemeClr val="accent1"/>
+          </a:fillRef>
+          <a:effectRef idx="0">
+            <a:schemeClr val="accent1"/>
+          </a:effectRef>
+          <a:fontRef idx="minor">
+            <a:schemeClr val="lt1"/>
+          </a:fontRef>
+        </p:style>
+        <p:txBody>
+          <a:bodyPr rtlCol="0" anchor="ctr"/>
+          <a:lstStyle/>
+          <a:p>
+            <a:pPr algn="ctr"/>
+            <a:endParaRPr lang="fr-FR" sz="1600">
+              <a:solidFill>
+                <a:schemeClr val="accent5">
+                  <a:lumMod val="50000"/>
+                </a:schemeClr>
+              </a:solidFill>
+            </a:endParaRPr>
+          </a:p>
+        </p:txBody>
+      </p:sp>
+    </p:spTree>
+    <p:extLst>
+      <p:ext uri="{BB962C8B-B14F-4D97-AF65-F5344CB8AC3E}">
+        <p14:creationId xmlns:p14="http://schemas.microsoft.com/office/powerpoint/2010/main" val="2201485441"/>
+      </p:ext>
+    </p:extLst>
+  </p:cSld>
+  <p:clrMapOvr>
+    <a:masterClrMapping/>
+  </p:clrMapOvr>
+  <p:transition spd="slow">
+    <p:push dir="u"/>
+  </p:transition>
+</p:sld>
+</file>
+
+<file path=ppt/slides/slide4.xml><?xml version="1.0" encoding="utf-8"?>
+<p:sld xmlns:a="http://schemas.openxmlformats.org/drawingml/2006/main" xmlns:r="http://schemas.openxmlformats.org/officeDocument/2006/relationships" xmlns:p="http://schemas.openxmlformats.org/presentationml/2006/main">
+  <p:cSld>
+    <p:spTree>
+      <p:nvGrpSpPr>
+        <p:cNvPr id="1" name="">
+          <a:extLst>
+            <a:ext uri="{FF2B5EF4-FFF2-40B4-BE49-F238E27FC236}">
+              <a16:creationId xmlns:a16="http://schemas.microsoft.com/office/drawing/2014/main" id="{FFD872BE-C9DE-43C3-D033-A77E25CF44F5}"/>
+            </a:ext>
+          </a:extLst>
+        </p:cNvPr>
+        <p:cNvGrpSpPr/>
+        <p:nvPr/>
+      </p:nvGrpSpPr>
+      <p:grpSpPr>
+        <a:xfrm>
+          <a:off x="0" y="0"/>
+          <a:ext cx="0" cy="0"/>
+          <a:chOff x="0" y="0"/>
+          <a:chExt cx="0" cy="0"/>
+        </a:xfrm>
+      </p:grpSpPr>
+      <p:sp>
+        <p:nvSpPr>
+          <p:cNvPr id="2" name="Titre 1">
+            <a:extLst>
+              <a:ext uri="{FF2B5EF4-FFF2-40B4-BE49-F238E27FC236}">
+                <a16:creationId xmlns:a16="http://schemas.microsoft.com/office/drawing/2014/main" id="{0E4C7659-B2DE-EFB6-1CC3-F4C8CDB70B64}"/>
+              </a:ext>
+            </a:extLst>
+          </p:cNvPr>
+          <p:cNvSpPr>
+            <a:spLocks noGrp="1"/>
+          </p:cNvSpPr>
+          <p:nvPr>
+            <p:ph type="ctrTitle"/>
+          </p:nvPr>
+        </p:nvSpPr>
+        <p:spPr>
+          <a:xfrm>
+            <a:off x="562554" y="1154433"/>
+            <a:ext cx="4922964" cy="635554"/>
+          </a:xfrm>
+        </p:spPr>
+        <p:txBody>
+          <a:bodyPr>
+            <a:noAutofit/>
+          </a:bodyPr>
+          <a:lstStyle/>
+          <a:p>
+            <a:pPr algn="ctr"/>
+            <a:r>
+              <a:rPr lang="fr-FR" sz="2400" b="1" dirty="0"/>
+              <a:t>Création de la base de données et des tables dans </a:t>
+            </a:r>
+            <a:r>
+              <a:rPr lang="fr-FR" sz="2400" b="1" dirty="0" err="1"/>
+              <a:t>snowflake</a:t>
+            </a:r>
+            <a:endParaRPr lang="fr-FR" sz="2400" dirty="0"/>
+          </a:p>
+        </p:txBody>
+      </p:sp>
+      <p:sp>
+        <p:nvSpPr>
+          <p:cNvPr id="8" name="Titre 1">
+            <a:extLst>
+              <a:ext uri="{FF2B5EF4-FFF2-40B4-BE49-F238E27FC236}">
+                <a16:creationId xmlns:a16="http://schemas.microsoft.com/office/drawing/2014/main" id="{95C0C275-FE82-545A-7FC6-F0F928F0E9D6}"/>
+              </a:ext>
+            </a:extLst>
+          </p:cNvPr>
+          <p:cNvSpPr txBox="1">
+            <a:spLocks/>
+          </p:cNvSpPr>
+          <p:nvPr/>
+        </p:nvSpPr>
+        <p:spPr>
+          <a:xfrm>
+            <a:off x="2492477" y="144878"/>
+            <a:ext cx="8454052" cy="721789"/>
+          </a:xfrm>
+          <a:prstGeom prst="rect">
+            <a:avLst/>
+          </a:prstGeom>
+        </p:spPr>
+        <p:txBody>
+          <a:bodyPr vert="horz" lIns="91440" tIns="45720" rIns="91440" bIns="45720" rtlCol="0" anchor="b">
+            <a:noAutofit/>
+          </a:bodyPr>
+          <a:lstStyle>
+            <a:lvl1pPr algn="l" defTabSz="914400" rtl="0" eaLnBrk="1" latinLnBrk="0" hangingPunct="1">
+              <a:lnSpc>
+                <a:spcPct val="90000"/>
+              </a:lnSpc>
+              <a:spcBef>
+                <a:spcPct val="0"/>
+              </a:spcBef>
+              <a:buNone/>
+              <a:defRPr sz="4800" kern="1200" cap="all" baseline="0">
+                <a:solidFill>
+                  <a:schemeClr val="tx1"/>
+                </a:solidFill>
+                <a:latin typeface="+mj-lt"/>
+                <a:ea typeface="+mj-ea"/>
+                <a:cs typeface="+mj-cs"/>
+              </a:defRPr>
+            </a:lvl1pPr>
+          </a:lstStyle>
+          <a:p>
+            <a:pPr algn="ctr"/>
+            <a:r>
+              <a:rPr lang="fr-FR" b="1" dirty="0"/>
+              <a:t>SYSTEME DE VENTE DES LIVRES</a:t>
+            </a:r>
+          </a:p>
+        </p:txBody>
+      </p:sp>
+      <p:pic>
+        <p:nvPicPr>
+          <p:cNvPr id="12" name="Image 11">
+            <a:extLst>
+              <a:ext uri="{FF2B5EF4-FFF2-40B4-BE49-F238E27FC236}">
+                <a16:creationId xmlns:a16="http://schemas.microsoft.com/office/drawing/2014/main" id="{627D38E1-EAE8-4444-567B-4672224B6726}"/>
+              </a:ext>
+            </a:extLst>
+          </p:cNvPr>
+          <p:cNvPicPr>
+            <a:picLocks noChangeAspect="1"/>
+          </p:cNvPicPr>
+          <p:nvPr/>
+        </p:nvPicPr>
+        <p:blipFill>
+          <a:blip r:embed="rId2">
+            <a:extLst>
+              <a:ext uri="{28A0092B-C50C-407E-A947-70E740481C1C}">
+                <a14:useLocalDpi xmlns:a14="http://schemas.microsoft.com/office/drawing/2010/main" val="0"/>
+              </a:ext>
+            </a:extLst>
+          </a:blip>
+          <a:stretch>
+            <a:fillRect/>
+          </a:stretch>
+        </p:blipFill>
+        <p:spPr>
+          <a:xfrm>
+            <a:off x="0" y="0"/>
+            <a:ext cx="2359742" cy="866667"/>
+          </a:xfrm>
+          <a:prstGeom prst="rect">
+            <a:avLst/>
+          </a:prstGeom>
+        </p:spPr>
+      </p:pic>
+      <p:sp>
+        <p:nvSpPr>
+          <p:cNvPr id="14" name="ZoneTexte 13">
+            <a:extLst>
+              <a:ext uri="{FF2B5EF4-FFF2-40B4-BE49-F238E27FC236}">
+                <a16:creationId xmlns:a16="http://schemas.microsoft.com/office/drawing/2014/main" id="{B7E9BABF-7C08-D9EB-51DD-B8D76E232432}"/>
+              </a:ext>
+            </a:extLst>
+          </p:cNvPr>
+          <p:cNvSpPr txBox="1"/>
+          <p:nvPr/>
+        </p:nvSpPr>
+        <p:spPr>
+          <a:xfrm>
+            <a:off x="0" y="2044889"/>
+            <a:ext cx="5412657" cy="365869"/>
+          </a:xfrm>
+          <a:prstGeom prst="rect">
+            <a:avLst/>
+          </a:prstGeom>
+          <a:solidFill>
+            <a:schemeClr val="tx1">
+              <a:lumMod val="85000"/>
+            </a:schemeClr>
+          </a:solidFill>
+        </p:spPr>
+        <p:txBody>
+          <a:bodyPr wrap="square">
+            <a:spAutoFit/>
+          </a:bodyPr>
+          <a:lstStyle/>
+          <a:p>
+            <a:pPr>
+              <a:lnSpc>
+                <a:spcPct val="107000"/>
+              </a:lnSpc>
+              <a:spcAft>
+                <a:spcPts val="800"/>
+              </a:spcAft>
+              <a:buNone/>
+            </a:pPr>
+            <a:r>
+              <a:rPr lang="en-US" sz="1800" kern="100" dirty="0">
+                <a:solidFill>
+                  <a:srgbClr val="000000"/>
+                </a:solidFill>
+                <a:effectLst/>
+                <a:latin typeface="Century Gothic" panose="020B0502020202020204" pitchFamily="34" charset="0"/>
+                <a:ea typeface="Calibri" panose="020F0502020204030204" pitchFamily="34" charset="0"/>
+                <a:cs typeface="Arial" panose="020B0604020202020204" pitchFamily="34" charset="0"/>
+              </a:rPr>
+              <a:t>DROP DATABASE IF EXISTS BOOKSHOP</a:t>
+            </a:r>
+            <a:endParaRPr lang="fr-FR" sz="1800" kern="100" dirty="0">
+              <a:effectLst/>
+              <a:latin typeface="Century Gothic" panose="020B0502020202020204" pitchFamily="34" charset="0"/>
+              <a:ea typeface="Calibri" panose="020F0502020204030204" pitchFamily="34" charset="0"/>
+              <a:cs typeface="Arial" panose="020B0604020202020204" pitchFamily="34" charset="0"/>
+            </a:endParaRPr>
+          </a:p>
+        </p:txBody>
+      </p:sp>
+      <p:sp>
+        <p:nvSpPr>
+          <p:cNvPr id="16" name="Titre 1">
+            <a:extLst>
+              <a:ext uri="{FF2B5EF4-FFF2-40B4-BE49-F238E27FC236}">
+                <a16:creationId xmlns:a16="http://schemas.microsoft.com/office/drawing/2014/main" id="{AB26893A-AD05-104C-9538-C5B54311FB1C}"/>
+              </a:ext>
+            </a:extLst>
+          </p:cNvPr>
+          <p:cNvSpPr txBox="1">
+            <a:spLocks/>
+          </p:cNvSpPr>
+          <p:nvPr/>
+        </p:nvSpPr>
+        <p:spPr>
+          <a:xfrm>
+            <a:off x="6519018" y="816420"/>
+            <a:ext cx="5004388" cy="866667"/>
+          </a:xfrm>
+          <a:prstGeom prst="rect">
+            <a:avLst/>
+          </a:prstGeom>
+        </p:spPr>
+        <p:txBody>
+          <a:bodyPr vert="horz" lIns="91440" tIns="45720" rIns="91440" bIns="45720" rtlCol="0" anchor="b">
+            <a:noAutofit/>
+          </a:bodyPr>
+          <a:lstStyle>
+            <a:lvl1pPr algn="l" defTabSz="914400" rtl="0" eaLnBrk="1" latinLnBrk="0" hangingPunct="1">
+              <a:lnSpc>
+                <a:spcPct val="90000"/>
+              </a:lnSpc>
+              <a:spcBef>
+                <a:spcPct val="0"/>
+              </a:spcBef>
+              <a:buNone/>
+              <a:defRPr sz="4800" kern="1200" cap="all" baseline="0">
+                <a:solidFill>
+                  <a:schemeClr val="tx1"/>
+                </a:solidFill>
+                <a:latin typeface="+mj-lt"/>
+                <a:ea typeface="+mj-ea"/>
+                <a:cs typeface="+mj-cs"/>
+              </a:defRPr>
+            </a:lvl1pPr>
+          </a:lstStyle>
+          <a:p>
+            <a:pPr algn="ctr"/>
+            <a:r>
+              <a:rPr lang="fr-FR" sz="2400" b="1" dirty="0"/>
+              <a:t>Vérification de la création des données dans la BD </a:t>
+            </a:r>
+            <a:r>
+              <a:rPr lang="fr-FR" sz="2400" b="1" dirty="0" err="1"/>
+              <a:t>Postgres</a:t>
+            </a:r>
+            <a:endParaRPr lang="fr-FR" sz="2400" b="1" dirty="0"/>
+          </a:p>
+        </p:txBody>
+      </p:sp>
+      <p:sp>
+        <p:nvSpPr>
+          <p:cNvPr id="17" name="Flèche : chevron 16">
+            <a:extLst>
+              <a:ext uri="{FF2B5EF4-FFF2-40B4-BE49-F238E27FC236}">
+                <a16:creationId xmlns:a16="http://schemas.microsoft.com/office/drawing/2014/main" id="{98C98E5D-FF36-BDFD-F5AA-361F477BEB9A}"/>
+              </a:ext>
+            </a:extLst>
+          </p:cNvPr>
+          <p:cNvSpPr/>
+          <p:nvPr/>
+        </p:nvSpPr>
+        <p:spPr>
+          <a:xfrm>
+            <a:off x="5942142" y="1050937"/>
+            <a:ext cx="576876" cy="439170"/>
+          </a:xfrm>
+          <a:prstGeom prst="chevron">
+            <a:avLst/>
+          </a:prstGeom>
+          <a:solidFill>
+            <a:schemeClr val="tx2"/>
+          </a:solidFill>
+        </p:spPr>
+        <p:style>
+          <a:lnRef idx="2">
+            <a:schemeClr val="accent1">
+              <a:shade val="15000"/>
+            </a:schemeClr>
+          </a:lnRef>
+          <a:fillRef idx="1">
+            <a:schemeClr val="accent1"/>
+          </a:fillRef>
+          <a:effectRef idx="0">
+            <a:schemeClr val="accent1"/>
+          </a:effectRef>
+          <a:fontRef idx="minor">
+            <a:schemeClr val="lt1"/>
+          </a:fontRef>
+        </p:style>
+        <p:txBody>
+          <a:bodyPr rtlCol="0" anchor="ctr"/>
+          <a:lstStyle/>
+          <a:p>
+            <a:pPr algn="ctr"/>
+            <a:endParaRPr lang="fr-FR" sz="1600">
+              <a:solidFill>
+                <a:schemeClr val="accent5">
+                  <a:lumMod val="50000"/>
+                </a:schemeClr>
+              </a:solidFill>
+            </a:endParaRPr>
+          </a:p>
+        </p:txBody>
+      </p:sp>
+      <p:sp>
+        <p:nvSpPr>
+          <p:cNvPr id="25" name="Flèche : chevron 24">
+            <a:extLst>
+              <a:ext uri="{FF2B5EF4-FFF2-40B4-BE49-F238E27FC236}">
+                <a16:creationId xmlns:a16="http://schemas.microsoft.com/office/drawing/2014/main" id="{C7489C82-9BCD-ACB9-3015-B7DB86986568}"/>
+              </a:ext>
+            </a:extLst>
+          </p:cNvPr>
+          <p:cNvSpPr/>
+          <p:nvPr/>
+        </p:nvSpPr>
+        <p:spPr>
+          <a:xfrm>
+            <a:off x="145796" y="1243917"/>
+            <a:ext cx="576876" cy="439170"/>
+          </a:xfrm>
+          <a:prstGeom prst="chevron">
+            <a:avLst/>
+          </a:prstGeom>
+          <a:solidFill>
+            <a:schemeClr val="tx2"/>
+          </a:solidFill>
+        </p:spPr>
+        <p:style>
+          <a:lnRef idx="2">
+            <a:schemeClr val="accent1">
+              <a:shade val="15000"/>
+            </a:schemeClr>
+          </a:lnRef>
+          <a:fillRef idx="1">
+            <a:schemeClr val="accent1"/>
+          </a:fillRef>
+          <a:effectRef idx="0">
+            <a:schemeClr val="accent1"/>
+          </a:effectRef>
+          <a:fontRef idx="minor">
+            <a:schemeClr val="lt1"/>
+          </a:fontRef>
+        </p:style>
+        <p:txBody>
+          <a:bodyPr rtlCol="0" anchor="ctr"/>
+          <a:lstStyle/>
+          <a:p>
+            <a:pPr algn="ctr"/>
+            <a:endParaRPr lang="fr-FR" sz="1600">
+              <a:solidFill>
+                <a:schemeClr val="accent5">
+                  <a:lumMod val="50000"/>
+                </a:schemeClr>
+              </a:solidFill>
+            </a:endParaRPr>
+          </a:p>
+        </p:txBody>
+      </p:sp>
+      <p:pic>
+        <p:nvPicPr>
+          <p:cNvPr id="3" name="Image 2">
+            <a:extLst>
+              <a:ext uri="{FF2B5EF4-FFF2-40B4-BE49-F238E27FC236}">
+                <a16:creationId xmlns:a16="http://schemas.microsoft.com/office/drawing/2014/main" id="{B0282DB8-C6B8-D29C-3BBC-6DB96AE355CD}"/>
+              </a:ext>
+            </a:extLst>
+          </p:cNvPr>
+          <p:cNvPicPr>
+            <a:picLocks noChangeAspect="1"/>
+          </p:cNvPicPr>
+          <p:nvPr/>
+        </p:nvPicPr>
+        <p:blipFill>
+          <a:blip r:embed="rId3">
+            <a:extLst>
+              <a:ext uri="{28A0092B-C50C-407E-A947-70E740481C1C}">
+                <a14:useLocalDpi xmlns:a14="http://schemas.microsoft.com/office/drawing/2010/main" val="0"/>
+              </a:ext>
+            </a:extLst>
+          </a:blip>
+          <a:stretch>
+            <a:fillRect/>
+          </a:stretch>
+        </p:blipFill>
+        <p:spPr>
+          <a:xfrm>
+            <a:off x="1" y="2551235"/>
+            <a:ext cx="5412656" cy="2515235"/>
+          </a:xfrm>
+          <a:prstGeom prst="rect">
+            <a:avLst/>
+          </a:prstGeom>
+          <a:ln>
+            <a:solidFill>
+              <a:schemeClr val="bg1">
+                <a:lumMod val="85000"/>
+              </a:schemeClr>
+            </a:solidFill>
+          </a:ln>
+        </p:spPr>
+      </p:pic>
+      <p:sp>
+        <p:nvSpPr>
+          <p:cNvPr id="5" name="ZoneTexte 4">
+            <a:extLst>
+              <a:ext uri="{FF2B5EF4-FFF2-40B4-BE49-F238E27FC236}">
+                <a16:creationId xmlns:a16="http://schemas.microsoft.com/office/drawing/2014/main" id="{343B324D-8DF7-7557-7987-47ECBD6F10C3}"/>
+              </a:ext>
+            </a:extLst>
+          </p:cNvPr>
+          <p:cNvSpPr txBox="1"/>
+          <p:nvPr/>
+        </p:nvSpPr>
+        <p:spPr>
+          <a:xfrm>
+            <a:off x="5942142" y="1867357"/>
+            <a:ext cx="4922964" cy="365869"/>
+          </a:xfrm>
+          <a:prstGeom prst="rect">
+            <a:avLst/>
+          </a:prstGeom>
+          <a:solidFill>
+            <a:schemeClr val="tx1">
+              <a:lumMod val="85000"/>
+            </a:schemeClr>
+          </a:solidFill>
+        </p:spPr>
+        <p:txBody>
+          <a:bodyPr wrap="square">
+            <a:spAutoFit/>
+          </a:bodyPr>
+          <a:lstStyle/>
+          <a:p>
+            <a:pPr>
+              <a:lnSpc>
+                <a:spcPct val="107000"/>
+              </a:lnSpc>
+              <a:spcAft>
+                <a:spcPts val="800"/>
+              </a:spcAft>
+              <a:buNone/>
+            </a:pPr>
+            <a:r>
+              <a:rPr lang="en-US" sz="1800" kern="100" dirty="0">
+                <a:solidFill>
+                  <a:srgbClr val="000000"/>
+                </a:solidFill>
+                <a:effectLst/>
+                <a:latin typeface="Century Gothic" panose="020B0502020202020204" pitchFamily="34" charset="0"/>
+                <a:ea typeface="Calibri" panose="020F0502020204030204" pitchFamily="34" charset="0"/>
+                <a:cs typeface="Arial" panose="020B0604020202020204" pitchFamily="34" charset="0"/>
+              </a:rPr>
+              <a:t>docker exec -it </a:t>
+            </a:r>
+            <a:r>
+              <a:rPr lang="en-US" sz="1800" kern="100" dirty="0" err="1">
+                <a:solidFill>
+                  <a:srgbClr val="000000"/>
+                </a:solidFill>
+                <a:effectLst/>
+                <a:latin typeface="Century Gothic" panose="020B0502020202020204" pitchFamily="34" charset="0"/>
+                <a:ea typeface="Calibri" panose="020F0502020204030204" pitchFamily="34" charset="0"/>
+                <a:cs typeface="Arial" panose="020B0604020202020204" pitchFamily="34" charset="0"/>
+              </a:rPr>
+              <a:t>postgres_bookshop</a:t>
+            </a:r>
+            <a:r>
+              <a:rPr lang="en-US" sz="1800" kern="100" dirty="0">
+                <a:solidFill>
+                  <a:srgbClr val="000000"/>
+                </a:solidFill>
+                <a:effectLst/>
+                <a:latin typeface="Century Gothic" panose="020B0502020202020204" pitchFamily="34" charset="0"/>
+                <a:ea typeface="Calibri" panose="020F0502020204030204" pitchFamily="34" charset="0"/>
+                <a:cs typeface="Arial" panose="020B0604020202020204" pitchFamily="34" charset="0"/>
+              </a:rPr>
+              <a:t> bash</a:t>
+            </a:r>
+            <a:endParaRPr lang="fr-FR" sz="1800" kern="100" dirty="0">
+              <a:effectLst/>
+              <a:latin typeface="Century Gothic" panose="020B0502020202020204" pitchFamily="34" charset="0"/>
+              <a:ea typeface="Calibri" panose="020F0502020204030204" pitchFamily="34" charset="0"/>
+              <a:cs typeface="Arial" panose="020B0604020202020204" pitchFamily="34" charset="0"/>
+            </a:endParaRPr>
+          </a:p>
+        </p:txBody>
+      </p:sp>
+      <p:sp>
+        <p:nvSpPr>
+          <p:cNvPr id="7" name="ZoneTexte 6">
+            <a:extLst>
+              <a:ext uri="{FF2B5EF4-FFF2-40B4-BE49-F238E27FC236}">
+                <a16:creationId xmlns:a16="http://schemas.microsoft.com/office/drawing/2014/main" id="{B38A76DC-A061-DD49-1A6A-58BC1D425143}"/>
+              </a:ext>
+            </a:extLst>
+          </p:cNvPr>
+          <p:cNvSpPr txBox="1"/>
+          <p:nvPr/>
+        </p:nvSpPr>
+        <p:spPr>
+          <a:xfrm>
+            <a:off x="5942142" y="2427541"/>
+            <a:ext cx="2937158" cy="365869"/>
+          </a:xfrm>
+          <a:prstGeom prst="rect">
+            <a:avLst/>
+          </a:prstGeom>
+          <a:solidFill>
+            <a:schemeClr val="tx1">
+              <a:lumMod val="85000"/>
+            </a:schemeClr>
+          </a:solidFill>
+        </p:spPr>
+        <p:txBody>
+          <a:bodyPr wrap="square">
+            <a:spAutoFit/>
+          </a:bodyPr>
+          <a:lstStyle/>
+          <a:p>
+            <a:pPr>
+              <a:lnSpc>
+                <a:spcPct val="107000"/>
+              </a:lnSpc>
+              <a:spcAft>
+                <a:spcPts val="800"/>
+              </a:spcAft>
+              <a:buNone/>
+            </a:pPr>
+            <a:r>
+              <a:rPr lang="fr-FR" sz="1800" kern="100" dirty="0" err="1">
+                <a:solidFill>
+                  <a:srgbClr val="000000"/>
+                </a:solidFill>
+                <a:effectLst/>
+                <a:latin typeface="Century Gothic" panose="020B0502020202020204" pitchFamily="34" charset="0"/>
+                <a:ea typeface="Calibri" panose="020F0502020204030204" pitchFamily="34" charset="0"/>
+                <a:cs typeface="Arial" panose="020B0604020202020204" pitchFamily="34" charset="0"/>
+              </a:rPr>
+              <a:t>psql</a:t>
+            </a:r>
+            <a:r>
+              <a:rPr lang="fr-FR" sz="1800" kern="100" dirty="0">
+                <a:solidFill>
+                  <a:srgbClr val="000000"/>
+                </a:solidFill>
+                <a:effectLst/>
+                <a:latin typeface="Century Gothic" panose="020B0502020202020204" pitchFamily="34" charset="0"/>
+                <a:ea typeface="Calibri" panose="020F0502020204030204" pitchFamily="34" charset="0"/>
+                <a:cs typeface="Arial" panose="020B0604020202020204" pitchFamily="34" charset="0"/>
+              </a:rPr>
+              <a:t> -U user -d </a:t>
+            </a:r>
+            <a:r>
+              <a:rPr lang="fr-FR" sz="1800" kern="100" dirty="0" err="1">
+                <a:solidFill>
+                  <a:srgbClr val="000000"/>
+                </a:solidFill>
+                <a:effectLst/>
+                <a:latin typeface="Century Gothic" panose="020B0502020202020204" pitchFamily="34" charset="0"/>
+                <a:ea typeface="Calibri" panose="020F0502020204030204" pitchFamily="34" charset="0"/>
+                <a:cs typeface="Arial" panose="020B0604020202020204" pitchFamily="34" charset="0"/>
+              </a:rPr>
+              <a:t>bookshop</a:t>
+            </a:r>
+            <a:endParaRPr lang="fr-FR" sz="1800" kern="100" dirty="0">
+              <a:effectLst/>
+              <a:latin typeface="Century Gothic" panose="020B0502020202020204" pitchFamily="34" charset="0"/>
+              <a:ea typeface="Calibri" panose="020F0502020204030204" pitchFamily="34" charset="0"/>
+              <a:cs typeface="Arial" panose="020B0604020202020204" pitchFamily="34" charset="0"/>
+            </a:endParaRPr>
+          </a:p>
+        </p:txBody>
+      </p:sp>
+      <p:sp>
+        <p:nvSpPr>
+          <p:cNvPr id="10" name="ZoneTexte 9">
+            <a:extLst>
+              <a:ext uri="{FF2B5EF4-FFF2-40B4-BE49-F238E27FC236}">
+                <a16:creationId xmlns:a16="http://schemas.microsoft.com/office/drawing/2014/main" id="{D57DF2DA-2EE5-EDD1-C4DE-AC3BF48D285D}"/>
+              </a:ext>
+            </a:extLst>
+          </p:cNvPr>
+          <p:cNvSpPr txBox="1"/>
+          <p:nvPr/>
+        </p:nvSpPr>
+        <p:spPr>
+          <a:xfrm>
+            <a:off x="5942142" y="2987725"/>
+            <a:ext cx="2937158" cy="365869"/>
+          </a:xfrm>
+          <a:prstGeom prst="rect">
+            <a:avLst/>
+          </a:prstGeom>
+          <a:solidFill>
+            <a:schemeClr val="tx1">
+              <a:lumMod val="85000"/>
+            </a:schemeClr>
+          </a:solidFill>
+        </p:spPr>
+        <p:txBody>
+          <a:bodyPr wrap="square">
+            <a:spAutoFit/>
+          </a:bodyPr>
+          <a:lstStyle/>
+          <a:p>
+            <a:pPr>
+              <a:lnSpc>
+                <a:spcPct val="107000"/>
+              </a:lnSpc>
+              <a:spcAft>
+                <a:spcPts val="800"/>
+              </a:spcAft>
+              <a:buNone/>
+            </a:pPr>
+            <a:r>
+              <a:rPr lang="fr-FR" sz="1800" kern="100" dirty="0">
+                <a:solidFill>
+                  <a:srgbClr val="000000"/>
+                </a:solidFill>
+                <a:effectLst/>
+                <a:latin typeface="Century Gothic" panose="020B0502020202020204" pitchFamily="34" charset="0"/>
+                <a:ea typeface="Calibri" panose="020F0502020204030204" pitchFamily="34" charset="0"/>
+                <a:cs typeface="Arial" panose="020B0604020202020204" pitchFamily="34" charset="0"/>
+              </a:rPr>
+              <a:t>\l</a:t>
+            </a:r>
+            <a:endParaRPr lang="fr-FR" sz="1800" kern="100" dirty="0">
+              <a:effectLst/>
+              <a:latin typeface="Century Gothic" panose="020B0502020202020204" pitchFamily="34" charset="0"/>
+              <a:ea typeface="Calibri" panose="020F0502020204030204" pitchFamily="34" charset="0"/>
+              <a:cs typeface="Arial" panose="020B0604020202020204" pitchFamily="34" charset="0"/>
+            </a:endParaRPr>
+          </a:p>
+        </p:txBody>
+      </p:sp>
+      <p:sp>
+        <p:nvSpPr>
+          <p:cNvPr id="13" name="ZoneTexte 12">
+            <a:extLst>
+              <a:ext uri="{FF2B5EF4-FFF2-40B4-BE49-F238E27FC236}">
+                <a16:creationId xmlns:a16="http://schemas.microsoft.com/office/drawing/2014/main" id="{C2D272D4-AC28-33EE-4A07-63A686C1C6D7}"/>
+              </a:ext>
+            </a:extLst>
+          </p:cNvPr>
+          <p:cNvSpPr txBox="1"/>
+          <p:nvPr/>
+        </p:nvSpPr>
+        <p:spPr>
+          <a:xfrm>
+            <a:off x="5942142" y="3504407"/>
+            <a:ext cx="2464439" cy="365869"/>
+          </a:xfrm>
+          <a:prstGeom prst="rect">
+            <a:avLst/>
+          </a:prstGeom>
+          <a:solidFill>
+            <a:schemeClr val="tx1">
+              <a:lumMod val="85000"/>
+            </a:schemeClr>
+          </a:solidFill>
+        </p:spPr>
+        <p:txBody>
+          <a:bodyPr wrap="square">
+            <a:spAutoFit/>
+          </a:bodyPr>
+          <a:lstStyle/>
+          <a:p>
+            <a:pPr>
+              <a:lnSpc>
+                <a:spcPct val="107000"/>
+              </a:lnSpc>
+              <a:spcAft>
+                <a:spcPts val="800"/>
+              </a:spcAft>
+              <a:buNone/>
+            </a:pPr>
+            <a:r>
+              <a:rPr lang="fr-FR" sz="1800" kern="100" dirty="0">
+                <a:solidFill>
+                  <a:srgbClr val="000000"/>
+                </a:solidFill>
+                <a:effectLst/>
+                <a:latin typeface="Century Gothic" panose="020B0502020202020204" pitchFamily="34" charset="0"/>
+                <a:ea typeface="Calibri" panose="020F0502020204030204" pitchFamily="34" charset="0"/>
+                <a:cs typeface="Arial" panose="020B0604020202020204" pitchFamily="34" charset="0"/>
+              </a:rPr>
+              <a:t>\</a:t>
+            </a:r>
+            <a:r>
+              <a:rPr lang="fr-FR" sz="1800" kern="100" dirty="0" err="1">
+                <a:solidFill>
+                  <a:srgbClr val="000000"/>
+                </a:solidFill>
+                <a:effectLst/>
+                <a:latin typeface="Century Gothic" panose="020B0502020202020204" pitchFamily="34" charset="0"/>
+                <a:ea typeface="Calibri" panose="020F0502020204030204" pitchFamily="34" charset="0"/>
+                <a:cs typeface="Arial" panose="020B0604020202020204" pitchFamily="34" charset="0"/>
+              </a:rPr>
+              <a:t>dn</a:t>
+            </a:r>
+            <a:r>
+              <a:rPr lang="fr-FR" sz="1800" kern="100" dirty="0">
+                <a:solidFill>
+                  <a:srgbClr val="000000"/>
+                </a:solidFill>
+                <a:effectLst/>
+                <a:latin typeface="Century Gothic" panose="020B0502020202020204" pitchFamily="34" charset="0"/>
+                <a:ea typeface="Calibri" panose="020F0502020204030204" pitchFamily="34" charset="0"/>
+                <a:cs typeface="Arial" panose="020B0604020202020204" pitchFamily="34" charset="0"/>
+              </a:rPr>
+              <a:t>+</a:t>
+            </a:r>
+            <a:endParaRPr lang="fr-FR" sz="1800" kern="100" dirty="0">
+              <a:effectLst/>
+              <a:latin typeface="Century Gothic" panose="020B0502020202020204" pitchFamily="34" charset="0"/>
+              <a:ea typeface="Calibri" panose="020F0502020204030204" pitchFamily="34" charset="0"/>
+              <a:cs typeface="Arial" panose="020B0604020202020204" pitchFamily="34" charset="0"/>
+            </a:endParaRPr>
+          </a:p>
+        </p:txBody>
+      </p:sp>
+      <p:pic>
+        <p:nvPicPr>
+          <p:cNvPr id="18" name="Image 17">
+            <a:extLst>
+              <a:ext uri="{FF2B5EF4-FFF2-40B4-BE49-F238E27FC236}">
+                <a16:creationId xmlns:a16="http://schemas.microsoft.com/office/drawing/2014/main" id="{4663E9F7-DCD8-3284-CD80-6E53FC54C4C3}"/>
+              </a:ext>
+            </a:extLst>
+          </p:cNvPr>
+          <p:cNvPicPr>
+            <a:picLocks noChangeAspect="1"/>
+          </p:cNvPicPr>
+          <p:nvPr/>
+        </p:nvPicPr>
+        <p:blipFill>
+          <a:blip r:embed="rId4"/>
+          <a:stretch>
+            <a:fillRect/>
+          </a:stretch>
+        </p:blipFill>
+        <p:spPr>
+          <a:xfrm>
+            <a:off x="5942141" y="4021089"/>
+            <a:ext cx="6249857" cy="2836911"/>
+          </a:xfrm>
+          <a:prstGeom prst="rect">
+            <a:avLst/>
+          </a:prstGeom>
+          <a:ln>
+            <a:solidFill>
+              <a:schemeClr val="bg1">
+                <a:lumMod val="85000"/>
+              </a:schemeClr>
+            </a:solidFill>
+          </a:ln>
+        </p:spPr>
+      </p:pic>
+      <p:sp>
+        <p:nvSpPr>
+          <p:cNvPr id="24" name="ZoneTexte 23">
+            <a:extLst>
+              <a:ext uri="{FF2B5EF4-FFF2-40B4-BE49-F238E27FC236}">
+                <a16:creationId xmlns:a16="http://schemas.microsoft.com/office/drawing/2014/main" id="{546D3F8E-2686-A646-FC64-7BFEA1AC797C}"/>
+              </a:ext>
+            </a:extLst>
+          </p:cNvPr>
+          <p:cNvSpPr txBox="1"/>
+          <p:nvPr/>
+        </p:nvSpPr>
+        <p:spPr>
+          <a:xfrm>
+            <a:off x="9021212" y="2435055"/>
+            <a:ext cx="1843548" cy="365869"/>
+          </a:xfrm>
+          <a:prstGeom prst="rect">
+            <a:avLst/>
+          </a:prstGeom>
+          <a:solidFill>
+            <a:schemeClr val="tx1">
+              <a:lumMod val="85000"/>
+            </a:schemeClr>
+          </a:solidFill>
+        </p:spPr>
+        <p:txBody>
+          <a:bodyPr wrap="square">
+            <a:spAutoFit/>
+          </a:bodyPr>
+          <a:lstStyle/>
+          <a:p>
+            <a:pPr>
+              <a:lnSpc>
+                <a:spcPct val="107000"/>
+              </a:lnSpc>
+              <a:spcAft>
+                <a:spcPts val="800"/>
+              </a:spcAft>
+              <a:buNone/>
+            </a:pPr>
+            <a:r>
+              <a:rPr lang="fr-FR" sz="1800" kern="100" dirty="0">
+                <a:solidFill>
+                  <a:srgbClr val="000000"/>
+                </a:solidFill>
+                <a:effectLst/>
+                <a:latin typeface="Century Gothic" panose="020B0502020202020204" pitchFamily="34" charset="0"/>
+                <a:ea typeface="Calibri" panose="020F0502020204030204" pitchFamily="34" charset="0"/>
+                <a:cs typeface="Arial" panose="020B0604020202020204" pitchFamily="34" charset="0"/>
+              </a:rPr>
+              <a:t>\</a:t>
+            </a:r>
+            <a:r>
+              <a:rPr lang="fr-FR" sz="1800" kern="100" dirty="0" err="1">
+                <a:solidFill>
+                  <a:srgbClr val="000000"/>
+                </a:solidFill>
+                <a:effectLst/>
+                <a:latin typeface="Century Gothic" panose="020B0502020202020204" pitchFamily="34" charset="0"/>
+                <a:ea typeface="Calibri" panose="020F0502020204030204" pitchFamily="34" charset="0"/>
+                <a:cs typeface="Arial" panose="020B0604020202020204" pitchFamily="34" charset="0"/>
+              </a:rPr>
+              <a:t>dt</a:t>
+            </a:r>
+            <a:r>
+              <a:rPr lang="fr-FR" sz="1800" kern="100" dirty="0">
+                <a:solidFill>
+                  <a:srgbClr val="000000"/>
+                </a:solidFill>
+                <a:effectLst/>
+                <a:latin typeface="Century Gothic" panose="020B0502020202020204" pitchFamily="34" charset="0"/>
+                <a:ea typeface="Calibri" panose="020F0502020204030204" pitchFamily="34" charset="0"/>
+                <a:cs typeface="Arial" panose="020B0604020202020204" pitchFamily="34" charset="0"/>
+              </a:rPr>
+              <a:t> raw.*</a:t>
+            </a:r>
+            <a:endParaRPr lang="fr-FR" sz="1800" kern="100" dirty="0">
+              <a:effectLst/>
+              <a:latin typeface="Century Gothic" panose="020B0502020202020204" pitchFamily="34" charset="0"/>
+              <a:ea typeface="Calibri" panose="020F0502020204030204" pitchFamily="34" charset="0"/>
+              <a:cs typeface="Arial" panose="020B0604020202020204" pitchFamily="34" charset="0"/>
+            </a:endParaRPr>
+          </a:p>
+        </p:txBody>
+      </p:sp>
+      <p:sp>
+        <p:nvSpPr>
+          <p:cNvPr id="27" name="ZoneTexte 26">
+            <a:extLst>
+              <a:ext uri="{FF2B5EF4-FFF2-40B4-BE49-F238E27FC236}">
+                <a16:creationId xmlns:a16="http://schemas.microsoft.com/office/drawing/2014/main" id="{83496306-3410-CFC5-30FF-684C30561E62}"/>
+              </a:ext>
+            </a:extLst>
+          </p:cNvPr>
+          <p:cNvSpPr txBox="1"/>
+          <p:nvPr/>
+        </p:nvSpPr>
+        <p:spPr>
+          <a:xfrm>
+            <a:off x="998" y="5500449"/>
+            <a:ext cx="5676401" cy="1357551"/>
+          </a:xfrm>
+          <a:prstGeom prst="rect">
+            <a:avLst/>
+          </a:prstGeom>
+          <a:solidFill>
+            <a:schemeClr val="tx1">
+              <a:lumMod val="85000"/>
+            </a:schemeClr>
+          </a:solidFill>
+        </p:spPr>
+        <p:txBody>
+          <a:bodyPr wrap="square">
+            <a:spAutoFit/>
+          </a:bodyPr>
+          <a:lstStyle/>
+          <a:p>
+            <a:pPr>
+              <a:lnSpc>
+                <a:spcPct val="107000"/>
+              </a:lnSpc>
+              <a:spcAft>
+                <a:spcPts val="800"/>
+              </a:spcAft>
+              <a:buNone/>
+            </a:pPr>
+            <a:r>
+              <a:rPr lang="fr-FR" sz="1800" kern="100" dirty="0">
+                <a:solidFill>
+                  <a:srgbClr val="000000"/>
+                </a:solidFill>
+                <a:effectLst/>
+                <a:latin typeface="Century Gothic" panose="020B0502020202020204" pitchFamily="34" charset="0"/>
+                <a:ea typeface="Calibri" panose="020F0502020204030204" pitchFamily="34" charset="0"/>
+                <a:cs typeface="Arial" panose="020B0604020202020204" pitchFamily="34" charset="0"/>
+              </a:rPr>
+              <a:t>\d </a:t>
+            </a:r>
+            <a:r>
+              <a:rPr lang="fr-FR" sz="1800" kern="100" dirty="0" err="1">
+                <a:solidFill>
+                  <a:srgbClr val="000000"/>
+                </a:solidFill>
+                <a:effectLst/>
+                <a:latin typeface="Century Gothic" panose="020B0502020202020204" pitchFamily="34" charset="0"/>
+                <a:ea typeface="Calibri" panose="020F0502020204030204" pitchFamily="34" charset="0"/>
+                <a:cs typeface="Arial" panose="020B0604020202020204" pitchFamily="34" charset="0"/>
+              </a:rPr>
+              <a:t>raw.category</a:t>
+            </a:r>
+            <a:r>
+              <a:rPr lang="fr-FR" sz="1800" kern="100" dirty="0">
+                <a:solidFill>
+                  <a:srgbClr val="000000"/>
+                </a:solidFill>
+                <a:effectLst/>
+                <a:latin typeface="Century Gothic" panose="020B0502020202020204" pitchFamily="34" charset="0"/>
+                <a:ea typeface="Calibri" panose="020F0502020204030204" pitchFamily="34" charset="0"/>
+                <a:cs typeface="Arial" panose="020B0604020202020204" pitchFamily="34" charset="0"/>
+              </a:rPr>
+              <a:t> # Affiche la </a:t>
+            </a:r>
+            <a:r>
+              <a:rPr lang="fr-FR" sz="1800" kern="100" dirty="0" err="1">
+                <a:solidFill>
+                  <a:srgbClr val="000000"/>
+                </a:solidFill>
+                <a:effectLst/>
+                <a:latin typeface="Century Gothic" panose="020B0502020202020204" pitchFamily="34" charset="0"/>
+                <a:ea typeface="Calibri" panose="020F0502020204030204" pitchFamily="34" charset="0"/>
+                <a:cs typeface="Arial" panose="020B0604020202020204" pitchFamily="34" charset="0"/>
+              </a:rPr>
+              <a:t>scrtucture</a:t>
+            </a:r>
+            <a:r>
+              <a:rPr lang="fr-FR" sz="1800" kern="100" dirty="0">
+                <a:solidFill>
+                  <a:srgbClr val="000000"/>
+                </a:solidFill>
+                <a:effectLst/>
+                <a:latin typeface="Century Gothic" panose="020B0502020202020204" pitchFamily="34" charset="0"/>
+                <a:ea typeface="Calibri" panose="020F0502020204030204" pitchFamily="34" charset="0"/>
+                <a:cs typeface="Arial" panose="020B0604020202020204" pitchFamily="34" charset="0"/>
+              </a:rPr>
+              <a:t> de la table </a:t>
+            </a:r>
+            <a:r>
+              <a:rPr lang="fr-FR" sz="1800" kern="100" dirty="0" err="1">
+                <a:solidFill>
+                  <a:srgbClr val="000000"/>
+                </a:solidFill>
+                <a:effectLst/>
+                <a:latin typeface="Century Gothic" panose="020B0502020202020204" pitchFamily="34" charset="0"/>
+                <a:ea typeface="Calibri" panose="020F0502020204030204" pitchFamily="34" charset="0"/>
+                <a:cs typeface="Arial" panose="020B0604020202020204" pitchFamily="34" charset="0"/>
+              </a:rPr>
+              <a:t>category</a:t>
+            </a:r>
+            <a:endParaRPr lang="fr-FR" sz="1800" kern="100" dirty="0">
+              <a:effectLst/>
+              <a:latin typeface="Century Gothic" panose="020B0502020202020204" pitchFamily="34" charset="0"/>
+              <a:ea typeface="Calibri" panose="020F0502020204030204" pitchFamily="34" charset="0"/>
+              <a:cs typeface="Arial" panose="020B0604020202020204" pitchFamily="34" charset="0"/>
+            </a:endParaRPr>
+          </a:p>
+          <a:p>
+            <a:pPr>
+              <a:lnSpc>
+                <a:spcPct val="107000"/>
+              </a:lnSpc>
+              <a:spcAft>
+                <a:spcPts val="800"/>
+              </a:spcAft>
+              <a:buNone/>
+            </a:pPr>
+            <a:r>
+              <a:rPr lang="fr-FR" sz="1800" kern="100" dirty="0">
+                <a:solidFill>
+                  <a:srgbClr val="000000"/>
+                </a:solidFill>
+                <a:effectLst/>
+                <a:latin typeface="Century Gothic" panose="020B0502020202020204" pitchFamily="34" charset="0"/>
+                <a:ea typeface="Calibri" panose="020F0502020204030204" pitchFamily="34" charset="0"/>
+                <a:cs typeface="Arial" panose="020B0604020202020204" pitchFamily="34" charset="0"/>
+              </a:rPr>
+              <a:t>\d raw.*	# </a:t>
+            </a:r>
+            <a:r>
+              <a:rPr lang="fr-FR" sz="1800" kern="100" dirty="0" err="1">
+                <a:solidFill>
+                  <a:srgbClr val="000000"/>
+                </a:solidFill>
+                <a:effectLst/>
+                <a:latin typeface="Century Gothic" panose="020B0502020202020204" pitchFamily="34" charset="0"/>
+                <a:ea typeface="Calibri" panose="020F0502020204030204" pitchFamily="34" charset="0"/>
+                <a:cs typeface="Arial" panose="020B0604020202020204" pitchFamily="34" charset="0"/>
+              </a:rPr>
+              <a:t>Affichiche</a:t>
+            </a:r>
+            <a:r>
+              <a:rPr lang="fr-FR" sz="1800" kern="100" dirty="0">
+                <a:solidFill>
+                  <a:srgbClr val="000000"/>
+                </a:solidFill>
+                <a:effectLst/>
+                <a:latin typeface="Century Gothic" panose="020B0502020202020204" pitchFamily="34" charset="0"/>
+                <a:ea typeface="Calibri" panose="020F0502020204030204" pitchFamily="34" charset="0"/>
+                <a:cs typeface="Arial" panose="020B0604020202020204" pitchFamily="34" charset="0"/>
+              </a:rPr>
+              <a:t> la </a:t>
+            </a:r>
+            <a:r>
+              <a:rPr lang="fr-FR" sz="1800" kern="100" dirty="0" err="1">
+                <a:solidFill>
+                  <a:srgbClr val="000000"/>
+                </a:solidFill>
+                <a:effectLst/>
+                <a:latin typeface="Century Gothic" panose="020B0502020202020204" pitchFamily="34" charset="0"/>
+                <a:ea typeface="Calibri" panose="020F0502020204030204" pitchFamily="34" charset="0"/>
+                <a:cs typeface="Arial" panose="020B0604020202020204" pitchFamily="34" charset="0"/>
+              </a:rPr>
+              <a:t>sctructure</a:t>
+            </a:r>
+            <a:r>
+              <a:rPr lang="fr-FR" sz="1800" kern="100" dirty="0">
+                <a:solidFill>
+                  <a:srgbClr val="000000"/>
+                </a:solidFill>
+                <a:effectLst/>
+                <a:latin typeface="Century Gothic" panose="020B0502020202020204" pitchFamily="34" charset="0"/>
+                <a:ea typeface="Calibri" panose="020F0502020204030204" pitchFamily="34" charset="0"/>
+                <a:cs typeface="Arial" panose="020B0604020202020204" pitchFamily="34" charset="0"/>
+              </a:rPr>
+              <a:t> de toutes les tables</a:t>
+            </a:r>
+            <a:endParaRPr lang="fr-FR" sz="1800" kern="100" dirty="0">
+              <a:effectLst/>
+              <a:latin typeface="Century Gothic" panose="020B0502020202020204" pitchFamily="34" charset="0"/>
+              <a:ea typeface="Calibri" panose="020F0502020204030204" pitchFamily="34" charset="0"/>
+              <a:cs typeface="Arial" panose="020B0604020202020204" pitchFamily="34" charset="0"/>
+            </a:endParaRPr>
+          </a:p>
+        </p:txBody>
+      </p:sp>
+      <p:sp>
+        <p:nvSpPr>
+          <p:cNvPr id="29" name="ZoneTexte 28">
+            <a:extLst>
+              <a:ext uri="{FF2B5EF4-FFF2-40B4-BE49-F238E27FC236}">
+                <a16:creationId xmlns:a16="http://schemas.microsoft.com/office/drawing/2014/main" id="{9DD73E3E-4D71-DEDF-4CD1-274187FE38FC}"/>
+              </a:ext>
+            </a:extLst>
+          </p:cNvPr>
+          <p:cNvSpPr txBox="1"/>
+          <p:nvPr/>
+        </p:nvSpPr>
+        <p:spPr>
+          <a:xfrm>
+            <a:off x="8552608" y="3497776"/>
+            <a:ext cx="3528054" cy="365869"/>
+          </a:xfrm>
+          <a:prstGeom prst="rect">
+            <a:avLst/>
+          </a:prstGeom>
+          <a:solidFill>
+            <a:schemeClr val="tx1">
+              <a:lumMod val="85000"/>
+            </a:schemeClr>
+          </a:solidFill>
+        </p:spPr>
+        <p:txBody>
+          <a:bodyPr wrap="square">
+            <a:spAutoFit/>
+          </a:bodyPr>
+          <a:lstStyle/>
+          <a:p>
+            <a:pPr>
+              <a:lnSpc>
+                <a:spcPct val="107000"/>
+              </a:lnSpc>
+              <a:spcAft>
+                <a:spcPts val="800"/>
+              </a:spcAft>
+              <a:buNone/>
+            </a:pPr>
+            <a:r>
+              <a:rPr lang="fr-FR" sz="1800" kern="100" dirty="0">
+                <a:solidFill>
+                  <a:srgbClr val="000000"/>
+                </a:solidFill>
+                <a:effectLst/>
+                <a:latin typeface="Century Gothic" panose="020B0502020202020204" pitchFamily="34" charset="0"/>
+                <a:ea typeface="Calibri" panose="020F0502020204030204" pitchFamily="34" charset="0"/>
+                <a:cs typeface="Arial" panose="020B0604020202020204" pitchFamily="34" charset="0"/>
+              </a:rPr>
+              <a:t>SELECT * FROM </a:t>
+            </a:r>
+            <a:r>
+              <a:rPr lang="fr-FR" sz="1800" kern="100" dirty="0" err="1">
+                <a:solidFill>
+                  <a:srgbClr val="000000"/>
+                </a:solidFill>
+                <a:effectLst/>
+                <a:latin typeface="Century Gothic" panose="020B0502020202020204" pitchFamily="34" charset="0"/>
+                <a:ea typeface="Calibri" panose="020F0502020204030204" pitchFamily="34" charset="0"/>
+                <a:cs typeface="Arial" panose="020B0604020202020204" pitchFamily="34" charset="0"/>
+              </a:rPr>
+              <a:t>raw.category</a:t>
+            </a:r>
+            <a:r>
+              <a:rPr lang="fr-FR" sz="1800" kern="100" dirty="0">
+                <a:solidFill>
+                  <a:srgbClr val="000000"/>
+                </a:solidFill>
+                <a:effectLst/>
+                <a:latin typeface="Century Gothic" panose="020B0502020202020204" pitchFamily="34" charset="0"/>
+                <a:ea typeface="Calibri" panose="020F0502020204030204" pitchFamily="34" charset="0"/>
+                <a:cs typeface="Arial" panose="020B0604020202020204" pitchFamily="34" charset="0"/>
+              </a:rPr>
+              <a:t> ;</a:t>
+            </a:r>
+            <a:endParaRPr lang="fr-FR" sz="1800" kern="100" dirty="0">
+              <a:effectLst/>
+              <a:latin typeface="Century Gothic" panose="020B0502020202020204" pitchFamily="34" charset="0"/>
+              <a:ea typeface="Calibri" panose="020F0502020204030204" pitchFamily="34" charset="0"/>
+              <a:cs typeface="Arial" panose="020B0604020202020204" pitchFamily="34" charset="0"/>
+            </a:endParaRPr>
+          </a:p>
+        </p:txBody>
+      </p:sp>
+    </p:spTree>
+    <p:extLst>
+      <p:ext uri="{BB962C8B-B14F-4D97-AF65-F5344CB8AC3E}">
+        <p14:creationId xmlns:p14="http://schemas.microsoft.com/office/powerpoint/2010/main" val="2084887020"/>
+      </p:ext>
+    </p:extLst>
+  </p:cSld>
+  <p:clrMapOvr>
+    <a:masterClrMapping/>
+  </p:clrMapOvr>
+  <p:transition spd="slow">
+    <p:push dir="u"/>
+  </p:transition>
+</p:sld>
+</file>
+
+<file path=ppt/slides/slide5.xml><?xml version="1.0" encoding="utf-8"?>
+<p:sld xmlns:a="http://schemas.openxmlformats.org/drawingml/2006/main" xmlns:r="http://schemas.openxmlformats.org/officeDocument/2006/relationships" xmlns:p="http://schemas.openxmlformats.org/presentationml/2006/main">
+  <p:cSld>
+    <p:spTree>
+      <p:nvGrpSpPr>
+        <p:cNvPr id="1" name="">
+          <a:extLst>
+            <a:ext uri="{FF2B5EF4-FFF2-40B4-BE49-F238E27FC236}">
+              <a16:creationId xmlns:a16="http://schemas.microsoft.com/office/drawing/2014/main" id="{2FA35CF9-AB26-D73C-575E-E8EC7F386AB4}"/>
+            </a:ext>
+          </a:extLst>
+        </p:cNvPr>
+        <p:cNvGrpSpPr/>
+        <p:nvPr/>
+      </p:nvGrpSpPr>
+      <p:grpSpPr>
+        <a:xfrm>
+          <a:off x="0" y="0"/>
+          <a:ext cx="0" cy="0"/>
+          <a:chOff x="0" y="0"/>
+          <a:chExt cx="0" cy="0"/>
+        </a:xfrm>
+      </p:grpSpPr>
+      <p:sp>
+        <p:nvSpPr>
+          <p:cNvPr id="2" name="Titre 1">
+            <a:extLst>
+              <a:ext uri="{FF2B5EF4-FFF2-40B4-BE49-F238E27FC236}">
+                <a16:creationId xmlns:a16="http://schemas.microsoft.com/office/drawing/2014/main" id="{68A55D8F-09DB-46ED-A01E-1A1CB233674D}"/>
+              </a:ext>
+            </a:extLst>
+          </p:cNvPr>
+          <p:cNvSpPr>
+            <a:spLocks noGrp="1"/>
+          </p:cNvSpPr>
+          <p:nvPr>
+            <p:ph type="ctrTitle"/>
+          </p:nvPr>
+        </p:nvSpPr>
+        <p:spPr>
+          <a:xfrm>
+            <a:off x="624275" y="1243917"/>
+            <a:ext cx="5140732" cy="489342"/>
+          </a:xfrm>
+        </p:spPr>
+        <p:txBody>
+          <a:bodyPr>
+            <a:noAutofit/>
+          </a:bodyPr>
+          <a:lstStyle/>
+          <a:p>
+            <a:pPr algn="ctr"/>
+            <a:r>
+              <a:rPr lang="fr-FR" sz="2400" b="1" dirty="0"/>
+              <a:t>Création du fichier </a:t>
+            </a:r>
+            <a:r>
+              <a:rPr lang="fr-FR" sz="2400" b="1" dirty="0" err="1"/>
+              <a:t>profiles.yml</a:t>
+            </a:r>
+            <a:r>
+              <a:rPr lang="fr-FR" sz="2400" b="1" dirty="0"/>
+              <a:t> dans le container</a:t>
+            </a:r>
+            <a:endParaRPr lang="fr-FR" sz="2400" dirty="0"/>
+          </a:p>
+        </p:txBody>
+      </p:sp>
+      <p:sp>
+        <p:nvSpPr>
+          <p:cNvPr id="8" name="Titre 1">
+            <a:extLst>
+              <a:ext uri="{FF2B5EF4-FFF2-40B4-BE49-F238E27FC236}">
+                <a16:creationId xmlns:a16="http://schemas.microsoft.com/office/drawing/2014/main" id="{14055050-C21D-FD29-97AF-50C16EFAEC27}"/>
+              </a:ext>
+            </a:extLst>
+          </p:cNvPr>
+          <p:cNvSpPr txBox="1">
+            <a:spLocks/>
+          </p:cNvSpPr>
+          <p:nvPr/>
+        </p:nvSpPr>
+        <p:spPr>
+          <a:xfrm>
+            <a:off x="2492477" y="144878"/>
+            <a:ext cx="8454052" cy="721789"/>
+          </a:xfrm>
+          <a:prstGeom prst="rect">
+            <a:avLst/>
+          </a:prstGeom>
+        </p:spPr>
+        <p:txBody>
+          <a:bodyPr vert="horz" lIns="91440" tIns="45720" rIns="91440" bIns="45720" rtlCol="0" anchor="b">
+            <a:noAutofit/>
+          </a:bodyPr>
+          <a:lstStyle>
+            <a:lvl1pPr algn="l" defTabSz="914400" rtl="0" eaLnBrk="1" latinLnBrk="0" hangingPunct="1">
+              <a:lnSpc>
+                <a:spcPct val="90000"/>
+              </a:lnSpc>
+              <a:spcBef>
+                <a:spcPct val="0"/>
+              </a:spcBef>
+              <a:buNone/>
+              <a:defRPr sz="4800" kern="1200" cap="all" baseline="0">
+                <a:solidFill>
+                  <a:schemeClr val="tx1"/>
+                </a:solidFill>
+                <a:latin typeface="+mj-lt"/>
+                <a:ea typeface="+mj-ea"/>
+                <a:cs typeface="+mj-cs"/>
+              </a:defRPr>
+            </a:lvl1pPr>
+          </a:lstStyle>
+          <a:p>
+            <a:pPr algn="ctr"/>
+            <a:r>
+              <a:rPr lang="fr-FR" b="1" dirty="0"/>
+              <a:t>SYSTEME DE VENTE DES LIVRES</a:t>
+            </a:r>
+          </a:p>
+        </p:txBody>
+      </p:sp>
+      <p:pic>
+        <p:nvPicPr>
+          <p:cNvPr id="12" name="Image 11">
+            <a:extLst>
+              <a:ext uri="{FF2B5EF4-FFF2-40B4-BE49-F238E27FC236}">
+                <a16:creationId xmlns:a16="http://schemas.microsoft.com/office/drawing/2014/main" id="{B556C242-A195-5D1C-7D95-F08C45C8EB94}"/>
+              </a:ext>
+            </a:extLst>
+          </p:cNvPr>
+          <p:cNvPicPr>
+            <a:picLocks noChangeAspect="1"/>
+          </p:cNvPicPr>
+          <p:nvPr/>
+        </p:nvPicPr>
+        <p:blipFill>
+          <a:blip r:embed="rId2">
+            <a:extLst>
+              <a:ext uri="{28A0092B-C50C-407E-A947-70E740481C1C}">
+                <a14:useLocalDpi xmlns:a14="http://schemas.microsoft.com/office/drawing/2010/main" val="0"/>
+              </a:ext>
+            </a:extLst>
+          </a:blip>
+          <a:stretch>
+            <a:fillRect/>
+          </a:stretch>
+        </p:blipFill>
+        <p:spPr>
+          <a:xfrm>
+            <a:off x="0" y="0"/>
+            <a:ext cx="2359742" cy="866667"/>
+          </a:xfrm>
+          <a:prstGeom prst="rect">
+            <a:avLst/>
+          </a:prstGeom>
+        </p:spPr>
+      </p:pic>
+      <p:sp>
+        <p:nvSpPr>
+          <p:cNvPr id="25" name="Flèche : chevron 24">
+            <a:extLst>
+              <a:ext uri="{FF2B5EF4-FFF2-40B4-BE49-F238E27FC236}">
+                <a16:creationId xmlns:a16="http://schemas.microsoft.com/office/drawing/2014/main" id="{9682072F-52D8-BD3D-E9E1-9188C19393E9}"/>
+              </a:ext>
+            </a:extLst>
+          </p:cNvPr>
+          <p:cNvSpPr/>
+          <p:nvPr/>
+        </p:nvSpPr>
+        <p:spPr>
+          <a:xfrm>
+            <a:off x="193189" y="991722"/>
+            <a:ext cx="576876" cy="439170"/>
+          </a:xfrm>
+          <a:prstGeom prst="chevron">
+            <a:avLst/>
+          </a:prstGeom>
+          <a:solidFill>
+            <a:schemeClr val="tx2"/>
+          </a:solidFill>
+        </p:spPr>
+        <p:style>
+          <a:lnRef idx="2">
+            <a:schemeClr val="accent1">
+              <a:shade val="15000"/>
+            </a:schemeClr>
+          </a:lnRef>
+          <a:fillRef idx="1">
+            <a:schemeClr val="accent1"/>
+          </a:fillRef>
+          <a:effectRef idx="0">
+            <a:schemeClr val="accent1"/>
+          </a:effectRef>
+          <a:fontRef idx="minor">
+            <a:schemeClr val="lt1"/>
+          </a:fontRef>
+        </p:style>
+        <p:txBody>
+          <a:bodyPr rtlCol="0" anchor="ctr"/>
+          <a:lstStyle/>
+          <a:p>
+            <a:pPr algn="ctr"/>
+            <a:endParaRPr lang="fr-FR" sz="1600">
+              <a:solidFill>
+                <a:schemeClr val="accent5">
+                  <a:lumMod val="50000"/>
+                </a:schemeClr>
+              </a:solidFill>
+            </a:endParaRPr>
+          </a:p>
+        </p:txBody>
+      </p:sp>
+      <p:sp>
+        <p:nvSpPr>
+          <p:cNvPr id="4" name="ZoneTexte 3">
+            <a:extLst>
+              <a:ext uri="{FF2B5EF4-FFF2-40B4-BE49-F238E27FC236}">
+                <a16:creationId xmlns:a16="http://schemas.microsoft.com/office/drawing/2014/main" id="{D30B7510-D501-C0D2-53B5-8B19B92BFDAE}"/>
+              </a:ext>
+            </a:extLst>
+          </p:cNvPr>
+          <p:cNvSpPr txBox="1"/>
+          <p:nvPr/>
+        </p:nvSpPr>
+        <p:spPr>
+          <a:xfrm>
+            <a:off x="0" y="1898648"/>
+            <a:ext cx="5765007" cy="662233"/>
+          </a:xfrm>
+          <a:prstGeom prst="rect">
+            <a:avLst/>
+          </a:prstGeom>
+          <a:solidFill>
+            <a:schemeClr val="tx1">
+              <a:lumMod val="85000"/>
+            </a:schemeClr>
+          </a:solidFill>
+        </p:spPr>
+        <p:txBody>
+          <a:bodyPr wrap="square">
+            <a:spAutoFit/>
+          </a:bodyPr>
+          <a:lstStyle/>
+          <a:p>
+            <a:pPr>
+              <a:lnSpc>
+                <a:spcPct val="107000"/>
+              </a:lnSpc>
+              <a:spcAft>
+                <a:spcPts val="800"/>
+              </a:spcAft>
+              <a:buNone/>
+            </a:pPr>
+            <a:r>
+              <a:rPr lang="en-US" sz="1800" kern="100" dirty="0">
+                <a:solidFill>
+                  <a:srgbClr val="000000"/>
+                </a:solidFill>
+                <a:effectLst/>
+                <a:latin typeface="Century Gothic" panose="020B0502020202020204" pitchFamily="34" charset="0"/>
+                <a:ea typeface="Calibri" panose="020F0502020204030204" pitchFamily="34" charset="0"/>
+                <a:cs typeface="Arial" panose="020B0604020202020204" pitchFamily="34" charset="0"/>
+              </a:rPr>
+              <a:t>docker exec -it </a:t>
+            </a:r>
+            <a:r>
+              <a:rPr lang="en-US" sz="1800" kern="100" dirty="0" err="1">
+                <a:solidFill>
+                  <a:srgbClr val="000000"/>
+                </a:solidFill>
+                <a:effectLst/>
+                <a:latin typeface="Century Gothic" panose="020B0502020202020204" pitchFamily="34" charset="0"/>
+                <a:ea typeface="Calibri" panose="020F0502020204030204" pitchFamily="34" charset="0"/>
+                <a:cs typeface="Arial" panose="020B0604020202020204" pitchFamily="34" charset="0"/>
+              </a:rPr>
+              <a:t>airflow_exam</a:t>
+            </a:r>
+            <a:r>
+              <a:rPr lang="en-US" sz="1800" kern="100" dirty="0">
+                <a:solidFill>
+                  <a:srgbClr val="000000"/>
+                </a:solidFill>
+                <a:effectLst/>
+                <a:latin typeface="Century Gothic" panose="020B0502020202020204" pitchFamily="34" charset="0"/>
+                <a:ea typeface="Calibri" panose="020F0502020204030204" pitchFamily="34" charset="0"/>
+                <a:cs typeface="Arial" panose="020B0604020202020204" pitchFamily="34" charset="0"/>
+              </a:rPr>
+              <a:t> bash -c "cd /opt/airflow/</a:t>
+            </a:r>
+            <a:r>
+              <a:rPr lang="en-US" sz="1800" kern="100" dirty="0" err="1">
+                <a:solidFill>
+                  <a:srgbClr val="000000"/>
+                </a:solidFill>
+                <a:effectLst/>
+                <a:latin typeface="Century Gothic" panose="020B0502020202020204" pitchFamily="34" charset="0"/>
+                <a:ea typeface="Calibri" panose="020F0502020204030204" pitchFamily="34" charset="0"/>
+                <a:cs typeface="Arial" panose="020B0604020202020204" pitchFamily="34" charset="0"/>
+              </a:rPr>
+              <a:t>dbt</a:t>
+            </a:r>
+            <a:r>
+              <a:rPr lang="en-US" sz="1800" kern="100" dirty="0">
+                <a:solidFill>
+                  <a:srgbClr val="000000"/>
+                </a:solidFill>
+                <a:effectLst/>
+                <a:latin typeface="Century Gothic" panose="020B0502020202020204" pitchFamily="34" charset="0"/>
+                <a:ea typeface="Calibri" panose="020F0502020204030204" pitchFamily="34" charset="0"/>
+                <a:cs typeface="Arial" panose="020B0604020202020204" pitchFamily="34" charset="0"/>
+              </a:rPr>
+              <a:t> &amp;&amp; </a:t>
+            </a:r>
+            <a:r>
+              <a:rPr lang="en-US" sz="1800" kern="100" dirty="0" err="1">
+                <a:solidFill>
+                  <a:srgbClr val="000000"/>
+                </a:solidFill>
+                <a:effectLst/>
+                <a:latin typeface="Century Gothic" panose="020B0502020202020204" pitchFamily="34" charset="0"/>
+                <a:ea typeface="Calibri" panose="020F0502020204030204" pitchFamily="34" charset="0"/>
+                <a:cs typeface="Arial" panose="020B0604020202020204" pitchFamily="34" charset="0"/>
+              </a:rPr>
+              <a:t>dbt</a:t>
+            </a:r>
+            <a:r>
+              <a:rPr lang="en-US" sz="1800" kern="100" dirty="0">
+                <a:solidFill>
+                  <a:srgbClr val="000000"/>
+                </a:solidFill>
+                <a:effectLst/>
+                <a:latin typeface="Century Gothic" panose="020B0502020202020204" pitchFamily="34" charset="0"/>
+                <a:ea typeface="Calibri" panose="020F0502020204030204" pitchFamily="34" charset="0"/>
+                <a:cs typeface="Arial" panose="020B0604020202020204" pitchFamily="34" charset="0"/>
+              </a:rPr>
+              <a:t> </a:t>
+            </a:r>
+            <a:r>
+              <a:rPr lang="en-US" sz="1800" kern="100" dirty="0" err="1">
+                <a:solidFill>
+                  <a:srgbClr val="000000"/>
+                </a:solidFill>
+                <a:effectLst/>
+                <a:latin typeface="Century Gothic" panose="020B0502020202020204" pitchFamily="34" charset="0"/>
+                <a:ea typeface="Calibri" panose="020F0502020204030204" pitchFamily="34" charset="0"/>
+                <a:cs typeface="Arial" panose="020B0604020202020204" pitchFamily="34" charset="0"/>
+              </a:rPr>
+              <a:t>init</a:t>
+            </a:r>
+            <a:r>
+              <a:rPr lang="en-US" sz="1800" kern="100" dirty="0">
+                <a:solidFill>
+                  <a:srgbClr val="000000"/>
+                </a:solidFill>
+                <a:effectLst/>
+                <a:latin typeface="Century Gothic" panose="020B0502020202020204" pitchFamily="34" charset="0"/>
+                <a:ea typeface="Calibri" panose="020F0502020204030204" pitchFamily="34" charset="0"/>
+                <a:cs typeface="Arial" panose="020B0604020202020204" pitchFamily="34" charset="0"/>
+              </a:rPr>
+              <a:t> </a:t>
+            </a:r>
+            <a:r>
+              <a:rPr lang="en-US" sz="1800" kern="100" dirty="0" err="1">
+                <a:solidFill>
+                  <a:srgbClr val="000000"/>
+                </a:solidFill>
+                <a:effectLst/>
+                <a:latin typeface="Century Gothic" panose="020B0502020202020204" pitchFamily="34" charset="0"/>
+                <a:ea typeface="Calibri" panose="020F0502020204030204" pitchFamily="34" charset="0"/>
+                <a:cs typeface="Arial" panose="020B0604020202020204" pitchFamily="34" charset="0"/>
+              </a:rPr>
+              <a:t>exam_tech_bigdata</a:t>
+            </a:r>
+            <a:r>
+              <a:rPr lang="en-US" sz="1800" kern="100" dirty="0">
+                <a:solidFill>
+                  <a:srgbClr val="000000"/>
+                </a:solidFill>
+                <a:effectLst/>
+                <a:latin typeface="Century Gothic" panose="020B0502020202020204" pitchFamily="34" charset="0"/>
+                <a:ea typeface="Calibri" panose="020F0502020204030204" pitchFamily="34" charset="0"/>
+                <a:cs typeface="Arial" panose="020B0604020202020204" pitchFamily="34" charset="0"/>
+              </a:rPr>
+              <a:t>"</a:t>
+            </a:r>
+            <a:endParaRPr lang="fr-FR" sz="1800" kern="100" dirty="0">
+              <a:effectLst/>
+              <a:latin typeface="Century Gothic" panose="020B0502020202020204" pitchFamily="34" charset="0"/>
+              <a:ea typeface="Calibri" panose="020F0502020204030204" pitchFamily="34" charset="0"/>
+              <a:cs typeface="Arial" panose="020B0604020202020204" pitchFamily="34" charset="0"/>
+            </a:endParaRPr>
+          </a:p>
+        </p:txBody>
+      </p:sp>
+      <p:sp>
+        <p:nvSpPr>
+          <p:cNvPr id="6" name="ZoneTexte 5">
+            <a:extLst>
+              <a:ext uri="{FF2B5EF4-FFF2-40B4-BE49-F238E27FC236}">
+                <a16:creationId xmlns:a16="http://schemas.microsoft.com/office/drawing/2014/main" id="{E61EBDAF-E125-FAF6-9BB8-B2D0BC7EE4D0}"/>
+              </a:ext>
+            </a:extLst>
+          </p:cNvPr>
+          <p:cNvSpPr txBox="1"/>
+          <p:nvPr/>
+        </p:nvSpPr>
+        <p:spPr>
+          <a:xfrm>
+            <a:off x="0" y="2765240"/>
+            <a:ext cx="5765007" cy="365869"/>
+          </a:xfrm>
+          <a:prstGeom prst="rect">
+            <a:avLst/>
+          </a:prstGeom>
+          <a:solidFill>
+            <a:schemeClr val="tx1">
+              <a:lumMod val="85000"/>
+            </a:schemeClr>
+          </a:solidFill>
+        </p:spPr>
+        <p:txBody>
+          <a:bodyPr wrap="square">
+            <a:spAutoFit/>
+          </a:bodyPr>
+          <a:lstStyle/>
+          <a:p>
+            <a:pPr>
+              <a:lnSpc>
+                <a:spcPct val="107000"/>
+              </a:lnSpc>
+              <a:spcAft>
+                <a:spcPts val="800"/>
+              </a:spcAft>
+              <a:buNone/>
+            </a:pPr>
+            <a:r>
+              <a:rPr lang="fr-FR" sz="1800" kern="100" dirty="0">
+                <a:solidFill>
+                  <a:srgbClr val="000000"/>
+                </a:solidFill>
+                <a:effectLst/>
+                <a:latin typeface="Century Gothic" panose="020B0502020202020204" pitchFamily="34" charset="0"/>
+                <a:ea typeface="Calibri" panose="020F0502020204030204" pitchFamily="34" charset="0"/>
+                <a:cs typeface="Arial" panose="020B0604020202020204" pitchFamily="34" charset="0"/>
+              </a:rPr>
+              <a:t>docker </a:t>
+            </a:r>
+            <a:r>
+              <a:rPr lang="fr-FR" sz="1800" kern="100" dirty="0" err="1">
+                <a:solidFill>
+                  <a:srgbClr val="000000"/>
+                </a:solidFill>
+                <a:effectLst/>
+                <a:latin typeface="Century Gothic" panose="020B0502020202020204" pitchFamily="34" charset="0"/>
+                <a:ea typeface="Calibri" panose="020F0502020204030204" pitchFamily="34" charset="0"/>
+                <a:cs typeface="Arial" panose="020B0604020202020204" pitchFamily="34" charset="0"/>
+              </a:rPr>
+              <a:t>exec</a:t>
+            </a:r>
+            <a:r>
+              <a:rPr lang="fr-FR" sz="1800" kern="100" dirty="0">
+                <a:solidFill>
+                  <a:srgbClr val="000000"/>
+                </a:solidFill>
+                <a:effectLst/>
+                <a:latin typeface="Century Gothic" panose="020B0502020202020204" pitchFamily="34" charset="0"/>
+                <a:ea typeface="Calibri" panose="020F0502020204030204" pitchFamily="34" charset="0"/>
+                <a:cs typeface="Arial" panose="020B0604020202020204" pitchFamily="34" charset="0"/>
+              </a:rPr>
+              <a:t> -</a:t>
+            </a:r>
+            <a:r>
+              <a:rPr lang="fr-FR" sz="1800" kern="100" dirty="0" err="1">
+                <a:solidFill>
+                  <a:srgbClr val="000000"/>
+                </a:solidFill>
+                <a:effectLst/>
+                <a:latin typeface="Century Gothic" panose="020B0502020202020204" pitchFamily="34" charset="0"/>
+                <a:ea typeface="Calibri" panose="020F0502020204030204" pitchFamily="34" charset="0"/>
+                <a:cs typeface="Arial" panose="020B0604020202020204" pitchFamily="34" charset="0"/>
+              </a:rPr>
+              <a:t>it</a:t>
+            </a:r>
+            <a:r>
+              <a:rPr lang="fr-FR" sz="1800" kern="100" dirty="0">
+                <a:solidFill>
+                  <a:srgbClr val="000000"/>
+                </a:solidFill>
+                <a:effectLst/>
+                <a:latin typeface="Century Gothic" panose="020B0502020202020204" pitchFamily="34" charset="0"/>
+                <a:ea typeface="Calibri" panose="020F0502020204030204" pitchFamily="34" charset="0"/>
+                <a:cs typeface="Arial" panose="020B0604020202020204" pitchFamily="34" charset="0"/>
+              </a:rPr>
+              <a:t> </a:t>
+            </a:r>
+            <a:r>
+              <a:rPr lang="fr-FR" sz="1800" kern="100" dirty="0" err="1">
+                <a:solidFill>
+                  <a:srgbClr val="000000"/>
+                </a:solidFill>
+                <a:effectLst/>
+                <a:latin typeface="Century Gothic" panose="020B0502020202020204" pitchFamily="34" charset="0"/>
+                <a:ea typeface="Calibri" panose="020F0502020204030204" pitchFamily="34" charset="0"/>
+                <a:cs typeface="Arial" panose="020B0604020202020204" pitchFamily="34" charset="0"/>
+              </a:rPr>
+              <a:t>airflow_exam</a:t>
+            </a:r>
+            <a:r>
+              <a:rPr lang="fr-FR" sz="1800" kern="100" dirty="0">
+                <a:solidFill>
+                  <a:srgbClr val="000000"/>
+                </a:solidFill>
+                <a:effectLst/>
+                <a:latin typeface="Century Gothic" panose="020B0502020202020204" pitchFamily="34" charset="0"/>
+                <a:ea typeface="Calibri" panose="020F0502020204030204" pitchFamily="34" charset="0"/>
+                <a:cs typeface="Arial" panose="020B0604020202020204" pitchFamily="34" charset="0"/>
+              </a:rPr>
+              <a:t> </a:t>
+            </a:r>
+            <a:r>
+              <a:rPr lang="fr-FR" sz="1800" kern="100" dirty="0" err="1">
+                <a:solidFill>
+                  <a:srgbClr val="000000"/>
+                </a:solidFill>
+                <a:effectLst/>
+                <a:latin typeface="Century Gothic" panose="020B0502020202020204" pitchFamily="34" charset="0"/>
+                <a:ea typeface="Calibri" panose="020F0502020204030204" pitchFamily="34" charset="0"/>
+                <a:cs typeface="Arial" panose="020B0604020202020204" pitchFamily="34" charset="0"/>
+              </a:rPr>
+              <a:t>bash</a:t>
+            </a:r>
+            <a:endParaRPr lang="fr-FR" sz="1800" kern="100" dirty="0">
+              <a:effectLst/>
+              <a:latin typeface="Century Gothic" panose="020B0502020202020204" pitchFamily="34" charset="0"/>
+              <a:ea typeface="Calibri" panose="020F0502020204030204" pitchFamily="34" charset="0"/>
+              <a:cs typeface="Arial" panose="020B0604020202020204" pitchFamily="34" charset="0"/>
+            </a:endParaRPr>
+          </a:p>
+        </p:txBody>
+      </p:sp>
+      <p:sp>
+        <p:nvSpPr>
+          <p:cNvPr id="9" name="ZoneTexte 8">
+            <a:extLst>
+              <a:ext uri="{FF2B5EF4-FFF2-40B4-BE49-F238E27FC236}">
+                <a16:creationId xmlns:a16="http://schemas.microsoft.com/office/drawing/2014/main" id="{0E7B08D6-0FEF-AE2F-62B3-4B7C4A0B89E8}"/>
+              </a:ext>
+            </a:extLst>
+          </p:cNvPr>
+          <p:cNvSpPr txBox="1"/>
+          <p:nvPr/>
+        </p:nvSpPr>
+        <p:spPr>
+          <a:xfrm>
+            <a:off x="-1" y="3338900"/>
+            <a:ext cx="5765007" cy="365869"/>
+          </a:xfrm>
+          <a:prstGeom prst="rect">
+            <a:avLst/>
+          </a:prstGeom>
+          <a:solidFill>
+            <a:schemeClr val="tx1">
+              <a:lumMod val="85000"/>
+            </a:schemeClr>
+          </a:solidFill>
+        </p:spPr>
+        <p:txBody>
+          <a:bodyPr wrap="square">
+            <a:spAutoFit/>
+          </a:bodyPr>
+          <a:lstStyle/>
+          <a:p>
+            <a:pPr>
+              <a:lnSpc>
+                <a:spcPct val="107000"/>
+              </a:lnSpc>
+              <a:spcAft>
+                <a:spcPts val="800"/>
+              </a:spcAft>
+              <a:buNone/>
+            </a:pPr>
+            <a:r>
+              <a:rPr lang="en-US" sz="1800" kern="100" dirty="0">
+                <a:solidFill>
+                  <a:srgbClr val="000000"/>
+                </a:solidFill>
+                <a:effectLst/>
+                <a:latin typeface="Century Gothic" panose="020B0502020202020204" pitchFamily="34" charset="0"/>
+                <a:ea typeface="Calibri" panose="020F0502020204030204" pitchFamily="34" charset="0"/>
+                <a:cs typeface="Arial" panose="020B0604020202020204" pitchFamily="34" charset="0"/>
+              </a:rPr>
+              <a:t>cd /opt/airflow/</a:t>
+            </a:r>
+            <a:r>
+              <a:rPr lang="en-US" sz="1800" kern="100" dirty="0" err="1">
+                <a:solidFill>
+                  <a:srgbClr val="000000"/>
+                </a:solidFill>
+                <a:effectLst/>
+                <a:latin typeface="Century Gothic" panose="020B0502020202020204" pitchFamily="34" charset="0"/>
+                <a:ea typeface="Calibri" panose="020F0502020204030204" pitchFamily="34" charset="0"/>
+                <a:cs typeface="Arial" panose="020B0604020202020204" pitchFamily="34" charset="0"/>
+              </a:rPr>
+              <a:t>dbt</a:t>
+            </a:r>
+            <a:r>
+              <a:rPr lang="en-US" sz="1800" kern="100" dirty="0">
+                <a:solidFill>
+                  <a:srgbClr val="000000"/>
+                </a:solidFill>
+                <a:effectLst/>
+                <a:latin typeface="Century Gothic" panose="020B0502020202020204" pitchFamily="34" charset="0"/>
+                <a:ea typeface="Calibri" panose="020F0502020204030204" pitchFamily="34" charset="0"/>
+                <a:cs typeface="Arial" panose="020B0604020202020204" pitchFamily="34" charset="0"/>
+              </a:rPr>
+              <a:t>/</a:t>
+            </a:r>
+            <a:r>
+              <a:rPr lang="en-US" sz="1800" kern="100" dirty="0" err="1">
+                <a:solidFill>
+                  <a:srgbClr val="000000"/>
+                </a:solidFill>
+                <a:effectLst/>
+                <a:latin typeface="Century Gothic" panose="020B0502020202020204" pitchFamily="34" charset="0"/>
+                <a:ea typeface="Calibri" panose="020F0502020204030204" pitchFamily="34" charset="0"/>
+                <a:cs typeface="Arial" panose="020B0604020202020204" pitchFamily="34" charset="0"/>
+              </a:rPr>
+              <a:t>exam_tech_bigdata</a:t>
+            </a:r>
+            <a:endParaRPr lang="fr-FR" sz="1800" kern="100" dirty="0">
+              <a:effectLst/>
+              <a:latin typeface="Century Gothic" panose="020B0502020202020204" pitchFamily="34" charset="0"/>
+              <a:ea typeface="Calibri" panose="020F0502020204030204" pitchFamily="34" charset="0"/>
+              <a:cs typeface="Arial" panose="020B0604020202020204" pitchFamily="34" charset="0"/>
+            </a:endParaRPr>
+          </a:p>
+        </p:txBody>
+      </p:sp>
+      <p:sp>
+        <p:nvSpPr>
+          <p:cNvPr id="11" name="ZoneTexte 10">
+            <a:extLst>
+              <a:ext uri="{FF2B5EF4-FFF2-40B4-BE49-F238E27FC236}">
+                <a16:creationId xmlns:a16="http://schemas.microsoft.com/office/drawing/2014/main" id="{1F7BA3F5-E75D-168E-DC66-5A49E5D0DB06}"/>
+              </a:ext>
+            </a:extLst>
+          </p:cNvPr>
+          <p:cNvSpPr txBox="1"/>
+          <p:nvPr/>
+        </p:nvSpPr>
+        <p:spPr>
+          <a:xfrm>
+            <a:off x="6064046" y="907481"/>
+            <a:ext cx="6127954" cy="5951245"/>
+          </a:xfrm>
+          <a:prstGeom prst="rect">
+            <a:avLst/>
+          </a:prstGeom>
+          <a:solidFill>
+            <a:schemeClr val="tx1">
+              <a:lumMod val="85000"/>
+            </a:schemeClr>
+          </a:solidFill>
+        </p:spPr>
+        <p:txBody>
+          <a:bodyPr wrap="square">
+            <a:spAutoFit/>
+          </a:bodyPr>
+          <a:lstStyle/>
+          <a:p>
+            <a:pPr>
+              <a:lnSpc>
+                <a:spcPct val="107000"/>
+              </a:lnSpc>
+              <a:spcAft>
+                <a:spcPts val="800"/>
+              </a:spcAft>
+              <a:buNone/>
+            </a:pPr>
+            <a:r>
+              <a:rPr lang="en-US" sz="1800" kern="100" dirty="0" err="1">
+                <a:solidFill>
+                  <a:srgbClr val="000000"/>
+                </a:solidFill>
+                <a:effectLst/>
+                <a:latin typeface="Century Gothic" panose="020B0502020202020204" pitchFamily="34" charset="0"/>
+                <a:ea typeface="Calibri" panose="020F0502020204030204" pitchFamily="34" charset="0"/>
+                <a:cs typeface="Arial" panose="020B0604020202020204" pitchFamily="34" charset="0"/>
+              </a:rPr>
+              <a:t>mkdir</a:t>
+            </a:r>
+            <a:r>
+              <a:rPr lang="en-US" sz="1800" kern="100" dirty="0">
+                <a:solidFill>
+                  <a:srgbClr val="000000"/>
+                </a:solidFill>
+                <a:effectLst/>
+                <a:latin typeface="Century Gothic" panose="020B0502020202020204" pitchFamily="34" charset="0"/>
+                <a:ea typeface="Calibri" panose="020F0502020204030204" pitchFamily="34" charset="0"/>
+                <a:cs typeface="Arial" panose="020B0604020202020204" pitchFamily="34" charset="0"/>
+              </a:rPr>
+              <a:t> -p ~/.</a:t>
+            </a:r>
+            <a:r>
+              <a:rPr lang="en-US" sz="1800" kern="100" dirty="0" err="1">
+                <a:solidFill>
+                  <a:srgbClr val="000000"/>
+                </a:solidFill>
+                <a:effectLst/>
+                <a:latin typeface="Century Gothic" panose="020B0502020202020204" pitchFamily="34" charset="0"/>
+                <a:ea typeface="Calibri" panose="020F0502020204030204" pitchFamily="34" charset="0"/>
+                <a:cs typeface="Arial" panose="020B0604020202020204" pitchFamily="34" charset="0"/>
+              </a:rPr>
+              <a:t>dbt</a:t>
+            </a:r>
+            <a:r>
+              <a:rPr lang="en-US" sz="1800" kern="100" dirty="0">
+                <a:solidFill>
+                  <a:srgbClr val="000000"/>
+                </a:solidFill>
+                <a:effectLst/>
+                <a:latin typeface="Century Gothic" panose="020B0502020202020204" pitchFamily="34" charset="0"/>
+                <a:ea typeface="Calibri" panose="020F0502020204030204" pitchFamily="34" charset="0"/>
+                <a:cs typeface="Arial" panose="020B0604020202020204" pitchFamily="34" charset="0"/>
+              </a:rPr>
+              <a:t>/ &amp;&amp; cat &lt;&lt; EOF &gt; ~/.</a:t>
+            </a:r>
+            <a:r>
+              <a:rPr lang="en-US" sz="1800" kern="100" dirty="0" err="1">
+                <a:solidFill>
+                  <a:srgbClr val="000000"/>
+                </a:solidFill>
+                <a:effectLst/>
+                <a:latin typeface="Century Gothic" panose="020B0502020202020204" pitchFamily="34" charset="0"/>
+                <a:ea typeface="Calibri" panose="020F0502020204030204" pitchFamily="34" charset="0"/>
+                <a:cs typeface="Arial" panose="020B0604020202020204" pitchFamily="34" charset="0"/>
+              </a:rPr>
+              <a:t>dbt</a:t>
+            </a:r>
+            <a:r>
+              <a:rPr lang="en-US" sz="1800" kern="100" dirty="0">
+                <a:solidFill>
+                  <a:srgbClr val="000000"/>
+                </a:solidFill>
+                <a:effectLst/>
+                <a:latin typeface="Century Gothic" panose="020B0502020202020204" pitchFamily="34" charset="0"/>
+                <a:ea typeface="Calibri" panose="020F0502020204030204" pitchFamily="34" charset="0"/>
+                <a:cs typeface="Arial" panose="020B0604020202020204" pitchFamily="34" charset="0"/>
+              </a:rPr>
+              <a:t>/</a:t>
+            </a:r>
+            <a:r>
+              <a:rPr lang="en-US" sz="1800" kern="100" dirty="0" err="1">
+                <a:solidFill>
+                  <a:srgbClr val="000000"/>
+                </a:solidFill>
+                <a:effectLst/>
+                <a:latin typeface="Century Gothic" panose="020B0502020202020204" pitchFamily="34" charset="0"/>
+                <a:ea typeface="Calibri" panose="020F0502020204030204" pitchFamily="34" charset="0"/>
+                <a:cs typeface="Arial" panose="020B0604020202020204" pitchFamily="34" charset="0"/>
+              </a:rPr>
+              <a:t>profiles.yml</a:t>
+            </a:r>
+            <a:endParaRPr lang="fr-FR" sz="1800" kern="100" dirty="0">
+              <a:effectLst/>
+              <a:latin typeface="Century Gothic" panose="020B0502020202020204" pitchFamily="34" charset="0"/>
+              <a:ea typeface="Calibri" panose="020F0502020204030204" pitchFamily="34" charset="0"/>
+              <a:cs typeface="Arial" panose="020B0604020202020204" pitchFamily="34" charset="0"/>
+            </a:endParaRPr>
+          </a:p>
+          <a:p>
+            <a:pPr>
+              <a:lnSpc>
+                <a:spcPct val="107000"/>
+              </a:lnSpc>
+              <a:spcAft>
+                <a:spcPts val="800"/>
+              </a:spcAft>
+              <a:buNone/>
+            </a:pPr>
+            <a:r>
+              <a:rPr lang="en-US" sz="1800" kern="100" dirty="0" err="1">
+                <a:solidFill>
+                  <a:srgbClr val="000000"/>
+                </a:solidFill>
+                <a:effectLst/>
+                <a:latin typeface="Century Gothic" panose="020B0502020202020204" pitchFamily="34" charset="0"/>
+                <a:ea typeface="Calibri" panose="020F0502020204030204" pitchFamily="34" charset="0"/>
+                <a:cs typeface="Arial" panose="020B0604020202020204" pitchFamily="34" charset="0"/>
+              </a:rPr>
+              <a:t>exam_tech_bigdata</a:t>
+            </a:r>
+            <a:r>
+              <a:rPr lang="en-US" sz="1800" kern="100" dirty="0">
+                <a:solidFill>
+                  <a:srgbClr val="000000"/>
+                </a:solidFill>
+                <a:effectLst/>
+                <a:latin typeface="Century Gothic" panose="020B0502020202020204" pitchFamily="34" charset="0"/>
+                <a:ea typeface="Calibri" panose="020F0502020204030204" pitchFamily="34" charset="0"/>
+                <a:cs typeface="Arial" panose="020B0604020202020204" pitchFamily="34" charset="0"/>
+              </a:rPr>
+              <a:t>:</a:t>
+            </a:r>
+            <a:endParaRPr lang="fr-FR" sz="1800" kern="100" dirty="0">
+              <a:effectLst/>
+              <a:latin typeface="Century Gothic" panose="020B0502020202020204" pitchFamily="34" charset="0"/>
+              <a:ea typeface="Calibri" panose="020F0502020204030204" pitchFamily="34" charset="0"/>
+              <a:cs typeface="Arial" panose="020B0604020202020204" pitchFamily="34" charset="0"/>
+            </a:endParaRPr>
+          </a:p>
+          <a:p>
+            <a:pPr>
+              <a:lnSpc>
+                <a:spcPct val="107000"/>
+              </a:lnSpc>
+              <a:spcAft>
+                <a:spcPts val="800"/>
+              </a:spcAft>
+              <a:buNone/>
+            </a:pPr>
+            <a:r>
+              <a:rPr lang="en-US" sz="1800" kern="100" dirty="0">
+                <a:solidFill>
+                  <a:srgbClr val="000000"/>
+                </a:solidFill>
+                <a:effectLst/>
+                <a:latin typeface="Century Gothic" panose="020B0502020202020204" pitchFamily="34" charset="0"/>
+                <a:ea typeface="Calibri" panose="020F0502020204030204" pitchFamily="34" charset="0"/>
+                <a:cs typeface="Arial" panose="020B0604020202020204" pitchFamily="34" charset="0"/>
+              </a:rPr>
+              <a:t>  target: dev</a:t>
+            </a:r>
+            <a:endParaRPr lang="fr-FR" sz="1800" kern="100" dirty="0">
+              <a:effectLst/>
+              <a:latin typeface="Century Gothic" panose="020B0502020202020204" pitchFamily="34" charset="0"/>
+              <a:ea typeface="Calibri" panose="020F0502020204030204" pitchFamily="34" charset="0"/>
+              <a:cs typeface="Arial" panose="020B0604020202020204" pitchFamily="34" charset="0"/>
+            </a:endParaRPr>
+          </a:p>
+          <a:p>
+            <a:pPr>
+              <a:lnSpc>
+                <a:spcPct val="107000"/>
+              </a:lnSpc>
+              <a:spcAft>
+                <a:spcPts val="800"/>
+              </a:spcAft>
+              <a:buNone/>
+            </a:pPr>
+            <a:r>
+              <a:rPr lang="en-US" sz="1800" kern="100" dirty="0">
+                <a:solidFill>
+                  <a:srgbClr val="000000"/>
+                </a:solidFill>
+                <a:effectLst/>
+                <a:latin typeface="Century Gothic" panose="020B0502020202020204" pitchFamily="34" charset="0"/>
+                <a:ea typeface="Calibri" panose="020F0502020204030204" pitchFamily="34" charset="0"/>
+                <a:cs typeface="Arial" panose="020B0604020202020204" pitchFamily="34" charset="0"/>
+              </a:rPr>
+              <a:t>  outputs:</a:t>
+            </a:r>
+            <a:endParaRPr lang="fr-FR" sz="1800" kern="100" dirty="0">
+              <a:effectLst/>
+              <a:latin typeface="Century Gothic" panose="020B0502020202020204" pitchFamily="34" charset="0"/>
+              <a:ea typeface="Calibri" panose="020F0502020204030204" pitchFamily="34" charset="0"/>
+              <a:cs typeface="Arial" panose="020B0604020202020204" pitchFamily="34" charset="0"/>
+            </a:endParaRPr>
+          </a:p>
+          <a:p>
+            <a:pPr>
+              <a:lnSpc>
+                <a:spcPct val="107000"/>
+              </a:lnSpc>
+              <a:spcAft>
+                <a:spcPts val="800"/>
+              </a:spcAft>
+              <a:buNone/>
+            </a:pPr>
+            <a:r>
+              <a:rPr lang="en-US" sz="1800" kern="100" dirty="0">
+                <a:solidFill>
+                  <a:srgbClr val="000000"/>
+                </a:solidFill>
+                <a:effectLst/>
+                <a:latin typeface="Century Gothic" panose="020B0502020202020204" pitchFamily="34" charset="0"/>
+                <a:ea typeface="Calibri" panose="020F0502020204030204" pitchFamily="34" charset="0"/>
+                <a:cs typeface="Arial" panose="020B0604020202020204" pitchFamily="34" charset="0"/>
+              </a:rPr>
+              <a:t>    dev:</a:t>
+            </a:r>
+            <a:endParaRPr lang="fr-FR" sz="1800" kern="100" dirty="0">
+              <a:effectLst/>
+              <a:latin typeface="Century Gothic" panose="020B0502020202020204" pitchFamily="34" charset="0"/>
+              <a:ea typeface="Calibri" panose="020F0502020204030204" pitchFamily="34" charset="0"/>
+              <a:cs typeface="Arial" panose="020B0604020202020204" pitchFamily="34" charset="0"/>
+            </a:endParaRPr>
+          </a:p>
+          <a:p>
+            <a:pPr>
+              <a:lnSpc>
+                <a:spcPct val="107000"/>
+              </a:lnSpc>
+              <a:spcAft>
+                <a:spcPts val="800"/>
+              </a:spcAft>
+              <a:buNone/>
+            </a:pPr>
+            <a:r>
+              <a:rPr lang="en-US" sz="1800" kern="100" dirty="0">
+                <a:solidFill>
+                  <a:srgbClr val="000000"/>
+                </a:solidFill>
+                <a:effectLst/>
+                <a:latin typeface="Century Gothic" panose="020B0502020202020204" pitchFamily="34" charset="0"/>
+                <a:ea typeface="Calibri" panose="020F0502020204030204" pitchFamily="34" charset="0"/>
+                <a:cs typeface="Arial" panose="020B0604020202020204" pitchFamily="34" charset="0"/>
+              </a:rPr>
+              <a:t>      type: snowflake</a:t>
+            </a:r>
+            <a:endParaRPr lang="fr-FR" sz="1800" kern="100" dirty="0">
+              <a:effectLst/>
+              <a:latin typeface="Century Gothic" panose="020B0502020202020204" pitchFamily="34" charset="0"/>
+              <a:ea typeface="Calibri" panose="020F0502020204030204" pitchFamily="34" charset="0"/>
+              <a:cs typeface="Arial" panose="020B0604020202020204" pitchFamily="34" charset="0"/>
+            </a:endParaRPr>
+          </a:p>
+          <a:p>
+            <a:pPr>
+              <a:lnSpc>
+                <a:spcPct val="107000"/>
+              </a:lnSpc>
+              <a:spcAft>
+                <a:spcPts val="800"/>
+              </a:spcAft>
+              <a:buNone/>
+            </a:pPr>
+            <a:r>
+              <a:rPr lang="en-US" sz="1800" kern="100" dirty="0">
+                <a:solidFill>
+                  <a:srgbClr val="000000"/>
+                </a:solidFill>
+                <a:effectLst/>
+                <a:latin typeface="Century Gothic" panose="020B0502020202020204" pitchFamily="34" charset="0"/>
+                <a:ea typeface="Calibri" panose="020F0502020204030204" pitchFamily="34" charset="0"/>
+                <a:cs typeface="Arial" panose="020B0604020202020204" pitchFamily="34" charset="0"/>
+              </a:rPr>
+              <a:t>      account: [</a:t>
+            </a:r>
+            <a:r>
+              <a:rPr lang="en-US" sz="1800" kern="100" dirty="0" err="1">
+                <a:solidFill>
+                  <a:srgbClr val="000000"/>
+                </a:solidFill>
+                <a:effectLst/>
+                <a:latin typeface="Century Gothic" panose="020B0502020202020204" pitchFamily="34" charset="0"/>
+                <a:ea typeface="Calibri" panose="020F0502020204030204" pitchFamily="34" charset="0"/>
+                <a:cs typeface="Arial" panose="020B0604020202020204" pitchFamily="34" charset="0"/>
+              </a:rPr>
+              <a:t>ton_id_snowflake</a:t>
+            </a:r>
+            <a:r>
+              <a:rPr lang="en-US" sz="1800" kern="100" dirty="0">
+                <a:solidFill>
+                  <a:srgbClr val="000000"/>
+                </a:solidFill>
+                <a:effectLst/>
+                <a:latin typeface="Century Gothic" panose="020B0502020202020204" pitchFamily="34" charset="0"/>
+                <a:ea typeface="Calibri" panose="020F0502020204030204" pitchFamily="34" charset="0"/>
+                <a:cs typeface="Arial" panose="020B0604020202020204" pitchFamily="34" charset="0"/>
+              </a:rPr>
+              <a:t>]</a:t>
+            </a:r>
+            <a:endParaRPr lang="fr-FR" sz="1800" kern="100" dirty="0">
+              <a:effectLst/>
+              <a:latin typeface="Century Gothic" panose="020B0502020202020204" pitchFamily="34" charset="0"/>
+              <a:ea typeface="Calibri" panose="020F0502020204030204" pitchFamily="34" charset="0"/>
+              <a:cs typeface="Arial" panose="020B0604020202020204" pitchFamily="34" charset="0"/>
+            </a:endParaRPr>
+          </a:p>
+          <a:p>
+            <a:pPr>
+              <a:lnSpc>
+                <a:spcPct val="107000"/>
+              </a:lnSpc>
+              <a:spcAft>
+                <a:spcPts val="800"/>
+              </a:spcAft>
+              <a:buNone/>
+            </a:pPr>
+            <a:r>
+              <a:rPr lang="en-US" sz="1800" kern="100" dirty="0">
+                <a:solidFill>
+                  <a:srgbClr val="000000"/>
+                </a:solidFill>
+                <a:effectLst/>
+                <a:latin typeface="Century Gothic" panose="020B0502020202020204" pitchFamily="34" charset="0"/>
+                <a:ea typeface="Calibri" panose="020F0502020204030204" pitchFamily="34" charset="0"/>
+                <a:cs typeface="Arial" panose="020B0604020202020204" pitchFamily="34" charset="0"/>
+              </a:rPr>
+              <a:t>      </a:t>
+            </a:r>
+            <a:r>
+              <a:rPr lang="fr-FR" sz="1800" kern="100" dirty="0">
+                <a:solidFill>
+                  <a:srgbClr val="000000"/>
+                </a:solidFill>
+                <a:effectLst/>
+                <a:latin typeface="Century Gothic" panose="020B0502020202020204" pitchFamily="34" charset="0"/>
+                <a:ea typeface="Calibri" panose="020F0502020204030204" pitchFamily="34" charset="0"/>
+                <a:cs typeface="Arial" panose="020B0604020202020204" pitchFamily="34" charset="0"/>
+              </a:rPr>
+              <a:t>user: [</a:t>
+            </a:r>
+            <a:r>
+              <a:rPr lang="fr-FR" sz="1800" kern="100" dirty="0" err="1">
+                <a:solidFill>
+                  <a:srgbClr val="000000"/>
+                </a:solidFill>
+                <a:effectLst/>
+                <a:latin typeface="Century Gothic" panose="020B0502020202020204" pitchFamily="34" charset="0"/>
+                <a:ea typeface="Calibri" panose="020F0502020204030204" pitchFamily="34" charset="0"/>
+                <a:cs typeface="Arial" panose="020B0604020202020204" pitchFamily="34" charset="0"/>
+              </a:rPr>
+              <a:t>ton_utilisateur</a:t>
+            </a:r>
+            <a:r>
+              <a:rPr lang="fr-FR" sz="1800" kern="100" dirty="0">
+                <a:solidFill>
+                  <a:srgbClr val="000000"/>
+                </a:solidFill>
+                <a:effectLst/>
+                <a:latin typeface="Century Gothic" panose="020B0502020202020204" pitchFamily="34" charset="0"/>
+                <a:ea typeface="Calibri" panose="020F0502020204030204" pitchFamily="34" charset="0"/>
+                <a:cs typeface="Arial" panose="020B0604020202020204" pitchFamily="34" charset="0"/>
+              </a:rPr>
+              <a:t>]</a:t>
+            </a:r>
+            <a:endParaRPr lang="fr-FR" sz="1800" kern="100" dirty="0">
+              <a:effectLst/>
+              <a:latin typeface="Century Gothic" panose="020B0502020202020204" pitchFamily="34" charset="0"/>
+              <a:ea typeface="Calibri" panose="020F0502020204030204" pitchFamily="34" charset="0"/>
+              <a:cs typeface="Arial" panose="020B0604020202020204" pitchFamily="34" charset="0"/>
+            </a:endParaRPr>
+          </a:p>
+          <a:p>
+            <a:pPr>
+              <a:lnSpc>
+                <a:spcPct val="107000"/>
+              </a:lnSpc>
+              <a:spcAft>
+                <a:spcPts val="800"/>
+              </a:spcAft>
+              <a:buNone/>
+            </a:pPr>
+            <a:r>
+              <a:rPr lang="fr-FR" sz="1800" kern="100" dirty="0">
+                <a:solidFill>
+                  <a:srgbClr val="000000"/>
+                </a:solidFill>
+                <a:effectLst/>
+                <a:latin typeface="Century Gothic" panose="020B0502020202020204" pitchFamily="34" charset="0"/>
+                <a:ea typeface="Calibri" panose="020F0502020204030204" pitchFamily="34" charset="0"/>
+                <a:cs typeface="Arial" panose="020B0604020202020204" pitchFamily="34" charset="0"/>
+              </a:rPr>
+              <a:t>      </a:t>
+            </a:r>
+            <a:r>
+              <a:rPr lang="fr-FR" sz="1800" kern="100" dirty="0" err="1">
+                <a:solidFill>
+                  <a:srgbClr val="000000"/>
+                </a:solidFill>
+                <a:effectLst/>
+                <a:latin typeface="Century Gothic" panose="020B0502020202020204" pitchFamily="34" charset="0"/>
+                <a:ea typeface="Calibri" panose="020F0502020204030204" pitchFamily="34" charset="0"/>
+                <a:cs typeface="Arial" panose="020B0604020202020204" pitchFamily="34" charset="0"/>
+              </a:rPr>
+              <a:t>password</a:t>
+            </a:r>
+            <a:r>
+              <a:rPr lang="fr-FR" sz="1800" kern="100" dirty="0">
+                <a:solidFill>
+                  <a:srgbClr val="000000"/>
+                </a:solidFill>
+                <a:effectLst/>
+                <a:latin typeface="Century Gothic" panose="020B0502020202020204" pitchFamily="34" charset="0"/>
+                <a:ea typeface="Calibri" panose="020F0502020204030204" pitchFamily="34" charset="0"/>
+                <a:cs typeface="Arial" panose="020B0604020202020204" pitchFamily="34" charset="0"/>
+              </a:rPr>
+              <a:t>: [</a:t>
+            </a:r>
+            <a:r>
+              <a:rPr lang="fr-FR" sz="1800" kern="100" dirty="0" err="1">
+                <a:solidFill>
+                  <a:srgbClr val="000000"/>
+                </a:solidFill>
+                <a:effectLst/>
+                <a:latin typeface="Century Gothic" panose="020B0502020202020204" pitchFamily="34" charset="0"/>
+                <a:ea typeface="Calibri" panose="020F0502020204030204" pitchFamily="34" charset="0"/>
+                <a:cs typeface="Arial" panose="020B0604020202020204" pitchFamily="34" charset="0"/>
+              </a:rPr>
+              <a:t>ton_mot_de_passe</a:t>
+            </a:r>
+            <a:r>
+              <a:rPr lang="fr-FR" sz="1800" kern="100" dirty="0">
+                <a:solidFill>
+                  <a:srgbClr val="000000"/>
+                </a:solidFill>
+                <a:effectLst/>
+                <a:latin typeface="Century Gothic" panose="020B0502020202020204" pitchFamily="34" charset="0"/>
+                <a:ea typeface="Calibri" panose="020F0502020204030204" pitchFamily="34" charset="0"/>
+                <a:cs typeface="Arial" panose="020B0604020202020204" pitchFamily="34" charset="0"/>
+              </a:rPr>
+              <a:t>]</a:t>
+            </a:r>
+            <a:endParaRPr lang="fr-FR" sz="1800" kern="100" dirty="0">
+              <a:effectLst/>
+              <a:latin typeface="Century Gothic" panose="020B0502020202020204" pitchFamily="34" charset="0"/>
+              <a:ea typeface="Calibri" panose="020F0502020204030204" pitchFamily="34" charset="0"/>
+              <a:cs typeface="Arial" panose="020B0604020202020204" pitchFamily="34" charset="0"/>
+            </a:endParaRPr>
+          </a:p>
+          <a:p>
+            <a:pPr>
+              <a:lnSpc>
+                <a:spcPct val="107000"/>
+              </a:lnSpc>
+              <a:spcAft>
+                <a:spcPts val="800"/>
+              </a:spcAft>
+              <a:buNone/>
+            </a:pPr>
+            <a:r>
+              <a:rPr lang="fr-FR" sz="1800" kern="100" dirty="0">
+                <a:solidFill>
+                  <a:srgbClr val="000000"/>
+                </a:solidFill>
+                <a:effectLst/>
+                <a:latin typeface="Century Gothic" panose="020B0502020202020204" pitchFamily="34" charset="0"/>
+                <a:ea typeface="Calibri" panose="020F0502020204030204" pitchFamily="34" charset="0"/>
+                <a:cs typeface="Arial" panose="020B0604020202020204" pitchFamily="34" charset="0"/>
+              </a:rPr>
+              <a:t>      </a:t>
+            </a:r>
+            <a:r>
+              <a:rPr lang="en-US" sz="1800" kern="100" dirty="0">
+                <a:solidFill>
+                  <a:srgbClr val="000000"/>
+                </a:solidFill>
+                <a:effectLst/>
+                <a:latin typeface="Century Gothic" panose="020B0502020202020204" pitchFamily="34" charset="0"/>
+                <a:ea typeface="Calibri" panose="020F0502020204030204" pitchFamily="34" charset="0"/>
+                <a:cs typeface="Arial" panose="020B0604020202020204" pitchFamily="34" charset="0"/>
+              </a:rPr>
+              <a:t>role: ACCOUNTADMIN</a:t>
+            </a:r>
+            <a:endParaRPr lang="fr-FR" sz="1800" kern="100" dirty="0">
+              <a:effectLst/>
+              <a:latin typeface="Century Gothic" panose="020B0502020202020204" pitchFamily="34" charset="0"/>
+              <a:ea typeface="Calibri" panose="020F0502020204030204" pitchFamily="34" charset="0"/>
+              <a:cs typeface="Arial" panose="020B0604020202020204" pitchFamily="34" charset="0"/>
+            </a:endParaRPr>
+          </a:p>
+          <a:p>
+            <a:pPr>
+              <a:lnSpc>
+                <a:spcPct val="107000"/>
+              </a:lnSpc>
+              <a:spcAft>
+                <a:spcPts val="800"/>
+              </a:spcAft>
+              <a:buNone/>
+            </a:pPr>
+            <a:r>
+              <a:rPr lang="en-US" sz="1800" kern="100" dirty="0">
+                <a:solidFill>
+                  <a:srgbClr val="000000"/>
+                </a:solidFill>
+                <a:effectLst/>
+                <a:latin typeface="Century Gothic" panose="020B0502020202020204" pitchFamily="34" charset="0"/>
+                <a:ea typeface="Calibri" panose="020F0502020204030204" pitchFamily="34" charset="0"/>
+                <a:cs typeface="Arial" panose="020B0604020202020204" pitchFamily="34" charset="0"/>
+              </a:rPr>
+              <a:t>      database: BOOKSHOP</a:t>
+            </a:r>
+            <a:endParaRPr lang="fr-FR" sz="1800" kern="100" dirty="0">
+              <a:effectLst/>
+              <a:latin typeface="Century Gothic" panose="020B0502020202020204" pitchFamily="34" charset="0"/>
+              <a:ea typeface="Calibri" panose="020F0502020204030204" pitchFamily="34" charset="0"/>
+              <a:cs typeface="Arial" panose="020B0604020202020204" pitchFamily="34" charset="0"/>
+            </a:endParaRPr>
+          </a:p>
+          <a:p>
+            <a:pPr>
+              <a:lnSpc>
+                <a:spcPct val="107000"/>
+              </a:lnSpc>
+              <a:spcAft>
+                <a:spcPts val="800"/>
+              </a:spcAft>
+              <a:buNone/>
+            </a:pPr>
+            <a:r>
+              <a:rPr lang="en-US" sz="1800" kern="100" dirty="0">
+                <a:solidFill>
+                  <a:srgbClr val="000000"/>
+                </a:solidFill>
+                <a:effectLst/>
+                <a:latin typeface="Century Gothic" panose="020B0502020202020204" pitchFamily="34" charset="0"/>
+                <a:ea typeface="Calibri" panose="020F0502020204030204" pitchFamily="34" charset="0"/>
+                <a:cs typeface="Arial" panose="020B0604020202020204" pitchFamily="34" charset="0"/>
+              </a:rPr>
+              <a:t>      warehouse: COMPUTE_WH</a:t>
+            </a:r>
+            <a:endParaRPr lang="fr-FR" sz="1800" kern="100" dirty="0">
+              <a:effectLst/>
+              <a:latin typeface="Century Gothic" panose="020B0502020202020204" pitchFamily="34" charset="0"/>
+              <a:ea typeface="Calibri" panose="020F0502020204030204" pitchFamily="34" charset="0"/>
+              <a:cs typeface="Arial" panose="020B0604020202020204" pitchFamily="34" charset="0"/>
+            </a:endParaRPr>
+          </a:p>
+          <a:p>
+            <a:pPr>
+              <a:lnSpc>
+                <a:spcPct val="107000"/>
+              </a:lnSpc>
+              <a:spcAft>
+                <a:spcPts val="800"/>
+              </a:spcAft>
+              <a:buNone/>
+            </a:pPr>
+            <a:r>
+              <a:rPr lang="en-US" sz="1800" kern="100" dirty="0">
+                <a:solidFill>
+                  <a:srgbClr val="000000"/>
+                </a:solidFill>
+                <a:effectLst/>
+                <a:latin typeface="Century Gothic" panose="020B0502020202020204" pitchFamily="34" charset="0"/>
+                <a:ea typeface="Calibri" panose="020F0502020204030204" pitchFamily="34" charset="0"/>
+                <a:cs typeface="Arial" panose="020B0604020202020204" pitchFamily="34" charset="0"/>
+              </a:rPr>
+              <a:t>      </a:t>
+            </a:r>
+            <a:r>
+              <a:rPr lang="fr-FR" sz="1800" kern="100" dirty="0" err="1">
+                <a:solidFill>
+                  <a:srgbClr val="000000"/>
+                </a:solidFill>
+                <a:effectLst/>
+                <a:latin typeface="Century Gothic" panose="020B0502020202020204" pitchFamily="34" charset="0"/>
+                <a:ea typeface="Calibri" panose="020F0502020204030204" pitchFamily="34" charset="0"/>
+                <a:cs typeface="Arial" panose="020B0604020202020204" pitchFamily="34" charset="0"/>
+              </a:rPr>
+              <a:t>schema</a:t>
+            </a:r>
+            <a:r>
+              <a:rPr lang="fr-FR" sz="1800" kern="100" dirty="0">
+                <a:solidFill>
+                  <a:srgbClr val="000000"/>
+                </a:solidFill>
+                <a:effectLst/>
+                <a:latin typeface="Century Gothic" panose="020B0502020202020204" pitchFamily="34" charset="0"/>
+                <a:ea typeface="Calibri" panose="020F0502020204030204" pitchFamily="34" charset="0"/>
+                <a:cs typeface="Arial" panose="020B0604020202020204" pitchFamily="34" charset="0"/>
+              </a:rPr>
+              <a:t>: STAGGING</a:t>
+            </a:r>
+            <a:endParaRPr lang="fr-FR" sz="1800" kern="100" dirty="0">
+              <a:effectLst/>
+              <a:latin typeface="Century Gothic" panose="020B0502020202020204" pitchFamily="34" charset="0"/>
+              <a:ea typeface="Calibri" panose="020F0502020204030204" pitchFamily="34" charset="0"/>
+              <a:cs typeface="Arial" panose="020B0604020202020204" pitchFamily="34" charset="0"/>
+            </a:endParaRPr>
+          </a:p>
+          <a:p>
+            <a:pPr>
+              <a:lnSpc>
+                <a:spcPct val="107000"/>
+              </a:lnSpc>
+              <a:spcAft>
+                <a:spcPts val="800"/>
+              </a:spcAft>
+              <a:buNone/>
+            </a:pPr>
+            <a:r>
+              <a:rPr lang="fr-FR" sz="1800" kern="100" dirty="0">
+                <a:solidFill>
+                  <a:srgbClr val="000000"/>
+                </a:solidFill>
+                <a:effectLst/>
+                <a:latin typeface="Century Gothic" panose="020B0502020202020204" pitchFamily="34" charset="0"/>
+                <a:ea typeface="Calibri" panose="020F0502020204030204" pitchFamily="34" charset="0"/>
+                <a:cs typeface="Arial" panose="020B0604020202020204" pitchFamily="34" charset="0"/>
+              </a:rPr>
+              <a:t>      threads: 4</a:t>
+            </a:r>
+            <a:endParaRPr lang="fr-FR" sz="1800" kern="100" dirty="0">
+              <a:effectLst/>
+              <a:latin typeface="Century Gothic" panose="020B0502020202020204" pitchFamily="34" charset="0"/>
+              <a:ea typeface="Calibri" panose="020F0502020204030204" pitchFamily="34" charset="0"/>
+              <a:cs typeface="Arial" panose="020B0604020202020204" pitchFamily="34" charset="0"/>
+            </a:endParaRPr>
+          </a:p>
+          <a:p>
+            <a:pPr>
+              <a:lnSpc>
+                <a:spcPct val="107000"/>
+              </a:lnSpc>
+              <a:spcAft>
+                <a:spcPts val="800"/>
+              </a:spcAft>
+              <a:buNone/>
+            </a:pPr>
+            <a:r>
+              <a:rPr lang="fr-FR" sz="1800" kern="100" dirty="0">
+                <a:solidFill>
+                  <a:srgbClr val="000000"/>
+                </a:solidFill>
+                <a:effectLst/>
+                <a:latin typeface="Century Gothic" panose="020B0502020202020204" pitchFamily="34" charset="0"/>
+                <a:ea typeface="Calibri" panose="020F0502020204030204" pitchFamily="34" charset="0"/>
+                <a:cs typeface="Arial" panose="020B0604020202020204" pitchFamily="34" charset="0"/>
+              </a:rPr>
+              <a:t>EOF</a:t>
+            </a:r>
+            <a:endParaRPr lang="fr-FR" sz="1800" kern="100" dirty="0">
+              <a:effectLst/>
+              <a:latin typeface="Century Gothic" panose="020B0502020202020204" pitchFamily="34" charset="0"/>
+              <a:ea typeface="Calibri" panose="020F0502020204030204" pitchFamily="34" charset="0"/>
+              <a:cs typeface="Arial" panose="020B0604020202020204" pitchFamily="34" charset="0"/>
+            </a:endParaRPr>
+          </a:p>
+        </p:txBody>
+      </p:sp>
+      <p:sp>
+        <p:nvSpPr>
+          <p:cNvPr id="18" name="ZoneTexte 17">
+            <a:extLst>
+              <a:ext uri="{FF2B5EF4-FFF2-40B4-BE49-F238E27FC236}">
+                <a16:creationId xmlns:a16="http://schemas.microsoft.com/office/drawing/2014/main" id="{4CF38A16-8DA3-A19C-EA70-2981C6B807B2}"/>
+              </a:ext>
+            </a:extLst>
+          </p:cNvPr>
+          <p:cNvSpPr txBox="1"/>
+          <p:nvPr/>
+        </p:nvSpPr>
+        <p:spPr>
+          <a:xfrm>
+            <a:off x="0" y="4022557"/>
+            <a:ext cx="5828914" cy="365869"/>
+          </a:xfrm>
+          <a:prstGeom prst="rect">
+            <a:avLst/>
+          </a:prstGeom>
+          <a:solidFill>
+            <a:schemeClr val="tx1">
+              <a:lumMod val="85000"/>
+            </a:schemeClr>
+          </a:solidFill>
+        </p:spPr>
+        <p:txBody>
+          <a:bodyPr wrap="square">
+            <a:spAutoFit/>
+          </a:bodyPr>
+          <a:lstStyle/>
+          <a:p>
+            <a:pPr>
+              <a:lnSpc>
+                <a:spcPct val="107000"/>
+              </a:lnSpc>
+              <a:spcAft>
+                <a:spcPts val="800"/>
+              </a:spcAft>
+              <a:buNone/>
+            </a:pPr>
+            <a:r>
+              <a:rPr lang="fr-FR" sz="1800" kern="100" dirty="0">
+                <a:solidFill>
+                  <a:srgbClr val="000000"/>
+                </a:solidFill>
+                <a:effectLst/>
+                <a:latin typeface="Century Gothic" panose="020B0502020202020204" pitchFamily="34" charset="0"/>
+                <a:ea typeface="Calibri" panose="020F0502020204030204" pitchFamily="34" charset="0"/>
+                <a:cs typeface="Arial" panose="020B0604020202020204" pitchFamily="34" charset="0"/>
+              </a:rPr>
+              <a:t>cat ~/.</a:t>
+            </a:r>
+            <a:r>
+              <a:rPr lang="fr-FR" sz="1800" kern="100" dirty="0" err="1">
+                <a:solidFill>
+                  <a:srgbClr val="000000"/>
+                </a:solidFill>
+                <a:effectLst/>
+                <a:latin typeface="Century Gothic" panose="020B0502020202020204" pitchFamily="34" charset="0"/>
+                <a:ea typeface="Calibri" panose="020F0502020204030204" pitchFamily="34" charset="0"/>
+                <a:cs typeface="Arial" panose="020B0604020202020204" pitchFamily="34" charset="0"/>
+              </a:rPr>
+              <a:t>dbt</a:t>
+            </a:r>
+            <a:r>
+              <a:rPr lang="fr-FR" sz="1800" kern="100" dirty="0">
+                <a:solidFill>
+                  <a:srgbClr val="000000"/>
+                </a:solidFill>
+                <a:effectLst/>
+                <a:latin typeface="Century Gothic" panose="020B0502020202020204" pitchFamily="34" charset="0"/>
+                <a:ea typeface="Calibri" panose="020F0502020204030204" pitchFamily="34" charset="0"/>
+                <a:cs typeface="Arial" panose="020B0604020202020204" pitchFamily="34" charset="0"/>
+              </a:rPr>
+              <a:t>/</a:t>
+            </a:r>
+            <a:r>
+              <a:rPr lang="fr-FR" sz="1800" kern="100" dirty="0" err="1">
+                <a:solidFill>
+                  <a:srgbClr val="000000"/>
+                </a:solidFill>
+                <a:effectLst/>
+                <a:latin typeface="Century Gothic" panose="020B0502020202020204" pitchFamily="34" charset="0"/>
+                <a:ea typeface="Calibri" panose="020F0502020204030204" pitchFamily="34" charset="0"/>
+                <a:cs typeface="Arial" panose="020B0604020202020204" pitchFamily="34" charset="0"/>
+              </a:rPr>
+              <a:t>profiles.yml</a:t>
+            </a:r>
+            <a:endParaRPr lang="fr-FR" sz="1800" kern="100" dirty="0">
+              <a:effectLst/>
+              <a:latin typeface="Century Gothic" panose="020B0502020202020204" pitchFamily="34" charset="0"/>
+              <a:ea typeface="Calibri" panose="020F0502020204030204" pitchFamily="34" charset="0"/>
+              <a:cs typeface="Arial" panose="020B0604020202020204" pitchFamily="34" charset="0"/>
+            </a:endParaRPr>
+          </a:p>
+        </p:txBody>
+      </p:sp>
+    </p:spTree>
+    <p:extLst>
+      <p:ext uri="{BB962C8B-B14F-4D97-AF65-F5344CB8AC3E}">
+        <p14:creationId xmlns:p14="http://schemas.microsoft.com/office/powerpoint/2010/main" val="3601266478"/>
+      </p:ext>
+    </p:extLst>
+  </p:cSld>
+  <p:clrMapOvr>
+    <a:masterClrMapping/>
+  </p:clrMapOvr>
+  <p:transition spd="slow">
+    <p:push dir="u"/>
+  </p:transition>
+</p:sld>
+</file>
+
+<file path=ppt/slides/slide6.xml><?xml version="1.0" encoding="utf-8"?>
+<p:sld xmlns:a="http://schemas.openxmlformats.org/drawingml/2006/main" xmlns:r="http://schemas.openxmlformats.org/officeDocument/2006/relationships" xmlns:p="http://schemas.openxmlformats.org/presentationml/2006/main">
+  <p:cSld>
+    <p:spTree>
+      <p:nvGrpSpPr>
+        <p:cNvPr id="1" name="">
+          <a:extLst>
+            <a:ext uri="{FF2B5EF4-FFF2-40B4-BE49-F238E27FC236}">
+              <a16:creationId xmlns:a16="http://schemas.microsoft.com/office/drawing/2014/main" id="{C9B4053C-83B1-FE07-70B0-62CF27390AD3}"/>
+            </a:ext>
+          </a:extLst>
+        </p:cNvPr>
+        <p:cNvGrpSpPr/>
+        <p:nvPr/>
+      </p:nvGrpSpPr>
+      <p:grpSpPr>
+        <a:xfrm>
+          <a:off x="0" y="0"/>
+          <a:ext cx="0" cy="0"/>
+          <a:chOff x="0" y="0"/>
+          <a:chExt cx="0" cy="0"/>
+        </a:xfrm>
+      </p:grpSpPr>
+      <p:sp>
+        <p:nvSpPr>
+          <p:cNvPr id="2" name="Titre 1">
+            <a:extLst>
+              <a:ext uri="{FF2B5EF4-FFF2-40B4-BE49-F238E27FC236}">
+                <a16:creationId xmlns:a16="http://schemas.microsoft.com/office/drawing/2014/main" id="{5DCE0D16-F672-103F-231F-74060517AAB5}"/>
+              </a:ext>
+            </a:extLst>
+          </p:cNvPr>
+          <p:cNvSpPr>
+            <a:spLocks noGrp="1"/>
+          </p:cNvSpPr>
+          <p:nvPr>
+            <p:ph type="ctrTitle"/>
+          </p:nvPr>
+        </p:nvSpPr>
+        <p:spPr>
+          <a:xfrm>
+            <a:off x="624275" y="1243917"/>
+            <a:ext cx="5140732" cy="489342"/>
+          </a:xfrm>
+        </p:spPr>
+        <p:txBody>
+          <a:bodyPr>
+            <a:noAutofit/>
+          </a:bodyPr>
+          <a:lstStyle/>
+          <a:p>
+            <a:pPr algn="ctr"/>
+            <a:r>
+              <a:rPr lang="fr-FR" sz="2400" b="1" dirty="0"/>
+              <a:t>Création du fichier </a:t>
+            </a:r>
+            <a:r>
+              <a:rPr lang="fr-FR" sz="2400" b="1" dirty="0" err="1"/>
+              <a:t>profiles.yml</a:t>
+            </a:r>
+            <a:r>
+              <a:rPr lang="fr-FR" sz="2400" b="1" dirty="0"/>
+              <a:t> dans le container</a:t>
+            </a:r>
+            <a:endParaRPr lang="fr-FR" sz="2400" dirty="0"/>
+          </a:p>
+        </p:txBody>
+      </p:sp>
+      <p:sp>
+        <p:nvSpPr>
+          <p:cNvPr id="8" name="Titre 1">
+            <a:extLst>
+              <a:ext uri="{FF2B5EF4-FFF2-40B4-BE49-F238E27FC236}">
+                <a16:creationId xmlns:a16="http://schemas.microsoft.com/office/drawing/2014/main" id="{6B85A9F2-8DA2-A6C9-B9EF-51CB738A1AA6}"/>
+              </a:ext>
+            </a:extLst>
+          </p:cNvPr>
+          <p:cNvSpPr txBox="1">
+            <a:spLocks/>
+          </p:cNvSpPr>
+          <p:nvPr/>
+        </p:nvSpPr>
+        <p:spPr>
+          <a:xfrm>
+            <a:off x="2492477" y="144878"/>
+            <a:ext cx="8454052" cy="721789"/>
+          </a:xfrm>
+          <a:prstGeom prst="rect">
+            <a:avLst/>
+          </a:prstGeom>
+        </p:spPr>
+        <p:txBody>
+          <a:bodyPr vert="horz" lIns="91440" tIns="45720" rIns="91440" bIns="45720" rtlCol="0" anchor="b">
+            <a:noAutofit/>
+          </a:bodyPr>
+          <a:lstStyle>
+            <a:lvl1pPr algn="l" defTabSz="914400" rtl="0" eaLnBrk="1" latinLnBrk="0" hangingPunct="1">
+              <a:lnSpc>
+                <a:spcPct val="90000"/>
+              </a:lnSpc>
+              <a:spcBef>
+                <a:spcPct val="0"/>
+              </a:spcBef>
+              <a:buNone/>
+              <a:defRPr sz="4800" kern="1200" cap="all" baseline="0">
+                <a:solidFill>
+                  <a:schemeClr val="tx1"/>
+                </a:solidFill>
+                <a:latin typeface="+mj-lt"/>
+                <a:ea typeface="+mj-ea"/>
+                <a:cs typeface="+mj-cs"/>
+              </a:defRPr>
+            </a:lvl1pPr>
+          </a:lstStyle>
+          <a:p>
+            <a:pPr algn="ctr"/>
+            <a:r>
+              <a:rPr lang="fr-FR" b="1" dirty="0"/>
+              <a:t>SYSTEME DE VENTE DES LIVRES</a:t>
+            </a:r>
+          </a:p>
+        </p:txBody>
+      </p:sp>
+      <p:pic>
+        <p:nvPicPr>
+          <p:cNvPr id="12" name="Image 11">
+            <a:extLst>
+              <a:ext uri="{FF2B5EF4-FFF2-40B4-BE49-F238E27FC236}">
+                <a16:creationId xmlns:a16="http://schemas.microsoft.com/office/drawing/2014/main" id="{0136FC39-3F0D-11A4-8F73-A5F9F46E6489}"/>
+              </a:ext>
+            </a:extLst>
+          </p:cNvPr>
+          <p:cNvPicPr>
+            <a:picLocks noChangeAspect="1"/>
+          </p:cNvPicPr>
+          <p:nvPr/>
+        </p:nvPicPr>
+        <p:blipFill>
+          <a:blip r:embed="rId2">
+            <a:extLst>
+              <a:ext uri="{28A0092B-C50C-407E-A947-70E740481C1C}">
+                <a14:useLocalDpi xmlns:a14="http://schemas.microsoft.com/office/drawing/2010/main" val="0"/>
+              </a:ext>
+            </a:extLst>
+          </a:blip>
+          <a:stretch>
+            <a:fillRect/>
+          </a:stretch>
+        </p:blipFill>
+        <p:spPr>
+          <a:xfrm>
+            <a:off x="0" y="0"/>
+            <a:ext cx="2359742" cy="866667"/>
+          </a:xfrm>
+          <a:prstGeom prst="rect">
+            <a:avLst/>
+          </a:prstGeom>
+        </p:spPr>
+      </p:pic>
+      <p:sp>
+        <p:nvSpPr>
+          <p:cNvPr id="25" name="Flèche : chevron 24">
+            <a:extLst>
+              <a:ext uri="{FF2B5EF4-FFF2-40B4-BE49-F238E27FC236}">
+                <a16:creationId xmlns:a16="http://schemas.microsoft.com/office/drawing/2014/main" id="{BE9E4D5D-7270-3FCE-9D10-28F2E008CAD7}"/>
+              </a:ext>
+            </a:extLst>
+          </p:cNvPr>
+          <p:cNvSpPr/>
+          <p:nvPr/>
+        </p:nvSpPr>
+        <p:spPr>
+          <a:xfrm>
+            <a:off x="193189" y="991722"/>
+            <a:ext cx="576876" cy="439170"/>
+          </a:xfrm>
+          <a:prstGeom prst="chevron">
+            <a:avLst/>
+          </a:prstGeom>
+          <a:solidFill>
+            <a:schemeClr val="tx2"/>
+          </a:solidFill>
+        </p:spPr>
+        <p:style>
+          <a:lnRef idx="2">
+            <a:schemeClr val="accent1">
+              <a:shade val="15000"/>
+            </a:schemeClr>
+          </a:lnRef>
+          <a:fillRef idx="1">
+            <a:schemeClr val="accent1"/>
+          </a:fillRef>
+          <a:effectRef idx="0">
+            <a:schemeClr val="accent1"/>
+          </a:effectRef>
+          <a:fontRef idx="minor">
+            <a:schemeClr val="lt1"/>
+          </a:fontRef>
+        </p:style>
+        <p:txBody>
+          <a:bodyPr rtlCol="0" anchor="ctr"/>
+          <a:lstStyle/>
+          <a:p>
+            <a:pPr algn="ctr"/>
+            <a:endParaRPr lang="fr-FR" sz="1600">
+              <a:solidFill>
+                <a:schemeClr val="accent5">
+                  <a:lumMod val="50000"/>
+                </a:schemeClr>
+              </a:solidFill>
+            </a:endParaRPr>
+          </a:p>
+        </p:txBody>
+      </p:sp>
+      <p:pic>
+        <p:nvPicPr>
+          <p:cNvPr id="3" name="Image 2">
+            <a:extLst>
+              <a:ext uri="{FF2B5EF4-FFF2-40B4-BE49-F238E27FC236}">
+                <a16:creationId xmlns:a16="http://schemas.microsoft.com/office/drawing/2014/main" id="{9CB6BF3D-679E-C7A5-A2B6-CF64D39957EB}"/>
+              </a:ext>
+            </a:extLst>
+          </p:cNvPr>
+          <p:cNvPicPr>
+            <a:picLocks noChangeAspect="1"/>
+          </p:cNvPicPr>
+          <p:nvPr/>
+        </p:nvPicPr>
+        <p:blipFill>
+          <a:blip r:embed="rId3"/>
+          <a:stretch>
+            <a:fillRect/>
+          </a:stretch>
+        </p:blipFill>
+        <p:spPr>
+          <a:xfrm>
+            <a:off x="2980634" y="1837970"/>
+            <a:ext cx="5902811" cy="4725062"/>
+          </a:xfrm>
+          <a:prstGeom prst="rect">
+            <a:avLst/>
+          </a:prstGeom>
+          <a:ln>
+            <a:solidFill>
+              <a:schemeClr val="bg1">
+                <a:lumMod val="85000"/>
+              </a:schemeClr>
+            </a:solidFill>
+          </a:ln>
+        </p:spPr>
+      </p:pic>
+    </p:spTree>
+    <p:extLst>
+      <p:ext uri="{BB962C8B-B14F-4D97-AF65-F5344CB8AC3E}">
+        <p14:creationId xmlns:p14="http://schemas.microsoft.com/office/powerpoint/2010/main" val="140951782"/>
+      </p:ext>
+    </p:extLst>
+  </p:cSld>
+  <p:clrMapOvr>
+    <a:masterClrMapping/>
+  </p:clrMapOvr>
+  <p:transition spd="slow">
+    <p:push dir="u"/>
+  </p:transition>
+</p:sld>
+</file>
+
+<file path=ppt/slides/slide7.xml><?xml version="1.0" encoding="utf-8"?>
+<p:sld xmlns:a="http://schemas.openxmlformats.org/drawingml/2006/main" xmlns:r="http://schemas.openxmlformats.org/officeDocument/2006/relationships" xmlns:p="http://schemas.openxmlformats.org/presentationml/2006/main">
+  <p:cSld>
+    <p:spTree>
+      <p:nvGrpSpPr>
+        <p:cNvPr id="1" name="">
+          <a:extLst>
+            <a:ext uri="{FF2B5EF4-FFF2-40B4-BE49-F238E27FC236}">
+              <a16:creationId xmlns:a16="http://schemas.microsoft.com/office/drawing/2014/main" id="{32755B2C-9684-A53B-DE12-14982360259B}"/>
+            </a:ext>
+          </a:extLst>
+        </p:cNvPr>
+        <p:cNvGrpSpPr/>
+        <p:nvPr/>
+      </p:nvGrpSpPr>
+      <p:grpSpPr>
+        <a:xfrm>
+          <a:off x="0" y="0"/>
+          <a:ext cx="0" cy="0"/>
+          <a:chOff x="0" y="0"/>
+          <a:chExt cx="0" cy="0"/>
+        </a:xfrm>
+      </p:grpSpPr>
+      <p:sp>
+        <p:nvSpPr>
+          <p:cNvPr id="2" name="Titre 1">
+            <a:extLst>
+              <a:ext uri="{FF2B5EF4-FFF2-40B4-BE49-F238E27FC236}">
+                <a16:creationId xmlns:a16="http://schemas.microsoft.com/office/drawing/2014/main" id="{367481DF-A8C7-5685-B255-9CEA985AD050}"/>
+              </a:ext>
+            </a:extLst>
+          </p:cNvPr>
+          <p:cNvSpPr>
+            <a:spLocks noGrp="1"/>
+          </p:cNvSpPr>
+          <p:nvPr>
+            <p:ph type="ctrTitle"/>
+          </p:nvPr>
+        </p:nvSpPr>
+        <p:spPr>
+          <a:xfrm>
+            <a:off x="770066" y="991722"/>
+            <a:ext cx="4539354" cy="439170"/>
+          </a:xfrm>
+        </p:spPr>
+        <p:txBody>
+          <a:bodyPr>
+            <a:noAutofit/>
+          </a:bodyPr>
+          <a:lstStyle/>
+          <a:p>
+            <a:pPr algn="ctr"/>
+            <a:r>
+              <a:rPr lang="fr-FR" sz="2400" b="1" dirty="0"/>
+              <a:t>Configuration et test de DBT</a:t>
+            </a:r>
+            <a:endParaRPr lang="fr-FR" sz="2400" dirty="0"/>
+          </a:p>
+        </p:txBody>
+      </p:sp>
+      <p:sp>
+        <p:nvSpPr>
+          <p:cNvPr id="8" name="Titre 1">
+            <a:extLst>
+              <a:ext uri="{FF2B5EF4-FFF2-40B4-BE49-F238E27FC236}">
+                <a16:creationId xmlns:a16="http://schemas.microsoft.com/office/drawing/2014/main" id="{AF4B8933-CB55-A19A-AE94-DAF959245C03}"/>
+              </a:ext>
+            </a:extLst>
+          </p:cNvPr>
+          <p:cNvSpPr txBox="1">
+            <a:spLocks/>
+          </p:cNvSpPr>
+          <p:nvPr/>
+        </p:nvSpPr>
+        <p:spPr>
+          <a:xfrm>
+            <a:off x="2492477" y="144878"/>
+            <a:ext cx="8454052" cy="721789"/>
+          </a:xfrm>
+          <a:prstGeom prst="rect">
+            <a:avLst/>
+          </a:prstGeom>
+        </p:spPr>
+        <p:txBody>
+          <a:bodyPr vert="horz" lIns="91440" tIns="45720" rIns="91440" bIns="45720" rtlCol="0" anchor="b">
+            <a:noAutofit/>
+          </a:bodyPr>
+          <a:lstStyle>
+            <a:lvl1pPr algn="l" defTabSz="914400" rtl="0" eaLnBrk="1" latinLnBrk="0" hangingPunct="1">
+              <a:lnSpc>
+                <a:spcPct val="90000"/>
+              </a:lnSpc>
+              <a:spcBef>
+                <a:spcPct val="0"/>
+              </a:spcBef>
+              <a:buNone/>
+              <a:defRPr sz="4800" kern="1200" cap="all" baseline="0">
+                <a:solidFill>
+                  <a:schemeClr val="tx1"/>
+                </a:solidFill>
+                <a:latin typeface="+mj-lt"/>
+                <a:ea typeface="+mj-ea"/>
+                <a:cs typeface="+mj-cs"/>
+              </a:defRPr>
+            </a:lvl1pPr>
+          </a:lstStyle>
+          <a:p>
+            <a:pPr algn="ctr"/>
+            <a:r>
+              <a:rPr lang="fr-FR" b="1" dirty="0"/>
+              <a:t>SYSTEME DE VENTE DES LIVRES</a:t>
+            </a:r>
+          </a:p>
+        </p:txBody>
+      </p:sp>
+      <p:pic>
+        <p:nvPicPr>
+          <p:cNvPr id="12" name="Image 11">
+            <a:extLst>
+              <a:ext uri="{FF2B5EF4-FFF2-40B4-BE49-F238E27FC236}">
+                <a16:creationId xmlns:a16="http://schemas.microsoft.com/office/drawing/2014/main" id="{EE25251B-7DE7-358B-3948-68A7D196991D}"/>
+              </a:ext>
+            </a:extLst>
+          </p:cNvPr>
+          <p:cNvPicPr>
+            <a:picLocks noChangeAspect="1"/>
+          </p:cNvPicPr>
+          <p:nvPr/>
+        </p:nvPicPr>
+        <p:blipFill>
+          <a:blip r:embed="rId2">
+            <a:extLst>
+              <a:ext uri="{28A0092B-C50C-407E-A947-70E740481C1C}">
+                <a14:useLocalDpi xmlns:a14="http://schemas.microsoft.com/office/drawing/2010/main" val="0"/>
+              </a:ext>
+            </a:extLst>
+          </a:blip>
+          <a:stretch>
+            <a:fillRect/>
+          </a:stretch>
+        </p:blipFill>
+        <p:spPr>
+          <a:xfrm>
+            <a:off x="0" y="0"/>
+            <a:ext cx="2359742" cy="866667"/>
+          </a:xfrm>
+          <a:prstGeom prst="rect">
+            <a:avLst/>
+          </a:prstGeom>
+        </p:spPr>
+      </p:pic>
+      <p:sp>
+        <p:nvSpPr>
+          <p:cNvPr id="25" name="Flèche : chevron 24">
+            <a:extLst>
+              <a:ext uri="{FF2B5EF4-FFF2-40B4-BE49-F238E27FC236}">
+                <a16:creationId xmlns:a16="http://schemas.microsoft.com/office/drawing/2014/main" id="{761EF762-13A6-20C6-7AE4-963A8DC070C3}"/>
+              </a:ext>
+            </a:extLst>
+          </p:cNvPr>
+          <p:cNvSpPr/>
+          <p:nvPr/>
+        </p:nvSpPr>
+        <p:spPr>
+          <a:xfrm>
+            <a:off x="193189" y="991722"/>
+            <a:ext cx="576876" cy="439170"/>
+          </a:xfrm>
+          <a:prstGeom prst="chevron">
+            <a:avLst/>
+          </a:prstGeom>
+          <a:solidFill>
+            <a:schemeClr val="tx2"/>
+          </a:solidFill>
+        </p:spPr>
+        <p:style>
+          <a:lnRef idx="2">
+            <a:schemeClr val="accent1">
+              <a:shade val="15000"/>
+            </a:schemeClr>
+          </a:lnRef>
+          <a:fillRef idx="1">
+            <a:schemeClr val="accent1"/>
+          </a:fillRef>
+          <a:effectRef idx="0">
+            <a:schemeClr val="accent1"/>
+          </a:effectRef>
+          <a:fontRef idx="minor">
+            <a:schemeClr val="lt1"/>
+          </a:fontRef>
+        </p:style>
+        <p:txBody>
+          <a:bodyPr rtlCol="0" anchor="ctr"/>
+          <a:lstStyle/>
+          <a:p>
+            <a:pPr algn="ctr"/>
+            <a:endParaRPr lang="fr-FR" sz="1600">
+              <a:solidFill>
+                <a:schemeClr val="accent5">
+                  <a:lumMod val="50000"/>
+                </a:schemeClr>
+              </a:solidFill>
+            </a:endParaRPr>
+          </a:p>
+        </p:txBody>
+      </p:sp>
+      <p:sp>
+        <p:nvSpPr>
+          <p:cNvPr id="5" name="ZoneTexte 4">
+            <a:extLst>
+              <a:ext uri="{FF2B5EF4-FFF2-40B4-BE49-F238E27FC236}">
+                <a16:creationId xmlns:a16="http://schemas.microsoft.com/office/drawing/2014/main" id="{682F8B4F-4F45-B0C1-EAEC-0A08D1CF6633}"/>
+              </a:ext>
+            </a:extLst>
+          </p:cNvPr>
+          <p:cNvSpPr txBox="1"/>
+          <p:nvPr/>
+        </p:nvSpPr>
+        <p:spPr>
+          <a:xfrm>
+            <a:off x="193189" y="1555947"/>
+            <a:ext cx="5116231" cy="365869"/>
+          </a:xfrm>
+          <a:prstGeom prst="rect">
+            <a:avLst/>
+          </a:prstGeom>
+          <a:solidFill>
+            <a:schemeClr val="tx1">
+              <a:lumMod val="85000"/>
+            </a:schemeClr>
+          </a:solidFill>
+        </p:spPr>
+        <p:txBody>
+          <a:bodyPr wrap="square">
+            <a:spAutoFit/>
+          </a:bodyPr>
+          <a:lstStyle/>
+          <a:p>
+            <a:pPr>
+              <a:lnSpc>
+                <a:spcPct val="107000"/>
+              </a:lnSpc>
+              <a:spcAft>
+                <a:spcPts val="800"/>
+              </a:spcAft>
+              <a:buNone/>
+            </a:pPr>
+            <a:r>
+              <a:rPr lang="fr-FR" sz="1800" kern="100" dirty="0" err="1">
+                <a:solidFill>
+                  <a:srgbClr val="000000"/>
+                </a:solidFill>
+                <a:effectLst/>
+                <a:latin typeface="Century Gothic" panose="020B0502020202020204" pitchFamily="34" charset="0"/>
+                <a:ea typeface="Calibri" panose="020F0502020204030204" pitchFamily="34" charset="0"/>
+                <a:cs typeface="Arial" panose="020B0604020202020204" pitchFamily="34" charset="0"/>
+              </a:rPr>
+              <a:t>dbt</a:t>
+            </a:r>
+            <a:r>
+              <a:rPr lang="fr-FR" sz="1800" kern="100" dirty="0">
+                <a:solidFill>
+                  <a:srgbClr val="000000"/>
+                </a:solidFill>
+                <a:effectLst/>
+                <a:latin typeface="Century Gothic" panose="020B0502020202020204" pitchFamily="34" charset="0"/>
+                <a:ea typeface="Calibri" panose="020F0502020204030204" pitchFamily="34" charset="0"/>
+                <a:cs typeface="Arial" panose="020B0604020202020204" pitchFamily="34" charset="0"/>
+              </a:rPr>
+              <a:t> </a:t>
+            </a:r>
+            <a:r>
+              <a:rPr lang="fr-FR" sz="1800" kern="100" dirty="0" err="1">
+                <a:solidFill>
+                  <a:srgbClr val="000000"/>
+                </a:solidFill>
+                <a:effectLst/>
+                <a:latin typeface="Century Gothic" panose="020B0502020202020204" pitchFamily="34" charset="0"/>
+                <a:ea typeface="Calibri" panose="020F0502020204030204" pitchFamily="34" charset="0"/>
+                <a:cs typeface="Arial" panose="020B0604020202020204" pitchFamily="34" charset="0"/>
+              </a:rPr>
+              <a:t>debug</a:t>
+            </a:r>
+            <a:endParaRPr lang="fr-FR" sz="1800" kern="100" dirty="0">
+              <a:effectLst/>
+              <a:latin typeface="Century Gothic" panose="020B0502020202020204" pitchFamily="34" charset="0"/>
+              <a:ea typeface="Calibri" panose="020F0502020204030204" pitchFamily="34" charset="0"/>
+              <a:cs typeface="Arial" panose="020B0604020202020204" pitchFamily="34" charset="0"/>
+            </a:endParaRPr>
+          </a:p>
+        </p:txBody>
+      </p:sp>
+      <p:graphicFrame>
+        <p:nvGraphicFramePr>
+          <p:cNvPr id="6" name="Tableau 5">
+            <a:extLst>
+              <a:ext uri="{FF2B5EF4-FFF2-40B4-BE49-F238E27FC236}">
+                <a16:creationId xmlns:a16="http://schemas.microsoft.com/office/drawing/2014/main" id="{947F9F11-6F00-D982-F42D-00749B65FFE9}"/>
+              </a:ext>
+            </a:extLst>
+          </p:cNvPr>
+          <p:cNvGraphicFramePr>
+            <a:graphicFrameLocks noGrp="1"/>
+          </p:cNvGraphicFramePr>
+          <p:nvPr>
+            <p:extLst>
+              <p:ext uri="{D42A27DB-BD31-4B8C-83A1-F6EECF244321}">
+                <p14:modId xmlns:p14="http://schemas.microsoft.com/office/powerpoint/2010/main" val="1095221504"/>
+              </p:ext>
+            </p:extLst>
+          </p:nvPr>
+        </p:nvGraphicFramePr>
+        <p:xfrm>
+          <a:off x="193188" y="2046871"/>
+          <a:ext cx="5116231" cy="937070"/>
+        </p:xfrm>
+        <a:graphic>
+          <a:graphicData uri="http://schemas.openxmlformats.org/drawingml/2006/table">
+            <a:tbl>
+              <a:tblPr firstRow="1" firstCol="1" bandRow="1">
+                <a:tableStyleId>{5C22544A-7EE6-4342-B048-85BDC9FD1C3A}</a:tableStyleId>
+              </a:tblPr>
+              <a:tblGrid>
+                <a:gridCol w="5116231">
+                  <a:extLst>
+                    <a:ext uri="{9D8B030D-6E8A-4147-A177-3AD203B41FA5}">
+                      <a16:colId xmlns:a16="http://schemas.microsoft.com/office/drawing/2014/main" val="2940421465"/>
+                    </a:ext>
+                  </a:extLst>
+                </a:gridCol>
+              </a:tblGrid>
+              <a:tr h="0">
+                <a:tc>
+                  <a:txBody>
+                    <a:bodyPr/>
+                    <a:lstStyle/>
+                    <a:p>
+                      <a:pPr algn="ctr">
+                        <a:lnSpc>
+                          <a:spcPct val="107000"/>
+                        </a:lnSpc>
+                        <a:spcAft>
+                          <a:spcPts val="800"/>
+                        </a:spcAft>
+                        <a:buNone/>
+                        <a:tabLst>
+                          <a:tab pos="1028700" algn="l"/>
+                        </a:tabLst>
+                      </a:pPr>
+                      <a:r>
+                        <a:rPr lang="fr-FR" sz="1200" kern="100" dirty="0">
+                          <a:solidFill>
+                            <a:schemeClr val="bg1"/>
+                          </a:solidFill>
+                          <a:effectLst/>
+                        </a:rPr>
+                        <a:t>Image retirée</a:t>
+                      </a:r>
+                      <a:endParaRPr lang="fr-FR" sz="1100" kern="100" dirty="0">
+                        <a:solidFill>
+                          <a:schemeClr val="bg1"/>
+                        </a:solidFill>
+                        <a:effectLst/>
+                      </a:endParaRPr>
+                    </a:p>
+                    <a:p>
+                      <a:pPr algn="ctr">
+                        <a:lnSpc>
+                          <a:spcPct val="107000"/>
+                        </a:lnSpc>
+                        <a:spcAft>
+                          <a:spcPts val="800"/>
+                        </a:spcAft>
+                        <a:buNone/>
+                        <a:tabLst>
+                          <a:tab pos="1028700" algn="l"/>
+                        </a:tabLst>
+                      </a:pPr>
+                      <a:r>
+                        <a:rPr lang="fr-FR" sz="1200" kern="100" dirty="0">
+                          <a:solidFill>
+                            <a:schemeClr val="bg1"/>
+                          </a:solidFill>
+                          <a:effectLst/>
+                        </a:rPr>
+                        <a:t> contenant des identifiants</a:t>
+                      </a:r>
+                      <a:endParaRPr lang="fr-FR" sz="1100" kern="100" dirty="0">
+                        <a:solidFill>
+                          <a:schemeClr val="bg1"/>
+                        </a:solidFill>
+                        <a:effectLst/>
+                      </a:endParaRPr>
+                    </a:p>
+                    <a:p>
+                      <a:pPr algn="ctr">
+                        <a:lnSpc>
+                          <a:spcPct val="107000"/>
+                        </a:lnSpc>
+                        <a:spcAft>
+                          <a:spcPts val="800"/>
+                        </a:spcAft>
+                        <a:buNone/>
+                        <a:tabLst>
+                          <a:tab pos="1028700" algn="l"/>
+                        </a:tabLst>
+                      </a:pPr>
+                      <a:r>
+                        <a:rPr lang="fr-FR" sz="1200" kern="100" dirty="0">
+                          <a:solidFill>
+                            <a:schemeClr val="bg1"/>
+                          </a:solidFill>
+                          <a:effectLst/>
+                        </a:rPr>
+                        <a:t> du vrai compte utilisateur</a:t>
+                      </a:r>
+                      <a:endParaRPr lang="fr-FR" sz="1100" kern="100" dirty="0">
+                        <a:solidFill>
+                          <a:schemeClr val="bg1"/>
+                        </a:solidFill>
+                        <a:effectLst/>
+                        <a:latin typeface="Calibri" panose="020F0502020204030204" pitchFamily="34" charset="0"/>
+                        <a:ea typeface="Calibri" panose="020F0502020204030204" pitchFamily="34" charset="0"/>
+                        <a:cs typeface="Times New Roman" panose="02020603050405020304" pitchFamily="18" charset="0"/>
+                      </a:endParaRPr>
+                    </a:p>
+                  </a:txBody>
+                  <a:tcPr marL="68580" marR="68580" marT="0" marB="0">
+                    <a:solidFill>
+                      <a:schemeClr val="tx1">
+                        <a:lumMod val="85000"/>
+                      </a:schemeClr>
+                    </a:solidFill>
+                  </a:tcPr>
+                </a:tc>
+                <a:extLst>
+                  <a:ext uri="{0D108BD9-81ED-4DB2-BD59-A6C34878D82A}">
+                    <a16:rowId xmlns:a16="http://schemas.microsoft.com/office/drawing/2014/main" val="32639966"/>
+                  </a:ext>
+                </a:extLst>
+              </a:tr>
+              <a:tr h="0">
+                <a:tc>
+                  <a:txBody>
+                    <a:bodyPr/>
+                    <a:lstStyle/>
+                    <a:p>
+                      <a:pPr algn="ctr">
+                        <a:lnSpc>
+                          <a:spcPct val="107000"/>
+                        </a:lnSpc>
+                        <a:spcAft>
+                          <a:spcPts val="800"/>
+                        </a:spcAft>
+                        <a:buNone/>
+                        <a:tabLst>
+                          <a:tab pos="1028700" algn="l"/>
+                        </a:tabLst>
+                      </a:pPr>
+                      <a:r>
+                        <a:rPr lang="fr-FR" sz="1000" kern="100" dirty="0">
+                          <a:solidFill>
+                            <a:schemeClr val="bg1"/>
+                          </a:solidFill>
+                          <a:effectLst/>
+                        </a:rPr>
+                        <a:t>Fig1.6. a : </a:t>
+                      </a:r>
+                      <a:r>
+                        <a:rPr lang="fr-FR" sz="1000" kern="100" dirty="0" err="1">
+                          <a:solidFill>
+                            <a:schemeClr val="bg1"/>
+                          </a:solidFill>
+                          <a:effectLst/>
+                        </a:rPr>
+                        <a:t>dbt</a:t>
+                      </a:r>
+                      <a:r>
+                        <a:rPr lang="fr-FR" sz="1000" kern="100" dirty="0">
+                          <a:solidFill>
+                            <a:schemeClr val="bg1"/>
+                          </a:solidFill>
+                          <a:effectLst/>
+                        </a:rPr>
+                        <a:t> </a:t>
+                      </a:r>
+                      <a:r>
+                        <a:rPr lang="fr-FR" sz="1000" kern="100" dirty="0" err="1">
+                          <a:solidFill>
+                            <a:schemeClr val="bg1"/>
+                          </a:solidFill>
+                          <a:effectLst/>
+                        </a:rPr>
+                        <a:t>debug</a:t>
+                      </a:r>
+                      <a:r>
+                        <a:rPr lang="fr-FR" sz="1000" kern="100" dirty="0">
+                          <a:solidFill>
+                            <a:schemeClr val="bg1"/>
+                          </a:solidFill>
+                          <a:effectLst/>
+                        </a:rPr>
+                        <a:t> qui montre que tout est OK</a:t>
+                      </a:r>
+                      <a:endParaRPr lang="fr-FR" sz="1100" kern="100" dirty="0">
+                        <a:solidFill>
+                          <a:schemeClr val="bg1"/>
+                        </a:solidFill>
+                        <a:effectLst/>
+                        <a:latin typeface="Calibri" panose="020F0502020204030204" pitchFamily="34" charset="0"/>
+                        <a:ea typeface="Calibri" panose="020F0502020204030204" pitchFamily="34" charset="0"/>
+                        <a:cs typeface="Times New Roman" panose="02020603050405020304" pitchFamily="18" charset="0"/>
+                      </a:endParaRPr>
+                    </a:p>
+                  </a:txBody>
+                  <a:tcPr marL="68580" marR="68580" marT="0" marB="0">
+                    <a:solidFill>
+                      <a:schemeClr val="tx1">
+                        <a:lumMod val="85000"/>
+                      </a:schemeClr>
+                    </a:solidFill>
+                  </a:tcPr>
+                </a:tc>
+                <a:extLst>
+                  <a:ext uri="{0D108BD9-81ED-4DB2-BD59-A6C34878D82A}">
+                    <a16:rowId xmlns:a16="http://schemas.microsoft.com/office/drawing/2014/main" val="2738853711"/>
+                  </a:ext>
+                </a:extLst>
+              </a:tr>
+            </a:tbl>
+          </a:graphicData>
+        </a:graphic>
+      </p:graphicFrame>
+      <p:sp>
+        <p:nvSpPr>
+          <p:cNvPr id="9" name="ZoneTexte 8">
+            <a:extLst>
+              <a:ext uri="{FF2B5EF4-FFF2-40B4-BE49-F238E27FC236}">
+                <a16:creationId xmlns:a16="http://schemas.microsoft.com/office/drawing/2014/main" id="{408C55D8-8879-06FE-6756-0FCCD0F83B31}"/>
+              </a:ext>
+            </a:extLst>
+          </p:cNvPr>
+          <p:cNvSpPr txBox="1"/>
+          <p:nvPr/>
+        </p:nvSpPr>
+        <p:spPr>
+          <a:xfrm>
+            <a:off x="193188" y="3108996"/>
+            <a:ext cx="5116231" cy="365869"/>
+          </a:xfrm>
+          <a:prstGeom prst="rect">
+            <a:avLst/>
+          </a:prstGeom>
+          <a:solidFill>
+            <a:schemeClr val="tx1">
+              <a:lumMod val="85000"/>
+            </a:schemeClr>
+          </a:solidFill>
+        </p:spPr>
+        <p:txBody>
+          <a:bodyPr wrap="square">
+            <a:spAutoFit/>
+          </a:bodyPr>
+          <a:lstStyle/>
+          <a:p>
+            <a:pPr>
+              <a:lnSpc>
+                <a:spcPct val="107000"/>
+              </a:lnSpc>
+              <a:spcAft>
+                <a:spcPts val="800"/>
+              </a:spcAft>
+              <a:buNone/>
+            </a:pPr>
+            <a:r>
+              <a:rPr lang="fr-FR" sz="1800" kern="100" dirty="0" err="1">
+                <a:solidFill>
+                  <a:srgbClr val="000000"/>
+                </a:solidFill>
+                <a:effectLst/>
+                <a:latin typeface="Century Gothic" panose="020B0502020202020204" pitchFamily="34" charset="0"/>
+                <a:ea typeface="Calibri" panose="020F0502020204030204" pitchFamily="34" charset="0"/>
+                <a:cs typeface="Arial" panose="020B0604020202020204" pitchFamily="34" charset="0"/>
+              </a:rPr>
+              <a:t>dbt</a:t>
+            </a:r>
+            <a:r>
+              <a:rPr lang="fr-FR" sz="1800" kern="100" dirty="0">
+                <a:solidFill>
+                  <a:srgbClr val="000000"/>
+                </a:solidFill>
+                <a:effectLst/>
+                <a:latin typeface="Century Gothic" panose="020B0502020202020204" pitchFamily="34" charset="0"/>
+                <a:ea typeface="Calibri" panose="020F0502020204030204" pitchFamily="34" charset="0"/>
+                <a:cs typeface="Arial" panose="020B0604020202020204" pitchFamily="34" charset="0"/>
+              </a:rPr>
+              <a:t> run</a:t>
+            </a:r>
+            <a:endParaRPr lang="fr-FR" sz="1800" kern="100" dirty="0">
+              <a:effectLst/>
+              <a:latin typeface="Century Gothic" panose="020B0502020202020204" pitchFamily="34" charset="0"/>
+              <a:ea typeface="Calibri" panose="020F0502020204030204" pitchFamily="34" charset="0"/>
+              <a:cs typeface="Arial" panose="020B0604020202020204" pitchFamily="34" charset="0"/>
+            </a:endParaRPr>
+          </a:p>
+        </p:txBody>
+      </p:sp>
+      <p:pic>
+        <p:nvPicPr>
+          <p:cNvPr id="10" name="Image 9">
+            <a:extLst>
+              <a:ext uri="{FF2B5EF4-FFF2-40B4-BE49-F238E27FC236}">
+                <a16:creationId xmlns:a16="http://schemas.microsoft.com/office/drawing/2014/main" id="{43750CA2-BD0D-AE51-D25E-8C5E3BF68CFB}"/>
+              </a:ext>
+            </a:extLst>
+          </p:cNvPr>
+          <p:cNvPicPr>
+            <a:picLocks noChangeAspect="1"/>
+          </p:cNvPicPr>
+          <p:nvPr/>
+        </p:nvPicPr>
+        <p:blipFill>
+          <a:blip r:embed="rId3"/>
+          <a:stretch>
+            <a:fillRect/>
+          </a:stretch>
+        </p:blipFill>
+        <p:spPr>
+          <a:xfrm>
+            <a:off x="5648632" y="1106128"/>
+            <a:ext cx="6543368" cy="5751872"/>
+          </a:xfrm>
+          <a:prstGeom prst="rect">
+            <a:avLst/>
+          </a:prstGeom>
+        </p:spPr>
+      </p:pic>
+      <p:sp>
+        <p:nvSpPr>
+          <p:cNvPr id="13" name="ZoneTexte 12">
+            <a:extLst>
+              <a:ext uri="{FF2B5EF4-FFF2-40B4-BE49-F238E27FC236}">
+                <a16:creationId xmlns:a16="http://schemas.microsoft.com/office/drawing/2014/main" id="{D01B11E0-2C1F-2663-2F33-166922B79914}"/>
+              </a:ext>
+            </a:extLst>
+          </p:cNvPr>
+          <p:cNvSpPr txBox="1"/>
+          <p:nvPr/>
+        </p:nvSpPr>
+        <p:spPr>
+          <a:xfrm>
+            <a:off x="193188" y="3669487"/>
+            <a:ext cx="5116231" cy="365869"/>
+          </a:xfrm>
+          <a:prstGeom prst="rect">
+            <a:avLst/>
+          </a:prstGeom>
+          <a:solidFill>
+            <a:schemeClr val="tx1">
+              <a:lumMod val="85000"/>
+            </a:schemeClr>
+          </a:solidFill>
+        </p:spPr>
+        <p:txBody>
+          <a:bodyPr wrap="square">
+            <a:spAutoFit/>
+          </a:bodyPr>
+          <a:lstStyle/>
+          <a:p>
+            <a:pPr>
+              <a:lnSpc>
+                <a:spcPct val="107000"/>
+              </a:lnSpc>
+              <a:spcAft>
+                <a:spcPts val="800"/>
+              </a:spcAft>
+              <a:buNone/>
+            </a:pPr>
+            <a:r>
+              <a:rPr lang="fr-FR" sz="1800" kern="100" dirty="0" err="1">
+                <a:solidFill>
+                  <a:srgbClr val="000000"/>
+                </a:solidFill>
+                <a:effectLst/>
+                <a:latin typeface="Century Gothic" panose="020B0502020202020204" pitchFamily="34" charset="0"/>
+                <a:ea typeface="Calibri" panose="020F0502020204030204" pitchFamily="34" charset="0"/>
+                <a:cs typeface="Arial" panose="020B0604020202020204" pitchFamily="34" charset="0"/>
+              </a:rPr>
+              <a:t>dbt</a:t>
+            </a:r>
+            <a:r>
+              <a:rPr lang="fr-FR" sz="1800" kern="100" dirty="0">
+                <a:solidFill>
+                  <a:srgbClr val="000000"/>
+                </a:solidFill>
+                <a:effectLst/>
+                <a:latin typeface="Century Gothic" panose="020B0502020202020204" pitchFamily="34" charset="0"/>
+                <a:ea typeface="Calibri" panose="020F0502020204030204" pitchFamily="34" charset="0"/>
+                <a:cs typeface="Arial" panose="020B0604020202020204" pitchFamily="34" charset="0"/>
+              </a:rPr>
+              <a:t> test</a:t>
+            </a:r>
+            <a:endParaRPr lang="fr-FR" sz="1800" kern="100" dirty="0">
+              <a:effectLst/>
+              <a:latin typeface="Century Gothic" panose="020B0502020202020204" pitchFamily="34" charset="0"/>
+              <a:ea typeface="Calibri" panose="020F0502020204030204" pitchFamily="34" charset="0"/>
+              <a:cs typeface="Arial" panose="020B0604020202020204" pitchFamily="34" charset="0"/>
+            </a:endParaRPr>
+          </a:p>
+        </p:txBody>
+      </p:sp>
+      <p:pic>
+        <p:nvPicPr>
+          <p:cNvPr id="14" name="Image 13">
+            <a:extLst>
+              <a:ext uri="{FF2B5EF4-FFF2-40B4-BE49-F238E27FC236}">
+                <a16:creationId xmlns:a16="http://schemas.microsoft.com/office/drawing/2014/main" id="{FCE9E068-1E06-C26B-BFC6-87C7F91586FC}"/>
+              </a:ext>
+            </a:extLst>
+          </p:cNvPr>
+          <p:cNvPicPr>
+            <a:picLocks noChangeAspect="1"/>
+          </p:cNvPicPr>
+          <p:nvPr/>
+        </p:nvPicPr>
+        <p:blipFill>
+          <a:blip r:embed="rId4"/>
+          <a:stretch>
+            <a:fillRect/>
+          </a:stretch>
+        </p:blipFill>
+        <p:spPr>
+          <a:xfrm>
+            <a:off x="193188" y="4164145"/>
+            <a:ext cx="5210175" cy="2693855"/>
+          </a:xfrm>
+          <a:prstGeom prst="rect">
+            <a:avLst/>
+          </a:prstGeom>
+          <a:ln>
+            <a:solidFill>
+              <a:schemeClr val="bg1">
+                <a:lumMod val="85000"/>
+              </a:schemeClr>
+            </a:solidFill>
+          </a:ln>
+        </p:spPr>
+      </p:pic>
+    </p:spTree>
+    <p:extLst>
+      <p:ext uri="{BB962C8B-B14F-4D97-AF65-F5344CB8AC3E}">
+        <p14:creationId xmlns:p14="http://schemas.microsoft.com/office/powerpoint/2010/main" val="2343611013"/>
+      </p:ext>
+    </p:extLst>
+  </p:cSld>
+  <p:clrMapOvr>
+    <a:masterClrMapping/>
+  </p:clrMapOvr>
+  <p:transition spd="slow">
+    <p:push dir="u"/>
+  </p:transition>
+</p:sld>
+</file>
+
+<file path=ppt/slides/slide8.xml><?xml version="1.0" encoding="utf-8"?>
+<p:sld xmlns:a="http://schemas.openxmlformats.org/drawingml/2006/main" xmlns:r="http://schemas.openxmlformats.org/officeDocument/2006/relationships" xmlns:p="http://schemas.openxmlformats.org/presentationml/2006/main">
+  <p:cSld>
+    <p:spTree>
+      <p:nvGrpSpPr>
+        <p:cNvPr id="1" name="">
+          <a:extLst>
+            <a:ext uri="{FF2B5EF4-FFF2-40B4-BE49-F238E27FC236}">
+              <a16:creationId xmlns:a16="http://schemas.microsoft.com/office/drawing/2014/main" id="{31A8BFED-ED68-1D7E-0789-2CFEBA28BA98}"/>
+            </a:ext>
+          </a:extLst>
+        </p:cNvPr>
+        <p:cNvGrpSpPr/>
+        <p:nvPr/>
+      </p:nvGrpSpPr>
+      <p:grpSpPr>
+        <a:xfrm>
+          <a:off x="0" y="0"/>
+          <a:ext cx="0" cy="0"/>
+          <a:chOff x="0" y="0"/>
+          <a:chExt cx="0" cy="0"/>
+        </a:xfrm>
+      </p:grpSpPr>
+      <p:sp>
+        <p:nvSpPr>
+          <p:cNvPr id="8" name="Titre 1">
+            <a:extLst>
+              <a:ext uri="{FF2B5EF4-FFF2-40B4-BE49-F238E27FC236}">
+                <a16:creationId xmlns:a16="http://schemas.microsoft.com/office/drawing/2014/main" id="{98533D7B-F61A-533C-2170-8851FF61F263}"/>
+              </a:ext>
+            </a:extLst>
+          </p:cNvPr>
+          <p:cNvSpPr txBox="1">
+            <a:spLocks/>
+          </p:cNvSpPr>
+          <p:nvPr/>
+        </p:nvSpPr>
+        <p:spPr>
+          <a:xfrm>
+            <a:off x="2492477" y="144878"/>
+            <a:ext cx="8454052" cy="721789"/>
+          </a:xfrm>
+          <a:prstGeom prst="rect">
+            <a:avLst/>
+          </a:prstGeom>
+        </p:spPr>
+        <p:txBody>
+          <a:bodyPr vert="horz" lIns="91440" tIns="45720" rIns="91440" bIns="45720" rtlCol="0" anchor="b">
+            <a:noAutofit/>
+          </a:bodyPr>
+          <a:lstStyle>
+            <a:lvl1pPr algn="l" defTabSz="914400" rtl="0" eaLnBrk="1" latinLnBrk="0" hangingPunct="1">
+              <a:lnSpc>
+                <a:spcPct val="90000"/>
+              </a:lnSpc>
+              <a:spcBef>
+                <a:spcPct val="0"/>
+              </a:spcBef>
+              <a:buNone/>
+              <a:defRPr sz="4800" kern="1200" cap="all" baseline="0">
+                <a:solidFill>
+                  <a:schemeClr val="tx1"/>
+                </a:solidFill>
+                <a:latin typeface="+mj-lt"/>
+                <a:ea typeface="+mj-ea"/>
+                <a:cs typeface="+mj-cs"/>
+              </a:defRPr>
+            </a:lvl1pPr>
+          </a:lstStyle>
+          <a:p>
+            <a:pPr algn="ctr"/>
+            <a:r>
+              <a:rPr lang="fr-FR" b="1" dirty="0"/>
+              <a:t>SYSTEME DE VENTE DES LIVRES</a:t>
+            </a:r>
+          </a:p>
+        </p:txBody>
+      </p:sp>
+      <p:pic>
+        <p:nvPicPr>
+          <p:cNvPr id="12" name="Image 11">
+            <a:extLst>
+              <a:ext uri="{FF2B5EF4-FFF2-40B4-BE49-F238E27FC236}">
+                <a16:creationId xmlns:a16="http://schemas.microsoft.com/office/drawing/2014/main" id="{D6AB175D-58EC-2EF3-E17E-07F36D03B2B9}"/>
+              </a:ext>
+            </a:extLst>
+          </p:cNvPr>
+          <p:cNvPicPr>
+            <a:picLocks noChangeAspect="1"/>
+          </p:cNvPicPr>
+          <p:nvPr/>
+        </p:nvPicPr>
+        <p:blipFill>
+          <a:blip r:embed="rId2">
+            <a:extLst>
+              <a:ext uri="{28A0092B-C50C-407E-A947-70E740481C1C}">
+                <a14:useLocalDpi xmlns:a14="http://schemas.microsoft.com/office/drawing/2010/main" val="0"/>
+              </a:ext>
+            </a:extLst>
+          </a:blip>
+          <a:stretch>
+            <a:fillRect/>
+          </a:stretch>
+        </p:blipFill>
+        <p:spPr>
+          <a:xfrm>
+            <a:off x="0" y="0"/>
+            <a:ext cx="2359742" cy="866667"/>
+          </a:xfrm>
+          <a:prstGeom prst="rect">
+            <a:avLst/>
+          </a:prstGeom>
+        </p:spPr>
+      </p:pic>
+      <p:sp>
+        <p:nvSpPr>
+          <p:cNvPr id="5" name="ZoneTexte 4">
+            <a:extLst>
+              <a:ext uri="{FF2B5EF4-FFF2-40B4-BE49-F238E27FC236}">
+                <a16:creationId xmlns:a16="http://schemas.microsoft.com/office/drawing/2014/main" id="{B3DADAC3-6528-DDE0-B6B6-D401AA2DD890}"/>
+              </a:ext>
+            </a:extLst>
+          </p:cNvPr>
+          <p:cNvSpPr txBox="1"/>
+          <p:nvPr/>
+        </p:nvSpPr>
+        <p:spPr>
+          <a:xfrm>
+            <a:off x="193189" y="1555947"/>
+            <a:ext cx="6089624" cy="366575"/>
+          </a:xfrm>
+          <a:prstGeom prst="rect">
+            <a:avLst/>
+          </a:prstGeom>
+          <a:solidFill>
+            <a:schemeClr val="tx1">
+              <a:lumMod val="85000"/>
+            </a:schemeClr>
+          </a:solidFill>
+        </p:spPr>
+        <p:txBody>
+          <a:bodyPr wrap="square">
+            <a:spAutoFit/>
+          </a:bodyPr>
+          <a:lstStyle/>
+          <a:p>
+            <a:pPr>
+              <a:lnSpc>
+                <a:spcPct val="107000"/>
+              </a:lnSpc>
+              <a:spcAft>
+                <a:spcPts val="800"/>
+              </a:spcAft>
+              <a:buNone/>
+            </a:pPr>
+            <a:r>
+              <a:rPr lang="fr-FR" sz="1800" u="sng" kern="100" dirty="0">
+                <a:solidFill>
+                  <a:schemeClr val="bg1"/>
+                </a:solidFill>
+                <a:effectLst/>
+                <a:latin typeface="Arial Nova" panose="020B0504020202020204" pitchFamily="34" charset="0"/>
+                <a:ea typeface="Calibri" panose="020F0502020204030204" pitchFamily="34" charset="0"/>
+                <a:cs typeface="Arial" panose="020B0604020202020204" pitchFamily="34" charset="0"/>
+                <a:hlinkClick r:id="rId3">
+                  <a:extLst>
+                    <a:ext uri="{A12FA001-AC4F-418D-AE19-62706E023703}">
+                      <ahyp:hlinkClr xmlns:ahyp="http://schemas.microsoft.com/office/drawing/2018/hyperlinkcolor" val="tx"/>
+                    </a:ext>
+                  </a:extLst>
+                </a:hlinkClick>
+              </a:rPr>
+              <a:t>http://localhost:8081</a:t>
+            </a:r>
+            <a:endParaRPr lang="fr-FR" sz="1600" kern="100" dirty="0">
+              <a:solidFill>
+                <a:schemeClr val="bg1"/>
+              </a:solidFill>
+              <a:effectLst/>
+              <a:latin typeface="Century Gothic" panose="020B0502020202020204" pitchFamily="34" charset="0"/>
+              <a:ea typeface="Calibri" panose="020F0502020204030204" pitchFamily="34" charset="0"/>
+              <a:cs typeface="Arial" panose="020B0604020202020204" pitchFamily="34" charset="0"/>
+            </a:endParaRPr>
+          </a:p>
+        </p:txBody>
+      </p:sp>
+      <p:sp>
+        <p:nvSpPr>
+          <p:cNvPr id="6" name="Titre 1">
+            <a:extLst>
+              <a:ext uri="{FF2B5EF4-FFF2-40B4-BE49-F238E27FC236}">
+                <a16:creationId xmlns:a16="http://schemas.microsoft.com/office/drawing/2014/main" id="{CF76EF69-8D56-9CC4-751A-4961B88F75E1}"/>
+              </a:ext>
+            </a:extLst>
+          </p:cNvPr>
+          <p:cNvSpPr>
+            <a:spLocks noGrp="1"/>
+          </p:cNvSpPr>
+          <p:nvPr>
+            <p:ph type="ctrTitle"/>
+          </p:nvPr>
+        </p:nvSpPr>
+        <p:spPr>
+          <a:xfrm>
+            <a:off x="770066" y="991722"/>
+            <a:ext cx="4539354" cy="439170"/>
+          </a:xfrm>
+        </p:spPr>
+        <p:txBody>
+          <a:bodyPr>
+            <a:noAutofit/>
+          </a:bodyPr>
+          <a:lstStyle/>
+          <a:p>
+            <a:pPr algn="ctr"/>
+            <a:r>
+              <a:rPr lang="fr-FR" sz="2400" b="1" dirty="0"/>
+              <a:t>Configuration et test de DBT</a:t>
+            </a:r>
+            <a:endParaRPr lang="fr-FR" sz="2400" dirty="0"/>
+          </a:p>
+        </p:txBody>
+      </p:sp>
+      <p:sp>
+        <p:nvSpPr>
+          <p:cNvPr id="7" name="Flèche : chevron 6">
+            <a:extLst>
+              <a:ext uri="{FF2B5EF4-FFF2-40B4-BE49-F238E27FC236}">
+                <a16:creationId xmlns:a16="http://schemas.microsoft.com/office/drawing/2014/main" id="{DFACA2DB-7889-64D1-2467-B156F5FCB539}"/>
+              </a:ext>
+            </a:extLst>
+          </p:cNvPr>
+          <p:cNvSpPr/>
+          <p:nvPr/>
+        </p:nvSpPr>
+        <p:spPr>
+          <a:xfrm>
+            <a:off x="193189" y="991722"/>
+            <a:ext cx="576876" cy="439170"/>
+          </a:xfrm>
+          <a:prstGeom prst="chevron">
+            <a:avLst/>
+          </a:prstGeom>
+          <a:solidFill>
+            <a:schemeClr val="tx2"/>
+          </a:solidFill>
+        </p:spPr>
+        <p:style>
+          <a:lnRef idx="2">
+            <a:schemeClr val="accent1">
+              <a:shade val="15000"/>
+            </a:schemeClr>
+          </a:lnRef>
+          <a:fillRef idx="1">
+            <a:schemeClr val="accent1"/>
+          </a:fillRef>
+          <a:effectRef idx="0">
+            <a:schemeClr val="accent1"/>
+          </a:effectRef>
+          <a:fontRef idx="minor">
+            <a:schemeClr val="lt1"/>
+          </a:fontRef>
+        </p:style>
+        <p:txBody>
+          <a:bodyPr rtlCol="0" anchor="ctr"/>
+          <a:lstStyle/>
+          <a:p>
+            <a:pPr algn="ctr"/>
+            <a:endParaRPr lang="fr-FR" sz="1600">
+              <a:solidFill>
+                <a:schemeClr val="accent5">
+                  <a:lumMod val="50000"/>
+                </a:schemeClr>
+              </a:solidFill>
+            </a:endParaRPr>
+          </a:p>
+        </p:txBody>
+      </p:sp>
+      <p:pic>
+        <p:nvPicPr>
+          <p:cNvPr id="9" name="Image 8">
+            <a:extLst>
+              <a:ext uri="{FF2B5EF4-FFF2-40B4-BE49-F238E27FC236}">
+                <a16:creationId xmlns:a16="http://schemas.microsoft.com/office/drawing/2014/main" id="{D8FEC40F-4D2B-C166-C0E1-5BB94334FB47}"/>
+              </a:ext>
+            </a:extLst>
+          </p:cNvPr>
+          <p:cNvPicPr>
+            <a:picLocks noChangeAspect="1"/>
+          </p:cNvPicPr>
+          <p:nvPr/>
+        </p:nvPicPr>
+        <p:blipFill>
+          <a:blip r:embed="rId4"/>
+          <a:stretch>
+            <a:fillRect/>
+          </a:stretch>
+        </p:blipFill>
+        <p:spPr>
+          <a:xfrm>
+            <a:off x="193189" y="2120172"/>
+            <a:ext cx="6089624" cy="2971800"/>
+          </a:xfrm>
+          <a:prstGeom prst="rect">
+            <a:avLst/>
+          </a:prstGeom>
+          <a:ln>
+            <a:solidFill>
+              <a:schemeClr val="bg1">
+                <a:lumMod val="85000"/>
+              </a:schemeClr>
+            </a:solidFill>
+          </a:ln>
+        </p:spPr>
+      </p:pic>
+      <p:pic>
+        <p:nvPicPr>
+          <p:cNvPr id="10" name="Image 9">
+            <a:extLst>
+              <a:ext uri="{FF2B5EF4-FFF2-40B4-BE49-F238E27FC236}">
+                <a16:creationId xmlns:a16="http://schemas.microsoft.com/office/drawing/2014/main" id="{748AAA73-8250-2B53-E0F2-9B55ECC23640}"/>
+              </a:ext>
+            </a:extLst>
+          </p:cNvPr>
+          <p:cNvPicPr>
+            <a:picLocks noChangeAspect="1"/>
+          </p:cNvPicPr>
+          <p:nvPr/>
+        </p:nvPicPr>
+        <p:blipFill>
+          <a:blip r:embed="rId5"/>
+          <a:stretch>
+            <a:fillRect/>
+          </a:stretch>
+        </p:blipFill>
+        <p:spPr>
+          <a:xfrm>
+            <a:off x="6614682" y="866667"/>
+            <a:ext cx="5384129" cy="2839073"/>
+          </a:xfrm>
+          <a:prstGeom prst="rect">
+            <a:avLst/>
+          </a:prstGeom>
+          <a:ln>
+            <a:solidFill>
+              <a:schemeClr val="bg1">
+                <a:lumMod val="85000"/>
+              </a:schemeClr>
+            </a:solidFill>
+          </a:ln>
+        </p:spPr>
+      </p:pic>
+      <p:pic>
+        <p:nvPicPr>
+          <p:cNvPr id="13" name="Image 12">
+            <a:extLst>
+              <a:ext uri="{FF2B5EF4-FFF2-40B4-BE49-F238E27FC236}">
+                <a16:creationId xmlns:a16="http://schemas.microsoft.com/office/drawing/2014/main" id="{0B937053-5057-BD88-677B-8CF86256B9F4}"/>
+              </a:ext>
+            </a:extLst>
+          </p:cNvPr>
+          <p:cNvPicPr>
+            <a:picLocks noChangeAspect="1"/>
+          </p:cNvPicPr>
+          <p:nvPr/>
+        </p:nvPicPr>
+        <p:blipFill>
+          <a:blip r:embed="rId6"/>
+          <a:stretch>
+            <a:fillRect/>
+          </a:stretch>
+        </p:blipFill>
+        <p:spPr>
+          <a:xfrm>
+            <a:off x="6614682" y="3886200"/>
+            <a:ext cx="5384129" cy="2971800"/>
+          </a:xfrm>
+          <a:prstGeom prst="rect">
+            <a:avLst/>
+          </a:prstGeom>
+          <a:ln>
+            <a:solidFill>
+              <a:schemeClr val="bg1">
+                <a:lumMod val="85000"/>
+              </a:schemeClr>
+            </a:solidFill>
+          </a:ln>
+        </p:spPr>
+      </p:pic>
+    </p:spTree>
+    <p:extLst>
+      <p:ext uri="{BB962C8B-B14F-4D97-AF65-F5344CB8AC3E}">
+        <p14:creationId xmlns:p14="http://schemas.microsoft.com/office/powerpoint/2010/main" val="3951204116"/>
+      </p:ext>
+    </p:extLst>
+  </p:cSld>
+  <p:clrMapOvr>
+    <a:masterClrMapping/>
+  </p:clrMapOvr>
+  <p:transition spd="slow">
+    <p:push dir="u"/>
+  </p:transition>
+</p:sld>
+</file>
+
+<file path=ppt/slides/slide9.xml><?xml version="1.0" encoding="utf-8"?>
+<p:sld xmlns:a="http://schemas.openxmlformats.org/drawingml/2006/main" xmlns:r="http://schemas.openxmlformats.org/officeDocument/2006/relationships" xmlns:p="http://schemas.openxmlformats.org/presentationml/2006/main">
+  <p:cSld>
+    <p:spTree>
+      <p:nvGrpSpPr>
+        <p:cNvPr id="1" name="">
+          <a:extLst>
+            <a:ext uri="{FF2B5EF4-FFF2-40B4-BE49-F238E27FC236}">
+              <a16:creationId xmlns:a16="http://schemas.microsoft.com/office/drawing/2014/main" id="{4116E8F3-1AE1-8E63-1C13-9A375A07060C}"/>
+            </a:ext>
+          </a:extLst>
+        </p:cNvPr>
+        <p:cNvGrpSpPr/>
+        <p:nvPr/>
+      </p:nvGrpSpPr>
+      <p:grpSpPr>
+        <a:xfrm>
+          <a:off x="0" y="0"/>
+          <a:ext cx="0" cy="0"/>
+          <a:chOff x="0" y="0"/>
+          <a:chExt cx="0" cy="0"/>
+        </a:xfrm>
+      </p:grpSpPr>
+      <p:sp>
+        <p:nvSpPr>
+          <p:cNvPr id="8" name="Titre 1">
+            <a:extLst>
+              <a:ext uri="{FF2B5EF4-FFF2-40B4-BE49-F238E27FC236}">
+                <a16:creationId xmlns:a16="http://schemas.microsoft.com/office/drawing/2014/main" id="{0900254C-0B5D-05D6-6B16-806160284524}"/>
+              </a:ext>
+            </a:extLst>
+          </p:cNvPr>
+          <p:cNvSpPr txBox="1">
+            <a:spLocks/>
+          </p:cNvSpPr>
+          <p:nvPr/>
+        </p:nvSpPr>
+        <p:spPr>
+          <a:xfrm>
+            <a:off x="2492477" y="144878"/>
+            <a:ext cx="8454052" cy="721789"/>
+          </a:xfrm>
+          <a:prstGeom prst="rect">
+            <a:avLst/>
+          </a:prstGeom>
+        </p:spPr>
+        <p:txBody>
+          <a:bodyPr vert="horz" lIns="91440" tIns="45720" rIns="91440" bIns="45720" rtlCol="0" anchor="b">
+            <a:noAutofit/>
+          </a:bodyPr>
+          <a:lstStyle>
+            <a:lvl1pPr algn="l" defTabSz="914400" rtl="0" eaLnBrk="1" latinLnBrk="0" hangingPunct="1">
+              <a:lnSpc>
+                <a:spcPct val="90000"/>
+              </a:lnSpc>
+              <a:spcBef>
+                <a:spcPct val="0"/>
+              </a:spcBef>
+              <a:buNone/>
+              <a:defRPr sz="4800" kern="1200" cap="all" baseline="0">
+                <a:solidFill>
+                  <a:schemeClr val="tx1"/>
+                </a:solidFill>
+                <a:latin typeface="+mj-lt"/>
+                <a:ea typeface="+mj-ea"/>
+                <a:cs typeface="+mj-cs"/>
+              </a:defRPr>
+            </a:lvl1pPr>
+          </a:lstStyle>
+          <a:p>
+            <a:pPr algn="ctr"/>
+            <a:r>
+              <a:rPr lang="fr-FR" b="1" dirty="0"/>
+              <a:t>SYSTEME DE VENTE DES LIVRES</a:t>
+            </a:r>
+          </a:p>
+        </p:txBody>
+      </p:sp>
+      <p:pic>
+        <p:nvPicPr>
+          <p:cNvPr id="12" name="Image 11">
+            <a:extLst>
+              <a:ext uri="{FF2B5EF4-FFF2-40B4-BE49-F238E27FC236}">
+                <a16:creationId xmlns:a16="http://schemas.microsoft.com/office/drawing/2014/main" id="{9FBD3D57-022D-4813-C5C6-0EB52FFBD09E}"/>
+              </a:ext>
+            </a:extLst>
+          </p:cNvPr>
+          <p:cNvPicPr>
+            <a:picLocks noChangeAspect="1"/>
+          </p:cNvPicPr>
+          <p:nvPr/>
+        </p:nvPicPr>
+        <p:blipFill>
+          <a:blip r:embed="rId2">
+            <a:extLst>
+              <a:ext uri="{28A0092B-C50C-407E-A947-70E740481C1C}">
+                <a14:useLocalDpi xmlns:a14="http://schemas.microsoft.com/office/drawing/2010/main" val="0"/>
+              </a:ext>
+            </a:extLst>
+          </a:blip>
+          <a:stretch>
+            <a:fillRect/>
+          </a:stretch>
+        </p:blipFill>
+        <p:spPr>
+          <a:xfrm>
+            <a:off x="0" y="0"/>
+            <a:ext cx="2359742" cy="866667"/>
+          </a:xfrm>
+          <a:prstGeom prst="rect">
+            <a:avLst/>
+          </a:prstGeom>
+        </p:spPr>
+      </p:pic>
+      <p:sp>
+        <p:nvSpPr>
+          <p:cNvPr id="6" name="Titre 1">
+            <a:extLst>
+              <a:ext uri="{FF2B5EF4-FFF2-40B4-BE49-F238E27FC236}">
+                <a16:creationId xmlns:a16="http://schemas.microsoft.com/office/drawing/2014/main" id="{5EFFD6F4-AEF0-AE3D-00C2-DCDEB65AAE41}"/>
+              </a:ext>
+            </a:extLst>
+          </p:cNvPr>
+          <p:cNvSpPr>
+            <a:spLocks noGrp="1"/>
+          </p:cNvSpPr>
+          <p:nvPr>
+            <p:ph type="ctrTitle"/>
+          </p:nvPr>
+        </p:nvSpPr>
+        <p:spPr>
+          <a:xfrm>
+            <a:off x="770066" y="991722"/>
+            <a:ext cx="3993663" cy="439170"/>
+          </a:xfrm>
+        </p:spPr>
+        <p:txBody>
+          <a:bodyPr>
+            <a:noAutofit/>
+          </a:bodyPr>
+          <a:lstStyle/>
+          <a:p>
+            <a:pPr algn="ctr"/>
+            <a:r>
+              <a:rPr lang="fr-FR" sz="2400" b="1" dirty="0" err="1"/>
+              <a:t>Airflow</a:t>
+            </a:r>
+            <a:r>
+              <a:rPr lang="fr-FR" sz="2400" b="1" dirty="0"/>
+              <a:t>, l’orchestration</a:t>
+            </a:r>
+            <a:endParaRPr lang="fr-FR" sz="2400" dirty="0"/>
+          </a:p>
+        </p:txBody>
+      </p:sp>
+      <p:sp>
+        <p:nvSpPr>
+          <p:cNvPr id="7" name="Flèche : chevron 6">
+            <a:extLst>
+              <a:ext uri="{FF2B5EF4-FFF2-40B4-BE49-F238E27FC236}">
+                <a16:creationId xmlns:a16="http://schemas.microsoft.com/office/drawing/2014/main" id="{B4D5837B-5394-7917-C752-4ED6264922F7}"/>
+              </a:ext>
+            </a:extLst>
+          </p:cNvPr>
+          <p:cNvSpPr/>
+          <p:nvPr/>
+        </p:nvSpPr>
+        <p:spPr>
+          <a:xfrm>
+            <a:off x="193189" y="991722"/>
+            <a:ext cx="576876" cy="439170"/>
+          </a:xfrm>
+          <a:prstGeom prst="chevron">
+            <a:avLst/>
+          </a:prstGeom>
+          <a:solidFill>
+            <a:schemeClr val="tx2"/>
+          </a:solidFill>
+        </p:spPr>
+        <p:style>
+          <a:lnRef idx="2">
+            <a:schemeClr val="accent1">
+              <a:shade val="15000"/>
+            </a:schemeClr>
+          </a:lnRef>
+          <a:fillRef idx="1">
+            <a:schemeClr val="accent1"/>
+          </a:fillRef>
+          <a:effectRef idx="0">
+            <a:schemeClr val="accent1"/>
+          </a:effectRef>
+          <a:fontRef idx="minor">
+            <a:schemeClr val="lt1"/>
+          </a:fontRef>
+        </p:style>
+        <p:txBody>
+          <a:bodyPr rtlCol="0" anchor="ctr"/>
+          <a:lstStyle/>
+          <a:p>
+            <a:pPr algn="ctr"/>
+            <a:endParaRPr lang="fr-FR" sz="1600">
+              <a:solidFill>
+                <a:schemeClr val="accent5">
+                  <a:lumMod val="50000"/>
+                </a:schemeClr>
+              </a:solidFill>
+            </a:endParaRPr>
+          </a:p>
+        </p:txBody>
+      </p:sp>
+      <p:pic>
+        <p:nvPicPr>
+          <p:cNvPr id="2" name="Image 1">
+            <a:extLst>
+              <a:ext uri="{FF2B5EF4-FFF2-40B4-BE49-F238E27FC236}">
+                <a16:creationId xmlns:a16="http://schemas.microsoft.com/office/drawing/2014/main" id="{E46A21B2-0ACC-16BD-D586-EB7FA0D628A8}"/>
+              </a:ext>
+            </a:extLst>
+          </p:cNvPr>
+          <p:cNvPicPr>
+            <a:picLocks noChangeAspect="1"/>
+          </p:cNvPicPr>
+          <p:nvPr/>
+        </p:nvPicPr>
+        <p:blipFill>
+          <a:blip r:embed="rId3"/>
+          <a:stretch>
+            <a:fillRect/>
+          </a:stretch>
+        </p:blipFill>
+        <p:spPr>
+          <a:xfrm>
+            <a:off x="193190" y="1555947"/>
+            <a:ext cx="5300018" cy="2549525"/>
+          </a:xfrm>
+          <a:prstGeom prst="rect">
+            <a:avLst/>
+          </a:prstGeom>
+          <a:ln>
+            <a:solidFill>
+              <a:schemeClr val="bg1">
+                <a:lumMod val="85000"/>
+              </a:schemeClr>
+            </a:solidFill>
+          </a:ln>
+        </p:spPr>
+      </p:pic>
+      <p:pic>
+        <p:nvPicPr>
+          <p:cNvPr id="3" name="Image 2">
+            <a:extLst>
+              <a:ext uri="{FF2B5EF4-FFF2-40B4-BE49-F238E27FC236}">
+                <a16:creationId xmlns:a16="http://schemas.microsoft.com/office/drawing/2014/main" id="{D1AD5136-B8E7-07C7-8DC9-5B40DEF33316}"/>
+              </a:ext>
+            </a:extLst>
+          </p:cNvPr>
+          <p:cNvPicPr>
+            <a:picLocks noChangeAspect="1"/>
+          </p:cNvPicPr>
+          <p:nvPr/>
+        </p:nvPicPr>
+        <p:blipFill>
+          <a:blip r:embed="rId4"/>
+          <a:stretch>
+            <a:fillRect/>
+          </a:stretch>
+        </p:blipFill>
+        <p:spPr>
+          <a:xfrm>
+            <a:off x="6395452" y="866667"/>
+            <a:ext cx="5484313" cy="2971808"/>
+          </a:xfrm>
+          <a:prstGeom prst="rect">
+            <a:avLst/>
+          </a:prstGeom>
+          <a:ln>
+            <a:solidFill>
+              <a:schemeClr val="bg1">
+                <a:lumMod val="85000"/>
+              </a:schemeClr>
+            </a:solidFill>
+          </a:ln>
+        </p:spPr>
+      </p:pic>
+      <p:sp>
+        <p:nvSpPr>
+          <p:cNvPr id="11" name="ZoneTexte 10">
+            <a:extLst>
+              <a:ext uri="{FF2B5EF4-FFF2-40B4-BE49-F238E27FC236}">
+                <a16:creationId xmlns:a16="http://schemas.microsoft.com/office/drawing/2014/main" id="{B9D06194-2392-B1B3-F7DD-6BE5A5C2AA3A}"/>
+              </a:ext>
+            </a:extLst>
+          </p:cNvPr>
+          <p:cNvSpPr txBox="1"/>
+          <p:nvPr/>
+        </p:nvSpPr>
+        <p:spPr>
+          <a:xfrm>
+            <a:off x="0" y="4652810"/>
+            <a:ext cx="5102942" cy="373692"/>
+          </a:xfrm>
+          <a:prstGeom prst="rect">
+            <a:avLst/>
+          </a:prstGeom>
+          <a:solidFill>
+            <a:schemeClr val="tx1">
+              <a:lumMod val="85000"/>
+            </a:schemeClr>
+          </a:solidFill>
+        </p:spPr>
+        <p:txBody>
+          <a:bodyPr wrap="square">
+            <a:spAutoFit/>
+          </a:bodyPr>
+          <a:lstStyle/>
+          <a:p>
+            <a:pPr marL="342900" lvl="0" indent="-342900">
+              <a:lnSpc>
+                <a:spcPct val="107000"/>
+              </a:lnSpc>
+              <a:spcAft>
+                <a:spcPts val="800"/>
+              </a:spcAft>
+              <a:buFont typeface="Arial Nova" panose="020B0504020202020204" pitchFamily="34" charset="0"/>
+              <a:buChar char="-"/>
+              <a:tabLst>
+                <a:tab pos="1028700" algn="l"/>
+              </a:tabLst>
+            </a:pPr>
+            <a:r>
+              <a:rPr lang="fr-FR" sz="1800" kern="100" dirty="0">
+                <a:solidFill>
+                  <a:schemeClr val="bg1"/>
+                </a:solidFill>
+                <a:effectLst/>
+                <a:latin typeface="Arial Nova" panose="020B0504020202020204" pitchFamily="34" charset="0"/>
+                <a:ea typeface="Calibri" panose="020F0502020204030204" pitchFamily="34" charset="0"/>
+                <a:cs typeface="Times New Roman" panose="02020603050405020304" pitchFamily="18" charset="0"/>
+              </a:rPr>
+              <a:t>Lancement du dag du </a:t>
+            </a:r>
+            <a:r>
+              <a:rPr lang="fr-FR" sz="1800" kern="100" dirty="0" err="1">
+                <a:solidFill>
+                  <a:schemeClr val="bg1"/>
+                </a:solidFill>
+                <a:effectLst/>
+                <a:latin typeface="Arial Nova" panose="020B0504020202020204" pitchFamily="34" charset="0"/>
+                <a:ea typeface="Calibri" panose="020F0502020204030204" pitchFamily="34" charset="0"/>
+                <a:cs typeface="Times New Roman" panose="02020603050405020304" pitchFamily="18" charset="0"/>
+              </a:rPr>
+              <a:t>pipeline_bookshoop</a:t>
+            </a:r>
+            <a:endParaRPr lang="fr-FR" sz="1600" kern="100" dirty="0">
+              <a:solidFill>
+                <a:schemeClr val="bg1"/>
+              </a:solidFill>
+              <a:effectLst/>
+              <a:latin typeface="Calibri" panose="020F0502020204030204" pitchFamily="34" charset="0"/>
+              <a:ea typeface="Calibri" panose="020F0502020204030204" pitchFamily="34" charset="0"/>
+              <a:cs typeface="Times New Roman" panose="02020603050405020304" pitchFamily="18" charset="0"/>
+            </a:endParaRPr>
+          </a:p>
+        </p:txBody>
+      </p:sp>
+      <p:pic>
+        <p:nvPicPr>
+          <p:cNvPr id="14" name="Image 13">
+            <a:extLst>
+              <a:ext uri="{FF2B5EF4-FFF2-40B4-BE49-F238E27FC236}">
+                <a16:creationId xmlns:a16="http://schemas.microsoft.com/office/drawing/2014/main" id="{74C7E1E1-0B97-7504-BF60-72C3A67F7E61}"/>
+              </a:ext>
+            </a:extLst>
+          </p:cNvPr>
+          <p:cNvPicPr>
+            <a:picLocks noChangeAspect="1"/>
+          </p:cNvPicPr>
+          <p:nvPr/>
+        </p:nvPicPr>
+        <p:blipFill>
+          <a:blip r:embed="rId5"/>
+          <a:stretch>
+            <a:fillRect/>
+          </a:stretch>
+        </p:blipFill>
+        <p:spPr>
+          <a:xfrm>
+            <a:off x="6395452" y="3983353"/>
+            <a:ext cx="5484313" cy="2874647"/>
+          </a:xfrm>
+          <a:prstGeom prst="rect">
+            <a:avLst/>
+          </a:prstGeom>
+          <a:ln>
+            <a:solidFill>
+              <a:schemeClr val="bg1">
+                <a:lumMod val="85000"/>
+              </a:schemeClr>
+            </a:solidFill>
+          </a:ln>
+        </p:spPr>
+      </p:pic>
+      <p:sp>
+        <p:nvSpPr>
+          <p:cNvPr id="16" name="Flèche : chevron 15">
+            <a:extLst>
+              <a:ext uri="{FF2B5EF4-FFF2-40B4-BE49-F238E27FC236}">
+                <a16:creationId xmlns:a16="http://schemas.microsoft.com/office/drawing/2014/main" id="{83BBCD58-EB0B-A1D3-D24E-6112185022AE}"/>
+              </a:ext>
+            </a:extLst>
+          </p:cNvPr>
+          <p:cNvSpPr/>
+          <p:nvPr/>
+        </p:nvSpPr>
+        <p:spPr>
+          <a:xfrm>
+            <a:off x="5367454" y="4620071"/>
+            <a:ext cx="576876" cy="439170"/>
+          </a:xfrm>
+          <a:prstGeom prst="chevron">
+            <a:avLst/>
+          </a:prstGeom>
+          <a:solidFill>
+            <a:schemeClr val="tx2"/>
+          </a:solidFill>
+        </p:spPr>
+        <p:style>
+          <a:lnRef idx="2">
+            <a:schemeClr val="accent1">
+              <a:shade val="15000"/>
+            </a:schemeClr>
+          </a:lnRef>
+          <a:fillRef idx="1">
+            <a:schemeClr val="accent1"/>
+          </a:fillRef>
+          <a:effectRef idx="0">
+            <a:schemeClr val="accent1"/>
+          </a:effectRef>
+          <a:fontRef idx="minor">
+            <a:schemeClr val="lt1"/>
+          </a:fontRef>
+        </p:style>
+        <p:txBody>
+          <a:bodyPr rtlCol="0" anchor="ctr"/>
+          <a:lstStyle/>
+          <a:p>
+            <a:pPr algn="ctr"/>
+            <a:endParaRPr lang="fr-FR" sz="1600">
+              <a:solidFill>
+                <a:schemeClr val="accent5">
+                  <a:lumMod val="50000"/>
+                </a:schemeClr>
+              </a:solidFill>
+            </a:endParaRPr>
+          </a:p>
+        </p:txBody>
+      </p:sp>
+    </p:spTree>
+    <p:extLst>
+      <p:ext uri="{BB962C8B-B14F-4D97-AF65-F5344CB8AC3E}">
+        <p14:creationId xmlns:p14="http://schemas.microsoft.com/office/powerpoint/2010/main" val="1784016931"/>
+      </p:ext>
+    </p:extLst>
+  </p:cSld>
+  <p:clrMapOvr>
+    <a:masterClrMapping/>
+  </p:clrMapOvr>
+  <p:transition spd="slow">
+    <p:push dir="u"/>
+  </p:transition>
 </p:sld>
 </file>
 

--- a/docs/architecture bigdata _Exam.pptx
+++ b/docs/architecture bigdata _Exam.pptx
@@ -174,7 +174,7 @@
           <a:noFill/>
           <a:extLst>
             <a:ext uri="{909E8E84-426E-40dd-AFC4-6F175D3DCCD1}">
-              <a14:hiddenFill xmlns:a14="http://schemas.microsoft.com/office/drawing/2010/main" xmlns="">
+              <a14:hiddenFill xmlns="" xmlns:a14="http://schemas.microsoft.com/office/drawing/2010/main">
                 <a:solidFill>
                   <a:srgbClr val="FFFFFF"/>
                 </a:solidFill>
@@ -234,7 +234,7 @@
             </a:ln>
             <a:extLst>
               <a:ext uri="{91240B29-F687-4f45-9708-019B960494DF}">
-                <a14:hiddenLine xmlns:a14="http://schemas.microsoft.com/office/drawing/2010/main" xmlns="" w="9525">
+                <a14:hiddenLine xmlns="" xmlns:a14="http://schemas.microsoft.com/office/drawing/2010/main" w="9525">
                   <a:solidFill>
                     <a:srgbClr val="000000"/>
                   </a:solidFill>
@@ -324,7 +324,7 @@
             </a:ln>
             <a:extLst>
               <a:ext uri="{91240B29-F687-4f45-9708-019B960494DF}">
-                <a14:hiddenLine xmlns:a14="http://schemas.microsoft.com/office/drawing/2010/main" xmlns="" w="9525">
+                <a14:hiddenLine xmlns="" xmlns:a14="http://schemas.microsoft.com/office/drawing/2010/main" w="9525">
                   <a:solidFill>
                     <a:srgbClr val="000000"/>
                   </a:solidFill>
@@ -414,7 +414,7 @@
             </a:ln>
             <a:extLst>
               <a:ext uri="{91240B29-F687-4f45-9708-019B960494DF}">
-                <a14:hiddenLine xmlns:a14="http://schemas.microsoft.com/office/drawing/2010/main" xmlns="" w="9525">
+                <a14:hiddenLine xmlns="" xmlns:a14="http://schemas.microsoft.com/office/drawing/2010/main" w="9525">
                   <a:solidFill>
                     <a:srgbClr val="000000"/>
                   </a:solidFill>
@@ -448,7 +448,7 @@
             </a:ln>
             <a:extLst>
               <a:ext uri="{91240B29-F687-4f45-9708-019B960494DF}">
-                <a14:hiddenLine xmlns:a14="http://schemas.microsoft.com/office/drawing/2010/main" xmlns="" w="9525">
+                <a14:hiddenLine xmlns="" xmlns:a14="http://schemas.microsoft.com/office/drawing/2010/main" w="9525">
                   <a:solidFill>
                     <a:srgbClr val="000000"/>
                   </a:solidFill>
@@ -538,7 +538,7 @@
             </a:ln>
             <a:extLst>
               <a:ext uri="{91240B29-F687-4f45-9708-019B960494DF}">
-                <a14:hiddenLine xmlns:a14="http://schemas.microsoft.com/office/drawing/2010/main" xmlns="" w="9525">
+                <a14:hiddenLine xmlns="" xmlns:a14="http://schemas.microsoft.com/office/drawing/2010/main" w="9525">
                   <a:solidFill>
                     <a:srgbClr val="000000"/>
                   </a:solidFill>
@@ -600,7 +600,7 @@
             </a:ln>
             <a:extLst>
               <a:ext uri="{91240B29-F687-4f45-9708-019B960494DF}">
-                <a14:hiddenLine xmlns:a14="http://schemas.microsoft.com/office/drawing/2010/main" xmlns="" w="9525">
+                <a14:hiddenLine xmlns="" xmlns:a14="http://schemas.microsoft.com/office/drawing/2010/main" w="9525">
                   <a:solidFill>
                     <a:srgbClr val="000000"/>
                   </a:solidFill>
@@ -662,7 +662,7 @@
             </a:ln>
             <a:extLst>
               <a:ext uri="{91240B29-F687-4f45-9708-019B960494DF}">
-                <a14:hiddenLine xmlns:a14="http://schemas.microsoft.com/office/drawing/2010/main" xmlns="" w="9525">
+                <a14:hiddenLine xmlns="" xmlns:a14="http://schemas.microsoft.com/office/drawing/2010/main" w="9525">
                   <a:solidFill>
                     <a:srgbClr val="000000"/>
                   </a:solidFill>
@@ -752,7 +752,7 @@
             </a:ln>
             <a:extLst>
               <a:ext uri="{91240B29-F687-4f45-9708-019B960494DF}">
-                <a14:hiddenLine xmlns:a14="http://schemas.microsoft.com/office/drawing/2010/main" xmlns="" w="9525">
+                <a14:hiddenLine xmlns="" xmlns:a14="http://schemas.microsoft.com/office/drawing/2010/main" w="9525">
                   <a:solidFill>
                     <a:srgbClr val="000000"/>
                   </a:solidFill>
@@ -814,7 +814,7 @@
             </a:ln>
             <a:extLst>
               <a:ext uri="{91240B29-F687-4f45-9708-019B960494DF}">
-                <a14:hiddenLine xmlns:a14="http://schemas.microsoft.com/office/drawing/2010/main" xmlns="" w="9525">
+                <a14:hiddenLine xmlns="" xmlns:a14="http://schemas.microsoft.com/office/drawing/2010/main" w="9525">
                   <a:solidFill>
                     <a:srgbClr val="000000"/>
                   </a:solidFill>
@@ -876,7 +876,7 @@
             </a:ln>
             <a:extLst>
               <a:ext uri="{91240B29-F687-4f45-9708-019B960494DF}">
-                <a14:hiddenLine xmlns:a14="http://schemas.microsoft.com/office/drawing/2010/main" xmlns="" w="9525">
+                <a14:hiddenLine xmlns="" xmlns:a14="http://schemas.microsoft.com/office/drawing/2010/main" w="9525">
                   <a:solidFill>
                     <a:srgbClr val="000000"/>
                   </a:solidFill>
@@ -966,7 +966,7 @@
             </a:ln>
             <a:extLst>
               <a:ext uri="{91240B29-F687-4f45-9708-019B960494DF}">
-                <a14:hiddenLine xmlns:a14="http://schemas.microsoft.com/office/drawing/2010/main" xmlns="" w="9525">
+                <a14:hiddenLine xmlns="" xmlns:a14="http://schemas.microsoft.com/office/drawing/2010/main" w="9525">
                   <a:solidFill>
                     <a:srgbClr val="000000"/>
                   </a:solidFill>
@@ -1056,7 +1056,7 @@
             </a:ln>
             <a:extLst>
               <a:ext uri="{91240B29-F687-4f45-9708-019B960494DF}">
-                <a14:hiddenLine xmlns:a14="http://schemas.microsoft.com/office/drawing/2010/main" xmlns="" w="9525">
+                <a14:hiddenLine xmlns="" xmlns:a14="http://schemas.microsoft.com/office/drawing/2010/main" w="9525">
                   <a:solidFill>
                     <a:srgbClr val="000000"/>
                   </a:solidFill>
@@ -1118,7 +1118,7 @@
             </a:ln>
             <a:extLst>
               <a:ext uri="{91240B29-F687-4f45-9708-019B960494DF}">
-                <a14:hiddenLine xmlns:a14="http://schemas.microsoft.com/office/drawing/2010/main" xmlns="" w="9525">
+                <a14:hiddenLine xmlns="" xmlns:a14="http://schemas.microsoft.com/office/drawing/2010/main" w="9525">
                   <a:solidFill>
                     <a:srgbClr val="000000"/>
                   </a:solidFill>
@@ -1228,7 +1228,7 @@
             </a:ln>
             <a:extLst>
               <a:ext uri="{91240B29-F687-4f45-9708-019B960494DF}">
-                <a14:hiddenLine xmlns:a14="http://schemas.microsoft.com/office/drawing/2010/main" xmlns="" w="9525">
+                <a14:hiddenLine xmlns="" xmlns:a14="http://schemas.microsoft.com/office/drawing/2010/main" w="9525">
                   <a:solidFill>
                     <a:srgbClr val="000000"/>
                   </a:solidFill>
@@ -1290,7 +1290,7 @@
             </a:ln>
             <a:extLst>
               <a:ext uri="{91240B29-F687-4f45-9708-019B960494DF}">
-                <a14:hiddenLine xmlns:a14="http://schemas.microsoft.com/office/drawing/2010/main" xmlns="" w="9525">
+                <a14:hiddenLine xmlns="" xmlns:a14="http://schemas.microsoft.com/office/drawing/2010/main" w="9525">
                   <a:solidFill>
                     <a:srgbClr val="000000"/>
                   </a:solidFill>
@@ -1380,7 +1380,7 @@
             </a:ln>
             <a:extLst>
               <a:ext uri="{91240B29-F687-4f45-9708-019B960494DF}">
-                <a14:hiddenLine xmlns:a14="http://schemas.microsoft.com/office/drawing/2010/main" xmlns="" w="9525">
+                <a14:hiddenLine xmlns="" xmlns:a14="http://schemas.microsoft.com/office/drawing/2010/main" w="9525">
                   <a:solidFill>
                     <a:srgbClr val="000000"/>
                   </a:solidFill>
@@ -1470,7 +1470,7 @@
             </a:ln>
             <a:extLst>
               <a:ext uri="{91240B29-F687-4f45-9708-019B960494DF}">
-                <a14:hiddenLine xmlns:a14="http://schemas.microsoft.com/office/drawing/2010/main" xmlns="" w="9525">
+                <a14:hiddenLine xmlns="" xmlns:a14="http://schemas.microsoft.com/office/drawing/2010/main" w="9525">
                   <a:solidFill>
                     <a:srgbClr val="000000"/>
                   </a:solidFill>
@@ -1532,7 +1532,7 @@
             </a:ln>
             <a:extLst>
               <a:ext uri="{91240B29-F687-4f45-9708-019B960494DF}">
-                <a14:hiddenLine xmlns:a14="http://schemas.microsoft.com/office/drawing/2010/main" xmlns="" w="9525">
+                <a14:hiddenLine xmlns="" xmlns:a14="http://schemas.microsoft.com/office/drawing/2010/main" w="9525">
                   <a:solidFill>
                     <a:srgbClr val="000000"/>
                   </a:solidFill>
@@ -1622,7 +1622,7 @@
             </a:ln>
             <a:extLst>
               <a:ext uri="{91240B29-F687-4f45-9708-019B960494DF}">
-                <a14:hiddenLine xmlns:a14="http://schemas.microsoft.com/office/drawing/2010/main" xmlns="" w="9525">
+                <a14:hiddenLine xmlns="" xmlns:a14="http://schemas.microsoft.com/office/drawing/2010/main" w="9525">
                   <a:solidFill>
                     <a:srgbClr val="000000"/>
                   </a:solidFill>
@@ -1712,7 +1712,7 @@
             </a:ln>
             <a:extLst>
               <a:ext uri="{91240B29-F687-4f45-9708-019B960494DF}">
-                <a14:hiddenLine xmlns:a14="http://schemas.microsoft.com/office/drawing/2010/main" xmlns="" w="9525">
+                <a14:hiddenLine xmlns="" xmlns:a14="http://schemas.microsoft.com/office/drawing/2010/main" w="9525">
                   <a:solidFill>
                     <a:srgbClr val="000000"/>
                   </a:solidFill>
@@ -1768,7 +1768,7 @@
             </a:ln>
             <a:extLst>
               <a:ext uri="{91240B29-F687-4f45-9708-019B960494DF}">
-                <a14:hiddenLine xmlns:a14="http://schemas.microsoft.com/office/drawing/2010/main" xmlns="" w="9525">
+                <a14:hiddenLine xmlns="" xmlns:a14="http://schemas.microsoft.com/office/drawing/2010/main" w="9525">
                   <a:solidFill>
                     <a:srgbClr val="000000"/>
                   </a:solidFill>
@@ -1858,7 +1858,7 @@
             </a:ln>
             <a:extLst>
               <a:ext uri="{91240B29-F687-4f45-9708-019B960494DF}">
-                <a14:hiddenLine xmlns:a14="http://schemas.microsoft.com/office/drawing/2010/main" xmlns="" w="9525">
+                <a14:hiddenLine xmlns="" xmlns:a14="http://schemas.microsoft.com/office/drawing/2010/main" w="9525">
                   <a:solidFill>
                     <a:srgbClr val="000000"/>
                   </a:solidFill>
@@ -1914,7 +1914,7 @@
             </a:ln>
             <a:extLst>
               <a:ext uri="{91240B29-F687-4f45-9708-019B960494DF}">
-                <a14:hiddenLine xmlns:a14="http://schemas.microsoft.com/office/drawing/2010/main" xmlns="" w="9525">
+                <a14:hiddenLine xmlns="" xmlns:a14="http://schemas.microsoft.com/office/drawing/2010/main" w="9525">
                   <a:solidFill>
                     <a:srgbClr val="000000"/>
                   </a:solidFill>
@@ -2004,7 +2004,7 @@
             </a:ln>
             <a:extLst>
               <a:ext uri="{91240B29-F687-4f45-9708-019B960494DF}">
-                <a14:hiddenLine xmlns:a14="http://schemas.microsoft.com/office/drawing/2010/main" xmlns="" w="9525">
+                <a14:hiddenLine xmlns="" xmlns:a14="http://schemas.microsoft.com/office/drawing/2010/main" w="9525">
                   <a:solidFill>
                     <a:srgbClr val="000000"/>
                   </a:solidFill>
@@ -2072,7 +2072,7 @@
             </a:ln>
             <a:extLst>
               <a:ext uri="{91240B29-F687-4f45-9708-019B960494DF}">
-                <a14:hiddenLine xmlns:a14="http://schemas.microsoft.com/office/drawing/2010/main" xmlns="" w="9525">
+                <a14:hiddenLine xmlns="" xmlns:a14="http://schemas.microsoft.com/office/drawing/2010/main" w="9525">
                   <a:solidFill>
                     <a:srgbClr val="000000"/>
                   </a:solidFill>
@@ -2162,7 +2162,7 @@
             </a:ln>
             <a:extLst>
               <a:ext uri="{91240B29-F687-4f45-9708-019B960494DF}">
-                <a14:hiddenLine xmlns:a14="http://schemas.microsoft.com/office/drawing/2010/main" xmlns="" w="9525">
+                <a14:hiddenLine xmlns="" xmlns:a14="http://schemas.microsoft.com/office/drawing/2010/main" w="9525">
                   <a:solidFill>
                     <a:srgbClr val="000000"/>
                   </a:solidFill>
@@ -2230,7 +2230,7 @@
             </a:ln>
             <a:extLst>
               <a:ext uri="{91240B29-F687-4f45-9708-019B960494DF}">
-                <a14:hiddenLine xmlns:a14="http://schemas.microsoft.com/office/drawing/2010/main" xmlns="" w="9525">
+                <a14:hiddenLine xmlns="" xmlns:a14="http://schemas.microsoft.com/office/drawing/2010/main" w="9525">
                   <a:solidFill>
                     <a:srgbClr val="000000"/>
                   </a:solidFill>
@@ -2320,7 +2320,7 @@
             </a:ln>
             <a:extLst>
               <a:ext uri="{91240B29-F687-4f45-9708-019B960494DF}">
-                <a14:hiddenLine xmlns:a14="http://schemas.microsoft.com/office/drawing/2010/main" xmlns="" w="9525">
+                <a14:hiddenLine xmlns="" xmlns:a14="http://schemas.microsoft.com/office/drawing/2010/main" w="9525">
                   <a:solidFill>
                     <a:srgbClr val="000000"/>
                   </a:solidFill>
@@ -2354,7 +2354,7 @@
             </a:ln>
             <a:extLst>
               <a:ext uri="{91240B29-F687-4f45-9708-019B960494DF}">
-                <a14:hiddenLine xmlns:a14="http://schemas.microsoft.com/office/drawing/2010/main" xmlns="" w="9525">
+                <a14:hiddenLine xmlns="" xmlns:a14="http://schemas.microsoft.com/office/drawing/2010/main" w="9525">
                   <a:solidFill>
                     <a:srgbClr val="000000"/>
                   </a:solidFill>
@@ -2444,7 +2444,7 @@
             </a:ln>
             <a:extLst>
               <a:ext uri="{91240B29-F687-4f45-9708-019B960494DF}">
-                <a14:hiddenLine xmlns:a14="http://schemas.microsoft.com/office/drawing/2010/main" xmlns="" w="9525">
+                <a14:hiddenLine xmlns="" xmlns:a14="http://schemas.microsoft.com/office/drawing/2010/main" w="9525">
                   <a:solidFill>
                     <a:srgbClr val="000000"/>
                   </a:solidFill>
@@ -2506,7 +2506,7 @@
             </a:ln>
             <a:extLst>
               <a:ext uri="{91240B29-F687-4f45-9708-019B960494DF}">
-                <a14:hiddenLine xmlns:a14="http://schemas.microsoft.com/office/drawing/2010/main" xmlns="" w="9525">
+                <a14:hiddenLine xmlns="" xmlns:a14="http://schemas.microsoft.com/office/drawing/2010/main" w="9525">
                   <a:solidFill>
                     <a:srgbClr val="000000"/>
                   </a:solidFill>
@@ -2568,7 +2568,7 @@
             </a:ln>
             <a:extLst>
               <a:ext uri="{91240B29-F687-4f45-9708-019B960494DF}">
-                <a14:hiddenLine xmlns:a14="http://schemas.microsoft.com/office/drawing/2010/main" xmlns="" w="9525">
+                <a14:hiddenLine xmlns="" xmlns:a14="http://schemas.microsoft.com/office/drawing/2010/main" w="9525">
                   <a:solidFill>
                     <a:srgbClr val="000000"/>
                   </a:solidFill>
@@ -2658,7 +2658,7 @@
             </a:ln>
             <a:extLst>
               <a:ext uri="{91240B29-F687-4f45-9708-019B960494DF}">
-                <a14:hiddenLine xmlns:a14="http://schemas.microsoft.com/office/drawing/2010/main" xmlns="" w="9525">
+                <a14:hiddenLine xmlns="" xmlns:a14="http://schemas.microsoft.com/office/drawing/2010/main" w="9525">
                   <a:solidFill>
                     <a:srgbClr val="000000"/>
                   </a:solidFill>
@@ -2726,7 +2726,7 @@
             </a:ln>
             <a:extLst>
               <a:ext uri="{91240B29-F687-4f45-9708-019B960494DF}">
-                <a14:hiddenLine xmlns:a14="http://schemas.microsoft.com/office/drawing/2010/main" xmlns="" w="9525">
+                <a14:hiddenLine xmlns="" xmlns:a14="http://schemas.microsoft.com/office/drawing/2010/main" w="9525">
                   <a:solidFill>
                     <a:srgbClr val="000000"/>
                   </a:solidFill>
@@ -2788,7 +2788,7 @@
             </a:ln>
             <a:extLst>
               <a:ext uri="{91240B29-F687-4f45-9708-019B960494DF}">
-                <a14:hiddenLine xmlns:a14="http://schemas.microsoft.com/office/drawing/2010/main" xmlns="" w="9525">
+                <a14:hiddenLine xmlns="" xmlns:a14="http://schemas.microsoft.com/office/drawing/2010/main" w="9525">
                   <a:solidFill>
                     <a:srgbClr val="000000"/>
                   </a:solidFill>
@@ -2878,7 +2878,7 @@
             </a:ln>
             <a:extLst>
               <a:ext uri="{91240B29-F687-4f45-9708-019B960494DF}">
-                <a14:hiddenLine xmlns:a14="http://schemas.microsoft.com/office/drawing/2010/main" xmlns="" w="9525">
+                <a14:hiddenLine xmlns="" xmlns:a14="http://schemas.microsoft.com/office/drawing/2010/main" w="9525">
                   <a:solidFill>
                     <a:srgbClr val="000000"/>
                   </a:solidFill>
@@ -2940,7 +2940,7 @@
             </a:ln>
             <a:extLst>
               <a:ext uri="{91240B29-F687-4f45-9708-019B960494DF}">
-                <a14:hiddenLine xmlns:a14="http://schemas.microsoft.com/office/drawing/2010/main" xmlns="" w="9525">
+                <a14:hiddenLine xmlns="" xmlns:a14="http://schemas.microsoft.com/office/drawing/2010/main" w="9525">
                   <a:solidFill>
                     <a:srgbClr val="000000"/>
                   </a:solidFill>
@@ -3030,7 +3030,7 @@
             </a:ln>
             <a:extLst>
               <a:ext uri="{91240B29-F687-4f45-9708-019B960494DF}">
-                <a14:hiddenLine xmlns:a14="http://schemas.microsoft.com/office/drawing/2010/main" xmlns="" w="9525">
+                <a14:hiddenLine xmlns="" xmlns:a14="http://schemas.microsoft.com/office/drawing/2010/main" w="9525">
                   <a:solidFill>
                     <a:srgbClr val="000000"/>
                   </a:solidFill>
@@ -3092,7 +3092,7 @@
             </a:ln>
             <a:extLst>
               <a:ext uri="{91240B29-F687-4f45-9708-019B960494DF}">
-                <a14:hiddenLine xmlns:a14="http://schemas.microsoft.com/office/drawing/2010/main" xmlns="" w="9525">
+                <a14:hiddenLine xmlns="" xmlns:a14="http://schemas.microsoft.com/office/drawing/2010/main" w="9525">
                   <a:solidFill>
                     <a:srgbClr val="000000"/>
                   </a:solidFill>
@@ -3182,7 +3182,7 @@
             </a:ln>
             <a:extLst>
               <a:ext uri="{91240B29-F687-4f45-9708-019B960494DF}">
-                <a14:hiddenLine xmlns:a14="http://schemas.microsoft.com/office/drawing/2010/main" xmlns="" w="9525">
+                <a14:hiddenLine xmlns="" xmlns:a14="http://schemas.microsoft.com/office/drawing/2010/main" w="9525">
                   <a:solidFill>
                     <a:srgbClr val="000000"/>
                   </a:solidFill>
@@ -3216,7 +3216,7 @@
             </a:ln>
             <a:extLst>
               <a:ext uri="{91240B29-F687-4f45-9708-019B960494DF}">
-                <a14:hiddenLine xmlns:a14="http://schemas.microsoft.com/office/drawing/2010/main" xmlns="" w="9525">
+                <a14:hiddenLine xmlns="" xmlns:a14="http://schemas.microsoft.com/office/drawing/2010/main" w="9525">
                   <a:solidFill>
                     <a:srgbClr val="000000"/>
                   </a:solidFill>
@@ -3281,7 +3281,7 @@
             </a:ln>
             <a:extLst>
               <a:ext uri="{91240B29-F687-4f45-9708-019B960494DF}">
-                <a14:hiddenLine xmlns:a14="http://schemas.microsoft.com/office/drawing/2010/main" xmlns="" w="9525">
+                <a14:hiddenLine xmlns="" xmlns:a14="http://schemas.microsoft.com/office/drawing/2010/main" w="9525">
                   <a:solidFill>
                     <a:srgbClr val="000000"/>
                   </a:solidFill>
@@ -3371,7 +3371,7 @@
             </a:ln>
             <a:extLst>
               <a:ext uri="{91240B29-F687-4f45-9708-019B960494DF}">
-                <a14:hiddenLine xmlns:a14="http://schemas.microsoft.com/office/drawing/2010/main" xmlns="" w="9525">
+                <a14:hiddenLine xmlns="" xmlns:a14="http://schemas.microsoft.com/office/drawing/2010/main" w="9525">
                   <a:solidFill>
                     <a:srgbClr val="000000"/>
                   </a:solidFill>
@@ -3433,7 +3433,7 @@
             </a:ln>
             <a:extLst>
               <a:ext uri="{91240B29-F687-4f45-9708-019B960494DF}">
-                <a14:hiddenLine xmlns:a14="http://schemas.microsoft.com/office/drawing/2010/main" xmlns="" w="9525">
+                <a14:hiddenLine xmlns="" xmlns:a14="http://schemas.microsoft.com/office/drawing/2010/main" w="9525">
                   <a:solidFill>
                     <a:srgbClr val="000000"/>
                   </a:solidFill>
@@ -3523,7 +3523,7 @@
             </a:ln>
             <a:extLst>
               <a:ext uri="{91240B29-F687-4f45-9708-019B960494DF}">
-                <a14:hiddenLine xmlns:a14="http://schemas.microsoft.com/office/drawing/2010/main" xmlns="" w="9525">
+                <a14:hiddenLine xmlns="" xmlns:a14="http://schemas.microsoft.com/office/drawing/2010/main" w="9525">
                   <a:solidFill>
                     <a:srgbClr val="000000"/>
                   </a:solidFill>
@@ -3613,7 +3613,7 @@
             </a:ln>
             <a:extLst>
               <a:ext uri="{91240B29-F687-4f45-9708-019B960494DF}">
-                <a14:hiddenLine xmlns:a14="http://schemas.microsoft.com/office/drawing/2010/main" xmlns="" w="9525">
+                <a14:hiddenLine xmlns="" xmlns:a14="http://schemas.microsoft.com/office/drawing/2010/main" w="9525">
                   <a:solidFill>
                     <a:srgbClr val="000000"/>
                   </a:solidFill>
@@ -3678,7 +3678,7 @@
             </a:ln>
             <a:extLst>
               <a:ext uri="{91240B29-F687-4f45-9708-019B960494DF}">
-                <a14:hiddenLine xmlns:a14="http://schemas.microsoft.com/office/drawing/2010/main" xmlns="" w="9525">
+                <a14:hiddenLine xmlns="" xmlns:a14="http://schemas.microsoft.com/office/drawing/2010/main" w="9525">
                   <a:solidFill>
                     <a:srgbClr val="000000"/>
                   </a:solidFill>
@@ -3740,7 +3740,7 @@
             </a:ln>
             <a:extLst>
               <a:ext uri="{91240B29-F687-4f45-9708-019B960494DF}">
-                <a14:hiddenLine xmlns:a14="http://schemas.microsoft.com/office/drawing/2010/main" xmlns="" w="9525">
+                <a14:hiddenLine xmlns="" xmlns:a14="http://schemas.microsoft.com/office/drawing/2010/main" w="9525">
                   <a:solidFill>
                     <a:srgbClr val="000000"/>
                   </a:solidFill>
@@ -3830,7 +3830,7 @@
             </a:ln>
             <a:extLst>
               <a:ext uri="{91240B29-F687-4f45-9708-019B960494DF}">
-                <a14:hiddenLine xmlns:a14="http://schemas.microsoft.com/office/drawing/2010/main" xmlns="" w="9525">
+                <a14:hiddenLine xmlns="" xmlns:a14="http://schemas.microsoft.com/office/drawing/2010/main" w="9525">
                   <a:solidFill>
                     <a:srgbClr val="000000"/>
                   </a:solidFill>
@@ -3920,7 +3920,7 @@
             </a:ln>
             <a:extLst>
               <a:ext uri="{91240B29-F687-4f45-9708-019B960494DF}">
-                <a14:hiddenLine xmlns:a14="http://schemas.microsoft.com/office/drawing/2010/main" xmlns="" w="9525">
+                <a14:hiddenLine xmlns="" xmlns:a14="http://schemas.microsoft.com/office/drawing/2010/main" w="9525">
                   <a:solidFill>
                     <a:srgbClr val="000000"/>
                   </a:solidFill>
@@ -3982,7 +3982,7 @@
             </a:ln>
             <a:extLst>
               <a:ext uri="{91240B29-F687-4f45-9708-019B960494DF}">
-                <a14:hiddenLine xmlns:a14="http://schemas.microsoft.com/office/drawing/2010/main" xmlns="" w="9525">
+                <a14:hiddenLine xmlns="" xmlns:a14="http://schemas.microsoft.com/office/drawing/2010/main" w="9525">
                   <a:solidFill>
                     <a:srgbClr val="000000"/>
                   </a:solidFill>
@@ -4102,7 +4102,7 @@
             </a:ln>
             <a:extLst>
               <a:ext uri="{91240B29-F687-4f45-9708-019B960494DF}">
-                <a14:hiddenLine xmlns:a14="http://schemas.microsoft.com/office/drawing/2010/main" xmlns="" w="9525">
+                <a14:hiddenLine xmlns="" xmlns:a14="http://schemas.microsoft.com/office/drawing/2010/main" w="9525">
                   <a:solidFill>
                     <a:srgbClr val="000000"/>
                   </a:solidFill>
@@ -4170,7 +4170,7 @@
             </a:ln>
             <a:extLst>
               <a:ext uri="{91240B29-F687-4f45-9708-019B960494DF}">
-                <a14:hiddenLine xmlns:a14="http://schemas.microsoft.com/office/drawing/2010/main" xmlns="" w="9525">
+                <a14:hiddenLine xmlns="" xmlns:a14="http://schemas.microsoft.com/office/drawing/2010/main" w="9525">
                   <a:solidFill>
                     <a:srgbClr val="000000"/>
                   </a:solidFill>
@@ -4260,7 +4260,7 @@
             </a:ln>
             <a:extLst>
               <a:ext uri="{91240B29-F687-4f45-9708-019B960494DF}">
-                <a14:hiddenLine xmlns:a14="http://schemas.microsoft.com/office/drawing/2010/main" xmlns="" w="9525">
+                <a14:hiddenLine xmlns="" xmlns:a14="http://schemas.microsoft.com/office/drawing/2010/main" w="9525">
                   <a:solidFill>
                     <a:srgbClr val="000000"/>
                   </a:solidFill>
@@ -9067,7 +9067,7 @@
           <a:noFill/>
           <a:extLst>
             <a:ext uri="{909E8E84-426E-40dd-AFC4-6F175D3DCCD1}">
-              <a14:hiddenFill xmlns:a14="http://schemas.microsoft.com/office/drawing/2010/main" xmlns="">
+              <a14:hiddenFill xmlns="" xmlns:a14="http://schemas.microsoft.com/office/drawing/2010/main">
                 <a:solidFill>
                   <a:srgbClr val="FFFFFF"/>
                 </a:solidFill>
@@ -9141,7 +9141,7 @@
               </a:ln>
               <a:extLst>
                 <a:ext uri="{91240B29-F687-4f45-9708-019B960494DF}">
-                  <a14:hiddenLine xmlns:a14="http://schemas.microsoft.com/office/drawing/2010/main" xmlns="" w="9525">
+                  <a14:hiddenLine xmlns="" xmlns:a14="http://schemas.microsoft.com/office/drawing/2010/main" w="9525">
                     <a:solidFill>
                       <a:srgbClr val="000000"/>
                     </a:solidFill>
@@ -9231,7 +9231,7 @@
               </a:ln>
               <a:extLst>
                 <a:ext uri="{91240B29-F687-4f45-9708-019B960494DF}">
-                  <a14:hiddenLine xmlns:a14="http://schemas.microsoft.com/office/drawing/2010/main" xmlns="" w="9525">
+                  <a14:hiddenLine xmlns="" xmlns:a14="http://schemas.microsoft.com/office/drawing/2010/main" w="9525">
                     <a:solidFill>
                       <a:srgbClr val="000000"/>
                     </a:solidFill>
@@ -9321,7 +9321,7 @@
               </a:ln>
               <a:extLst>
                 <a:ext uri="{91240B29-F687-4f45-9708-019B960494DF}">
-                  <a14:hiddenLine xmlns:a14="http://schemas.microsoft.com/office/drawing/2010/main" xmlns="" w="9525">
+                  <a14:hiddenLine xmlns="" xmlns:a14="http://schemas.microsoft.com/office/drawing/2010/main" w="9525">
                     <a:solidFill>
                       <a:srgbClr val="000000"/>
                     </a:solidFill>
@@ -9383,7 +9383,7 @@
               </a:ln>
               <a:extLst>
                 <a:ext uri="{91240B29-F687-4f45-9708-019B960494DF}">
-                  <a14:hiddenLine xmlns:a14="http://schemas.microsoft.com/office/drawing/2010/main" xmlns="" w="9525">
+                  <a14:hiddenLine xmlns="" xmlns:a14="http://schemas.microsoft.com/office/drawing/2010/main" w="9525">
                     <a:solidFill>
                       <a:srgbClr val="000000"/>
                     </a:solidFill>
@@ -9473,7 +9473,7 @@
               </a:ln>
               <a:extLst>
                 <a:ext uri="{91240B29-F687-4f45-9708-019B960494DF}">
-                  <a14:hiddenLine xmlns:a14="http://schemas.microsoft.com/office/drawing/2010/main" xmlns="" w="9525">
+                  <a14:hiddenLine xmlns="" xmlns:a14="http://schemas.microsoft.com/office/drawing/2010/main" w="9525">
                     <a:solidFill>
                       <a:srgbClr val="000000"/>
                     </a:solidFill>
@@ -9535,7 +9535,7 @@
               </a:ln>
               <a:extLst>
                 <a:ext uri="{91240B29-F687-4f45-9708-019B960494DF}">
-                  <a14:hiddenLine xmlns:a14="http://schemas.microsoft.com/office/drawing/2010/main" xmlns="" w="9525">
+                  <a14:hiddenLine xmlns="" xmlns:a14="http://schemas.microsoft.com/office/drawing/2010/main" w="9525">
                     <a:solidFill>
                       <a:srgbClr val="000000"/>
                     </a:solidFill>
@@ -9597,7 +9597,7 @@
               </a:ln>
               <a:extLst>
                 <a:ext uri="{91240B29-F687-4f45-9708-019B960494DF}">
-                  <a14:hiddenLine xmlns:a14="http://schemas.microsoft.com/office/drawing/2010/main" xmlns="" w="9525">
+                  <a14:hiddenLine xmlns="" xmlns:a14="http://schemas.microsoft.com/office/drawing/2010/main" w="9525">
                     <a:solidFill>
                       <a:srgbClr val="000000"/>
                     </a:solidFill>
@@ -9687,7 +9687,7 @@
               </a:ln>
               <a:extLst>
                 <a:ext uri="{91240B29-F687-4f45-9708-019B960494DF}">
-                  <a14:hiddenLine xmlns:a14="http://schemas.microsoft.com/office/drawing/2010/main" xmlns="" w="9525">
+                  <a14:hiddenLine xmlns="" xmlns:a14="http://schemas.microsoft.com/office/drawing/2010/main" w="9525">
                     <a:solidFill>
                       <a:srgbClr val="000000"/>
                     </a:solidFill>
@@ -9777,7 +9777,7 @@
               </a:ln>
               <a:extLst>
                 <a:ext uri="{91240B29-F687-4f45-9708-019B960494DF}">
-                  <a14:hiddenLine xmlns:a14="http://schemas.microsoft.com/office/drawing/2010/main" xmlns="" w="9525">
+                  <a14:hiddenLine xmlns="" xmlns:a14="http://schemas.microsoft.com/office/drawing/2010/main" w="9525">
                     <a:solidFill>
                       <a:srgbClr val="000000"/>
                     </a:solidFill>
@@ -9839,7 +9839,7 @@
               </a:ln>
               <a:extLst>
                 <a:ext uri="{91240B29-F687-4f45-9708-019B960494DF}">
-                  <a14:hiddenLine xmlns:a14="http://schemas.microsoft.com/office/drawing/2010/main" xmlns="" w="9525">
+                  <a14:hiddenLine xmlns="" xmlns:a14="http://schemas.microsoft.com/office/drawing/2010/main" w="9525">
                     <a:solidFill>
                       <a:srgbClr val="000000"/>
                     </a:solidFill>
@@ -9949,7 +9949,7 @@
               </a:ln>
               <a:extLst>
                 <a:ext uri="{91240B29-F687-4f45-9708-019B960494DF}">
-                  <a14:hiddenLine xmlns:a14="http://schemas.microsoft.com/office/drawing/2010/main" xmlns="" w="9525">
+                  <a14:hiddenLine xmlns="" xmlns:a14="http://schemas.microsoft.com/office/drawing/2010/main" w="9525">
                     <a:solidFill>
                       <a:srgbClr val="000000"/>
                     </a:solidFill>
@@ -10033,7 +10033,7 @@
               </a:ln>
               <a:extLst>
                 <a:ext uri="{91240B29-F687-4f45-9708-019B960494DF}">
-                  <a14:hiddenLine xmlns:a14="http://schemas.microsoft.com/office/drawing/2010/main" xmlns="" w="9525">
+                  <a14:hiddenLine xmlns="" xmlns:a14="http://schemas.microsoft.com/office/drawing/2010/main" w="9525">
                     <a:solidFill>
                       <a:srgbClr val="000000"/>
                     </a:solidFill>
@@ -10095,7 +10095,7 @@
               </a:ln>
               <a:extLst>
                 <a:ext uri="{91240B29-F687-4f45-9708-019B960494DF}">
-                  <a14:hiddenLine xmlns:a14="http://schemas.microsoft.com/office/drawing/2010/main" xmlns="" w="9525">
+                  <a14:hiddenLine xmlns="" xmlns:a14="http://schemas.microsoft.com/office/drawing/2010/main" w="9525">
                     <a:solidFill>
                       <a:srgbClr val="000000"/>
                     </a:solidFill>
@@ -10157,7 +10157,7 @@
               </a:ln>
               <a:extLst>
                 <a:ext uri="{91240B29-F687-4f45-9708-019B960494DF}">
-                  <a14:hiddenLine xmlns:a14="http://schemas.microsoft.com/office/drawing/2010/main" xmlns="" w="9525">
+                  <a14:hiddenLine xmlns="" xmlns:a14="http://schemas.microsoft.com/office/drawing/2010/main" w="9525">
                     <a:solidFill>
                       <a:srgbClr val="000000"/>
                     </a:solidFill>
@@ -10247,7 +10247,7 @@
               </a:ln>
               <a:extLst>
                 <a:ext uri="{91240B29-F687-4f45-9708-019B960494DF}">
-                  <a14:hiddenLine xmlns:a14="http://schemas.microsoft.com/office/drawing/2010/main" xmlns="" w="9525">
+                  <a14:hiddenLine xmlns="" xmlns:a14="http://schemas.microsoft.com/office/drawing/2010/main" w="9525">
                     <a:solidFill>
                       <a:srgbClr val="000000"/>
                     </a:solidFill>
@@ -10281,7 +10281,7 @@
               </a:ln>
               <a:extLst>
                 <a:ext uri="{91240B29-F687-4f45-9708-019B960494DF}">
-                  <a14:hiddenLine xmlns:a14="http://schemas.microsoft.com/office/drawing/2010/main" xmlns="" w="9525">
+                  <a14:hiddenLine xmlns="" xmlns:a14="http://schemas.microsoft.com/office/drawing/2010/main" w="9525">
                     <a:solidFill>
                       <a:srgbClr val="000000"/>
                     </a:solidFill>
@@ -10346,7 +10346,7 @@
               </a:ln>
               <a:extLst>
                 <a:ext uri="{91240B29-F687-4f45-9708-019B960494DF}">
-                  <a14:hiddenLine xmlns:a14="http://schemas.microsoft.com/office/drawing/2010/main" xmlns="" w="9525">
+                  <a14:hiddenLine xmlns="" xmlns:a14="http://schemas.microsoft.com/office/drawing/2010/main" w="9525">
                     <a:solidFill>
                       <a:srgbClr val="000000"/>
                     </a:solidFill>
@@ -10436,7 +10436,7 @@
               </a:ln>
               <a:extLst>
                 <a:ext uri="{91240B29-F687-4f45-9708-019B960494DF}">
-                  <a14:hiddenLine xmlns:a14="http://schemas.microsoft.com/office/drawing/2010/main" xmlns="" w="9525">
+                  <a14:hiddenLine xmlns="" xmlns:a14="http://schemas.microsoft.com/office/drawing/2010/main" w="9525">
                     <a:solidFill>
                       <a:srgbClr val="000000"/>
                     </a:solidFill>
@@ -10498,7 +10498,7 @@
               </a:ln>
               <a:extLst>
                 <a:ext uri="{91240B29-F687-4f45-9708-019B960494DF}">
-                  <a14:hiddenLine xmlns:a14="http://schemas.microsoft.com/office/drawing/2010/main" xmlns="" w="9525">
+                  <a14:hiddenLine xmlns="" xmlns:a14="http://schemas.microsoft.com/office/drawing/2010/main" w="9525">
                     <a:solidFill>
                       <a:srgbClr val="000000"/>
                     </a:solidFill>
@@ -10588,7 +10588,7 @@
               </a:ln>
               <a:extLst>
                 <a:ext uri="{91240B29-F687-4f45-9708-019B960494DF}">
-                  <a14:hiddenLine xmlns:a14="http://schemas.microsoft.com/office/drawing/2010/main" xmlns="" w="9525">
+                  <a14:hiddenLine xmlns="" xmlns:a14="http://schemas.microsoft.com/office/drawing/2010/main" w="9525">
                     <a:solidFill>
                       <a:srgbClr val="000000"/>
                     </a:solidFill>
@@ -10653,7 +10653,7 @@
               </a:ln>
               <a:extLst>
                 <a:ext uri="{91240B29-F687-4f45-9708-019B960494DF}">
-                  <a14:hiddenLine xmlns:a14="http://schemas.microsoft.com/office/drawing/2010/main" xmlns="" w="9525">
+                  <a14:hiddenLine xmlns="" xmlns:a14="http://schemas.microsoft.com/office/drawing/2010/main" w="9525">
                     <a:solidFill>
                       <a:srgbClr val="000000"/>
                     </a:solidFill>
@@ -10715,7 +10715,7 @@
               </a:ln>
               <a:extLst>
                 <a:ext uri="{91240B29-F687-4f45-9708-019B960494DF}">
-                  <a14:hiddenLine xmlns:a14="http://schemas.microsoft.com/office/drawing/2010/main" xmlns="" w="9525">
+                  <a14:hiddenLine xmlns="" xmlns:a14="http://schemas.microsoft.com/office/drawing/2010/main" w="9525">
                     <a:solidFill>
                       <a:srgbClr val="000000"/>
                     </a:solidFill>
@@ -10805,7 +10805,7 @@
               </a:ln>
               <a:extLst>
                 <a:ext uri="{91240B29-F687-4f45-9708-019B960494DF}">
-                  <a14:hiddenLine xmlns:a14="http://schemas.microsoft.com/office/drawing/2010/main" xmlns="" w="9525">
+                  <a14:hiddenLine xmlns="" xmlns:a14="http://schemas.microsoft.com/office/drawing/2010/main" w="9525">
                     <a:solidFill>
                       <a:srgbClr val="000000"/>
                     </a:solidFill>
@@ -10895,7 +10895,7 @@
               </a:ln>
               <a:extLst>
                 <a:ext uri="{91240B29-F687-4f45-9708-019B960494DF}">
-                  <a14:hiddenLine xmlns:a14="http://schemas.microsoft.com/office/drawing/2010/main" xmlns="" w="9525">
+                  <a14:hiddenLine xmlns="" xmlns:a14="http://schemas.microsoft.com/office/drawing/2010/main" w="9525">
                     <a:solidFill>
                       <a:srgbClr val="000000"/>
                     </a:solidFill>
@@ -10960,7 +10960,7 @@
               </a:ln>
               <a:extLst>
                 <a:ext uri="{91240B29-F687-4f45-9708-019B960494DF}">
-                  <a14:hiddenLine xmlns:a14="http://schemas.microsoft.com/office/drawing/2010/main" xmlns="" w="9525">
+                  <a14:hiddenLine xmlns="" xmlns:a14="http://schemas.microsoft.com/office/drawing/2010/main" w="9525">
                     <a:solidFill>
                       <a:srgbClr val="000000"/>
                     </a:solidFill>
@@ -11080,7 +11080,7 @@
               </a:ln>
               <a:extLst>
                 <a:ext uri="{91240B29-F687-4f45-9708-019B960494DF}">
-                  <a14:hiddenLine xmlns:a14="http://schemas.microsoft.com/office/drawing/2010/main" xmlns="" w="9525">
+                  <a14:hiddenLine xmlns="" xmlns:a14="http://schemas.microsoft.com/office/drawing/2010/main" w="9525">
                     <a:solidFill>
                       <a:srgbClr val="000000"/>
                     </a:solidFill>
@@ -11178,7 +11178,7 @@
               </a:ln>
               <a:extLst>
                 <a:ext uri="{91240B29-F687-4f45-9708-019B960494DF}">
-                  <a14:hiddenLine xmlns:a14="http://schemas.microsoft.com/office/drawing/2010/main" xmlns="" w="9525">
+                  <a14:hiddenLine xmlns="" xmlns:a14="http://schemas.microsoft.com/office/drawing/2010/main" w="9525">
                     <a:solidFill>
                       <a:srgbClr val="000000"/>
                     </a:solidFill>
@@ -11293,7 +11293,7 @@
               </a:ln>
               <a:extLst>
                 <a:ext uri="{91240B29-F687-4f45-9708-019B960494DF}">
-                  <a14:hiddenLine xmlns:a14="http://schemas.microsoft.com/office/drawing/2010/main" xmlns="" w="9525">
+                  <a14:hiddenLine xmlns="" xmlns:a14="http://schemas.microsoft.com/office/drawing/2010/main" w="9525">
                     <a:solidFill>
                       <a:srgbClr val="000000"/>
                     </a:solidFill>
@@ -11383,7 +11383,7 @@
               </a:ln>
               <a:extLst>
                 <a:ext uri="{91240B29-F687-4f45-9708-019B960494DF}">
-                  <a14:hiddenLine xmlns:a14="http://schemas.microsoft.com/office/drawing/2010/main" xmlns="" w="9525">
+                  <a14:hiddenLine xmlns="" xmlns:a14="http://schemas.microsoft.com/office/drawing/2010/main" w="9525">
                     <a:solidFill>
                       <a:srgbClr val="000000"/>
                     </a:solidFill>
@@ -11448,7 +11448,7 @@
               </a:ln>
               <a:extLst>
                 <a:ext uri="{91240B29-F687-4f45-9708-019B960494DF}">
-                  <a14:hiddenLine xmlns:a14="http://schemas.microsoft.com/office/drawing/2010/main" xmlns="" w="9525">
+                  <a14:hiddenLine xmlns="" xmlns:a14="http://schemas.microsoft.com/office/drawing/2010/main" w="9525">
                     <a:solidFill>
                       <a:srgbClr val="000000"/>
                     </a:solidFill>
@@ -11538,7 +11538,7 @@
               </a:ln>
               <a:extLst>
                 <a:ext uri="{91240B29-F687-4f45-9708-019B960494DF}">
-                  <a14:hiddenLine xmlns:a14="http://schemas.microsoft.com/office/drawing/2010/main" xmlns="" w="9525">
+                  <a14:hiddenLine xmlns="" xmlns:a14="http://schemas.microsoft.com/office/drawing/2010/main" w="9525">
                     <a:solidFill>
                       <a:srgbClr val="000000"/>
                     </a:solidFill>
@@ -11606,7 +11606,7 @@
               </a:ln>
               <a:extLst>
                 <a:ext uri="{91240B29-F687-4f45-9708-019B960494DF}">
-                  <a14:hiddenLine xmlns:a14="http://schemas.microsoft.com/office/drawing/2010/main" xmlns="" w="9525">
+                  <a14:hiddenLine xmlns="" xmlns:a14="http://schemas.microsoft.com/office/drawing/2010/main" w="9525">
                     <a:solidFill>
                       <a:srgbClr val="000000"/>
                     </a:solidFill>
@@ -11696,7 +11696,7 @@
               </a:ln>
               <a:extLst>
                 <a:ext uri="{91240B29-F687-4f45-9708-019B960494DF}">
-                  <a14:hiddenLine xmlns:a14="http://schemas.microsoft.com/office/drawing/2010/main" xmlns="" w="9525">
+                  <a14:hiddenLine xmlns="" xmlns:a14="http://schemas.microsoft.com/office/drawing/2010/main" w="9525">
                     <a:solidFill>
                       <a:srgbClr val="000000"/>
                     </a:solidFill>
@@ -11764,7 +11764,7 @@
               </a:ln>
               <a:extLst>
                 <a:ext uri="{91240B29-F687-4f45-9708-019B960494DF}">
-                  <a14:hiddenLine xmlns:a14="http://schemas.microsoft.com/office/drawing/2010/main" xmlns="" w="9525">
+                  <a14:hiddenLine xmlns="" xmlns:a14="http://schemas.microsoft.com/office/drawing/2010/main" w="9525">
                     <a:solidFill>
                       <a:srgbClr val="000000"/>
                     </a:solidFill>
@@ -11854,7 +11854,7 @@
               </a:ln>
               <a:extLst>
                 <a:ext uri="{91240B29-F687-4f45-9708-019B960494DF}">
-                  <a14:hiddenLine xmlns:a14="http://schemas.microsoft.com/office/drawing/2010/main" xmlns="" w="9525">
+                  <a14:hiddenLine xmlns="" xmlns:a14="http://schemas.microsoft.com/office/drawing/2010/main" w="9525">
                     <a:solidFill>
                       <a:srgbClr val="000000"/>
                     </a:solidFill>
@@ -11888,7 +11888,7 @@
               </a:ln>
               <a:extLst>
                 <a:ext uri="{91240B29-F687-4f45-9708-019B960494DF}">
-                  <a14:hiddenLine xmlns:a14="http://schemas.microsoft.com/office/drawing/2010/main" xmlns="" w="9525">
+                  <a14:hiddenLine xmlns="" xmlns:a14="http://schemas.microsoft.com/office/drawing/2010/main" w="9525">
                     <a:solidFill>
                       <a:srgbClr val="000000"/>
                     </a:solidFill>

--- a/docs/architecture bigdata _Exam.pptx
+++ b/docs/architecture bigdata _Exam.pptx
@@ -174,7 +174,7 @@
           <a:noFill/>
           <a:extLst>
             <a:ext uri="{909E8E84-426E-40dd-AFC4-6F175D3DCCD1}">
-              <a14:hiddenFill xmlns="" xmlns:a14="http://schemas.microsoft.com/office/drawing/2010/main">
+              <a14:hiddenFill xmlns:a14="http://schemas.microsoft.com/office/drawing/2010/main" xmlns="">
                 <a:solidFill>
                   <a:srgbClr val="FFFFFF"/>
                 </a:solidFill>
@@ -234,7 +234,7 @@
             </a:ln>
             <a:extLst>
               <a:ext uri="{91240B29-F687-4f45-9708-019B960494DF}">
-                <a14:hiddenLine xmlns="" xmlns:a14="http://schemas.microsoft.com/office/drawing/2010/main" w="9525">
+                <a14:hiddenLine xmlns:a14="http://schemas.microsoft.com/office/drawing/2010/main" xmlns="" w="9525">
                   <a:solidFill>
                     <a:srgbClr val="000000"/>
                   </a:solidFill>
@@ -245,6 +245,13 @@
               </a:ext>
             </a:extLst>
           </p:spPr>
+          <p:txBody>
+            <a:bodyPr/>
+            <a:lstStyle/>
+            <a:p>
+              <a:endParaRPr lang="fr-FR"/>
+            </a:p>
+          </p:txBody>
         </p:sp>
         <p:sp>
           <p:nvSpPr>
@@ -324,7 +331,7 @@
             </a:ln>
             <a:extLst>
               <a:ext uri="{91240B29-F687-4f45-9708-019B960494DF}">
-                <a14:hiddenLine xmlns="" xmlns:a14="http://schemas.microsoft.com/office/drawing/2010/main" w="9525">
+                <a14:hiddenLine xmlns:a14="http://schemas.microsoft.com/office/drawing/2010/main" xmlns="" w="9525">
                   <a:solidFill>
                     <a:srgbClr val="000000"/>
                   </a:solidFill>
@@ -335,6 +342,13 @@
               </a:ext>
             </a:extLst>
           </p:spPr>
+          <p:txBody>
+            <a:bodyPr/>
+            <a:lstStyle/>
+            <a:p>
+              <a:endParaRPr lang="fr-FR"/>
+            </a:p>
+          </p:txBody>
         </p:sp>
         <p:sp>
           <p:nvSpPr>
@@ -414,7 +428,7 @@
             </a:ln>
             <a:extLst>
               <a:ext uri="{91240B29-F687-4f45-9708-019B960494DF}">
-                <a14:hiddenLine xmlns="" xmlns:a14="http://schemas.microsoft.com/office/drawing/2010/main" w="9525">
+                <a14:hiddenLine xmlns:a14="http://schemas.microsoft.com/office/drawing/2010/main" xmlns="" w="9525">
                   <a:solidFill>
                     <a:srgbClr val="000000"/>
                   </a:solidFill>
@@ -425,6 +439,13 @@
               </a:ext>
             </a:extLst>
           </p:spPr>
+          <p:txBody>
+            <a:bodyPr/>
+            <a:lstStyle/>
+            <a:p>
+              <a:endParaRPr lang="fr-FR"/>
+            </a:p>
+          </p:txBody>
         </p:sp>
         <p:sp>
           <p:nvSpPr>
@@ -448,7 +469,7 @@
             </a:ln>
             <a:extLst>
               <a:ext uri="{91240B29-F687-4f45-9708-019B960494DF}">
-                <a14:hiddenLine xmlns="" xmlns:a14="http://schemas.microsoft.com/office/drawing/2010/main" w="9525">
+                <a14:hiddenLine xmlns:a14="http://schemas.microsoft.com/office/drawing/2010/main" xmlns="" w="9525">
                   <a:solidFill>
                     <a:srgbClr val="000000"/>
                   </a:solidFill>
@@ -459,6 +480,13 @@
               </a:ext>
             </a:extLst>
           </p:spPr>
+          <p:txBody>
+            <a:bodyPr/>
+            <a:lstStyle/>
+            <a:p>
+              <a:endParaRPr lang="fr-FR"/>
+            </a:p>
+          </p:txBody>
         </p:sp>
         <p:sp>
           <p:nvSpPr>
@@ -538,7 +566,7 @@
             </a:ln>
             <a:extLst>
               <a:ext uri="{91240B29-F687-4f45-9708-019B960494DF}">
-                <a14:hiddenLine xmlns="" xmlns:a14="http://schemas.microsoft.com/office/drawing/2010/main" w="9525">
+                <a14:hiddenLine xmlns:a14="http://schemas.microsoft.com/office/drawing/2010/main" xmlns="" w="9525">
                   <a:solidFill>
                     <a:srgbClr val="000000"/>
                   </a:solidFill>
@@ -549,6 +577,13 @@
               </a:ext>
             </a:extLst>
           </p:spPr>
+          <p:txBody>
+            <a:bodyPr/>
+            <a:lstStyle/>
+            <a:p>
+              <a:endParaRPr lang="fr-FR"/>
+            </a:p>
+          </p:txBody>
         </p:sp>
         <p:sp>
           <p:nvSpPr>
@@ -600,7 +635,7 @@
             </a:ln>
             <a:extLst>
               <a:ext uri="{91240B29-F687-4f45-9708-019B960494DF}">
-                <a14:hiddenLine xmlns="" xmlns:a14="http://schemas.microsoft.com/office/drawing/2010/main" w="9525">
+                <a14:hiddenLine xmlns:a14="http://schemas.microsoft.com/office/drawing/2010/main" xmlns="" w="9525">
                   <a:solidFill>
                     <a:srgbClr val="000000"/>
                   </a:solidFill>
@@ -611,6 +646,13 @@
               </a:ext>
             </a:extLst>
           </p:spPr>
+          <p:txBody>
+            <a:bodyPr/>
+            <a:lstStyle/>
+            <a:p>
+              <a:endParaRPr lang="fr-FR"/>
+            </a:p>
+          </p:txBody>
         </p:sp>
         <p:sp>
           <p:nvSpPr>
@@ -662,7 +704,7 @@
             </a:ln>
             <a:extLst>
               <a:ext uri="{91240B29-F687-4f45-9708-019B960494DF}">
-                <a14:hiddenLine xmlns="" xmlns:a14="http://schemas.microsoft.com/office/drawing/2010/main" w="9525">
+                <a14:hiddenLine xmlns:a14="http://schemas.microsoft.com/office/drawing/2010/main" xmlns="" w="9525">
                   <a:solidFill>
                     <a:srgbClr val="000000"/>
                   </a:solidFill>
@@ -673,6 +715,13 @@
               </a:ext>
             </a:extLst>
           </p:spPr>
+          <p:txBody>
+            <a:bodyPr/>
+            <a:lstStyle/>
+            <a:p>
+              <a:endParaRPr lang="fr-FR"/>
+            </a:p>
+          </p:txBody>
         </p:sp>
         <p:sp>
           <p:nvSpPr>
@@ -752,7 +801,7 @@
             </a:ln>
             <a:extLst>
               <a:ext uri="{91240B29-F687-4f45-9708-019B960494DF}">
-                <a14:hiddenLine xmlns="" xmlns:a14="http://schemas.microsoft.com/office/drawing/2010/main" w="9525">
+                <a14:hiddenLine xmlns:a14="http://schemas.microsoft.com/office/drawing/2010/main" xmlns="" w="9525">
                   <a:solidFill>
                     <a:srgbClr val="000000"/>
                   </a:solidFill>
@@ -763,6 +812,13 @@
               </a:ext>
             </a:extLst>
           </p:spPr>
+          <p:txBody>
+            <a:bodyPr/>
+            <a:lstStyle/>
+            <a:p>
+              <a:endParaRPr lang="fr-FR"/>
+            </a:p>
+          </p:txBody>
         </p:sp>
         <p:sp>
           <p:nvSpPr>
@@ -814,7 +870,7 @@
             </a:ln>
             <a:extLst>
               <a:ext uri="{91240B29-F687-4f45-9708-019B960494DF}">
-                <a14:hiddenLine xmlns="" xmlns:a14="http://schemas.microsoft.com/office/drawing/2010/main" w="9525">
+                <a14:hiddenLine xmlns:a14="http://schemas.microsoft.com/office/drawing/2010/main" xmlns="" w="9525">
                   <a:solidFill>
                     <a:srgbClr val="000000"/>
                   </a:solidFill>
@@ -825,6 +881,13 @@
               </a:ext>
             </a:extLst>
           </p:spPr>
+          <p:txBody>
+            <a:bodyPr/>
+            <a:lstStyle/>
+            <a:p>
+              <a:endParaRPr lang="fr-FR"/>
+            </a:p>
+          </p:txBody>
         </p:sp>
         <p:sp>
           <p:nvSpPr>
@@ -876,7 +939,7 @@
             </a:ln>
             <a:extLst>
               <a:ext uri="{91240B29-F687-4f45-9708-019B960494DF}">
-                <a14:hiddenLine xmlns="" xmlns:a14="http://schemas.microsoft.com/office/drawing/2010/main" w="9525">
+                <a14:hiddenLine xmlns:a14="http://schemas.microsoft.com/office/drawing/2010/main" xmlns="" w="9525">
                   <a:solidFill>
                     <a:srgbClr val="000000"/>
                   </a:solidFill>
@@ -887,6 +950,13 @@
               </a:ext>
             </a:extLst>
           </p:spPr>
+          <p:txBody>
+            <a:bodyPr/>
+            <a:lstStyle/>
+            <a:p>
+              <a:endParaRPr lang="fr-FR"/>
+            </a:p>
+          </p:txBody>
         </p:sp>
         <p:sp>
           <p:nvSpPr>
@@ -966,7 +1036,7 @@
             </a:ln>
             <a:extLst>
               <a:ext uri="{91240B29-F687-4f45-9708-019B960494DF}">
-                <a14:hiddenLine xmlns="" xmlns:a14="http://schemas.microsoft.com/office/drawing/2010/main" w="9525">
+                <a14:hiddenLine xmlns:a14="http://schemas.microsoft.com/office/drawing/2010/main" xmlns="" w="9525">
                   <a:solidFill>
                     <a:srgbClr val="000000"/>
                   </a:solidFill>
@@ -977,6 +1047,13 @@
               </a:ext>
             </a:extLst>
           </p:spPr>
+          <p:txBody>
+            <a:bodyPr/>
+            <a:lstStyle/>
+            <a:p>
+              <a:endParaRPr lang="fr-FR"/>
+            </a:p>
+          </p:txBody>
         </p:sp>
         <p:sp>
           <p:nvSpPr>
@@ -1056,7 +1133,7 @@
             </a:ln>
             <a:extLst>
               <a:ext uri="{91240B29-F687-4f45-9708-019B960494DF}">
-                <a14:hiddenLine xmlns="" xmlns:a14="http://schemas.microsoft.com/office/drawing/2010/main" w="9525">
+                <a14:hiddenLine xmlns:a14="http://schemas.microsoft.com/office/drawing/2010/main" xmlns="" w="9525">
                   <a:solidFill>
                     <a:srgbClr val="000000"/>
                   </a:solidFill>
@@ -1067,6 +1144,13 @@
               </a:ext>
             </a:extLst>
           </p:spPr>
+          <p:txBody>
+            <a:bodyPr/>
+            <a:lstStyle/>
+            <a:p>
+              <a:endParaRPr lang="fr-FR"/>
+            </a:p>
+          </p:txBody>
         </p:sp>
         <p:sp>
           <p:nvSpPr>
@@ -1118,7 +1202,7 @@
             </a:ln>
             <a:extLst>
               <a:ext uri="{91240B29-F687-4f45-9708-019B960494DF}">
-                <a14:hiddenLine xmlns="" xmlns:a14="http://schemas.microsoft.com/office/drawing/2010/main" w="9525">
+                <a14:hiddenLine xmlns:a14="http://schemas.microsoft.com/office/drawing/2010/main" xmlns="" w="9525">
                   <a:solidFill>
                     <a:srgbClr val="000000"/>
                   </a:solidFill>
@@ -1129,6 +1213,13 @@
               </a:ext>
             </a:extLst>
           </p:spPr>
+          <p:txBody>
+            <a:bodyPr/>
+            <a:lstStyle/>
+            <a:p>
+              <a:endParaRPr lang="fr-FR"/>
+            </a:p>
+          </p:txBody>
         </p:sp>
         <p:sp>
           <p:nvSpPr>
@@ -1228,7 +1319,7 @@
             </a:ln>
             <a:extLst>
               <a:ext uri="{91240B29-F687-4f45-9708-019B960494DF}">
-                <a14:hiddenLine xmlns="" xmlns:a14="http://schemas.microsoft.com/office/drawing/2010/main" w="9525">
+                <a14:hiddenLine xmlns:a14="http://schemas.microsoft.com/office/drawing/2010/main" xmlns="" w="9525">
                   <a:solidFill>
                     <a:srgbClr val="000000"/>
                   </a:solidFill>
@@ -1239,6 +1330,13 @@
               </a:ext>
             </a:extLst>
           </p:spPr>
+          <p:txBody>
+            <a:bodyPr/>
+            <a:lstStyle/>
+            <a:p>
+              <a:endParaRPr lang="fr-FR"/>
+            </a:p>
+          </p:txBody>
         </p:sp>
         <p:sp>
           <p:nvSpPr>
@@ -1290,7 +1388,7 @@
             </a:ln>
             <a:extLst>
               <a:ext uri="{91240B29-F687-4f45-9708-019B960494DF}">
-                <a14:hiddenLine xmlns="" xmlns:a14="http://schemas.microsoft.com/office/drawing/2010/main" w="9525">
+                <a14:hiddenLine xmlns:a14="http://schemas.microsoft.com/office/drawing/2010/main" xmlns="" w="9525">
                   <a:solidFill>
                     <a:srgbClr val="000000"/>
                   </a:solidFill>
@@ -1301,6 +1399,13 @@
               </a:ext>
             </a:extLst>
           </p:spPr>
+          <p:txBody>
+            <a:bodyPr/>
+            <a:lstStyle/>
+            <a:p>
+              <a:endParaRPr lang="fr-FR"/>
+            </a:p>
+          </p:txBody>
         </p:sp>
         <p:sp>
           <p:nvSpPr>
@@ -1380,7 +1485,7 @@
             </a:ln>
             <a:extLst>
               <a:ext uri="{91240B29-F687-4f45-9708-019B960494DF}">
-                <a14:hiddenLine xmlns="" xmlns:a14="http://schemas.microsoft.com/office/drawing/2010/main" w="9525">
+                <a14:hiddenLine xmlns:a14="http://schemas.microsoft.com/office/drawing/2010/main" xmlns="" w="9525">
                   <a:solidFill>
                     <a:srgbClr val="000000"/>
                   </a:solidFill>
@@ -1391,6 +1496,13 @@
               </a:ext>
             </a:extLst>
           </p:spPr>
+          <p:txBody>
+            <a:bodyPr/>
+            <a:lstStyle/>
+            <a:p>
+              <a:endParaRPr lang="fr-FR"/>
+            </a:p>
+          </p:txBody>
         </p:sp>
         <p:sp>
           <p:nvSpPr>
@@ -1470,7 +1582,7 @@
             </a:ln>
             <a:extLst>
               <a:ext uri="{91240B29-F687-4f45-9708-019B960494DF}">
-                <a14:hiddenLine xmlns="" xmlns:a14="http://schemas.microsoft.com/office/drawing/2010/main" w="9525">
+                <a14:hiddenLine xmlns:a14="http://schemas.microsoft.com/office/drawing/2010/main" xmlns="" w="9525">
                   <a:solidFill>
                     <a:srgbClr val="000000"/>
                   </a:solidFill>
@@ -1481,6 +1593,13 @@
               </a:ext>
             </a:extLst>
           </p:spPr>
+          <p:txBody>
+            <a:bodyPr/>
+            <a:lstStyle/>
+            <a:p>
+              <a:endParaRPr lang="fr-FR"/>
+            </a:p>
+          </p:txBody>
         </p:sp>
         <p:sp>
           <p:nvSpPr>
@@ -1532,7 +1651,7 @@
             </a:ln>
             <a:extLst>
               <a:ext uri="{91240B29-F687-4f45-9708-019B960494DF}">
-                <a14:hiddenLine xmlns="" xmlns:a14="http://schemas.microsoft.com/office/drawing/2010/main" w="9525">
+                <a14:hiddenLine xmlns:a14="http://schemas.microsoft.com/office/drawing/2010/main" xmlns="" w="9525">
                   <a:solidFill>
                     <a:srgbClr val="000000"/>
                   </a:solidFill>
@@ -1543,6 +1662,13 @@
               </a:ext>
             </a:extLst>
           </p:spPr>
+          <p:txBody>
+            <a:bodyPr/>
+            <a:lstStyle/>
+            <a:p>
+              <a:endParaRPr lang="fr-FR"/>
+            </a:p>
+          </p:txBody>
         </p:sp>
         <p:sp>
           <p:nvSpPr>
@@ -1622,7 +1748,7 @@
             </a:ln>
             <a:extLst>
               <a:ext uri="{91240B29-F687-4f45-9708-019B960494DF}">
-                <a14:hiddenLine xmlns="" xmlns:a14="http://schemas.microsoft.com/office/drawing/2010/main" w="9525">
+                <a14:hiddenLine xmlns:a14="http://schemas.microsoft.com/office/drawing/2010/main" xmlns="" w="9525">
                   <a:solidFill>
                     <a:srgbClr val="000000"/>
                   </a:solidFill>
@@ -1633,6 +1759,13 @@
               </a:ext>
             </a:extLst>
           </p:spPr>
+          <p:txBody>
+            <a:bodyPr/>
+            <a:lstStyle/>
+            <a:p>
+              <a:endParaRPr lang="fr-FR"/>
+            </a:p>
+          </p:txBody>
         </p:sp>
         <p:sp>
           <p:nvSpPr>
@@ -1712,7 +1845,7 @@
             </a:ln>
             <a:extLst>
               <a:ext uri="{91240B29-F687-4f45-9708-019B960494DF}">
-                <a14:hiddenLine xmlns="" xmlns:a14="http://schemas.microsoft.com/office/drawing/2010/main" w="9525">
+                <a14:hiddenLine xmlns:a14="http://schemas.microsoft.com/office/drawing/2010/main" xmlns="" w="9525">
                   <a:solidFill>
                     <a:srgbClr val="000000"/>
                   </a:solidFill>
@@ -1723,6 +1856,13 @@
               </a:ext>
             </a:extLst>
           </p:spPr>
+          <p:txBody>
+            <a:bodyPr/>
+            <a:lstStyle/>
+            <a:p>
+              <a:endParaRPr lang="fr-FR"/>
+            </a:p>
+          </p:txBody>
         </p:sp>
         <p:sp>
           <p:nvSpPr>
@@ -1768,7 +1908,7 @@
             </a:ln>
             <a:extLst>
               <a:ext uri="{91240B29-F687-4f45-9708-019B960494DF}">
-                <a14:hiddenLine xmlns="" xmlns:a14="http://schemas.microsoft.com/office/drawing/2010/main" w="9525">
+                <a14:hiddenLine xmlns:a14="http://schemas.microsoft.com/office/drawing/2010/main" xmlns="" w="9525">
                   <a:solidFill>
                     <a:srgbClr val="000000"/>
                   </a:solidFill>
@@ -1779,6 +1919,13 @@
               </a:ext>
             </a:extLst>
           </p:spPr>
+          <p:txBody>
+            <a:bodyPr/>
+            <a:lstStyle/>
+            <a:p>
+              <a:endParaRPr lang="fr-FR"/>
+            </a:p>
+          </p:txBody>
         </p:sp>
         <p:sp>
           <p:nvSpPr>
@@ -1858,7 +2005,7 @@
             </a:ln>
             <a:extLst>
               <a:ext uri="{91240B29-F687-4f45-9708-019B960494DF}">
-                <a14:hiddenLine xmlns="" xmlns:a14="http://schemas.microsoft.com/office/drawing/2010/main" w="9525">
+                <a14:hiddenLine xmlns:a14="http://schemas.microsoft.com/office/drawing/2010/main" xmlns="" w="9525">
                   <a:solidFill>
                     <a:srgbClr val="000000"/>
                   </a:solidFill>
@@ -1869,6 +2016,13 @@
               </a:ext>
             </a:extLst>
           </p:spPr>
+          <p:txBody>
+            <a:bodyPr/>
+            <a:lstStyle/>
+            <a:p>
+              <a:endParaRPr lang="fr-FR"/>
+            </a:p>
+          </p:txBody>
         </p:sp>
         <p:sp>
           <p:nvSpPr>
@@ -1914,7 +2068,7 @@
             </a:ln>
             <a:extLst>
               <a:ext uri="{91240B29-F687-4f45-9708-019B960494DF}">
-                <a14:hiddenLine xmlns="" xmlns:a14="http://schemas.microsoft.com/office/drawing/2010/main" w="9525">
+                <a14:hiddenLine xmlns:a14="http://schemas.microsoft.com/office/drawing/2010/main" xmlns="" w="9525">
                   <a:solidFill>
                     <a:srgbClr val="000000"/>
                   </a:solidFill>
@@ -1925,6 +2079,13 @@
               </a:ext>
             </a:extLst>
           </p:spPr>
+          <p:txBody>
+            <a:bodyPr/>
+            <a:lstStyle/>
+            <a:p>
+              <a:endParaRPr lang="fr-FR"/>
+            </a:p>
+          </p:txBody>
         </p:sp>
         <p:sp>
           <p:nvSpPr>
@@ -2004,7 +2165,7 @@
             </a:ln>
             <a:extLst>
               <a:ext uri="{91240B29-F687-4f45-9708-019B960494DF}">
-                <a14:hiddenLine xmlns="" xmlns:a14="http://schemas.microsoft.com/office/drawing/2010/main" w="9525">
+                <a14:hiddenLine xmlns:a14="http://schemas.microsoft.com/office/drawing/2010/main" xmlns="" w="9525">
                   <a:solidFill>
                     <a:srgbClr val="000000"/>
                   </a:solidFill>
@@ -2015,6 +2176,13 @@
               </a:ext>
             </a:extLst>
           </p:spPr>
+          <p:txBody>
+            <a:bodyPr/>
+            <a:lstStyle/>
+            <a:p>
+              <a:endParaRPr lang="fr-FR"/>
+            </a:p>
+          </p:txBody>
         </p:sp>
         <p:sp>
           <p:nvSpPr>
@@ -2072,7 +2240,7 @@
             </a:ln>
             <a:extLst>
               <a:ext uri="{91240B29-F687-4f45-9708-019B960494DF}">
-                <a14:hiddenLine xmlns="" xmlns:a14="http://schemas.microsoft.com/office/drawing/2010/main" w="9525">
+                <a14:hiddenLine xmlns:a14="http://schemas.microsoft.com/office/drawing/2010/main" xmlns="" w="9525">
                   <a:solidFill>
                     <a:srgbClr val="000000"/>
                   </a:solidFill>
@@ -2083,6 +2251,13 @@
               </a:ext>
             </a:extLst>
           </p:spPr>
+          <p:txBody>
+            <a:bodyPr/>
+            <a:lstStyle/>
+            <a:p>
+              <a:endParaRPr lang="fr-FR"/>
+            </a:p>
+          </p:txBody>
         </p:sp>
         <p:sp>
           <p:nvSpPr>
@@ -2162,7 +2337,7 @@
             </a:ln>
             <a:extLst>
               <a:ext uri="{91240B29-F687-4f45-9708-019B960494DF}">
-                <a14:hiddenLine xmlns="" xmlns:a14="http://schemas.microsoft.com/office/drawing/2010/main" w="9525">
+                <a14:hiddenLine xmlns:a14="http://schemas.microsoft.com/office/drawing/2010/main" xmlns="" w="9525">
                   <a:solidFill>
                     <a:srgbClr val="000000"/>
                   </a:solidFill>
@@ -2173,6 +2348,13 @@
               </a:ext>
             </a:extLst>
           </p:spPr>
+          <p:txBody>
+            <a:bodyPr/>
+            <a:lstStyle/>
+            <a:p>
+              <a:endParaRPr lang="fr-FR"/>
+            </a:p>
+          </p:txBody>
         </p:sp>
         <p:sp>
           <p:nvSpPr>
@@ -2230,7 +2412,7 @@
             </a:ln>
             <a:extLst>
               <a:ext uri="{91240B29-F687-4f45-9708-019B960494DF}">
-                <a14:hiddenLine xmlns="" xmlns:a14="http://schemas.microsoft.com/office/drawing/2010/main" w="9525">
+                <a14:hiddenLine xmlns:a14="http://schemas.microsoft.com/office/drawing/2010/main" xmlns="" w="9525">
                   <a:solidFill>
                     <a:srgbClr val="000000"/>
                   </a:solidFill>
@@ -2241,6 +2423,13 @@
               </a:ext>
             </a:extLst>
           </p:spPr>
+          <p:txBody>
+            <a:bodyPr/>
+            <a:lstStyle/>
+            <a:p>
+              <a:endParaRPr lang="fr-FR"/>
+            </a:p>
+          </p:txBody>
         </p:sp>
         <p:sp>
           <p:nvSpPr>
@@ -2320,7 +2509,7 @@
             </a:ln>
             <a:extLst>
               <a:ext uri="{91240B29-F687-4f45-9708-019B960494DF}">
-                <a14:hiddenLine xmlns="" xmlns:a14="http://schemas.microsoft.com/office/drawing/2010/main" w="9525">
+                <a14:hiddenLine xmlns:a14="http://schemas.microsoft.com/office/drawing/2010/main" xmlns="" w="9525">
                   <a:solidFill>
                     <a:srgbClr val="000000"/>
                   </a:solidFill>
@@ -2331,6 +2520,13 @@
               </a:ext>
             </a:extLst>
           </p:spPr>
+          <p:txBody>
+            <a:bodyPr/>
+            <a:lstStyle/>
+            <a:p>
+              <a:endParaRPr lang="fr-FR"/>
+            </a:p>
+          </p:txBody>
         </p:sp>
         <p:sp>
           <p:nvSpPr>
@@ -2354,7 +2550,7 @@
             </a:ln>
             <a:extLst>
               <a:ext uri="{91240B29-F687-4f45-9708-019B960494DF}">
-                <a14:hiddenLine xmlns="" xmlns:a14="http://schemas.microsoft.com/office/drawing/2010/main" w="9525">
+                <a14:hiddenLine xmlns:a14="http://schemas.microsoft.com/office/drawing/2010/main" xmlns="" w="9525">
                   <a:solidFill>
                     <a:srgbClr val="000000"/>
                   </a:solidFill>
@@ -2365,6 +2561,13 @@
               </a:ext>
             </a:extLst>
           </p:spPr>
+          <p:txBody>
+            <a:bodyPr/>
+            <a:lstStyle/>
+            <a:p>
+              <a:endParaRPr lang="fr-FR"/>
+            </a:p>
+          </p:txBody>
         </p:sp>
         <p:sp>
           <p:nvSpPr>
@@ -2444,7 +2647,7 @@
             </a:ln>
             <a:extLst>
               <a:ext uri="{91240B29-F687-4f45-9708-019B960494DF}">
-                <a14:hiddenLine xmlns="" xmlns:a14="http://schemas.microsoft.com/office/drawing/2010/main" w="9525">
+                <a14:hiddenLine xmlns:a14="http://schemas.microsoft.com/office/drawing/2010/main" xmlns="" w="9525">
                   <a:solidFill>
                     <a:srgbClr val="000000"/>
                   </a:solidFill>
@@ -2455,6 +2658,13 @@
               </a:ext>
             </a:extLst>
           </p:spPr>
+          <p:txBody>
+            <a:bodyPr/>
+            <a:lstStyle/>
+            <a:p>
+              <a:endParaRPr lang="fr-FR"/>
+            </a:p>
+          </p:txBody>
         </p:sp>
         <p:sp>
           <p:nvSpPr>
@@ -2506,7 +2716,7 @@
             </a:ln>
             <a:extLst>
               <a:ext uri="{91240B29-F687-4f45-9708-019B960494DF}">
-                <a14:hiddenLine xmlns="" xmlns:a14="http://schemas.microsoft.com/office/drawing/2010/main" w="9525">
+                <a14:hiddenLine xmlns:a14="http://schemas.microsoft.com/office/drawing/2010/main" xmlns="" w="9525">
                   <a:solidFill>
                     <a:srgbClr val="000000"/>
                   </a:solidFill>
@@ -2517,6 +2727,13 @@
               </a:ext>
             </a:extLst>
           </p:spPr>
+          <p:txBody>
+            <a:bodyPr/>
+            <a:lstStyle/>
+            <a:p>
+              <a:endParaRPr lang="fr-FR"/>
+            </a:p>
+          </p:txBody>
         </p:sp>
         <p:sp>
           <p:nvSpPr>
@@ -2568,7 +2785,7 @@
             </a:ln>
             <a:extLst>
               <a:ext uri="{91240B29-F687-4f45-9708-019B960494DF}">
-                <a14:hiddenLine xmlns="" xmlns:a14="http://schemas.microsoft.com/office/drawing/2010/main" w="9525">
+                <a14:hiddenLine xmlns:a14="http://schemas.microsoft.com/office/drawing/2010/main" xmlns="" w="9525">
                   <a:solidFill>
                     <a:srgbClr val="000000"/>
                   </a:solidFill>
@@ -2579,6 +2796,13 @@
               </a:ext>
             </a:extLst>
           </p:spPr>
+          <p:txBody>
+            <a:bodyPr/>
+            <a:lstStyle/>
+            <a:p>
+              <a:endParaRPr lang="fr-FR"/>
+            </a:p>
+          </p:txBody>
         </p:sp>
         <p:sp>
           <p:nvSpPr>
@@ -2658,7 +2882,7 @@
             </a:ln>
             <a:extLst>
               <a:ext uri="{91240B29-F687-4f45-9708-019B960494DF}">
-                <a14:hiddenLine xmlns="" xmlns:a14="http://schemas.microsoft.com/office/drawing/2010/main" w="9525">
+                <a14:hiddenLine xmlns:a14="http://schemas.microsoft.com/office/drawing/2010/main" xmlns="" w="9525">
                   <a:solidFill>
                     <a:srgbClr val="000000"/>
                   </a:solidFill>
@@ -2669,6 +2893,13 @@
               </a:ext>
             </a:extLst>
           </p:spPr>
+          <p:txBody>
+            <a:bodyPr/>
+            <a:lstStyle/>
+            <a:p>
+              <a:endParaRPr lang="fr-FR"/>
+            </a:p>
+          </p:txBody>
         </p:sp>
         <p:sp>
           <p:nvSpPr>
@@ -2726,7 +2957,7 @@
             </a:ln>
             <a:extLst>
               <a:ext uri="{91240B29-F687-4f45-9708-019B960494DF}">
-                <a14:hiddenLine xmlns="" xmlns:a14="http://schemas.microsoft.com/office/drawing/2010/main" w="9525">
+                <a14:hiddenLine xmlns:a14="http://schemas.microsoft.com/office/drawing/2010/main" xmlns="" w="9525">
                   <a:solidFill>
                     <a:srgbClr val="000000"/>
                   </a:solidFill>
@@ -2737,6 +2968,13 @@
               </a:ext>
             </a:extLst>
           </p:spPr>
+          <p:txBody>
+            <a:bodyPr/>
+            <a:lstStyle/>
+            <a:p>
+              <a:endParaRPr lang="fr-FR"/>
+            </a:p>
+          </p:txBody>
         </p:sp>
         <p:sp>
           <p:nvSpPr>
@@ -2788,7 +3026,7 @@
             </a:ln>
             <a:extLst>
               <a:ext uri="{91240B29-F687-4f45-9708-019B960494DF}">
-                <a14:hiddenLine xmlns="" xmlns:a14="http://schemas.microsoft.com/office/drawing/2010/main" w="9525">
+                <a14:hiddenLine xmlns:a14="http://schemas.microsoft.com/office/drawing/2010/main" xmlns="" w="9525">
                   <a:solidFill>
                     <a:srgbClr val="000000"/>
                   </a:solidFill>
@@ -2799,6 +3037,13 @@
               </a:ext>
             </a:extLst>
           </p:spPr>
+          <p:txBody>
+            <a:bodyPr/>
+            <a:lstStyle/>
+            <a:p>
+              <a:endParaRPr lang="fr-FR"/>
+            </a:p>
+          </p:txBody>
         </p:sp>
         <p:sp>
           <p:nvSpPr>
@@ -2878,7 +3123,7 @@
             </a:ln>
             <a:extLst>
               <a:ext uri="{91240B29-F687-4f45-9708-019B960494DF}">
-                <a14:hiddenLine xmlns="" xmlns:a14="http://schemas.microsoft.com/office/drawing/2010/main" w="9525">
+                <a14:hiddenLine xmlns:a14="http://schemas.microsoft.com/office/drawing/2010/main" xmlns="" w="9525">
                   <a:solidFill>
                     <a:srgbClr val="000000"/>
                   </a:solidFill>
@@ -2889,6 +3134,13 @@
               </a:ext>
             </a:extLst>
           </p:spPr>
+          <p:txBody>
+            <a:bodyPr/>
+            <a:lstStyle/>
+            <a:p>
+              <a:endParaRPr lang="fr-FR"/>
+            </a:p>
+          </p:txBody>
         </p:sp>
         <p:sp>
           <p:nvSpPr>
@@ -2940,7 +3192,7 @@
             </a:ln>
             <a:extLst>
               <a:ext uri="{91240B29-F687-4f45-9708-019B960494DF}">
-                <a14:hiddenLine xmlns="" xmlns:a14="http://schemas.microsoft.com/office/drawing/2010/main" w="9525">
+                <a14:hiddenLine xmlns:a14="http://schemas.microsoft.com/office/drawing/2010/main" xmlns="" w="9525">
                   <a:solidFill>
                     <a:srgbClr val="000000"/>
                   </a:solidFill>
@@ -2951,6 +3203,13 @@
               </a:ext>
             </a:extLst>
           </p:spPr>
+          <p:txBody>
+            <a:bodyPr/>
+            <a:lstStyle/>
+            <a:p>
+              <a:endParaRPr lang="fr-FR"/>
+            </a:p>
+          </p:txBody>
         </p:sp>
         <p:sp>
           <p:nvSpPr>
@@ -3030,7 +3289,7 @@
             </a:ln>
             <a:extLst>
               <a:ext uri="{91240B29-F687-4f45-9708-019B960494DF}">
-                <a14:hiddenLine xmlns="" xmlns:a14="http://schemas.microsoft.com/office/drawing/2010/main" w="9525">
+                <a14:hiddenLine xmlns:a14="http://schemas.microsoft.com/office/drawing/2010/main" xmlns="" w="9525">
                   <a:solidFill>
                     <a:srgbClr val="000000"/>
                   </a:solidFill>
@@ -3041,6 +3300,13 @@
               </a:ext>
             </a:extLst>
           </p:spPr>
+          <p:txBody>
+            <a:bodyPr/>
+            <a:lstStyle/>
+            <a:p>
+              <a:endParaRPr lang="fr-FR"/>
+            </a:p>
+          </p:txBody>
         </p:sp>
         <p:sp>
           <p:nvSpPr>
@@ -3092,7 +3358,7 @@
             </a:ln>
             <a:extLst>
               <a:ext uri="{91240B29-F687-4f45-9708-019B960494DF}">
-                <a14:hiddenLine xmlns="" xmlns:a14="http://schemas.microsoft.com/office/drawing/2010/main" w="9525">
+                <a14:hiddenLine xmlns:a14="http://schemas.microsoft.com/office/drawing/2010/main" xmlns="" w="9525">
                   <a:solidFill>
                     <a:srgbClr val="000000"/>
                   </a:solidFill>
@@ -3103,6 +3369,13 @@
               </a:ext>
             </a:extLst>
           </p:spPr>
+          <p:txBody>
+            <a:bodyPr/>
+            <a:lstStyle/>
+            <a:p>
+              <a:endParaRPr lang="fr-FR"/>
+            </a:p>
+          </p:txBody>
         </p:sp>
         <p:sp>
           <p:nvSpPr>
@@ -3182,7 +3455,7 @@
             </a:ln>
             <a:extLst>
               <a:ext uri="{91240B29-F687-4f45-9708-019B960494DF}">
-                <a14:hiddenLine xmlns="" xmlns:a14="http://schemas.microsoft.com/office/drawing/2010/main" w="9525">
+                <a14:hiddenLine xmlns:a14="http://schemas.microsoft.com/office/drawing/2010/main" xmlns="" w="9525">
                   <a:solidFill>
                     <a:srgbClr val="000000"/>
                   </a:solidFill>
@@ -3193,6 +3466,13 @@
               </a:ext>
             </a:extLst>
           </p:spPr>
+          <p:txBody>
+            <a:bodyPr/>
+            <a:lstStyle/>
+            <a:p>
+              <a:endParaRPr lang="fr-FR"/>
+            </a:p>
+          </p:txBody>
         </p:sp>
         <p:sp>
           <p:nvSpPr>
@@ -3216,7 +3496,7 @@
             </a:ln>
             <a:extLst>
               <a:ext uri="{91240B29-F687-4f45-9708-019B960494DF}">
-                <a14:hiddenLine xmlns="" xmlns:a14="http://schemas.microsoft.com/office/drawing/2010/main" w="9525">
+                <a14:hiddenLine xmlns:a14="http://schemas.microsoft.com/office/drawing/2010/main" xmlns="" w="9525">
                   <a:solidFill>
                     <a:srgbClr val="000000"/>
                   </a:solidFill>
@@ -3227,6 +3507,13 @@
               </a:ext>
             </a:extLst>
           </p:spPr>
+          <p:txBody>
+            <a:bodyPr/>
+            <a:lstStyle/>
+            <a:p>
+              <a:endParaRPr lang="fr-FR"/>
+            </a:p>
+          </p:txBody>
         </p:sp>
         <p:sp>
           <p:nvSpPr>
@@ -3281,7 +3568,7 @@
             </a:ln>
             <a:extLst>
               <a:ext uri="{91240B29-F687-4f45-9708-019B960494DF}">
-                <a14:hiddenLine xmlns="" xmlns:a14="http://schemas.microsoft.com/office/drawing/2010/main" w="9525">
+                <a14:hiddenLine xmlns:a14="http://schemas.microsoft.com/office/drawing/2010/main" xmlns="" w="9525">
                   <a:solidFill>
                     <a:srgbClr val="000000"/>
                   </a:solidFill>
@@ -3292,6 +3579,13 @@
               </a:ext>
             </a:extLst>
           </p:spPr>
+          <p:txBody>
+            <a:bodyPr/>
+            <a:lstStyle/>
+            <a:p>
+              <a:endParaRPr lang="fr-FR"/>
+            </a:p>
+          </p:txBody>
         </p:sp>
         <p:sp>
           <p:nvSpPr>
@@ -3371,7 +3665,7 @@
             </a:ln>
             <a:extLst>
               <a:ext uri="{91240B29-F687-4f45-9708-019B960494DF}">
-                <a14:hiddenLine xmlns="" xmlns:a14="http://schemas.microsoft.com/office/drawing/2010/main" w="9525">
+                <a14:hiddenLine xmlns:a14="http://schemas.microsoft.com/office/drawing/2010/main" xmlns="" w="9525">
                   <a:solidFill>
                     <a:srgbClr val="000000"/>
                   </a:solidFill>
@@ -3382,6 +3676,13 @@
               </a:ext>
             </a:extLst>
           </p:spPr>
+          <p:txBody>
+            <a:bodyPr/>
+            <a:lstStyle/>
+            <a:p>
+              <a:endParaRPr lang="fr-FR"/>
+            </a:p>
+          </p:txBody>
         </p:sp>
         <p:sp>
           <p:nvSpPr>
@@ -3433,7 +3734,7 @@
             </a:ln>
             <a:extLst>
               <a:ext uri="{91240B29-F687-4f45-9708-019B960494DF}">
-                <a14:hiddenLine xmlns="" xmlns:a14="http://schemas.microsoft.com/office/drawing/2010/main" w="9525">
+                <a14:hiddenLine xmlns:a14="http://schemas.microsoft.com/office/drawing/2010/main" xmlns="" w="9525">
                   <a:solidFill>
                     <a:srgbClr val="000000"/>
                   </a:solidFill>
@@ -3444,6 +3745,13 @@
               </a:ext>
             </a:extLst>
           </p:spPr>
+          <p:txBody>
+            <a:bodyPr/>
+            <a:lstStyle/>
+            <a:p>
+              <a:endParaRPr lang="fr-FR"/>
+            </a:p>
+          </p:txBody>
         </p:sp>
         <p:sp>
           <p:nvSpPr>
@@ -3523,7 +3831,7 @@
             </a:ln>
             <a:extLst>
               <a:ext uri="{91240B29-F687-4f45-9708-019B960494DF}">
-                <a14:hiddenLine xmlns="" xmlns:a14="http://schemas.microsoft.com/office/drawing/2010/main" w="9525">
+                <a14:hiddenLine xmlns:a14="http://schemas.microsoft.com/office/drawing/2010/main" xmlns="" w="9525">
                   <a:solidFill>
                     <a:srgbClr val="000000"/>
                   </a:solidFill>
@@ -3534,6 +3842,13 @@
               </a:ext>
             </a:extLst>
           </p:spPr>
+          <p:txBody>
+            <a:bodyPr/>
+            <a:lstStyle/>
+            <a:p>
+              <a:endParaRPr lang="fr-FR"/>
+            </a:p>
+          </p:txBody>
         </p:sp>
         <p:sp>
           <p:nvSpPr>
@@ -3613,7 +3928,7 @@
             </a:ln>
             <a:extLst>
               <a:ext uri="{91240B29-F687-4f45-9708-019B960494DF}">
-                <a14:hiddenLine xmlns="" xmlns:a14="http://schemas.microsoft.com/office/drawing/2010/main" w="9525">
+                <a14:hiddenLine xmlns:a14="http://schemas.microsoft.com/office/drawing/2010/main" xmlns="" w="9525">
                   <a:solidFill>
                     <a:srgbClr val="000000"/>
                   </a:solidFill>
@@ -3624,6 +3939,13 @@
               </a:ext>
             </a:extLst>
           </p:spPr>
+          <p:txBody>
+            <a:bodyPr/>
+            <a:lstStyle/>
+            <a:p>
+              <a:endParaRPr lang="fr-FR"/>
+            </a:p>
+          </p:txBody>
         </p:sp>
         <p:sp>
           <p:nvSpPr>
@@ -3678,7 +4000,7 @@
             </a:ln>
             <a:extLst>
               <a:ext uri="{91240B29-F687-4f45-9708-019B960494DF}">
-                <a14:hiddenLine xmlns="" xmlns:a14="http://schemas.microsoft.com/office/drawing/2010/main" w="9525">
+                <a14:hiddenLine xmlns:a14="http://schemas.microsoft.com/office/drawing/2010/main" xmlns="" w="9525">
                   <a:solidFill>
                     <a:srgbClr val="000000"/>
                   </a:solidFill>
@@ -3689,6 +4011,13 @@
               </a:ext>
             </a:extLst>
           </p:spPr>
+          <p:txBody>
+            <a:bodyPr/>
+            <a:lstStyle/>
+            <a:p>
+              <a:endParaRPr lang="fr-FR"/>
+            </a:p>
+          </p:txBody>
         </p:sp>
         <p:sp>
           <p:nvSpPr>
@@ -3740,7 +4069,7 @@
             </a:ln>
             <a:extLst>
               <a:ext uri="{91240B29-F687-4f45-9708-019B960494DF}">
-                <a14:hiddenLine xmlns="" xmlns:a14="http://schemas.microsoft.com/office/drawing/2010/main" w="9525">
+                <a14:hiddenLine xmlns:a14="http://schemas.microsoft.com/office/drawing/2010/main" xmlns="" w="9525">
                   <a:solidFill>
                     <a:srgbClr val="000000"/>
                   </a:solidFill>
@@ -3751,6 +4080,13 @@
               </a:ext>
             </a:extLst>
           </p:spPr>
+          <p:txBody>
+            <a:bodyPr/>
+            <a:lstStyle/>
+            <a:p>
+              <a:endParaRPr lang="fr-FR"/>
+            </a:p>
+          </p:txBody>
         </p:sp>
         <p:sp>
           <p:nvSpPr>
@@ -3830,7 +4166,7 @@
             </a:ln>
             <a:extLst>
               <a:ext uri="{91240B29-F687-4f45-9708-019B960494DF}">
-                <a14:hiddenLine xmlns="" xmlns:a14="http://schemas.microsoft.com/office/drawing/2010/main" w="9525">
+                <a14:hiddenLine xmlns:a14="http://schemas.microsoft.com/office/drawing/2010/main" xmlns="" w="9525">
                   <a:solidFill>
                     <a:srgbClr val="000000"/>
                   </a:solidFill>
@@ -3841,6 +4177,13 @@
               </a:ext>
             </a:extLst>
           </p:spPr>
+          <p:txBody>
+            <a:bodyPr/>
+            <a:lstStyle/>
+            <a:p>
+              <a:endParaRPr lang="fr-FR"/>
+            </a:p>
+          </p:txBody>
         </p:sp>
         <p:sp>
           <p:nvSpPr>
@@ -3920,7 +4263,7 @@
             </a:ln>
             <a:extLst>
               <a:ext uri="{91240B29-F687-4f45-9708-019B960494DF}">
-                <a14:hiddenLine xmlns="" xmlns:a14="http://schemas.microsoft.com/office/drawing/2010/main" w="9525">
+                <a14:hiddenLine xmlns:a14="http://schemas.microsoft.com/office/drawing/2010/main" xmlns="" w="9525">
                   <a:solidFill>
                     <a:srgbClr val="000000"/>
                   </a:solidFill>
@@ -3931,6 +4274,13 @@
               </a:ext>
             </a:extLst>
           </p:spPr>
+          <p:txBody>
+            <a:bodyPr/>
+            <a:lstStyle/>
+            <a:p>
+              <a:endParaRPr lang="fr-FR"/>
+            </a:p>
+          </p:txBody>
         </p:sp>
         <p:sp>
           <p:nvSpPr>
@@ -3982,7 +4332,7 @@
             </a:ln>
             <a:extLst>
               <a:ext uri="{91240B29-F687-4f45-9708-019B960494DF}">
-                <a14:hiddenLine xmlns="" xmlns:a14="http://schemas.microsoft.com/office/drawing/2010/main" w="9525">
+                <a14:hiddenLine xmlns:a14="http://schemas.microsoft.com/office/drawing/2010/main" xmlns="" w="9525">
                   <a:solidFill>
                     <a:srgbClr val="000000"/>
                   </a:solidFill>
@@ -3993,6 +4343,13 @@
               </a:ext>
             </a:extLst>
           </p:spPr>
+          <p:txBody>
+            <a:bodyPr/>
+            <a:lstStyle/>
+            <a:p>
+              <a:endParaRPr lang="fr-FR"/>
+            </a:p>
+          </p:txBody>
         </p:sp>
         <p:sp>
           <p:nvSpPr>
@@ -4102,7 +4459,7 @@
             </a:ln>
             <a:extLst>
               <a:ext uri="{91240B29-F687-4f45-9708-019B960494DF}">
-                <a14:hiddenLine xmlns="" xmlns:a14="http://schemas.microsoft.com/office/drawing/2010/main" w="9525">
+                <a14:hiddenLine xmlns:a14="http://schemas.microsoft.com/office/drawing/2010/main" xmlns="" w="9525">
                   <a:solidFill>
                     <a:srgbClr val="000000"/>
                   </a:solidFill>
@@ -4113,6 +4470,13 @@
               </a:ext>
             </a:extLst>
           </p:spPr>
+          <p:txBody>
+            <a:bodyPr/>
+            <a:lstStyle/>
+            <a:p>
+              <a:endParaRPr lang="fr-FR"/>
+            </a:p>
+          </p:txBody>
         </p:sp>
         <p:sp>
           <p:nvSpPr>
@@ -4170,7 +4534,7 @@
             </a:ln>
             <a:extLst>
               <a:ext uri="{91240B29-F687-4f45-9708-019B960494DF}">
-                <a14:hiddenLine xmlns="" xmlns:a14="http://schemas.microsoft.com/office/drawing/2010/main" w="9525">
+                <a14:hiddenLine xmlns:a14="http://schemas.microsoft.com/office/drawing/2010/main" xmlns="" w="9525">
                   <a:solidFill>
                     <a:srgbClr val="000000"/>
                   </a:solidFill>
@@ -4181,6 +4545,13 @@
               </a:ext>
             </a:extLst>
           </p:spPr>
+          <p:txBody>
+            <a:bodyPr/>
+            <a:lstStyle/>
+            <a:p>
+              <a:endParaRPr lang="fr-FR"/>
+            </a:p>
+          </p:txBody>
         </p:sp>
         <p:sp>
           <p:nvSpPr>
@@ -4260,7 +4631,7 @@
             </a:ln>
             <a:extLst>
               <a:ext uri="{91240B29-F687-4f45-9708-019B960494DF}">
-                <a14:hiddenLine xmlns="" xmlns:a14="http://schemas.microsoft.com/office/drawing/2010/main" w="9525">
+                <a14:hiddenLine xmlns:a14="http://schemas.microsoft.com/office/drawing/2010/main" xmlns="" w="9525">
                   <a:solidFill>
                     <a:srgbClr val="000000"/>
                   </a:solidFill>
@@ -4271,6 +4642,13 @@
               </a:ext>
             </a:extLst>
           </p:spPr>
+          <p:txBody>
+            <a:bodyPr/>
+            <a:lstStyle/>
+            <a:p>
+              <a:endParaRPr lang="fr-FR"/>
+            </a:p>
+          </p:txBody>
         </p:sp>
       </p:grpSp>
       <p:sp>
@@ -9067,7 +9445,7 @@
           <a:noFill/>
           <a:extLst>
             <a:ext uri="{909E8E84-426E-40dd-AFC4-6F175D3DCCD1}">
-              <a14:hiddenFill xmlns="" xmlns:a14="http://schemas.microsoft.com/office/drawing/2010/main">
+              <a14:hiddenFill xmlns:a14="http://schemas.microsoft.com/office/drawing/2010/main" xmlns="">
                 <a:solidFill>
                   <a:srgbClr val="FFFFFF"/>
                 </a:solidFill>
@@ -9141,7 +9519,7 @@
               </a:ln>
               <a:extLst>
                 <a:ext uri="{91240B29-F687-4f45-9708-019B960494DF}">
-                  <a14:hiddenLine xmlns="" xmlns:a14="http://schemas.microsoft.com/office/drawing/2010/main" w="9525">
+                  <a14:hiddenLine xmlns:a14="http://schemas.microsoft.com/office/drawing/2010/main" xmlns="" w="9525">
                     <a:solidFill>
                       <a:srgbClr val="000000"/>
                     </a:solidFill>
@@ -9152,6 +9530,13 @@
                 </a:ext>
               </a:extLst>
             </p:spPr>
+            <p:txBody>
+              <a:bodyPr/>
+              <a:lstStyle/>
+              <a:p>
+                <a:endParaRPr lang="fr-FR"/>
+              </a:p>
+            </p:txBody>
           </p:sp>
           <p:sp>
             <p:nvSpPr>
@@ -9231,7 +9616,7 @@
               </a:ln>
               <a:extLst>
                 <a:ext uri="{91240B29-F687-4f45-9708-019B960494DF}">
-                  <a14:hiddenLine xmlns="" xmlns:a14="http://schemas.microsoft.com/office/drawing/2010/main" w="9525">
+                  <a14:hiddenLine xmlns:a14="http://schemas.microsoft.com/office/drawing/2010/main" xmlns="" w="9525">
                     <a:solidFill>
                       <a:srgbClr val="000000"/>
                     </a:solidFill>
@@ -9242,6 +9627,13 @@
                 </a:ext>
               </a:extLst>
             </p:spPr>
+            <p:txBody>
+              <a:bodyPr/>
+              <a:lstStyle/>
+              <a:p>
+                <a:endParaRPr lang="fr-FR"/>
+              </a:p>
+            </p:txBody>
           </p:sp>
           <p:sp>
             <p:nvSpPr>
@@ -9321,7 +9713,7 @@
               </a:ln>
               <a:extLst>
                 <a:ext uri="{91240B29-F687-4f45-9708-019B960494DF}">
-                  <a14:hiddenLine xmlns="" xmlns:a14="http://schemas.microsoft.com/office/drawing/2010/main" w="9525">
+                  <a14:hiddenLine xmlns:a14="http://schemas.microsoft.com/office/drawing/2010/main" xmlns="" w="9525">
                     <a:solidFill>
                       <a:srgbClr val="000000"/>
                     </a:solidFill>
@@ -9332,6 +9724,13 @@
                 </a:ext>
               </a:extLst>
             </p:spPr>
+            <p:txBody>
+              <a:bodyPr/>
+              <a:lstStyle/>
+              <a:p>
+                <a:endParaRPr lang="fr-FR"/>
+              </a:p>
+            </p:txBody>
           </p:sp>
           <p:sp>
             <p:nvSpPr>
@@ -9383,7 +9782,7 @@
               </a:ln>
               <a:extLst>
                 <a:ext uri="{91240B29-F687-4f45-9708-019B960494DF}">
-                  <a14:hiddenLine xmlns="" xmlns:a14="http://schemas.microsoft.com/office/drawing/2010/main" w="9525">
+                  <a14:hiddenLine xmlns:a14="http://schemas.microsoft.com/office/drawing/2010/main" xmlns="" w="9525">
                     <a:solidFill>
                       <a:srgbClr val="000000"/>
                     </a:solidFill>
@@ -9394,6 +9793,13 @@
                 </a:ext>
               </a:extLst>
             </p:spPr>
+            <p:txBody>
+              <a:bodyPr/>
+              <a:lstStyle/>
+              <a:p>
+                <a:endParaRPr lang="fr-FR"/>
+              </a:p>
+            </p:txBody>
           </p:sp>
           <p:sp>
             <p:nvSpPr>
@@ -9473,7 +9879,7 @@
               </a:ln>
               <a:extLst>
                 <a:ext uri="{91240B29-F687-4f45-9708-019B960494DF}">
-                  <a14:hiddenLine xmlns="" xmlns:a14="http://schemas.microsoft.com/office/drawing/2010/main" w="9525">
+                  <a14:hiddenLine xmlns:a14="http://schemas.microsoft.com/office/drawing/2010/main" xmlns="" w="9525">
                     <a:solidFill>
                       <a:srgbClr val="000000"/>
                     </a:solidFill>
@@ -9484,6 +9890,13 @@
                 </a:ext>
               </a:extLst>
             </p:spPr>
+            <p:txBody>
+              <a:bodyPr/>
+              <a:lstStyle/>
+              <a:p>
+                <a:endParaRPr lang="fr-FR"/>
+              </a:p>
+            </p:txBody>
           </p:sp>
           <p:sp>
             <p:nvSpPr>
@@ -9535,7 +9948,7 @@
               </a:ln>
               <a:extLst>
                 <a:ext uri="{91240B29-F687-4f45-9708-019B960494DF}">
-                  <a14:hiddenLine xmlns="" xmlns:a14="http://schemas.microsoft.com/office/drawing/2010/main" w="9525">
+                  <a14:hiddenLine xmlns:a14="http://schemas.microsoft.com/office/drawing/2010/main" xmlns="" w="9525">
                     <a:solidFill>
                       <a:srgbClr val="000000"/>
                     </a:solidFill>
@@ -9546,6 +9959,13 @@
                 </a:ext>
               </a:extLst>
             </p:spPr>
+            <p:txBody>
+              <a:bodyPr/>
+              <a:lstStyle/>
+              <a:p>
+                <a:endParaRPr lang="fr-FR"/>
+              </a:p>
+            </p:txBody>
           </p:sp>
           <p:sp>
             <p:nvSpPr>
@@ -9597,7 +10017,7 @@
               </a:ln>
               <a:extLst>
                 <a:ext uri="{91240B29-F687-4f45-9708-019B960494DF}">
-                  <a14:hiddenLine xmlns="" xmlns:a14="http://schemas.microsoft.com/office/drawing/2010/main" w="9525">
+                  <a14:hiddenLine xmlns:a14="http://schemas.microsoft.com/office/drawing/2010/main" xmlns="" w="9525">
                     <a:solidFill>
                       <a:srgbClr val="000000"/>
                     </a:solidFill>
@@ -9608,6 +10028,13 @@
                 </a:ext>
               </a:extLst>
             </p:spPr>
+            <p:txBody>
+              <a:bodyPr/>
+              <a:lstStyle/>
+              <a:p>
+                <a:endParaRPr lang="fr-FR"/>
+              </a:p>
+            </p:txBody>
           </p:sp>
           <p:sp>
             <p:nvSpPr>
@@ -9687,7 +10114,7 @@
               </a:ln>
               <a:extLst>
                 <a:ext uri="{91240B29-F687-4f45-9708-019B960494DF}">
-                  <a14:hiddenLine xmlns="" xmlns:a14="http://schemas.microsoft.com/office/drawing/2010/main" w="9525">
+                  <a14:hiddenLine xmlns:a14="http://schemas.microsoft.com/office/drawing/2010/main" xmlns="" w="9525">
                     <a:solidFill>
                       <a:srgbClr val="000000"/>
                     </a:solidFill>
@@ -9698,6 +10125,13 @@
                 </a:ext>
               </a:extLst>
             </p:spPr>
+            <p:txBody>
+              <a:bodyPr/>
+              <a:lstStyle/>
+              <a:p>
+                <a:endParaRPr lang="fr-FR"/>
+              </a:p>
+            </p:txBody>
           </p:sp>
           <p:sp>
             <p:nvSpPr>
@@ -9777,7 +10211,7 @@
               </a:ln>
               <a:extLst>
                 <a:ext uri="{91240B29-F687-4f45-9708-019B960494DF}">
-                  <a14:hiddenLine xmlns="" xmlns:a14="http://schemas.microsoft.com/office/drawing/2010/main" w="9525">
+                  <a14:hiddenLine xmlns:a14="http://schemas.microsoft.com/office/drawing/2010/main" xmlns="" w="9525">
                     <a:solidFill>
                       <a:srgbClr val="000000"/>
                     </a:solidFill>
@@ -9788,6 +10222,13 @@
                 </a:ext>
               </a:extLst>
             </p:spPr>
+            <p:txBody>
+              <a:bodyPr/>
+              <a:lstStyle/>
+              <a:p>
+                <a:endParaRPr lang="fr-FR"/>
+              </a:p>
+            </p:txBody>
           </p:sp>
           <p:sp>
             <p:nvSpPr>
@@ -9839,7 +10280,7 @@
               </a:ln>
               <a:extLst>
                 <a:ext uri="{91240B29-F687-4f45-9708-019B960494DF}">
-                  <a14:hiddenLine xmlns="" xmlns:a14="http://schemas.microsoft.com/office/drawing/2010/main" w="9525">
+                  <a14:hiddenLine xmlns:a14="http://schemas.microsoft.com/office/drawing/2010/main" xmlns="" w="9525">
                     <a:solidFill>
                       <a:srgbClr val="000000"/>
                     </a:solidFill>
@@ -9850,6 +10291,13 @@
                 </a:ext>
               </a:extLst>
             </p:spPr>
+            <p:txBody>
+              <a:bodyPr/>
+              <a:lstStyle/>
+              <a:p>
+                <a:endParaRPr lang="fr-FR"/>
+              </a:p>
+            </p:txBody>
           </p:sp>
           <p:sp>
             <p:nvSpPr>
@@ -9949,7 +10397,7 @@
               </a:ln>
               <a:extLst>
                 <a:ext uri="{91240B29-F687-4f45-9708-019B960494DF}">
-                  <a14:hiddenLine xmlns="" xmlns:a14="http://schemas.microsoft.com/office/drawing/2010/main" w="9525">
+                  <a14:hiddenLine xmlns:a14="http://schemas.microsoft.com/office/drawing/2010/main" xmlns="" w="9525">
                     <a:solidFill>
                       <a:srgbClr val="000000"/>
                     </a:solidFill>
@@ -9960,6 +10408,13 @@
                 </a:ext>
               </a:extLst>
             </p:spPr>
+            <p:txBody>
+              <a:bodyPr/>
+              <a:lstStyle/>
+              <a:p>
+                <a:endParaRPr lang="fr-FR"/>
+              </a:p>
+            </p:txBody>
           </p:sp>
           <p:sp>
             <p:nvSpPr>
@@ -9988,6 +10443,13 @@
                 <a:tailEnd/>
               </a:ln>
             </p:spPr>
+            <p:txBody>
+              <a:bodyPr/>
+              <a:lstStyle/>
+              <a:p>
+                <a:endParaRPr lang="fr-FR"/>
+              </a:p>
+            </p:txBody>
           </p:sp>
           <p:sp>
             <p:nvSpPr>
@@ -10033,7 +10495,7 @@
               </a:ln>
               <a:extLst>
                 <a:ext uri="{91240B29-F687-4f45-9708-019B960494DF}">
-                  <a14:hiddenLine xmlns="" xmlns:a14="http://schemas.microsoft.com/office/drawing/2010/main" w="9525">
+                  <a14:hiddenLine xmlns:a14="http://schemas.microsoft.com/office/drawing/2010/main" xmlns="" w="9525">
                     <a:solidFill>
                       <a:srgbClr val="000000"/>
                     </a:solidFill>
@@ -10044,6 +10506,13 @@
                 </a:ext>
               </a:extLst>
             </p:spPr>
+            <p:txBody>
+              <a:bodyPr/>
+              <a:lstStyle/>
+              <a:p>
+                <a:endParaRPr lang="fr-FR"/>
+              </a:p>
+            </p:txBody>
           </p:sp>
           <p:sp>
             <p:nvSpPr>
@@ -10095,7 +10564,7 @@
               </a:ln>
               <a:extLst>
                 <a:ext uri="{91240B29-F687-4f45-9708-019B960494DF}">
-                  <a14:hiddenLine xmlns="" xmlns:a14="http://schemas.microsoft.com/office/drawing/2010/main" w="9525">
+                  <a14:hiddenLine xmlns:a14="http://schemas.microsoft.com/office/drawing/2010/main" xmlns="" w="9525">
                     <a:solidFill>
                       <a:srgbClr val="000000"/>
                     </a:solidFill>
@@ -10106,6 +10575,13 @@
                 </a:ext>
               </a:extLst>
             </p:spPr>
+            <p:txBody>
+              <a:bodyPr/>
+              <a:lstStyle/>
+              <a:p>
+                <a:endParaRPr lang="fr-FR"/>
+              </a:p>
+            </p:txBody>
           </p:sp>
           <p:sp>
             <p:nvSpPr>
@@ -10157,7 +10633,7 @@
               </a:ln>
               <a:extLst>
                 <a:ext uri="{91240B29-F687-4f45-9708-019B960494DF}">
-                  <a14:hiddenLine xmlns="" xmlns:a14="http://schemas.microsoft.com/office/drawing/2010/main" w="9525">
+                  <a14:hiddenLine xmlns:a14="http://schemas.microsoft.com/office/drawing/2010/main" xmlns="" w="9525">
                     <a:solidFill>
                       <a:srgbClr val="000000"/>
                     </a:solidFill>
@@ -10168,6 +10644,13 @@
                 </a:ext>
               </a:extLst>
             </p:spPr>
+            <p:txBody>
+              <a:bodyPr/>
+              <a:lstStyle/>
+              <a:p>
+                <a:endParaRPr lang="fr-FR"/>
+              </a:p>
+            </p:txBody>
           </p:sp>
           <p:sp>
             <p:nvSpPr>
@@ -10247,7 +10730,7 @@
               </a:ln>
               <a:extLst>
                 <a:ext uri="{91240B29-F687-4f45-9708-019B960494DF}">
-                  <a14:hiddenLine xmlns="" xmlns:a14="http://schemas.microsoft.com/office/drawing/2010/main" w="9525">
+                  <a14:hiddenLine xmlns:a14="http://schemas.microsoft.com/office/drawing/2010/main" xmlns="" w="9525">
                     <a:solidFill>
                       <a:srgbClr val="000000"/>
                     </a:solidFill>
@@ -10258,6 +10741,13 @@
                 </a:ext>
               </a:extLst>
             </p:spPr>
+            <p:txBody>
+              <a:bodyPr/>
+              <a:lstStyle/>
+              <a:p>
+                <a:endParaRPr lang="fr-FR"/>
+              </a:p>
+            </p:txBody>
           </p:sp>
           <p:sp>
             <p:nvSpPr>
@@ -10281,7 +10771,7 @@
               </a:ln>
               <a:extLst>
                 <a:ext uri="{91240B29-F687-4f45-9708-019B960494DF}">
-                  <a14:hiddenLine xmlns="" xmlns:a14="http://schemas.microsoft.com/office/drawing/2010/main" w="9525">
+                  <a14:hiddenLine xmlns:a14="http://schemas.microsoft.com/office/drawing/2010/main" xmlns="" w="9525">
                     <a:solidFill>
                       <a:srgbClr val="000000"/>
                     </a:solidFill>
@@ -10292,6 +10782,13 @@
                 </a:ext>
               </a:extLst>
             </p:spPr>
+            <p:txBody>
+              <a:bodyPr/>
+              <a:lstStyle/>
+              <a:p>
+                <a:endParaRPr lang="fr-FR"/>
+              </a:p>
+            </p:txBody>
           </p:sp>
           <p:sp>
             <p:nvSpPr>
@@ -10346,7 +10843,7 @@
               </a:ln>
               <a:extLst>
                 <a:ext uri="{91240B29-F687-4f45-9708-019B960494DF}">
-                  <a14:hiddenLine xmlns="" xmlns:a14="http://schemas.microsoft.com/office/drawing/2010/main" w="9525">
+                  <a14:hiddenLine xmlns:a14="http://schemas.microsoft.com/office/drawing/2010/main" xmlns="" w="9525">
                     <a:solidFill>
                       <a:srgbClr val="000000"/>
                     </a:solidFill>
@@ -10357,6 +10854,13 @@
                 </a:ext>
               </a:extLst>
             </p:spPr>
+            <p:txBody>
+              <a:bodyPr/>
+              <a:lstStyle/>
+              <a:p>
+                <a:endParaRPr lang="fr-FR"/>
+              </a:p>
+            </p:txBody>
           </p:sp>
           <p:sp>
             <p:nvSpPr>
@@ -10436,7 +10940,7 @@
               </a:ln>
               <a:extLst>
                 <a:ext uri="{91240B29-F687-4f45-9708-019B960494DF}">
-                  <a14:hiddenLine xmlns="" xmlns:a14="http://schemas.microsoft.com/office/drawing/2010/main" w="9525">
+                  <a14:hiddenLine xmlns:a14="http://schemas.microsoft.com/office/drawing/2010/main" xmlns="" w="9525">
                     <a:solidFill>
                       <a:srgbClr val="000000"/>
                     </a:solidFill>
@@ -10447,6 +10951,13 @@
                 </a:ext>
               </a:extLst>
             </p:spPr>
+            <p:txBody>
+              <a:bodyPr/>
+              <a:lstStyle/>
+              <a:p>
+                <a:endParaRPr lang="fr-FR"/>
+              </a:p>
+            </p:txBody>
           </p:sp>
           <p:sp>
             <p:nvSpPr>
@@ -10498,7 +11009,7 @@
               </a:ln>
               <a:extLst>
                 <a:ext uri="{91240B29-F687-4f45-9708-019B960494DF}">
-                  <a14:hiddenLine xmlns="" xmlns:a14="http://schemas.microsoft.com/office/drawing/2010/main" w="9525">
+                  <a14:hiddenLine xmlns:a14="http://schemas.microsoft.com/office/drawing/2010/main" xmlns="" w="9525">
                     <a:solidFill>
                       <a:srgbClr val="000000"/>
                     </a:solidFill>
@@ -10509,6 +11020,13 @@
                 </a:ext>
               </a:extLst>
             </p:spPr>
+            <p:txBody>
+              <a:bodyPr/>
+              <a:lstStyle/>
+              <a:p>
+                <a:endParaRPr lang="fr-FR"/>
+              </a:p>
+            </p:txBody>
           </p:sp>
           <p:sp>
             <p:nvSpPr>
@@ -10588,7 +11106,7 @@
               </a:ln>
               <a:extLst>
                 <a:ext uri="{91240B29-F687-4f45-9708-019B960494DF}">
-                  <a14:hiddenLine xmlns="" xmlns:a14="http://schemas.microsoft.com/office/drawing/2010/main" w="9525">
+                  <a14:hiddenLine xmlns:a14="http://schemas.microsoft.com/office/drawing/2010/main" xmlns="" w="9525">
                     <a:solidFill>
                       <a:srgbClr val="000000"/>
                     </a:solidFill>
@@ -10599,6 +11117,13 @@
                 </a:ext>
               </a:extLst>
             </p:spPr>
+            <p:txBody>
+              <a:bodyPr/>
+              <a:lstStyle/>
+              <a:p>
+                <a:endParaRPr lang="fr-FR"/>
+              </a:p>
+            </p:txBody>
           </p:sp>
           <p:sp>
             <p:nvSpPr>
@@ -10653,7 +11178,7 @@
               </a:ln>
               <a:extLst>
                 <a:ext uri="{91240B29-F687-4f45-9708-019B960494DF}">
-                  <a14:hiddenLine xmlns="" xmlns:a14="http://schemas.microsoft.com/office/drawing/2010/main" w="9525">
+                  <a14:hiddenLine xmlns:a14="http://schemas.microsoft.com/office/drawing/2010/main" xmlns="" w="9525">
                     <a:solidFill>
                       <a:srgbClr val="000000"/>
                     </a:solidFill>
@@ -10664,6 +11189,13 @@
                 </a:ext>
               </a:extLst>
             </p:spPr>
+            <p:txBody>
+              <a:bodyPr/>
+              <a:lstStyle/>
+              <a:p>
+                <a:endParaRPr lang="fr-FR"/>
+              </a:p>
+            </p:txBody>
           </p:sp>
           <p:sp>
             <p:nvSpPr>
@@ -10715,7 +11247,7 @@
               </a:ln>
               <a:extLst>
                 <a:ext uri="{91240B29-F687-4f45-9708-019B960494DF}">
-                  <a14:hiddenLine xmlns="" xmlns:a14="http://schemas.microsoft.com/office/drawing/2010/main" w="9525">
+                  <a14:hiddenLine xmlns:a14="http://schemas.microsoft.com/office/drawing/2010/main" xmlns="" w="9525">
                     <a:solidFill>
                       <a:srgbClr val="000000"/>
                     </a:solidFill>
@@ -10726,6 +11258,13 @@
                 </a:ext>
               </a:extLst>
             </p:spPr>
+            <p:txBody>
+              <a:bodyPr/>
+              <a:lstStyle/>
+              <a:p>
+                <a:endParaRPr lang="fr-FR"/>
+              </a:p>
+            </p:txBody>
           </p:sp>
           <p:sp>
             <p:nvSpPr>
@@ -10805,7 +11344,7 @@
               </a:ln>
               <a:extLst>
                 <a:ext uri="{91240B29-F687-4f45-9708-019B960494DF}">
-                  <a14:hiddenLine xmlns="" xmlns:a14="http://schemas.microsoft.com/office/drawing/2010/main" w="9525">
+                  <a14:hiddenLine xmlns:a14="http://schemas.microsoft.com/office/drawing/2010/main" xmlns="" w="9525">
                     <a:solidFill>
                       <a:srgbClr val="000000"/>
                     </a:solidFill>
@@ -10816,6 +11355,13 @@
                 </a:ext>
               </a:extLst>
             </p:spPr>
+            <p:txBody>
+              <a:bodyPr/>
+              <a:lstStyle/>
+              <a:p>
+                <a:endParaRPr lang="fr-FR"/>
+              </a:p>
+            </p:txBody>
           </p:sp>
           <p:sp>
             <p:nvSpPr>
@@ -10895,7 +11441,7 @@
               </a:ln>
               <a:extLst>
                 <a:ext uri="{91240B29-F687-4f45-9708-019B960494DF}">
-                  <a14:hiddenLine xmlns="" xmlns:a14="http://schemas.microsoft.com/office/drawing/2010/main" w="9525">
+                  <a14:hiddenLine xmlns:a14="http://schemas.microsoft.com/office/drawing/2010/main" xmlns="" w="9525">
                     <a:solidFill>
                       <a:srgbClr val="000000"/>
                     </a:solidFill>
@@ -10906,6 +11452,13 @@
                 </a:ext>
               </a:extLst>
             </p:spPr>
+            <p:txBody>
+              <a:bodyPr/>
+              <a:lstStyle/>
+              <a:p>
+                <a:endParaRPr lang="fr-FR"/>
+              </a:p>
+            </p:txBody>
           </p:sp>
           <p:sp>
             <p:nvSpPr>
@@ -10960,7 +11513,7 @@
               </a:ln>
               <a:extLst>
                 <a:ext uri="{91240B29-F687-4f45-9708-019B960494DF}">
-                  <a14:hiddenLine xmlns="" xmlns:a14="http://schemas.microsoft.com/office/drawing/2010/main" w="9525">
+                  <a14:hiddenLine xmlns:a14="http://schemas.microsoft.com/office/drawing/2010/main" xmlns="" w="9525">
                     <a:solidFill>
                       <a:srgbClr val="000000"/>
                     </a:solidFill>
@@ -10971,6 +11524,13 @@
                 </a:ext>
               </a:extLst>
             </p:spPr>
+            <p:txBody>
+              <a:bodyPr/>
+              <a:lstStyle/>
+              <a:p>
+                <a:endParaRPr lang="fr-FR"/>
+              </a:p>
+            </p:txBody>
           </p:sp>
           <p:sp>
             <p:nvSpPr>
@@ -11080,7 +11640,7 @@
               </a:ln>
               <a:extLst>
                 <a:ext uri="{91240B29-F687-4f45-9708-019B960494DF}">
-                  <a14:hiddenLine xmlns="" xmlns:a14="http://schemas.microsoft.com/office/drawing/2010/main" w="9525">
+                  <a14:hiddenLine xmlns:a14="http://schemas.microsoft.com/office/drawing/2010/main" xmlns="" w="9525">
                     <a:solidFill>
                       <a:srgbClr val="000000"/>
                     </a:solidFill>
@@ -11091,6 +11651,13 @@
                 </a:ext>
               </a:extLst>
             </p:spPr>
+            <p:txBody>
+              <a:bodyPr/>
+              <a:lstStyle/>
+              <a:p>
+                <a:endParaRPr lang="fr-FR"/>
+              </a:p>
+            </p:txBody>
           </p:sp>
         </p:grpSp>
         <p:grpSp>
@@ -11178,7 +11745,7 @@
               </a:ln>
               <a:extLst>
                 <a:ext uri="{91240B29-F687-4f45-9708-019B960494DF}">
-                  <a14:hiddenLine xmlns="" xmlns:a14="http://schemas.microsoft.com/office/drawing/2010/main" w="9525">
+                  <a14:hiddenLine xmlns:a14="http://schemas.microsoft.com/office/drawing/2010/main" xmlns="" w="9525">
                     <a:solidFill>
                       <a:srgbClr val="000000"/>
                     </a:solidFill>
@@ -11189,6 +11756,13 @@
                 </a:ext>
               </a:extLst>
             </p:spPr>
+            <p:txBody>
+              <a:bodyPr/>
+              <a:lstStyle/>
+              <a:p>
+                <a:endParaRPr lang="fr-FR"/>
+              </a:p>
+            </p:txBody>
           </p:sp>
           <p:sp>
             <p:nvSpPr>
@@ -11293,7 +11867,7 @@
               </a:ln>
               <a:extLst>
                 <a:ext uri="{91240B29-F687-4f45-9708-019B960494DF}">
-                  <a14:hiddenLine xmlns="" xmlns:a14="http://schemas.microsoft.com/office/drawing/2010/main" w="9525">
+                  <a14:hiddenLine xmlns:a14="http://schemas.microsoft.com/office/drawing/2010/main" xmlns="" w="9525">
                     <a:solidFill>
                       <a:srgbClr val="000000"/>
                     </a:solidFill>
@@ -11304,6 +11878,13 @@
                 </a:ext>
               </a:extLst>
             </p:spPr>
+            <p:txBody>
+              <a:bodyPr/>
+              <a:lstStyle/>
+              <a:p>
+                <a:endParaRPr lang="fr-FR"/>
+              </a:p>
+            </p:txBody>
           </p:sp>
           <p:sp>
             <p:nvSpPr>
@@ -11383,7 +11964,7 @@
               </a:ln>
               <a:extLst>
                 <a:ext uri="{91240B29-F687-4f45-9708-019B960494DF}">
-                  <a14:hiddenLine xmlns="" xmlns:a14="http://schemas.microsoft.com/office/drawing/2010/main" w="9525">
+                  <a14:hiddenLine xmlns:a14="http://schemas.microsoft.com/office/drawing/2010/main" xmlns="" w="9525">
                     <a:solidFill>
                       <a:srgbClr val="000000"/>
                     </a:solidFill>
@@ -11394,6 +11975,13 @@
                 </a:ext>
               </a:extLst>
             </p:spPr>
+            <p:txBody>
+              <a:bodyPr/>
+              <a:lstStyle/>
+              <a:p>
+                <a:endParaRPr lang="fr-FR"/>
+              </a:p>
+            </p:txBody>
           </p:sp>
           <p:sp>
             <p:nvSpPr>
@@ -11448,7 +12036,7 @@
               </a:ln>
               <a:extLst>
                 <a:ext uri="{91240B29-F687-4f45-9708-019B960494DF}">
-                  <a14:hiddenLine xmlns="" xmlns:a14="http://schemas.microsoft.com/office/drawing/2010/main" w="9525">
+                  <a14:hiddenLine xmlns:a14="http://schemas.microsoft.com/office/drawing/2010/main" xmlns="" w="9525">
                     <a:solidFill>
                       <a:srgbClr val="000000"/>
                     </a:solidFill>
@@ -11459,6 +12047,13 @@
                 </a:ext>
               </a:extLst>
             </p:spPr>
+            <p:txBody>
+              <a:bodyPr/>
+              <a:lstStyle/>
+              <a:p>
+                <a:endParaRPr lang="fr-FR"/>
+              </a:p>
+            </p:txBody>
           </p:sp>
           <p:sp>
             <p:nvSpPr>
@@ -11538,7 +12133,7 @@
               </a:ln>
               <a:extLst>
                 <a:ext uri="{91240B29-F687-4f45-9708-019B960494DF}">
-                  <a14:hiddenLine xmlns="" xmlns:a14="http://schemas.microsoft.com/office/drawing/2010/main" w="9525">
+                  <a14:hiddenLine xmlns:a14="http://schemas.microsoft.com/office/drawing/2010/main" xmlns="" w="9525">
                     <a:solidFill>
                       <a:srgbClr val="000000"/>
                     </a:solidFill>
@@ -11549,6 +12144,13 @@
                 </a:ext>
               </a:extLst>
             </p:spPr>
+            <p:txBody>
+              <a:bodyPr/>
+              <a:lstStyle/>
+              <a:p>
+                <a:endParaRPr lang="fr-FR"/>
+              </a:p>
+            </p:txBody>
           </p:sp>
           <p:sp>
             <p:nvSpPr>
@@ -11606,7 +12208,7 @@
               </a:ln>
               <a:extLst>
                 <a:ext uri="{91240B29-F687-4f45-9708-019B960494DF}">
-                  <a14:hiddenLine xmlns="" xmlns:a14="http://schemas.microsoft.com/office/drawing/2010/main" w="9525">
+                  <a14:hiddenLine xmlns:a14="http://schemas.microsoft.com/office/drawing/2010/main" xmlns="" w="9525">
                     <a:solidFill>
                       <a:srgbClr val="000000"/>
                     </a:solidFill>
@@ -11617,6 +12219,13 @@
                 </a:ext>
               </a:extLst>
             </p:spPr>
+            <p:txBody>
+              <a:bodyPr/>
+              <a:lstStyle/>
+              <a:p>
+                <a:endParaRPr lang="fr-FR"/>
+              </a:p>
+            </p:txBody>
           </p:sp>
           <p:sp>
             <p:nvSpPr>
@@ -11696,7 +12305,7 @@
               </a:ln>
               <a:extLst>
                 <a:ext uri="{91240B29-F687-4f45-9708-019B960494DF}">
-                  <a14:hiddenLine xmlns="" xmlns:a14="http://schemas.microsoft.com/office/drawing/2010/main" w="9525">
+                  <a14:hiddenLine xmlns:a14="http://schemas.microsoft.com/office/drawing/2010/main" xmlns="" w="9525">
                     <a:solidFill>
                       <a:srgbClr val="000000"/>
                     </a:solidFill>
@@ -11707,6 +12316,13 @@
                 </a:ext>
               </a:extLst>
             </p:spPr>
+            <p:txBody>
+              <a:bodyPr/>
+              <a:lstStyle/>
+              <a:p>
+                <a:endParaRPr lang="fr-FR"/>
+              </a:p>
+            </p:txBody>
           </p:sp>
           <p:sp>
             <p:nvSpPr>
@@ -11764,7 +12380,7 @@
               </a:ln>
               <a:extLst>
                 <a:ext uri="{91240B29-F687-4f45-9708-019B960494DF}">
-                  <a14:hiddenLine xmlns="" xmlns:a14="http://schemas.microsoft.com/office/drawing/2010/main" w="9525">
+                  <a14:hiddenLine xmlns:a14="http://schemas.microsoft.com/office/drawing/2010/main" xmlns="" w="9525">
                     <a:solidFill>
                       <a:srgbClr val="000000"/>
                     </a:solidFill>
@@ -11775,6 +12391,13 @@
                 </a:ext>
               </a:extLst>
             </p:spPr>
+            <p:txBody>
+              <a:bodyPr/>
+              <a:lstStyle/>
+              <a:p>
+                <a:endParaRPr lang="fr-FR"/>
+              </a:p>
+            </p:txBody>
           </p:sp>
           <p:sp>
             <p:nvSpPr>
@@ -11854,7 +12477,7 @@
               </a:ln>
               <a:extLst>
                 <a:ext uri="{91240B29-F687-4f45-9708-019B960494DF}">
-                  <a14:hiddenLine xmlns="" xmlns:a14="http://schemas.microsoft.com/office/drawing/2010/main" w="9525">
+                  <a14:hiddenLine xmlns:a14="http://schemas.microsoft.com/office/drawing/2010/main" xmlns="" w="9525">
                     <a:solidFill>
                       <a:srgbClr val="000000"/>
                     </a:solidFill>
@@ -11865,6 +12488,13 @@
                 </a:ext>
               </a:extLst>
             </p:spPr>
+            <p:txBody>
+              <a:bodyPr/>
+              <a:lstStyle/>
+              <a:p>
+                <a:endParaRPr lang="fr-FR"/>
+              </a:p>
+            </p:txBody>
           </p:sp>
           <p:sp>
             <p:nvSpPr>
@@ -11888,7 +12518,7 @@
               </a:ln>
               <a:extLst>
                 <a:ext uri="{91240B29-F687-4f45-9708-019B960494DF}">
-                  <a14:hiddenLine xmlns="" xmlns:a14="http://schemas.microsoft.com/office/drawing/2010/main" w="9525">
+                  <a14:hiddenLine xmlns:a14="http://schemas.microsoft.com/office/drawing/2010/main" xmlns="" w="9525">
                     <a:solidFill>
                       <a:srgbClr val="000000"/>
                     </a:solidFill>
@@ -11899,6 +12529,13 @@
                 </a:ext>
               </a:extLst>
             </p:spPr>
+            <p:txBody>
+              <a:bodyPr/>
+              <a:lstStyle/>
+              <a:p>
+                <a:endParaRPr lang="fr-FR"/>
+              </a:p>
+            </p:txBody>
           </p:sp>
         </p:grpSp>
       </p:grpSp>
@@ -14344,8 +14981,8 @@
         </p:nvSpPr>
         <p:spPr>
           <a:xfrm>
-            <a:off x="3822980" y="1582838"/>
-            <a:ext cx="3669201" cy="721789"/>
+            <a:off x="3001942" y="2643945"/>
+            <a:ext cx="7435121" cy="1570109"/>
           </a:xfrm>
         </p:spPr>
         <p:txBody>
@@ -14357,7 +14994,7 @@
             <a:pPr algn="ctr"/>
             <a:r>
               <a:rPr lang="fr-FR" b="1" dirty="0"/>
-              <a:t>Merci</a:t>
+              <a:t>Merci de votre aimable attention</a:t>
             </a:r>
             <a:endParaRPr lang="fr-FR" sz="2800" b="1" dirty="0"/>
           </a:p>
